--- a/output/wordlabs-fast-3day.pptx
+++ b/output/wordlabs-fast-3day.pptx
@@ -4279,7 +4279,7 @@
                 <a:ea typeface="Calibri" pitchFamily="34" charset="-122"/>
                 <a:cs typeface="Calibri" pitchFamily="34" charset="-120"/>
               </a:rPr>
-              <a:t>Origin: Latin: fastus</a:t>
+              <a:t>Origin: Old English: fæst</a:t>
             </a:r>
             <a:endParaRPr lang="en-US" sz="1300" dirty="0"/>
           </a:p>
@@ -5622,7 +5622,7 @@
                 <a:ea typeface="Trebuchet MS" pitchFamily="34" charset="-122"/>
                 <a:cs typeface="Trebuchet MS" pitchFamily="34" charset="-120"/>
               </a:rPr>
-              <a:t>0</a:t>
+              <a:t>1</a:t>
             </a:r>
             <a:pPr algn="ctr" indent="0" marL="0">
               <a:buNone/>
@@ -6040,7 +6040,7 @@
                 <a:ea typeface="Calibri" pitchFamily="34" charset="-122"/>
                 <a:cs typeface="Calibri" pitchFamily="34" charset="-120"/>
               </a:rPr>
-              <a:t>She </a:t>
+              <a:t>She was the </a:t>
             </a:r>
             <a:pPr algn="l" indent="0" marL="0">
               <a:buNone/>
@@ -6057,7 +6057,7 @@
                 <a:ea typeface="Calibri" pitchFamily="34" charset="-122"/>
                 <a:cs typeface="Calibri" pitchFamily="34" charset="-120"/>
               </a:rPr>
-              <a:t>fastened</a:t>
+              <a:t>fastest</a:t>
             </a:r>
             <a:pPr algn="l" indent="0" marL="0">
               <a:buNone/>
@@ -6071,7 +6071,7 @@
                 <a:ea typeface="Calibri" pitchFamily="34" charset="-122"/>
                 <a:cs typeface="Calibri" pitchFamily="34" charset="-120"/>
               </a:rPr>
-              <a:t> her seatbelt and ate her </a:t>
+              <a:t> sprinter on the team, so the coach asked her to </a:t>
             </a:r>
             <a:pPr algn="l" indent="0" marL="0">
               <a:buNone/>
@@ -6088,7 +6088,7 @@
                 <a:ea typeface="Calibri" pitchFamily="34" charset="-122"/>
                 <a:cs typeface="Calibri" pitchFamily="34" charset="-120"/>
               </a:rPr>
-              <a:t>breakfast</a:t>
+              <a:t>fasten</a:t>
             </a:r>
             <a:pPr algn="l" indent="0" marL="0">
               <a:buNone/>
@@ -6102,7 +6102,7 @@
                 <a:ea typeface="Calibri" pitchFamily="34" charset="-122"/>
                 <a:cs typeface="Calibri" pitchFamily="34" charset="-120"/>
               </a:rPr>
-              <a:t> before the long car trip began.</a:t>
+              <a:t> her race bib before the event.</a:t>
             </a:r>
             <a:endParaRPr lang="en-US" sz="1800" dirty="0"/>
           </a:p>
@@ -6257,7 +6257,7 @@
                 <a:ea typeface="Trebuchet MS" pitchFamily="34" charset="-122"/>
                 <a:cs typeface="Trebuchet MS" pitchFamily="34" charset="-120"/>
               </a:rPr>
-              <a:t>fastened</a:t>
+              <a:t>fastest</a:t>
             </a:r>
             <a:endParaRPr lang="en-US" sz="1400" dirty="0"/>
           </a:p>
@@ -6385,7 +6385,7 @@
                 <a:ea typeface="Trebuchet MS" pitchFamily="34" charset="-122"/>
                 <a:cs typeface="Trebuchet MS" pitchFamily="34" charset="-120"/>
               </a:rPr>
-              <a:t>breakfast</a:t>
+              <a:t>fasten</a:t>
             </a:r>
             <a:endParaRPr lang="en-US" sz="1400" dirty="0"/>
           </a:p>
@@ -6855,7 +6855,7 @@
                 <a:ea typeface="Trebuchet MS" pitchFamily="34" charset="-122"/>
                 <a:cs typeface="Trebuchet MS" pitchFamily="34" charset="-120"/>
               </a:rPr>
-              <a:t>fastened</a:t>
+              <a:t>fastest</a:t>
             </a:r>
             <a:endParaRPr lang="en-US" sz="2800" dirty="0"/>
           </a:p>
@@ -7682,7 +7682,7 @@
                 <a:ea typeface="Trebuchet MS" pitchFamily="34" charset="-122"/>
                 <a:cs typeface="Trebuchet MS" pitchFamily="34" charset="-120"/>
               </a:rPr>
-              <a:t>fastened</a:t>
+              <a:t>fastest</a:t>
             </a:r>
             <a:endParaRPr lang="en-US" sz="2800" dirty="0"/>
           </a:p>
@@ -7762,7 +7762,7 @@
         </p:nvSpPr>
         <p:spPr>
           <a:xfrm>
-            <a:off x="2221992" y="2258568"/>
+            <a:off x="2938272" y="2258568"/>
             <a:ext cx="1828800" cy="292608"/>
           </a:xfrm>
           <a:prstGeom prst="rect">
@@ -7796,7 +7796,7 @@
         </p:nvSpPr>
         <p:spPr>
           <a:xfrm>
-            <a:off x="2221992" y="2258568"/>
+            <a:off x="2938272" y="2258568"/>
             <a:ext cx="1828800" cy="292608"/>
           </a:xfrm>
           <a:prstGeom prst="rect">
@@ -7835,7 +7835,7 @@
         </p:nvSpPr>
         <p:spPr>
           <a:xfrm>
-            <a:off x="2221992" y="2569464"/>
+            <a:off x="2938272" y="2569464"/>
             <a:ext cx="1828800" cy="201168"/>
           </a:xfrm>
           <a:prstGeom prst="rect">
@@ -7860,7 +7860,7 @@
                 <a:ea typeface="Calibri" pitchFamily="34" charset="-122"/>
                 <a:cs typeface="Calibri" pitchFamily="34" charset="-120"/>
               </a:rPr>
-              <a:t>firm, fixed</a:t>
+              <a:t>quick or moving with speed</a:t>
             </a:r>
             <a:endParaRPr lang="en-US" sz="850" dirty="0"/>
           </a:p>
@@ -7874,7 +7874,7 @@
         </p:nvSpPr>
         <p:spPr>
           <a:xfrm>
-            <a:off x="4370832" y="2258568"/>
+            <a:off x="5803392" y="2258568"/>
             <a:ext cx="1828800" cy="292608"/>
           </a:xfrm>
           <a:prstGeom prst="rect">
@@ -7908,7 +7908,7 @@
         </p:nvSpPr>
         <p:spPr>
           <a:xfrm>
-            <a:off x="4370832" y="2258568"/>
+            <a:off x="5803392" y="2258568"/>
             <a:ext cx="1828800" cy="292608"/>
           </a:xfrm>
           <a:prstGeom prst="rect">
@@ -7933,7 +7933,7 @@
                 <a:ea typeface="Trebuchet MS" pitchFamily="34" charset="-122"/>
                 <a:cs typeface="Trebuchet MS" pitchFamily="34" charset="-120"/>
               </a:rPr>
-              <a:t>en</a:t>
+              <a:t>-est</a:t>
             </a:r>
             <a:endParaRPr lang="en-US" sz="1300" dirty="0"/>
           </a:p>
@@ -7947,7 +7947,7 @@
         </p:nvSpPr>
         <p:spPr>
           <a:xfrm>
-            <a:off x="4370832" y="2569464"/>
+            <a:off x="5803392" y="2569464"/>
             <a:ext cx="1828800" cy="201168"/>
           </a:xfrm>
           <a:prstGeom prst="rect">
@@ -7972,7 +7972,7 @@
                 <a:ea typeface="Calibri" pitchFamily="34" charset="-122"/>
                 <a:cs typeface="Calibri" pitchFamily="34" charset="-120"/>
               </a:rPr>
-              <a:t>to make or become</a:t>
+              <a:t>most (superlative)</a:t>
             </a:r>
             <a:endParaRPr lang="en-US" sz="850" dirty="0"/>
           </a:p>
@@ -7986,30 +7986,23 @@
         </p:nvSpPr>
         <p:spPr>
           <a:xfrm>
-            <a:off x="6519672" y="2258568"/>
-            <a:ext cx="1828800" cy="292608"/>
+            <a:off x="365760" y="3273552"/>
+            <a:ext cx="1371600" cy="658368"/>
           </a:xfrm>
           <a:prstGeom prst="rect">
             <a:avLst>
-              <a:gd name="adj" fmla="val 25000"/>
+              <a:gd name="adj" fmla="val 8333"/>
             </a:avLst>
           </a:prstGeom>
           <a:solidFill>
-            <a:srgbClr val="FCE7F3"/>
-          </a:solidFill>
-          <a:ln w="19050">
-            <a:solidFill>
-              <a:srgbClr val="DB2777"/>
-            </a:solidFill>
-            <a:prstDash val="solid"/>
-          </a:ln>
-          <a:effectLst>
-            <a:outerShdw sx="100000" sy="100000" kx="0" ky="0" algn="bl" rotWithShape="0" blurRad="101600" dist="38100" dir="8100000">
-              <a:srgbClr val="000000">
-                <a:alpha val="12000"/>
-              </a:srgbClr>
-            </a:outerShdw>
-          </a:effectLst>
+            <a:srgbClr val="E2E8F0"/>
+          </a:solidFill>
+          <a:ln w="12700">
+            <a:solidFill>
+              <a:srgbClr val="E2E8F0"/>
+            </a:solidFill>
+            <a:prstDash val="solid"/>
+          </a:ln>
         </p:spPr>
       </p:sp>
       <p:sp>
@@ -8020,8 +8013,8 @@
         </p:nvSpPr>
         <p:spPr>
           <a:xfrm>
-            <a:off x="6519672" y="2258568"/>
-            <a:ext cx="1828800" cy="292608"/>
+            <a:off x="365760" y="3273552"/>
+            <a:ext cx="1371600" cy="658368"/>
           </a:xfrm>
           <a:prstGeom prst="rect">
             <a:avLst/>
@@ -8037,73 +8030,100 @@
               <a:buNone/>
             </a:pPr>
             <a:r>
-              <a:rPr lang="en-US" sz="1300" b="1" dirty="0">
-                <a:solidFill>
-                  <a:srgbClr val="9D174D"/>
+              <a:rPr lang="en-US" sz="1100" b="1" dirty="0">
+                <a:solidFill>
+                  <a:srgbClr val="475569"/>
                 </a:solidFill>
                 <a:latin typeface="Trebuchet MS" pitchFamily="34" charset="0"/>
                 <a:ea typeface="Trebuchet MS" pitchFamily="34" charset="-122"/>
                 <a:cs typeface="Trebuchet MS" pitchFamily="34" charset="-120"/>
               </a:rPr>
-              <a:t>ed</a:t>
-            </a:r>
-            <a:endParaRPr lang="en-US" sz="1300" dirty="0"/>
-          </a:p>
-        </p:txBody>
-      </p:sp>
-      <p:sp>
-        <p:nvSpPr>
-          <p:cNvPr id="24" name="Text 22"/>
-          <p:cNvSpPr/>
-          <p:nvPr/>
-        </p:nvSpPr>
-        <p:spPr>
-          <a:xfrm>
-            <a:off x="6519672" y="2569464"/>
-            <a:ext cx="1828800" cy="201168"/>
-          </a:xfrm>
-          <a:prstGeom prst="rect">
-            <a:avLst/>
-          </a:prstGeom>
-          <a:noFill/>
-          <a:ln/>
-        </p:spPr>
-        <p:txBody>
-          <a:bodyPr wrap="square" lIns="0" tIns="0" rIns="0" bIns="0" rtlCol="0" anchor="t"/>
-          <a:lstStyle/>
-          <a:p>
-            <a:pPr algn="ctr" indent="0" marL="0">
-              <a:buNone/>
-            </a:pPr>
-            <a:r>
-              <a:rPr lang="en-US" sz="850" dirty="0">
-                <a:solidFill>
-                  <a:srgbClr val="475569"/>
+              <a:t>Syllables</a:t>
+            </a:r>
+            <a:endParaRPr lang="en-US" sz="1100" dirty="0"/>
+          </a:p>
+        </p:txBody>
+      </p:sp>
+      <p:sp>
+        <p:nvSpPr>
+          <p:cNvPr id="24" name="Shape 22"/>
+          <p:cNvSpPr/>
+          <p:nvPr/>
+        </p:nvSpPr>
+        <p:spPr>
+          <a:xfrm>
+            <a:off x="1874520" y="3273552"/>
+            <a:ext cx="6903720" cy="658368"/>
+          </a:xfrm>
+          <a:prstGeom prst="rect">
+            <a:avLst>
+              <a:gd name="adj" fmla="val 8333"/>
+            </a:avLst>
+          </a:prstGeom>
+          <a:solidFill>
+            <a:srgbClr val="F8FAFC"/>
+          </a:solidFill>
+          <a:ln w="12700">
+            <a:solidFill>
+              <a:srgbClr val="E2E8F0"/>
+            </a:solidFill>
+            <a:prstDash val="dash"/>
+          </a:ln>
+        </p:spPr>
+      </p:sp>
+      <p:sp>
+        <p:nvSpPr>
+          <p:cNvPr id="25" name="Text 23"/>
+          <p:cNvSpPr/>
+          <p:nvPr/>
+        </p:nvSpPr>
+        <p:spPr>
+          <a:xfrm>
+            <a:off x="1874520" y="3273552"/>
+            <a:ext cx="6903720" cy="658368"/>
+          </a:xfrm>
+          <a:prstGeom prst="rect">
+            <a:avLst/>
+          </a:prstGeom>
+          <a:noFill/>
+          <a:ln/>
+        </p:spPr>
+        <p:txBody>
+          <a:bodyPr wrap="square" rtlCol="0" anchor="ctr"/>
+          <a:lstStyle/>
+          <a:p>
+            <a:pPr algn="ctr" indent="0" marL="0">
+              <a:buNone/>
+            </a:pPr>
+            <a:r>
+              <a:rPr lang="en-US" sz="1100" i="1" dirty="0">
+                <a:solidFill>
+                  <a:srgbClr val="CBD5E1"/>
                 </a:solidFill>
                 <a:latin typeface="Calibri" pitchFamily="34" charset="0"/>
                 <a:ea typeface="Calibri" pitchFamily="34" charset="-122"/>
                 <a:cs typeface="Calibri" pitchFamily="34" charset="-120"/>
               </a:rPr>
-              <a:t>past tense</a:t>
-            </a:r>
-            <a:endParaRPr lang="en-US" sz="850" dirty="0"/>
-          </a:p>
-        </p:txBody>
-      </p:sp>
-      <p:sp>
-        <p:nvSpPr>
-          <p:cNvPr id="25" name="Shape 23"/>
-          <p:cNvSpPr/>
-          <p:nvPr/>
-        </p:nvSpPr>
-        <p:spPr>
-          <a:xfrm>
-            <a:off x="365760" y="3273552"/>
-            <a:ext cx="1371600" cy="658368"/>
+              <a:t>Write here...</a:t>
+            </a:r>
+            <a:endParaRPr lang="en-US" sz="1100" dirty="0"/>
+          </a:p>
+        </p:txBody>
+      </p:sp>
+      <p:sp>
+        <p:nvSpPr>
+          <p:cNvPr id="26" name="Shape 24"/>
+          <p:cNvSpPr/>
+          <p:nvPr/>
+        </p:nvSpPr>
+        <p:spPr>
+          <a:xfrm>
+            <a:off x="365760" y="4096512"/>
+            <a:ext cx="1371600" cy="804672"/>
           </a:xfrm>
           <a:prstGeom prst="rect">
             <a:avLst>
-              <a:gd name="adj" fmla="val 8333"/>
+              <a:gd name="adj" fmla="val 6818"/>
             </a:avLst>
           </a:prstGeom>
           <a:solidFill>
@@ -8119,14 +8139,14 @@
       </p:sp>
       <p:sp>
         <p:nvSpPr>
-          <p:cNvPr id="26" name="Text 24"/>
-          <p:cNvSpPr/>
-          <p:nvPr/>
-        </p:nvSpPr>
-        <p:spPr>
-          <a:xfrm>
-            <a:off x="365760" y="3273552"/>
-            <a:ext cx="1371600" cy="658368"/>
+          <p:cNvPr id="27" name="Text 25"/>
+          <p:cNvSpPr/>
+          <p:nvPr/>
+        </p:nvSpPr>
+        <p:spPr>
+          <a:xfrm>
+            <a:off x="365760" y="4096512"/>
+            <a:ext cx="1371600" cy="804672"/>
           </a:xfrm>
           <a:prstGeom prst="rect">
             <a:avLst/>
@@ -8150,7 +8170,7 @@
                 <a:ea typeface="Trebuchet MS" pitchFamily="34" charset="-122"/>
                 <a:cs typeface="Trebuchet MS" pitchFamily="34" charset="-120"/>
               </a:rPr>
-              <a:t>Syllables</a:t>
+              <a:t>Phonemes</a:t>
             </a:r>
             <a:endParaRPr lang="en-US" sz="1100" dirty="0"/>
           </a:p>
@@ -8158,80 +8178,14 @@
       </p:sp>
       <p:sp>
         <p:nvSpPr>
-          <p:cNvPr id="27" name="Shape 25"/>
-          <p:cNvSpPr/>
-          <p:nvPr/>
-        </p:nvSpPr>
-        <p:spPr>
-          <a:xfrm>
-            <a:off x="1874520" y="3273552"/>
-            <a:ext cx="6903720" cy="658368"/>
-          </a:xfrm>
-          <a:prstGeom prst="rect">
-            <a:avLst>
-              <a:gd name="adj" fmla="val 8333"/>
-            </a:avLst>
-          </a:prstGeom>
-          <a:solidFill>
-            <a:srgbClr val="F8FAFC"/>
-          </a:solidFill>
-          <a:ln w="12700">
-            <a:solidFill>
-              <a:srgbClr val="E2E8F0"/>
-            </a:solidFill>
-            <a:prstDash val="dash"/>
-          </a:ln>
-        </p:spPr>
-      </p:sp>
-      <p:sp>
-        <p:nvSpPr>
-          <p:cNvPr id="28" name="Text 26"/>
-          <p:cNvSpPr/>
-          <p:nvPr/>
-        </p:nvSpPr>
-        <p:spPr>
-          <a:xfrm>
-            <a:off x="1874520" y="3273552"/>
-            <a:ext cx="6903720" cy="658368"/>
-          </a:xfrm>
-          <a:prstGeom prst="rect">
-            <a:avLst/>
-          </a:prstGeom>
-          <a:noFill/>
-          <a:ln/>
-        </p:spPr>
-        <p:txBody>
-          <a:bodyPr wrap="square" rtlCol="0" anchor="ctr"/>
-          <a:lstStyle/>
-          <a:p>
-            <a:pPr algn="ctr" indent="0" marL="0">
-              <a:buNone/>
-            </a:pPr>
-            <a:r>
-              <a:rPr lang="en-US" sz="1100" i="1" dirty="0">
-                <a:solidFill>
-                  <a:srgbClr val="CBD5E1"/>
-                </a:solidFill>
-                <a:latin typeface="Calibri" pitchFamily="34" charset="0"/>
-                <a:ea typeface="Calibri" pitchFamily="34" charset="-122"/>
-                <a:cs typeface="Calibri" pitchFamily="34" charset="-120"/>
-              </a:rPr>
-              <a:t>Write here...</a:t>
-            </a:r>
-            <a:endParaRPr lang="en-US" sz="1100" dirty="0"/>
-          </a:p>
-        </p:txBody>
-      </p:sp>
-      <p:sp>
-        <p:nvSpPr>
-          <p:cNvPr id="29" name="Shape 27"/>
-          <p:cNvSpPr/>
-          <p:nvPr/>
-        </p:nvSpPr>
-        <p:spPr>
-          <a:xfrm>
-            <a:off x="365760" y="4096512"/>
-            <a:ext cx="1371600" cy="804672"/>
+          <p:cNvPr id="28" name="Shape 26"/>
+          <p:cNvSpPr/>
+          <p:nvPr/>
+        </p:nvSpPr>
+        <p:spPr>
+          <a:xfrm>
+            <a:off x="1874520" y="4096512"/>
+            <a:ext cx="6903720" cy="804672"/>
           </a:xfrm>
           <a:prstGeom prst="rect">
             <a:avLst>
@@ -8239,85 +8193,19 @@
             </a:avLst>
           </a:prstGeom>
           <a:solidFill>
-            <a:srgbClr val="E2E8F0"/>
+            <a:srgbClr val="F8FAFC"/>
           </a:solidFill>
           <a:ln w="12700">
             <a:solidFill>
               <a:srgbClr val="E2E8F0"/>
             </a:solidFill>
-            <a:prstDash val="solid"/>
-          </a:ln>
-        </p:spPr>
-      </p:sp>
-      <p:sp>
-        <p:nvSpPr>
-          <p:cNvPr id="30" name="Text 28"/>
-          <p:cNvSpPr/>
-          <p:nvPr/>
-        </p:nvSpPr>
-        <p:spPr>
-          <a:xfrm>
-            <a:off x="365760" y="4096512"/>
-            <a:ext cx="1371600" cy="804672"/>
-          </a:xfrm>
-          <a:prstGeom prst="rect">
-            <a:avLst/>
-          </a:prstGeom>
-          <a:noFill/>
-          <a:ln/>
-        </p:spPr>
-        <p:txBody>
-          <a:bodyPr wrap="square" lIns="0" tIns="0" rIns="0" bIns="0" rtlCol="0" anchor="ctr"/>
-          <a:lstStyle/>
-          <a:p>
-            <a:pPr algn="ctr" indent="0" marL="0">
-              <a:buNone/>
-            </a:pPr>
-            <a:r>
-              <a:rPr lang="en-US" sz="1100" b="1" dirty="0">
-                <a:solidFill>
-                  <a:srgbClr val="475569"/>
-                </a:solidFill>
-                <a:latin typeface="Trebuchet MS" pitchFamily="34" charset="0"/>
-                <a:ea typeface="Trebuchet MS" pitchFamily="34" charset="-122"/>
-                <a:cs typeface="Trebuchet MS" pitchFamily="34" charset="-120"/>
-              </a:rPr>
-              <a:t>Phonemes</a:t>
-            </a:r>
-            <a:endParaRPr lang="en-US" sz="1100" dirty="0"/>
-          </a:p>
-        </p:txBody>
-      </p:sp>
-      <p:sp>
-        <p:nvSpPr>
-          <p:cNvPr id="31" name="Shape 29"/>
-          <p:cNvSpPr/>
-          <p:nvPr/>
-        </p:nvSpPr>
-        <p:spPr>
-          <a:xfrm>
-            <a:off x="1874520" y="4096512"/>
-            <a:ext cx="6903720" cy="804672"/>
-          </a:xfrm>
-          <a:prstGeom prst="rect">
-            <a:avLst>
-              <a:gd name="adj" fmla="val 6818"/>
-            </a:avLst>
-          </a:prstGeom>
-          <a:solidFill>
-            <a:srgbClr val="F8FAFC"/>
-          </a:solidFill>
-          <a:ln w="12700">
-            <a:solidFill>
-              <a:srgbClr val="E2E8F0"/>
-            </a:solidFill>
             <a:prstDash val="dash"/>
           </a:ln>
         </p:spPr>
       </p:sp>
       <p:sp>
         <p:nvSpPr>
-          <p:cNvPr id="32" name="Text 30"/>
+          <p:cNvPr id="29" name="Text 27"/>
           <p:cNvSpPr/>
           <p:nvPr/>
         </p:nvSpPr>
@@ -8779,7 +8667,7 @@
                 <a:ea typeface="Trebuchet MS" pitchFamily="34" charset="-122"/>
                 <a:cs typeface="Trebuchet MS" pitchFamily="34" charset="-120"/>
               </a:rPr>
-              <a:t>fastened</a:t>
+              <a:t>fastest</a:t>
             </a:r>
             <a:endParaRPr lang="en-US" sz="2800" dirty="0"/>
           </a:p>
@@ -8859,7 +8747,7 @@
         </p:nvSpPr>
         <p:spPr>
           <a:xfrm>
-            <a:off x="2221992" y="2258568"/>
+            <a:off x="2938272" y="2258568"/>
             <a:ext cx="1828800" cy="292608"/>
           </a:xfrm>
           <a:prstGeom prst="rect">
@@ -8893,7 +8781,7 @@
         </p:nvSpPr>
         <p:spPr>
           <a:xfrm>
-            <a:off x="2221992" y="2258568"/>
+            <a:off x="2938272" y="2258568"/>
             <a:ext cx="1828800" cy="292608"/>
           </a:xfrm>
           <a:prstGeom prst="rect">
@@ -8932,7 +8820,7 @@
         </p:nvSpPr>
         <p:spPr>
           <a:xfrm>
-            <a:off x="2221992" y="2569464"/>
+            <a:off x="2938272" y="2569464"/>
             <a:ext cx="1828800" cy="201168"/>
           </a:xfrm>
           <a:prstGeom prst="rect">
@@ -8957,7 +8845,7 @@
                 <a:ea typeface="Calibri" pitchFamily="34" charset="-122"/>
                 <a:cs typeface="Calibri" pitchFamily="34" charset="-120"/>
               </a:rPr>
-              <a:t>firm, fixed</a:t>
+              <a:t>quick or moving with speed</a:t>
             </a:r>
             <a:endParaRPr lang="en-US" sz="850" dirty="0"/>
           </a:p>
@@ -8971,7 +8859,7 @@
         </p:nvSpPr>
         <p:spPr>
           <a:xfrm>
-            <a:off x="4370832" y="2258568"/>
+            <a:off x="5803392" y="2258568"/>
             <a:ext cx="1828800" cy="292608"/>
           </a:xfrm>
           <a:prstGeom prst="rect">
@@ -9005,7 +8893,7 @@
         </p:nvSpPr>
         <p:spPr>
           <a:xfrm>
-            <a:off x="4370832" y="2258568"/>
+            <a:off x="5803392" y="2258568"/>
             <a:ext cx="1828800" cy="292608"/>
           </a:xfrm>
           <a:prstGeom prst="rect">
@@ -9030,7 +8918,7 @@
                 <a:ea typeface="Trebuchet MS" pitchFamily="34" charset="-122"/>
                 <a:cs typeface="Trebuchet MS" pitchFamily="34" charset="-120"/>
               </a:rPr>
-              <a:t>en</a:t>
+              <a:t>-est</a:t>
             </a:r>
             <a:endParaRPr lang="en-US" sz="1300" dirty="0"/>
           </a:p>
@@ -9044,7 +8932,7 @@
         </p:nvSpPr>
         <p:spPr>
           <a:xfrm>
-            <a:off x="4370832" y="2569464"/>
+            <a:off x="5803392" y="2569464"/>
             <a:ext cx="1828800" cy="201168"/>
           </a:xfrm>
           <a:prstGeom prst="rect">
@@ -9069,7 +8957,7 @@
                 <a:ea typeface="Calibri" pitchFamily="34" charset="-122"/>
                 <a:cs typeface="Calibri" pitchFamily="34" charset="-120"/>
               </a:rPr>
-              <a:t>to make or become</a:t>
+              <a:t>most (superlative)</a:t>
             </a:r>
             <a:endParaRPr lang="en-US" sz="850" dirty="0"/>
           </a:p>
@@ -9083,30 +8971,23 @@
         </p:nvSpPr>
         <p:spPr>
           <a:xfrm>
-            <a:off x="6519672" y="2258568"/>
-            <a:ext cx="1828800" cy="292608"/>
+            <a:off x="365760" y="3273552"/>
+            <a:ext cx="1371600" cy="658368"/>
           </a:xfrm>
           <a:prstGeom prst="rect">
             <a:avLst>
-              <a:gd name="adj" fmla="val 25000"/>
+              <a:gd name="adj" fmla="val 8333"/>
             </a:avLst>
           </a:prstGeom>
           <a:solidFill>
-            <a:srgbClr val="FCE7F3"/>
-          </a:solidFill>
-          <a:ln w="19050">
-            <a:solidFill>
-              <a:srgbClr val="DB2777"/>
-            </a:solidFill>
-            <a:prstDash val="solid"/>
-          </a:ln>
-          <a:effectLst>
-            <a:outerShdw sx="100000" sy="100000" kx="0" ky="0" algn="bl" rotWithShape="0" blurRad="101600" dist="38100" dir="8100000">
-              <a:srgbClr val="000000">
-                <a:alpha val="12000"/>
-              </a:srgbClr>
-            </a:outerShdw>
-          </a:effectLst>
+            <a:srgbClr val="E2E8F0"/>
+          </a:solidFill>
+          <a:ln w="12700">
+            <a:solidFill>
+              <a:srgbClr val="E2E8F0"/>
+            </a:solidFill>
+            <a:prstDash val="solid"/>
+          </a:ln>
         </p:spPr>
       </p:sp>
       <p:sp>
@@ -9117,8 +8998,8 @@
         </p:nvSpPr>
         <p:spPr>
           <a:xfrm>
-            <a:off x="6519672" y="2258568"/>
-            <a:ext cx="1828800" cy="292608"/>
+            <a:off x="365760" y="3273552"/>
+            <a:ext cx="1371600" cy="658368"/>
           </a:xfrm>
           <a:prstGeom prst="rect">
             <a:avLst/>
@@ -9134,69 +9015,30 @@
               <a:buNone/>
             </a:pPr>
             <a:r>
-              <a:rPr lang="en-US" sz="1300" b="1" dirty="0">
-                <a:solidFill>
-                  <a:srgbClr val="9D174D"/>
+              <a:rPr lang="en-US" sz="1100" b="1" dirty="0">
+                <a:solidFill>
+                  <a:srgbClr val="475569"/>
                 </a:solidFill>
                 <a:latin typeface="Trebuchet MS" pitchFamily="34" charset="0"/>
                 <a:ea typeface="Trebuchet MS" pitchFamily="34" charset="-122"/>
                 <a:cs typeface="Trebuchet MS" pitchFamily="34" charset="-120"/>
               </a:rPr>
-              <a:t>ed</a:t>
-            </a:r>
-            <a:endParaRPr lang="en-US" sz="1300" dirty="0"/>
-          </a:p>
-        </p:txBody>
-      </p:sp>
-      <p:sp>
-        <p:nvSpPr>
-          <p:cNvPr id="24" name="Text 22"/>
-          <p:cNvSpPr/>
-          <p:nvPr/>
-        </p:nvSpPr>
-        <p:spPr>
-          <a:xfrm>
-            <a:off x="6519672" y="2569464"/>
-            <a:ext cx="1828800" cy="201168"/>
-          </a:xfrm>
-          <a:prstGeom prst="rect">
-            <a:avLst/>
-          </a:prstGeom>
-          <a:noFill/>
-          <a:ln/>
-        </p:spPr>
-        <p:txBody>
-          <a:bodyPr wrap="square" lIns="0" tIns="0" rIns="0" bIns="0" rtlCol="0" anchor="t"/>
-          <a:lstStyle/>
-          <a:p>
-            <a:pPr algn="ctr" indent="0" marL="0">
-              <a:buNone/>
-            </a:pPr>
-            <a:r>
-              <a:rPr lang="en-US" sz="850" dirty="0">
-                <a:solidFill>
-                  <a:srgbClr val="475569"/>
-                </a:solidFill>
-                <a:latin typeface="Calibri" pitchFamily="34" charset="0"/>
-                <a:ea typeface="Calibri" pitchFamily="34" charset="-122"/>
-                <a:cs typeface="Calibri" pitchFamily="34" charset="-120"/>
-              </a:rPr>
-              <a:t>past tense</a:t>
-            </a:r>
-            <a:endParaRPr lang="en-US" sz="850" dirty="0"/>
-          </a:p>
-        </p:txBody>
-      </p:sp>
-      <p:sp>
-        <p:nvSpPr>
-          <p:cNvPr id="25" name="Shape 23"/>
-          <p:cNvSpPr/>
-          <p:nvPr/>
-        </p:nvSpPr>
-        <p:spPr>
-          <a:xfrm>
-            <a:off x="365760" y="3273552"/>
-            <a:ext cx="1371600" cy="658368"/>
+              <a:t>Syllables</a:t>
+            </a:r>
+            <a:endParaRPr lang="en-US" sz="1100" dirty="0"/>
+          </a:p>
+        </p:txBody>
+      </p:sp>
+      <p:sp>
+        <p:nvSpPr>
+          <p:cNvPr id="24" name="Shape 22"/>
+          <p:cNvSpPr/>
+          <p:nvPr/>
+        </p:nvSpPr>
+        <p:spPr>
+          <a:xfrm>
+            <a:off x="1874520" y="3273552"/>
+            <a:ext cx="6903720" cy="658368"/>
           </a:xfrm>
           <a:prstGeom prst="rect">
             <a:avLst>
@@ -9204,11 +9046,38 @@
             </a:avLst>
           </a:prstGeom>
           <a:solidFill>
-            <a:srgbClr val="E2E8F0"/>
-          </a:solidFill>
-          <a:ln w="12700">
-            <a:solidFill>
-              <a:srgbClr val="E2E8F0"/>
+            <a:srgbClr val="CCFBF1"/>
+          </a:solidFill>
+          <a:ln w="12700">
+            <a:solidFill>
+              <a:srgbClr val="0D9488"/>
+            </a:solidFill>
+            <a:prstDash val="solid"/>
+          </a:ln>
+        </p:spPr>
+      </p:sp>
+      <p:sp>
+        <p:nvSpPr>
+          <p:cNvPr id="25" name="Shape 23"/>
+          <p:cNvSpPr/>
+          <p:nvPr/>
+        </p:nvSpPr>
+        <p:spPr>
+          <a:xfrm>
+            <a:off x="2999232" y="3364992"/>
+            <a:ext cx="1645920" cy="475488"/>
+          </a:xfrm>
+          <a:prstGeom prst="rect">
+            <a:avLst>
+              <a:gd name="adj" fmla="val 9615"/>
+            </a:avLst>
+          </a:prstGeom>
+          <a:solidFill>
+            <a:srgbClr val="FFFFFF"/>
+          </a:solidFill>
+          <a:ln w="12700">
+            <a:solidFill>
+              <a:srgbClr val="0D9488"/>
             </a:solidFill>
             <a:prstDash val="solid"/>
           </a:ln>
@@ -9222,8 +9091,8 @@
         </p:nvSpPr>
         <p:spPr>
           <a:xfrm>
-            <a:off x="365760" y="3273552"/>
-            <a:ext cx="1371600" cy="658368"/>
+            <a:off x="2999232" y="3364992"/>
+            <a:ext cx="1645920" cy="475488"/>
           </a:xfrm>
           <a:prstGeom prst="rect">
             <a:avLst/>
@@ -9239,46 +9108,58 @@
               <a:buNone/>
             </a:pPr>
             <a:r>
-              <a:rPr lang="en-US" sz="1100" b="1" dirty="0">
-                <a:solidFill>
-                  <a:srgbClr val="475569"/>
+              <a:rPr lang="en-US" sz="1400" b="1" dirty="0">
+                <a:solidFill>
+                  <a:srgbClr val="0D9488"/>
                 </a:solidFill>
                 <a:latin typeface="Trebuchet MS" pitchFamily="34" charset="0"/>
                 <a:ea typeface="Trebuchet MS" pitchFamily="34" charset="-122"/>
                 <a:cs typeface="Trebuchet MS" pitchFamily="34" charset="-120"/>
               </a:rPr>
-              <a:t>Syllables</a:t>
-            </a:r>
-            <a:endParaRPr lang="en-US" sz="1100" dirty="0"/>
-          </a:p>
-        </p:txBody>
-      </p:sp>
-      <p:sp>
-        <p:nvSpPr>
-          <p:cNvPr id="27" name="Shape 25"/>
-          <p:cNvSpPr/>
-          <p:nvPr/>
-        </p:nvSpPr>
-        <p:spPr>
-          <a:xfrm>
-            <a:off x="1874520" y="3273552"/>
-            <a:ext cx="6903720" cy="658368"/>
-          </a:xfrm>
-          <a:prstGeom prst="rect">
-            <a:avLst>
-              <a:gd name="adj" fmla="val 8333"/>
-            </a:avLst>
-          </a:prstGeom>
-          <a:solidFill>
-            <a:srgbClr val="CCFBF1"/>
-          </a:solidFill>
-          <a:ln w="12700">
-            <a:solidFill>
-              <a:srgbClr val="0D9488"/>
-            </a:solidFill>
-            <a:prstDash val="solid"/>
-          </a:ln>
-        </p:spPr>
+              <a:t>fast</a:t>
+            </a:r>
+            <a:endParaRPr lang="en-US" sz="1400" dirty="0"/>
+          </a:p>
+        </p:txBody>
+      </p:sp>
+      <p:sp>
+        <p:nvSpPr>
+          <p:cNvPr id="27" name="Text 25"/>
+          <p:cNvSpPr/>
+          <p:nvPr/>
+        </p:nvSpPr>
+        <p:spPr>
+          <a:xfrm>
+            <a:off x="4645152" y="3364992"/>
+            <a:ext cx="1097280" cy="475488"/>
+          </a:xfrm>
+          <a:prstGeom prst="rect">
+            <a:avLst/>
+          </a:prstGeom>
+          <a:noFill/>
+          <a:ln/>
+        </p:spPr>
+        <p:txBody>
+          <a:bodyPr wrap="square" lIns="0" tIns="0" rIns="0" bIns="0" rtlCol="0" anchor="ctr"/>
+          <a:lstStyle/>
+          <a:p>
+            <a:pPr algn="ctr" indent="0" marL="0">
+              <a:buNone/>
+            </a:pPr>
+            <a:r>
+              <a:rPr lang="en-US" sz="1600" b="1" dirty="0">
+                <a:solidFill>
+                  <a:srgbClr val="0D9488"/>
+                </a:solidFill>
+                <a:latin typeface="Trebuchet MS" pitchFamily="34" charset="0"/>
+                <a:ea typeface="Trebuchet MS" pitchFamily="34" charset="-122"/>
+                <a:cs typeface="Trebuchet MS" pitchFamily="34" charset="-120"/>
+              </a:rPr>
+              <a:t>·</a:t>
+            </a:r>
+            <a:endParaRPr lang="en-US" sz="1600" dirty="0"/>
+          </a:p>
+        </p:txBody>
       </p:sp>
       <p:sp>
         <p:nvSpPr>
@@ -9288,7 +9169,7 @@
         </p:nvSpPr>
         <p:spPr>
           <a:xfrm>
-            <a:off x="2999232" y="3364992"/>
+            <a:off x="5742432" y="3364992"/>
             <a:ext cx="1645920" cy="475488"/>
           </a:xfrm>
           <a:prstGeom prst="rect">
@@ -9315,7 +9196,7 @@
         </p:nvSpPr>
         <p:spPr>
           <a:xfrm>
-            <a:off x="2999232" y="3364992"/>
+            <a:off x="5742432" y="3364992"/>
             <a:ext cx="1645920" cy="475488"/>
           </a:xfrm>
           <a:prstGeom prst="rect">
@@ -9340,7 +9221,7 @@
                 <a:ea typeface="Trebuchet MS" pitchFamily="34" charset="-122"/>
                 <a:cs typeface="Trebuchet MS" pitchFamily="34" charset="-120"/>
               </a:rPr>
-              <a:t>fas</a:t>
+              <a:t>est</a:t>
             </a:r>
             <a:endParaRPr lang="en-US" sz="1400" dirty="0"/>
           </a:p>
@@ -9348,14 +9229,41 @@
       </p:sp>
       <p:sp>
         <p:nvSpPr>
-          <p:cNvPr id="30" name="Text 28"/>
-          <p:cNvSpPr/>
-          <p:nvPr/>
-        </p:nvSpPr>
-        <p:spPr>
-          <a:xfrm>
-            <a:off x="4645152" y="3364992"/>
-            <a:ext cx="1097280" cy="475488"/>
+          <p:cNvPr id="30" name="Shape 28"/>
+          <p:cNvSpPr/>
+          <p:nvPr/>
+        </p:nvSpPr>
+        <p:spPr>
+          <a:xfrm>
+            <a:off x="365760" y="4096512"/>
+            <a:ext cx="1371600" cy="804672"/>
+          </a:xfrm>
+          <a:prstGeom prst="rect">
+            <a:avLst>
+              <a:gd name="adj" fmla="val 6818"/>
+            </a:avLst>
+          </a:prstGeom>
+          <a:solidFill>
+            <a:srgbClr val="E2E8F0"/>
+          </a:solidFill>
+          <a:ln w="12700">
+            <a:solidFill>
+              <a:srgbClr val="E2E8F0"/>
+            </a:solidFill>
+            <a:prstDash val="solid"/>
+          </a:ln>
+        </p:spPr>
+      </p:sp>
+      <p:sp>
+        <p:nvSpPr>
+          <p:cNvPr id="31" name="Text 29"/>
+          <p:cNvSpPr/>
+          <p:nvPr/>
+        </p:nvSpPr>
+        <p:spPr>
+          <a:xfrm>
+            <a:off x="365760" y="4096512"/>
+            <a:ext cx="1371600" cy="804672"/>
           </a:xfrm>
           <a:prstGeom prst="rect">
             <a:avLst/>
@@ -9371,96 +9279,30 @@
               <a:buNone/>
             </a:pPr>
             <a:r>
-              <a:rPr lang="en-US" sz="1600" b="1" dirty="0">
-                <a:solidFill>
-                  <a:srgbClr val="0D9488"/>
+              <a:rPr lang="en-US" sz="1100" b="1" dirty="0">
+                <a:solidFill>
+                  <a:srgbClr val="475569"/>
                 </a:solidFill>
                 <a:latin typeface="Trebuchet MS" pitchFamily="34" charset="0"/>
                 <a:ea typeface="Trebuchet MS" pitchFamily="34" charset="-122"/>
                 <a:cs typeface="Trebuchet MS" pitchFamily="34" charset="-120"/>
               </a:rPr>
-              <a:t>·</a:t>
-            </a:r>
-            <a:endParaRPr lang="en-US" sz="1600" dirty="0"/>
-          </a:p>
-        </p:txBody>
-      </p:sp>
-      <p:sp>
-        <p:nvSpPr>
-          <p:cNvPr id="31" name="Shape 29"/>
-          <p:cNvSpPr/>
-          <p:nvPr/>
-        </p:nvSpPr>
-        <p:spPr>
-          <a:xfrm>
-            <a:off x="5742432" y="3364992"/>
-            <a:ext cx="1645920" cy="475488"/>
-          </a:xfrm>
-          <a:prstGeom prst="rect">
-            <a:avLst>
-              <a:gd name="adj" fmla="val 9615"/>
-            </a:avLst>
-          </a:prstGeom>
-          <a:solidFill>
-            <a:srgbClr val="FFFFFF"/>
-          </a:solidFill>
-          <a:ln w="12700">
-            <a:solidFill>
-              <a:srgbClr val="0D9488"/>
-            </a:solidFill>
-            <a:prstDash val="solid"/>
-          </a:ln>
-        </p:spPr>
-      </p:sp>
-      <p:sp>
-        <p:nvSpPr>
-          <p:cNvPr id="32" name="Text 30"/>
-          <p:cNvSpPr/>
-          <p:nvPr/>
-        </p:nvSpPr>
-        <p:spPr>
-          <a:xfrm>
-            <a:off x="5742432" y="3364992"/>
-            <a:ext cx="1645920" cy="475488"/>
-          </a:xfrm>
-          <a:prstGeom prst="rect">
-            <a:avLst/>
-          </a:prstGeom>
-          <a:noFill/>
-          <a:ln/>
-        </p:spPr>
-        <p:txBody>
-          <a:bodyPr wrap="square" lIns="0" tIns="0" rIns="0" bIns="0" rtlCol="0" anchor="ctr"/>
-          <a:lstStyle/>
-          <a:p>
-            <a:pPr algn="ctr" indent="0" marL="0">
-              <a:buNone/>
-            </a:pPr>
-            <a:r>
-              <a:rPr lang="en-US" sz="1400" b="1" dirty="0">
-                <a:solidFill>
-                  <a:srgbClr val="0D9488"/>
-                </a:solidFill>
-                <a:latin typeface="Trebuchet MS" pitchFamily="34" charset="0"/>
-                <a:ea typeface="Trebuchet MS" pitchFamily="34" charset="-122"/>
-                <a:cs typeface="Trebuchet MS" pitchFamily="34" charset="-120"/>
-              </a:rPr>
-              <a:t>tened</a:t>
-            </a:r>
-            <a:endParaRPr lang="en-US" sz="1400" dirty="0"/>
-          </a:p>
-        </p:txBody>
-      </p:sp>
-      <p:sp>
-        <p:nvSpPr>
-          <p:cNvPr id="33" name="Shape 31"/>
-          <p:cNvSpPr/>
-          <p:nvPr/>
-        </p:nvSpPr>
-        <p:spPr>
-          <a:xfrm>
-            <a:off x="365760" y="4096512"/>
-            <a:ext cx="1371600" cy="804672"/>
+              <a:t>Phonemes</a:t>
+            </a:r>
+            <a:endParaRPr lang="en-US" sz="1100" dirty="0"/>
+          </a:p>
+        </p:txBody>
+      </p:sp>
+      <p:sp>
+        <p:nvSpPr>
+          <p:cNvPr id="32" name="Shape 30"/>
+          <p:cNvSpPr/>
+          <p:nvPr/>
+        </p:nvSpPr>
+        <p:spPr>
+          <a:xfrm>
+            <a:off x="1874520" y="4096512"/>
+            <a:ext cx="6903720" cy="804672"/>
           </a:xfrm>
           <a:prstGeom prst="rect">
             <a:avLst>
@@ -9468,85 +9310,19 @@
             </a:avLst>
           </a:prstGeom>
           <a:solidFill>
-            <a:srgbClr val="E2E8F0"/>
+            <a:srgbClr val="F8FAFC"/>
           </a:solidFill>
           <a:ln w="12700">
             <a:solidFill>
               <a:srgbClr val="E2E8F0"/>
             </a:solidFill>
-            <a:prstDash val="solid"/>
-          </a:ln>
-        </p:spPr>
-      </p:sp>
-      <p:sp>
-        <p:nvSpPr>
-          <p:cNvPr id="34" name="Text 32"/>
-          <p:cNvSpPr/>
-          <p:nvPr/>
-        </p:nvSpPr>
-        <p:spPr>
-          <a:xfrm>
-            <a:off x="365760" y="4096512"/>
-            <a:ext cx="1371600" cy="804672"/>
-          </a:xfrm>
-          <a:prstGeom prst="rect">
-            <a:avLst/>
-          </a:prstGeom>
-          <a:noFill/>
-          <a:ln/>
-        </p:spPr>
-        <p:txBody>
-          <a:bodyPr wrap="square" lIns="0" tIns="0" rIns="0" bIns="0" rtlCol="0" anchor="ctr"/>
-          <a:lstStyle/>
-          <a:p>
-            <a:pPr algn="ctr" indent="0" marL="0">
-              <a:buNone/>
-            </a:pPr>
-            <a:r>
-              <a:rPr lang="en-US" sz="1100" b="1" dirty="0">
-                <a:solidFill>
-                  <a:srgbClr val="475569"/>
-                </a:solidFill>
-                <a:latin typeface="Trebuchet MS" pitchFamily="34" charset="0"/>
-                <a:ea typeface="Trebuchet MS" pitchFamily="34" charset="-122"/>
-                <a:cs typeface="Trebuchet MS" pitchFamily="34" charset="-120"/>
-              </a:rPr>
-              <a:t>Phonemes</a:t>
-            </a:r>
-            <a:endParaRPr lang="en-US" sz="1100" dirty="0"/>
-          </a:p>
-        </p:txBody>
-      </p:sp>
-      <p:sp>
-        <p:nvSpPr>
-          <p:cNvPr id="35" name="Shape 33"/>
-          <p:cNvSpPr/>
-          <p:nvPr/>
-        </p:nvSpPr>
-        <p:spPr>
-          <a:xfrm>
-            <a:off x="1874520" y="4096512"/>
-            <a:ext cx="6903720" cy="804672"/>
-          </a:xfrm>
-          <a:prstGeom prst="rect">
-            <a:avLst>
-              <a:gd name="adj" fmla="val 6818"/>
-            </a:avLst>
-          </a:prstGeom>
-          <a:solidFill>
-            <a:srgbClr val="F8FAFC"/>
-          </a:solidFill>
-          <a:ln w="12700">
-            <a:solidFill>
-              <a:srgbClr val="E2E8F0"/>
-            </a:solidFill>
             <a:prstDash val="dash"/>
           </a:ln>
         </p:spPr>
       </p:sp>
       <p:sp>
         <p:nvSpPr>
-          <p:cNvPr id="36" name="Text 34"/>
+          <p:cNvPr id="33" name="Text 31"/>
           <p:cNvSpPr/>
           <p:nvPr/>
         </p:nvSpPr>
@@ -10008,7 +9784,7 @@
                 <a:ea typeface="Trebuchet MS" pitchFamily="34" charset="-122"/>
                 <a:cs typeface="Trebuchet MS" pitchFamily="34" charset="-120"/>
               </a:rPr>
-              <a:t>fastened</a:t>
+              <a:t>fastest</a:t>
             </a:r>
             <a:endParaRPr lang="en-US" sz="2800" dirty="0"/>
           </a:p>
@@ -10088,7 +9864,7 @@
         </p:nvSpPr>
         <p:spPr>
           <a:xfrm>
-            <a:off x="2221992" y="2258568"/>
+            <a:off x="2938272" y="2258568"/>
             <a:ext cx="1828800" cy="292608"/>
           </a:xfrm>
           <a:prstGeom prst="rect">
@@ -10122,7 +9898,7 @@
         </p:nvSpPr>
         <p:spPr>
           <a:xfrm>
-            <a:off x="2221992" y="2258568"/>
+            <a:off x="2938272" y="2258568"/>
             <a:ext cx="1828800" cy="292608"/>
           </a:xfrm>
           <a:prstGeom prst="rect">
@@ -10161,7 +9937,7 @@
         </p:nvSpPr>
         <p:spPr>
           <a:xfrm>
-            <a:off x="2221992" y="2569464"/>
+            <a:off x="2938272" y="2569464"/>
             <a:ext cx="1828800" cy="201168"/>
           </a:xfrm>
           <a:prstGeom prst="rect">
@@ -10186,7 +9962,7 @@
                 <a:ea typeface="Calibri" pitchFamily="34" charset="-122"/>
                 <a:cs typeface="Calibri" pitchFamily="34" charset="-120"/>
               </a:rPr>
-              <a:t>firm, fixed</a:t>
+              <a:t>quick or moving with speed</a:t>
             </a:r>
             <a:endParaRPr lang="en-US" sz="850" dirty="0"/>
           </a:p>
@@ -10200,7 +9976,7 @@
         </p:nvSpPr>
         <p:spPr>
           <a:xfrm>
-            <a:off x="4370832" y="2258568"/>
+            <a:off x="5803392" y="2258568"/>
             <a:ext cx="1828800" cy="292608"/>
           </a:xfrm>
           <a:prstGeom prst="rect">
@@ -10234,7 +10010,7 @@
         </p:nvSpPr>
         <p:spPr>
           <a:xfrm>
-            <a:off x="4370832" y="2258568"/>
+            <a:off x="5803392" y="2258568"/>
             <a:ext cx="1828800" cy="292608"/>
           </a:xfrm>
           <a:prstGeom prst="rect">
@@ -10259,7 +10035,7 @@
                 <a:ea typeface="Trebuchet MS" pitchFamily="34" charset="-122"/>
                 <a:cs typeface="Trebuchet MS" pitchFamily="34" charset="-120"/>
               </a:rPr>
-              <a:t>en</a:t>
+              <a:t>-est</a:t>
             </a:r>
             <a:endParaRPr lang="en-US" sz="1300" dirty="0"/>
           </a:p>
@@ -10273,7 +10049,7 @@
         </p:nvSpPr>
         <p:spPr>
           <a:xfrm>
-            <a:off x="4370832" y="2569464"/>
+            <a:off x="5803392" y="2569464"/>
             <a:ext cx="1828800" cy="201168"/>
           </a:xfrm>
           <a:prstGeom prst="rect">
@@ -10298,7 +10074,7 @@
                 <a:ea typeface="Calibri" pitchFamily="34" charset="-122"/>
                 <a:cs typeface="Calibri" pitchFamily="34" charset="-120"/>
               </a:rPr>
-              <a:t>to make or become</a:t>
+              <a:t>most (superlative)</a:t>
             </a:r>
             <a:endParaRPr lang="en-US" sz="850" dirty="0"/>
           </a:p>
@@ -10312,30 +10088,23 @@
         </p:nvSpPr>
         <p:spPr>
           <a:xfrm>
-            <a:off x="6519672" y="2258568"/>
-            <a:ext cx="1828800" cy="292608"/>
+            <a:off x="365760" y="3273552"/>
+            <a:ext cx="1371600" cy="658368"/>
           </a:xfrm>
           <a:prstGeom prst="rect">
             <a:avLst>
-              <a:gd name="adj" fmla="val 25000"/>
+              <a:gd name="adj" fmla="val 8333"/>
             </a:avLst>
           </a:prstGeom>
           <a:solidFill>
-            <a:srgbClr val="FCE7F3"/>
-          </a:solidFill>
-          <a:ln w="19050">
-            <a:solidFill>
-              <a:srgbClr val="DB2777"/>
-            </a:solidFill>
-            <a:prstDash val="solid"/>
-          </a:ln>
-          <a:effectLst>
-            <a:outerShdw sx="100000" sy="100000" kx="0" ky="0" algn="bl" rotWithShape="0" blurRad="101600" dist="38100" dir="8100000">
-              <a:srgbClr val="000000">
-                <a:alpha val="12000"/>
-              </a:srgbClr>
-            </a:outerShdw>
-          </a:effectLst>
+            <a:srgbClr val="E2E8F0"/>
+          </a:solidFill>
+          <a:ln w="12700">
+            <a:solidFill>
+              <a:srgbClr val="E2E8F0"/>
+            </a:solidFill>
+            <a:prstDash val="solid"/>
+          </a:ln>
         </p:spPr>
       </p:sp>
       <p:sp>
@@ -10346,8 +10115,8 @@
         </p:nvSpPr>
         <p:spPr>
           <a:xfrm>
-            <a:off x="6519672" y="2258568"/>
-            <a:ext cx="1828800" cy="292608"/>
+            <a:off x="365760" y="3273552"/>
+            <a:ext cx="1371600" cy="658368"/>
           </a:xfrm>
           <a:prstGeom prst="rect">
             <a:avLst/>
@@ -10363,69 +10132,30 @@
               <a:buNone/>
             </a:pPr>
             <a:r>
-              <a:rPr lang="en-US" sz="1300" b="1" dirty="0">
-                <a:solidFill>
-                  <a:srgbClr val="9D174D"/>
+              <a:rPr lang="en-US" sz="1100" b="1" dirty="0">
+                <a:solidFill>
+                  <a:srgbClr val="475569"/>
                 </a:solidFill>
                 <a:latin typeface="Trebuchet MS" pitchFamily="34" charset="0"/>
                 <a:ea typeface="Trebuchet MS" pitchFamily="34" charset="-122"/>
                 <a:cs typeface="Trebuchet MS" pitchFamily="34" charset="-120"/>
               </a:rPr>
-              <a:t>ed</a:t>
-            </a:r>
-            <a:endParaRPr lang="en-US" sz="1300" dirty="0"/>
-          </a:p>
-        </p:txBody>
-      </p:sp>
-      <p:sp>
-        <p:nvSpPr>
-          <p:cNvPr id="24" name="Text 22"/>
-          <p:cNvSpPr/>
-          <p:nvPr/>
-        </p:nvSpPr>
-        <p:spPr>
-          <a:xfrm>
-            <a:off x="6519672" y="2569464"/>
-            <a:ext cx="1828800" cy="201168"/>
-          </a:xfrm>
-          <a:prstGeom prst="rect">
-            <a:avLst/>
-          </a:prstGeom>
-          <a:noFill/>
-          <a:ln/>
-        </p:spPr>
-        <p:txBody>
-          <a:bodyPr wrap="square" lIns="0" tIns="0" rIns="0" bIns="0" rtlCol="0" anchor="t"/>
-          <a:lstStyle/>
-          <a:p>
-            <a:pPr algn="ctr" indent="0" marL="0">
-              <a:buNone/>
-            </a:pPr>
-            <a:r>
-              <a:rPr lang="en-US" sz="850" dirty="0">
-                <a:solidFill>
-                  <a:srgbClr val="475569"/>
-                </a:solidFill>
-                <a:latin typeface="Calibri" pitchFamily="34" charset="0"/>
-                <a:ea typeface="Calibri" pitchFamily="34" charset="-122"/>
-                <a:cs typeface="Calibri" pitchFamily="34" charset="-120"/>
-              </a:rPr>
-              <a:t>past tense</a:t>
-            </a:r>
-            <a:endParaRPr lang="en-US" sz="850" dirty="0"/>
-          </a:p>
-        </p:txBody>
-      </p:sp>
-      <p:sp>
-        <p:nvSpPr>
-          <p:cNvPr id="25" name="Shape 23"/>
-          <p:cNvSpPr/>
-          <p:nvPr/>
-        </p:nvSpPr>
-        <p:spPr>
-          <a:xfrm>
-            <a:off x="365760" y="3273552"/>
-            <a:ext cx="1371600" cy="658368"/>
+              <a:t>Syllables</a:t>
+            </a:r>
+            <a:endParaRPr lang="en-US" sz="1100" dirty="0"/>
+          </a:p>
+        </p:txBody>
+      </p:sp>
+      <p:sp>
+        <p:nvSpPr>
+          <p:cNvPr id="24" name="Shape 22"/>
+          <p:cNvSpPr/>
+          <p:nvPr/>
+        </p:nvSpPr>
+        <p:spPr>
+          <a:xfrm>
+            <a:off x="1874520" y="3273552"/>
+            <a:ext cx="6903720" cy="658368"/>
           </a:xfrm>
           <a:prstGeom prst="rect">
             <a:avLst>
@@ -10433,11 +10163,38 @@
             </a:avLst>
           </a:prstGeom>
           <a:solidFill>
-            <a:srgbClr val="E2E8F0"/>
-          </a:solidFill>
-          <a:ln w="12700">
-            <a:solidFill>
-              <a:srgbClr val="E2E8F0"/>
+            <a:srgbClr val="CCFBF1"/>
+          </a:solidFill>
+          <a:ln w="12700">
+            <a:solidFill>
+              <a:srgbClr val="0D9488"/>
+            </a:solidFill>
+            <a:prstDash val="solid"/>
+          </a:ln>
+        </p:spPr>
+      </p:sp>
+      <p:sp>
+        <p:nvSpPr>
+          <p:cNvPr id="25" name="Shape 23"/>
+          <p:cNvSpPr/>
+          <p:nvPr/>
+        </p:nvSpPr>
+        <p:spPr>
+          <a:xfrm>
+            <a:off x="2999232" y="3364992"/>
+            <a:ext cx="1645920" cy="475488"/>
+          </a:xfrm>
+          <a:prstGeom prst="rect">
+            <a:avLst>
+              <a:gd name="adj" fmla="val 9615"/>
+            </a:avLst>
+          </a:prstGeom>
+          <a:solidFill>
+            <a:srgbClr val="FFFFFF"/>
+          </a:solidFill>
+          <a:ln w="12700">
+            <a:solidFill>
+              <a:srgbClr val="0D9488"/>
             </a:solidFill>
             <a:prstDash val="solid"/>
           </a:ln>
@@ -10451,8 +10208,8 @@
         </p:nvSpPr>
         <p:spPr>
           <a:xfrm>
-            <a:off x="365760" y="3273552"/>
-            <a:ext cx="1371600" cy="658368"/>
+            <a:off x="2999232" y="3364992"/>
+            <a:ext cx="1645920" cy="475488"/>
           </a:xfrm>
           <a:prstGeom prst="rect">
             <a:avLst/>
@@ -10468,15 +10225,186 @@
               <a:buNone/>
             </a:pPr>
             <a:r>
-              <a:rPr lang="en-US" sz="1100" b="1" dirty="0">
-                <a:solidFill>
-                  <a:srgbClr val="475569"/>
+              <a:rPr lang="en-US" sz="1400" b="1" dirty="0">
+                <a:solidFill>
+                  <a:srgbClr val="0D9488"/>
                 </a:solidFill>
                 <a:latin typeface="Trebuchet MS" pitchFamily="34" charset="0"/>
                 <a:ea typeface="Trebuchet MS" pitchFamily="34" charset="-122"/>
                 <a:cs typeface="Trebuchet MS" pitchFamily="34" charset="-120"/>
               </a:rPr>
-              <a:t>Syllables</a:t>
+              <a:t>fast</a:t>
+            </a:r>
+            <a:endParaRPr lang="en-US" sz="1400" dirty="0"/>
+          </a:p>
+        </p:txBody>
+      </p:sp>
+      <p:sp>
+        <p:nvSpPr>
+          <p:cNvPr id="27" name="Text 25"/>
+          <p:cNvSpPr/>
+          <p:nvPr/>
+        </p:nvSpPr>
+        <p:spPr>
+          <a:xfrm>
+            <a:off x="4645152" y="3364992"/>
+            <a:ext cx="1097280" cy="475488"/>
+          </a:xfrm>
+          <a:prstGeom prst="rect">
+            <a:avLst/>
+          </a:prstGeom>
+          <a:noFill/>
+          <a:ln/>
+        </p:spPr>
+        <p:txBody>
+          <a:bodyPr wrap="square" lIns="0" tIns="0" rIns="0" bIns="0" rtlCol="0" anchor="ctr"/>
+          <a:lstStyle/>
+          <a:p>
+            <a:pPr algn="ctr" indent="0" marL="0">
+              <a:buNone/>
+            </a:pPr>
+            <a:r>
+              <a:rPr lang="en-US" sz="1600" b="1" dirty="0">
+                <a:solidFill>
+                  <a:srgbClr val="0D9488"/>
+                </a:solidFill>
+                <a:latin typeface="Trebuchet MS" pitchFamily="34" charset="0"/>
+                <a:ea typeface="Trebuchet MS" pitchFamily="34" charset="-122"/>
+                <a:cs typeface="Trebuchet MS" pitchFamily="34" charset="-120"/>
+              </a:rPr>
+              <a:t>·</a:t>
+            </a:r>
+            <a:endParaRPr lang="en-US" sz="1600" dirty="0"/>
+          </a:p>
+        </p:txBody>
+      </p:sp>
+      <p:sp>
+        <p:nvSpPr>
+          <p:cNvPr id="28" name="Shape 26"/>
+          <p:cNvSpPr/>
+          <p:nvPr/>
+        </p:nvSpPr>
+        <p:spPr>
+          <a:xfrm>
+            <a:off x="5742432" y="3364992"/>
+            <a:ext cx="1645920" cy="475488"/>
+          </a:xfrm>
+          <a:prstGeom prst="rect">
+            <a:avLst>
+              <a:gd name="adj" fmla="val 9615"/>
+            </a:avLst>
+          </a:prstGeom>
+          <a:solidFill>
+            <a:srgbClr val="FFFFFF"/>
+          </a:solidFill>
+          <a:ln w="12700">
+            <a:solidFill>
+              <a:srgbClr val="0D9488"/>
+            </a:solidFill>
+            <a:prstDash val="solid"/>
+          </a:ln>
+        </p:spPr>
+      </p:sp>
+      <p:sp>
+        <p:nvSpPr>
+          <p:cNvPr id="29" name="Text 27"/>
+          <p:cNvSpPr/>
+          <p:nvPr/>
+        </p:nvSpPr>
+        <p:spPr>
+          <a:xfrm>
+            <a:off x="5742432" y="3364992"/>
+            <a:ext cx="1645920" cy="475488"/>
+          </a:xfrm>
+          <a:prstGeom prst="rect">
+            <a:avLst/>
+          </a:prstGeom>
+          <a:noFill/>
+          <a:ln/>
+        </p:spPr>
+        <p:txBody>
+          <a:bodyPr wrap="square" lIns="0" tIns="0" rIns="0" bIns="0" rtlCol="0" anchor="ctr"/>
+          <a:lstStyle/>
+          <a:p>
+            <a:pPr algn="ctr" indent="0" marL="0">
+              <a:buNone/>
+            </a:pPr>
+            <a:r>
+              <a:rPr lang="en-US" sz="1400" b="1" dirty="0">
+                <a:solidFill>
+                  <a:srgbClr val="0D9488"/>
+                </a:solidFill>
+                <a:latin typeface="Trebuchet MS" pitchFamily="34" charset="0"/>
+                <a:ea typeface="Trebuchet MS" pitchFamily="34" charset="-122"/>
+                <a:cs typeface="Trebuchet MS" pitchFamily="34" charset="-120"/>
+              </a:rPr>
+              <a:t>est</a:t>
+            </a:r>
+            <a:endParaRPr lang="en-US" sz="1400" dirty="0"/>
+          </a:p>
+        </p:txBody>
+      </p:sp>
+      <p:sp>
+        <p:nvSpPr>
+          <p:cNvPr id="30" name="Shape 28"/>
+          <p:cNvSpPr/>
+          <p:nvPr/>
+        </p:nvSpPr>
+        <p:spPr>
+          <a:xfrm>
+            <a:off x="365760" y="4096512"/>
+            <a:ext cx="1371600" cy="804672"/>
+          </a:xfrm>
+          <a:prstGeom prst="rect">
+            <a:avLst>
+              <a:gd name="adj" fmla="val 6818"/>
+            </a:avLst>
+          </a:prstGeom>
+          <a:solidFill>
+            <a:srgbClr val="E2E8F0"/>
+          </a:solidFill>
+          <a:ln w="12700">
+            <a:solidFill>
+              <a:srgbClr val="E2E8F0"/>
+            </a:solidFill>
+            <a:prstDash val="solid"/>
+          </a:ln>
+        </p:spPr>
+      </p:sp>
+      <p:sp>
+        <p:nvSpPr>
+          <p:cNvPr id="31" name="Text 29"/>
+          <p:cNvSpPr/>
+          <p:nvPr/>
+        </p:nvSpPr>
+        <p:spPr>
+          <a:xfrm>
+            <a:off x="365760" y="4096512"/>
+            <a:ext cx="1371600" cy="804672"/>
+          </a:xfrm>
+          <a:prstGeom prst="rect">
+            <a:avLst/>
+          </a:prstGeom>
+          <a:noFill/>
+          <a:ln/>
+        </p:spPr>
+        <p:txBody>
+          <a:bodyPr wrap="square" lIns="0" tIns="0" rIns="0" bIns="0" rtlCol="0" anchor="ctr"/>
+          <a:lstStyle/>
+          <a:p>
+            <a:pPr algn="ctr" indent="0" marL="0">
+              <a:buNone/>
+            </a:pPr>
+            <a:r>
+              <a:rPr lang="en-US" sz="1100" b="1" dirty="0">
+                <a:solidFill>
+                  <a:srgbClr val="475569"/>
+                </a:solidFill>
+                <a:latin typeface="Trebuchet MS" pitchFamily="34" charset="0"/>
+                <a:ea typeface="Trebuchet MS" pitchFamily="34" charset="-122"/>
+                <a:cs typeface="Trebuchet MS" pitchFamily="34" charset="-120"/>
+              </a:rPr>
+              <a:t>Phonemes</a:t>
             </a:r>
             <a:endParaRPr lang="en-US" sz="1100" dirty="0"/>
           </a:p>
@@ -10484,13 +10412,13 @@
       </p:sp>
       <p:sp>
         <p:nvSpPr>
-          <p:cNvPr id="27" name="Shape 25"/>
-          <p:cNvSpPr/>
-          <p:nvPr/>
-        </p:nvSpPr>
-        <p:spPr>
-          <a:xfrm>
-            <a:off x="1874520" y="3273552"/>
+          <p:cNvPr id="32" name="Shape 30"/>
+          <p:cNvSpPr/>
+          <p:nvPr/>
+        </p:nvSpPr>
+        <p:spPr>
+          <a:xfrm>
+            <a:off x="1874520" y="4096512"/>
             <a:ext cx="6903720" cy="658368"/>
           </a:xfrm>
           <a:prstGeom prst="rect">
@@ -10499,30 +10427,30 @@
             </a:avLst>
           </a:prstGeom>
           <a:solidFill>
-            <a:srgbClr val="CCFBF1"/>
-          </a:solidFill>
-          <a:ln w="12700">
-            <a:solidFill>
-              <a:srgbClr val="0D9488"/>
-            </a:solidFill>
-            <a:prstDash val="solid"/>
-          </a:ln>
-        </p:spPr>
-      </p:sp>
-      <p:sp>
-        <p:nvSpPr>
-          <p:cNvPr id="28" name="Shape 26"/>
-          <p:cNvSpPr/>
-          <p:nvPr/>
-        </p:nvSpPr>
-        <p:spPr>
-          <a:xfrm>
-            <a:off x="2999232" y="3364992"/>
-            <a:ext cx="1645920" cy="475488"/>
+            <a:srgbClr val="FCE7F3"/>
+          </a:solidFill>
+          <a:ln w="12700">
+            <a:solidFill>
+              <a:srgbClr val="DB2777"/>
+            </a:solidFill>
+            <a:prstDash val="solid"/>
+          </a:ln>
+        </p:spPr>
+      </p:sp>
+      <p:sp>
+        <p:nvSpPr>
+          <p:cNvPr id="33" name="Shape 31"/>
+          <p:cNvSpPr/>
+          <p:nvPr/>
+        </p:nvSpPr>
+        <p:spPr>
+          <a:xfrm>
+            <a:off x="2124837" y="4169664"/>
+            <a:ext cx="685800" cy="475488"/>
           </a:xfrm>
           <a:prstGeom prst="rect">
             <a:avLst>
-              <a:gd name="adj" fmla="val 9615"/>
+              <a:gd name="adj" fmla="val 7692"/>
             </a:avLst>
           </a:prstGeom>
           <a:solidFill>
@@ -10530,22 +10458,22 @@
           </a:solidFill>
           <a:ln w="12700">
             <a:solidFill>
-              <a:srgbClr val="0D9488"/>
-            </a:solidFill>
-            <a:prstDash val="solid"/>
-          </a:ln>
-        </p:spPr>
-      </p:sp>
-      <p:sp>
-        <p:nvSpPr>
-          <p:cNvPr id="29" name="Text 27"/>
-          <p:cNvSpPr/>
-          <p:nvPr/>
-        </p:nvSpPr>
-        <p:spPr>
-          <a:xfrm>
-            <a:off x="2999232" y="3364992"/>
-            <a:ext cx="1645920" cy="475488"/>
+              <a:srgbClr val="DB2777"/>
+            </a:solidFill>
+            <a:prstDash val="solid"/>
+          </a:ln>
+        </p:spPr>
+      </p:sp>
+      <p:sp>
+        <p:nvSpPr>
+          <p:cNvPr id="34" name="Text 32"/>
+          <p:cNvSpPr/>
+          <p:nvPr/>
+        </p:nvSpPr>
+        <p:spPr>
+          <a:xfrm>
+            <a:off x="2124837" y="4169664"/>
+            <a:ext cx="685800" cy="475488"/>
           </a:xfrm>
           <a:prstGeom prst="rect">
             <a:avLst/>
@@ -10561,30 +10489,57 @@
               <a:buNone/>
             </a:pPr>
             <a:r>
-              <a:rPr lang="en-US" sz="1400" b="1" dirty="0">
-                <a:solidFill>
-                  <a:srgbClr val="0D9488"/>
+              <a:rPr lang="en-US" sz="900" b="1" dirty="0">
+                <a:solidFill>
+                  <a:srgbClr val="9D174D"/>
                 </a:solidFill>
                 <a:latin typeface="Trebuchet MS" pitchFamily="34" charset="0"/>
                 <a:ea typeface="Trebuchet MS" pitchFamily="34" charset="-122"/>
                 <a:cs typeface="Trebuchet MS" pitchFamily="34" charset="-120"/>
               </a:rPr>
-              <a:t>fas</a:t>
-            </a:r>
-            <a:endParaRPr lang="en-US" sz="1400" dirty="0"/>
-          </a:p>
-        </p:txBody>
-      </p:sp>
-      <p:sp>
-        <p:nvSpPr>
-          <p:cNvPr id="30" name="Text 28"/>
-          <p:cNvSpPr/>
-          <p:nvPr/>
-        </p:nvSpPr>
-        <p:spPr>
-          <a:xfrm>
-            <a:off x="4645152" y="3364992"/>
-            <a:ext cx="1097280" cy="475488"/>
+              <a:t>f</a:t>
+            </a:r>
+            <a:endParaRPr lang="en-US" sz="900" dirty="0"/>
+          </a:p>
+        </p:txBody>
+      </p:sp>
+      <p:sp>
+        <p:nvSpPr>
+          <p:cNvPr id="35" name="Shape 33"/>
+          <p:cNvSpPr/>
+          <p:nvPr/>
+        </p:nvSpPr>
+        <p:spPr>
+          <a:xfrm>
+            <a:off x="3033522" y="4169664"/>
+            <a:ext cx="685800" cy="475488"/>
+          </a:xfrm>
+          <a:prstGeom prst="rect">
+            <a:avLst>
+              <a:gd name="adj" fmla="val 7692"/>
+            </a:avLst>
+          </a:prstGeom>
+          <a:solidFill>
+            <a:srgbClr val="FFFFFF"/>
+          </a:solidFill>
+          <a:ln w="12700">
+            <a:solidFill>
+              <a:srgbClr val="DB2777"/>
+            </a:solidFill>
+            <a:prstDash val="solid"/>
+          </a:ln>
+        </p:spPr>
+      </p:sp>
+      <p:sp>
+        <p:nvSpPr>
+          <p:cNvPr id="36" name="Text 34"/>
+          <p:cNvSpPr/>
+          <p:nvPr/>
+        </p:nvSpPr>
+        <p:spPr>
+          <a:xfrm>
+            <a:off x="3033522" y="4169664"/>
+            <a:ext cx="685800" cy="475488"/>
           </a:xfrm>
           <a:prstGeom prst="rect">
             <a:avLst/>
@@ -10600,34 +10555,34 @@
               <a:buNone/>
             </a:pPr>
             <a:r>
-              <a:rPr lang="en-US" sz="1600" b="1" dirty="0">
-                <a:solidFill>
-                  <a:srgbClr val="0D9488"/>
+              <a:rPr lang="en-US" sz="900" b="1" dirty="0">
+                <a:solidFill>
+                  <a:srgbClr val="9D174D"/>
                 </a:solidFill>
                 <a:latin typeface="Trebuchet MS" pitchFamily="34" charset="0"/>
                 <a:ea typeface="Trebuchet MS" pitchFamily="34" charset="-122"/>
                 <a:cs typeface="Trebuchet MS" pitchFamily="34" charset="-120"/>
               </a:rPr>
-              <a:t>·</a:t>
-            </a:r>
-            <a:endParaRPr lang="en-US" sz="1600" dirty="0"/>
-          </a:p>
-        </p:txBody>
-      </p:sp>
-      <p:sp>
-        <p:nvSpPr>
-          <p:cNvPr id="31" name="Shape 29"/>
-          <p:cNvSpPr/>
-          <p:nvPr/>
-        </p:nvSpPr>
-        <p:spPr>
-          <a:xfrm>
-            <a:off x="5742432" y="3364992"/>
-            <a:ext cx="1645920" cy="475488"/>
+              <a:t>a</a:t>
+            </a:r>
+            <a:endParaRPr lang="en-US" sz="900" dirty="0"/>
+          </a:p>
+        </p:txBody>
+      </p:sp>
+      <p:sp>
+        <p:nvSpPr>
+          <p:cNvPr id="37" name="Shape 35"/>
+          <p:cNvSpPr/>
+          <p:nvPr/>
+        </p:nvSpPr>
+        <p:spPr>
+          <a:xfrm>
+            <a:off x="3942207" y="4169664"/>
+            <a:ext cx="685800" cy="475488"/>
           </a:xfrm>
           <a:prstGeom prst="rect">
             <a:avLst>
-              <a:gd name="adj" fmla="val 9615"/>
+              <a:gd name="adj" fmla="val 7692"/>
             </a:avLst>
           </a:prstGeom>
           <a:solidFill>
@@ -10635,22 +10590,22 @@
           </a:solidFill>
           <a:ln w="12700">
             <a:solidFill>
-              <a:srgbClr val="0D9488"/>
-            </a:solidFill>
-            <a:prstDash val="solid"/>
-          </a:ln>
-        </p:spPr>
-      </p:sp>
-      <p:sp>
-        <p:nvSpPr>
-          <p:cNvPr id="32" name="Text 30"/>
-          <p:cNvSpPr/>
-          <p:nvPr/>
-        </p:nvSpPr>
-        <p:spPr>
-          <a:xfrm>
-            <a:off x="5742432" y="3364992"/>
-            <a:ext cx="1645920" cy="475488"/>
+              <a:srgbClr val="DB2777"/>
+            </a:solidFill>
+            <a:prstDash val="solid"/>
+          </a:ln>
+        </p:spPr>
+      </p:sp>
+      <p:sp>
+        <p:nvSpPr>
+          <p:cNvPr id="38" name="Text 36"/>
+          <p:cNvSpPr/>
+          <p:nvPr/>
+        </p:nvSpPr>
+        <p:spPr>
+          <a:xfrm>
+            <a:off x="3942207" y="4169664"/>
+            <a:ext cx="685800" cy="475488"/>
           </a:xfrm>
           <a:prstGeom prst="rect">
             <a:avLst/>
@@ -10666,57 +10621,57 @@
               <a:buNone/>
             </a:pPr>
             <a:r>
-              <a:rPr lang="en-US" sz="1400" b="1" dirty="0">
-                <a:solidFill>
-                  <a:srgbClr val="0D9488"/>
+              <a:rPr lang="en-US" sz="900" b="1" dirty="0">
+                <a:solidFill>
+                  <a:srgbClr val="9D174D"/>
                 </a:solidFill>
                 <a:latin typeface="Trebuchet MS" pitchFamily="34" charset="0"/>
                 <a:ea typeface="Trebuchet MS" pitchFamily="34" charset="-122"/>
                 <a:cs typeface="Trebuchet MS" pitchFamily="34" charset="-120"/>
               </a:rPr>
-              <a:t>tened</a:t>
-            </a:r>
-            <a:endParaRPr lang="en-US" sz="1400" dirty="0"/>
-          </a:p>
-        </p:txBody>
-      </p:sp>
-      <p:sp>
-        <p:nvSpPr>
-          <p:cNvPr id="33" name="Shape 31"/>
-          <p:cNvSpPr/>
-          <p:nvPr/>
-        </p:nvSpPr>
-        <p:spPr>
-          <a:xfrm>
-            <a:off x="365760" y="4096512"/>
-            <a:ext cx="1371600" cy="804672"/>
+              <a:t>s</a:t>
+            </a:r>
+            <a:endParaRPr lang="en-US" sz="900" dirty="0"/>
+          </a:p>
+        </p:txBody>
+      </p:sp>
+      <p:sp>
+        <p:nvSpPr>
+          <p:cNvPr id="39" name="Shape 37"/>
+          <p:cNvSpPr/>
+          <p:nvPr/>
+        </p:nvSpPr>
+        <p:spPr>
+          <a:xfrm>
+            <a:off x="4850892" y="4169664"/>
+            <a:ext cx="685800" cy="475488"/>
           </a:xfrm>
           <a:prstGeom prst="rect">
             <a:avLst>
-              <a:gd name="adj" fmla="val 6818"/>
+              <a:gd name="adj" fmla="val 7692"/>
             </a:avLst>
           </a:prstGeom>
           <a:solidFill>
-            <a:srgbClr val="E2E8F0"/>
-          </a:solidFill>
-          <a:ln w="12700">
-            <a:solidFill>
-              <a:srgbClr val="E2E8F0"/>
-            </a:solidFill>
-            <a:prstDash val="solid"/>
-          </a:ln>
-        </p:spPr>
-      </p:sp>
-      <p:sp>
-        <p:nvSpPr>
-          <p:cNvPr id="34" name="Text 32"/>
-          <p:cNvSpPr/>
-          <p:nvPr/>
-        </p:nvSpPr>
-        <p:spPr>
-          <a:xfrm>
-            <a:off x="365760" y="4096512"/>
-            <a:ext cx="1371600" cy="804672"/>
+            <a:srgbClr val="FFFFFF"/>
+          </a:solidFill>
+          <a:ln w="12700">
+            <a:solidFill>
+              <a:srgbClr val="DB2777"/>
+            </a:solidFill>
+            <a:prstDash val="solid"/>
+          </a:ln>
+        </p:spPr>
+      </p:sp>
+      <p:sp>
+        <p:nvSpPr>
+          <p:cNvPr id="40" name="Text 38"/>
+          <p:cNvSpPr/>
+          <p:nvPr/>
+        </p:nvSpPr>
+        <p:spPr>
+          <a:xfrm>
+            <a:off x="4850892" y="4169664"/>
+            <a:ext cx="685800" cy="475488"/>
           </a:xfrm>
           <a:prstGeom prst="rect">
             <a:avLst/>
@@ -10732,38 +10687,38 @@
               <a:buNone/>
             </a:pPr>
             <a:r>
-              <a:rPr lang="en-US" sz="1100" b="1" dirty="0">
-                <a:solidFill>
-                  <a:srgbClr val="475569"/>
+              <a:rPr lang="en-US" sz="900" b="1" dirty="0">
+                <a:solidFill>
+                  <a:srgbClr val="9D174D"/>
                 </a:solidFill>
                 <a:latin typeface="Trebuchet MS" pitchFamily="34" charset="0"/>
                 <a:ea typeface="Trebuchet MS" pitchFamily="34" charset="-122"/>
                 <a:cs typeface="Trebuchet MS" pitchFamily="34" charset="-120"/>
               </a:rPr>
-              <a:t>Phonemes</a:t>
-            </a:r>
-            <a:endParaRPr lang="en-US" sz="1100" dirty="0"/>
-          </a:p>
-        </p:txBody>
-      </p:sp>
-      <p:sp>
-        <p:nvSpPr>
-          <p:cNvPr id="35" name="Shape 33"/>
-          <p:cNvSpPr/>
-          <p:nvPr/>
-        </p:nvSpPr>
-        <p:spPr>
-          <a:xfrm>
-            <a:off x="1874520" y="4096512"/>
-            <a:ext cx="6903720" cy="804672"/>
+              <a:t>t</a:t>
+            </a:r>
+            <a:endParaRPr lang="en-US" sz="900" dirty="0"/>
+          </a:p>
+        </p:txBody>
+      </p:sp>
+      <p:sp>
+        <p:nvSpPr>
+          <p:cNvPr id="41" name="Shape 39"/>
+          <p:cNvSpPr/>
+          <p:nvPr/>
+        </p:nvSpPr>
+        <p:spPr>
+          <a:xfrm>
+            <a:off x="5759577" y="4169664"/>
+            <a:ext cx="685800" cy="475488"/>
           </a:xfrm>
           <a:prstGeom prst="rect">
             <a:avLst>
-              <a:gd name="adj" fmla="val 6818"/>
+              <a:gd name="adj" fmla="val 7692"/>
             </a:avLst>
           </a:prstGeom>
           <a:solidFill>
-            <a:srgbClr val="FCE7F3"/>
+            <a:srgbClr val="FFFFFF"/>
           </a:solidFill>
           <a:ln w="12700">
             <a:solidFill>
@@ -10775,41 +10730,14 @@
       </p:sp>
       <p:sp>
         <p:nvSpPr>
-          <p:cNvPr id="36" name="Shape 34"/>
-          <p:cNvSpPr/>
-          <p:nvPr/>
-        </p:nvSpPr>
-        <p:spPr>
-          <a:xfrm>
-            <a:off x="2124837" y="4169664"/>
-            <a:ext cx="685800" cy="384048"/>
-          </a:xfrm>
-          <a:prstGeom prst="rect">
-            <a:avLst>
-              <a:gd name="adj" fmla="val 9524"/>
-            </a:avLst>
-          </a:prstGeom>
-          <a:solidFill>
-            <a:srgbClr val="FFFFFF"/>
-          </a:solidFill>
-          <a:ln w="12700">
-            <a:solidFill>
-              <a:srgbClr val="DB2777"/>
-            </a:solidFill>
-            <a:prstDash val="solid"/>
-          </a:ln>
-        </p:spPr>
-      </p:sp>
-      <p:sp>
-        <p:nvSpPr>
-          <p:cNvPr id="37" name="Text 35"/>
-          <p:cNvSpPr/>
-          <p:nvPr/>
-        </p:nvSpPr>
-        <p:spPr>
-          <a:xfrm>
-            <a:off x="2124837" y="4169664"/>
-            <a:ext cx="685800" cy="384048"/>
+          <p:cNvPr id="42" name="Text 40"/>
+          <p:cNvSpPr/>
+          <p:nvPr/>
+        </p:nvSpPr>
+        <p:spPr>
+          <a:xfrm>
+            <a:off x="5759577" y="4169664"/>
+            <a:ext cx="685800" cy="475488"/>
           </a:xfrm>
           <a:prstGeom prst="rect">
             <a:avLst/>
@@ -10833,7 +10761,7 @@
                 <a:ea typeface="Trebuchet MS" pitchFamily="34" charset="-122"/>
                 <a:cs typeface="Trebuchet MS" pitchFamily="34" charset="-120"/>
               </a:rPr>
-              <a:t>f</a:t>
+              <a:t>e</a:t>
             </a:r>
             <a:endParaRPr lang="en-US" sz="900" dirty="0"/>
           </a:p>
@@ -10841,18 +10769,18 @@
       </p:sp>
       <p:sp>
         <p:nvSpPr>
-          <p:cNvPr id="38" name="Shape 36"/>
-          <p:cNvSpPr/>
-          <p:nvPr/>
-        </p:nvSpPr>
-        <p:spPr>
-          <a:xfrm>
-            <a:off x="3033522" y="4169664"/>
-            <a:ext cx="685800" cy="384048"/>
+          <p:cNvPr id="43" name="Shape 41"/>
+          <p:cNvSpPr/>
+          <p:nvPr/>
+        </p:nvSpPr>
+        <p:spPr>
+          <a:xfrm>
+            <a:off x="6668262" y="4169664"/>
+            <a:ext cx="685800" cy="475488"/>
           </a:xfrm>
           <a:prstGeom prst="rect">
             <a:avLst>
-              <a:gd name="adj" fmla="val 9524"/>
+              <a:gd name="adj" fmla="val 7692"/>
             </a:avLst>
           </a:prstGeom>
           <a:solidFill>
@@ -10868,14 +10796,14 @@
       </p:sp>
       <p:sp>
         <p:nvSpPr>
-          <p:cNvPr id="39" name="Text 37"/>
-          <p:cNvSpPr/>
-          <p:nvPr/>
-        </p:nvSpPr>
-        <p:spPr>
-          <a:xfrm>
-            <a:off x="3033522" y="4169664"/>
-            <a:ext cx="685800" cy="384048"/>
+          <p:cNvPr id="44" name="Text 42"/>
+          <p:cNvSpPr/>
+          <p:nvPr/>
+        </p:nvSpPr>
+        <p:spPr>
+          <a:xfrm>
+            <a:off x="6668262" y="4169664"/>
+            <a:ext cx="685800" cy="475488"/>
           </a:xfrm>
           <a:prstGeom prst="rect">
             <a:avLst/>
@@ -10899,7 +10827,7 @@
                 <a:ea typeface="Trebuchet MS" pitchFamily="34" charset="-122"/>
                 <a:cs typeface="Trebuchet MS" pitchFamily="34" charset="-120"/>
               </a:rPr>
-              <a:t>a</a:t>
+              <a:t>s</a:t>
             </a:r>
             <a:endParaRPr lang="en-US" sz="900" dirty="0"/>
           </a:p>
@@ -10907,18 +10835,18 @@
       </p:sp>
       <p:sp>
         <p:nvSpPr>
-          <p:cNvPr id="40" name="Shape 38"/>
-          <p:cNvSpPr/>
-          <p:nvPr/>
-        </p:nvSpPr>
-        <p:spPr>
-          <a:xfrm>
-            <a:off x="3942207" y="4169664"/>
-            <a:ext cx="685800" cy="384048"/>
+          <p:cNvPr id="45" name="Shape 43"/>
+          <p:cNvSpPr/>
+          <p:nvPr/>
+        </p:nvSpPr>
+        <p:spPr>
+          <a:xfrm>
+            <a:off x="7576947" y="4169664"/>
+            <a:ext cx="685800" cy="475488"/>
           </a:xfrm>
           <a:prstGeom prst="rect">
             <a:avLst>
-              <a:gd name="adj" fmla="val 9524"/>
+              <a:gd name="adj" fmla="val 7692"/>
             </a:avLst>
           </a:prstGeom>
           <a:solidFill>
@@ -10934,14 +10862,14 @@
       </p:sp>
       <p:sp>
         <p:nvSpPr>
-          <p:cNvPr id="41" name="Text 39"/>
-          <p:cNvSpPr/>
-          <p:nvPr/>
-        </p:nvSpPr>
-        <p:spPr>
-          <a:xfrm>
-            <a:off x="3942207" y="4169664"/>
-            <a:ext cx="685800" cy="384048"/>
+          <p:cNvPr id="46" name="Text 44"/>
+          <p:cNvSpPr/>
+          <p:nvPr/>
+        </p:nvSpPr>
+        <p:spPr>
+          <a:xfrm>
+            <a:off x="7576947" y="4169664"/>
+            <a:ext cx="685800" cy="475488"/>
           </a:xfrm>
           <a:prstGeom prst="rect">
             <a:avLst/>
@@ -10965,312 +10893,9 @@
                 <a:ea typeface="Trebuchet MS" pitchFamily="34" charset="-122"/>
                 <a:cs typeface="Trebuchet MS" pitchFamily="34" charset="-120"/>
               </a:rPr>
-              <a:t>s</a:t>
+              <a:t>t</a:t>
             </a:r>
             <a:endParaRPr lang="en-US" sz="900" dirty="0"/>
-          </a:p>
-        </p:txBody>
-      </p:sp>
-      <p:sp>
-        <p:nvSpPr>
-          <p:cNvPr id="42" name="Shape 40"/>
-          <p:cNvSpPr/>
-          <p:nvPr/>
-        </p:nvSpPr>
-        <p:spPr>
-          <a:xfrm>
-            <a:off x="4850892" y="4169664"/>
-            <a:ext cx="685800" cy="384048"/>
-          </a:xfrm>
-          <a:prstGeom prst="rect">
-            <a:avLst>
-              <a:gd name="adj" fmla="val 9524"/>
-            </a:avLst>
-          </a:prstGeom>
-          <a:solidFill>
-            <a:srgbClr val="FFFFFF"/>
-          </a:solidFill>
-          <a:ln w="12700">
-            <a:solidFill>
-              <a:srgbClr val="DB2777"/>
-            </a:solidFill>
-            <a:prstDash val="solid"/>
-          </a:ln>
-        </p:spPr>
-      </p:sp>
-      <p:sp>
-        <p:nvSpPr>
-          <p:cNvPr id="43" name="Text 41"/>
-          <p:cNvSpPr/>
-          <p:nvPr/>
-        </p:nvSpPr>
-        <p:spPr>
-          <a:xfrm>
-            <a:off x="4850892" y="4169664"/>
-            <a:ext cx="685800" cy="384048"/>
-          </a:xfrm>
-          <a:prstGeom prst="rect">
-            <a:avLst/>
-          </a:prstGeom>
-          <a:noFill/>
-          <a:ln/>
-        </p:spPr>
-        <p:txBody>
-          <a:bodyPr wrap="square" lIns="0" tIns="0" rIns="0" bIns="0" rtlCol="0" anchor="ctr"/>
-          <a:lstStyle/>
-          <a:p>
-            <a:pPr algn="ctr" indent="0" marL="0">
-              <a:buNone/>
-            </a:pPr>
-            <a:r>
-              <a:rPr lang="en-US" sz="900" b="1" dirty="0">
-                <a:solidFill>
-                  <a:srgbClr val="9D174D"/>
-                </a:solidFill>
-                <a:latin typeface="Trebuchet MS" pitchFamily="34" charset="0"/>
-                <a:ea typeface="Trebuchet MS" pitchFamily="34" charset="-122"/>
-                <a:cs typeface="Trebuchet MS" pitchFamily="34" charset="-120"/>
-              </a:rPr>
-              <a:t>t</a:t>
-            </a:r>
-            <a:endParaRPr lang="en-US" sz="900" dirty="0"/>
-          </a:p>
-        </p:txBody>
-      </p:sp>
-      <p:sp>
-        <p:nvSpPr>
-          <p:cNvPr id="44" name="Shape 42"/>
-          <p:cNvSpPr/>
-          <p:nvPr/>
-        </p:nvSpPr>
-        <p:spPr>
-          <a:xfrm>
-            <a:off x="5759577" y="4169664"/>
-            <a:ext cx="685800" cy="384048"/>
-          </a:xfrm>
-          <a:prstGeom prst="rect">
-            <a:avLst>
-              <a:gd name="adj" fmla="val 9524"/>
-            </a:avLst>
-          </a:prstGeom>
-          <a:solidFill>
-            <a:srgbClr val="FFFFFF"/>
-          </a:solidFill>
-          <a:ln w="12700">
-            <a:solidFill>
-              <a:srgbClr val="DB2777"/>
-            </a:solidFill>
-            <a:prstDash val="solid"/>
-          </a:ln>
-        </p:spPr>
-      </p:sp>
-      <p:sp>
-        <p:nvSpPr>
-          <p:cNvPr id="45" name="Text 43"/>
-          <p:cNvSpPr/>
-          <p:nvPr/>
-        </p:nvSpPr>
-        <p:spPr>
-          <a:xfrm>
-            <a:off x="5759577" y="4169664"/>
-            <a:ext cx="685800" cy="384048"/>
-          </a:xfrm>
-          <a:prstGeom prst="rect">
-            <a:avLst/>
-          </a:prstGeom>
-          <a:noFill/>
-          <a:ln/>
-        </p:spPr>
-        <p:txBody>
-          <a:bodyPr wrap="square" lIns="0" tIns="0" rIns="0" bIns="0" rtlCol="0" anchor="ctr"/>
-          <a:lstStyle/>
-          <a:p>
-            <a:pPr algn="ctr" indent="0" marL="0">
-              <a:buNone/>
-            </a:pPr>
-            <a:r>
-              <a:rPr lang="en-US" sz="900" b="1" dirty="0">
-                <a:solidFill>
-                  <a:srgbClr val="9D174D"/>
-                </a:solidFill>
-                <a:latin typeface="Trebuchet MS" pitchFamily="34" charset="0"/>
-                <a:ea typeface="Trebuchet MS" pitchFamily="34" charset="-122"/>
-                <a:cs typeface="Trebuchet MS" pitchFamily="34" charset="-120"/>
-              </a:rPr>
-              <a:t>e</a:t>
-            </a:r>
-            <a:endParaRPr lang="en-US" sz="900" dirty="0"/>
-          </a:p>
-        </p:txBody>
-      </p:sp>
-      <p:sp>
-        <p:nvSpPr>
-          <p:cNvPr id="46" name="Shape 44"/>
-          <p:cNvSpPr/>
-          <p:nvPr/>
-        </p:nvSpPr>
-        <p:spPr>
-          <a:xfrm>
-            <a:off x="6668262" y="4169664"/>
-            <a:ext cx="685800" cy="384048"/>
-          </a:xfrm>
-          <a:prstGeom prst="rect">
-            <a:avLst>
-              <a:gd name="adj" fmla="val 9524"/>
-            </a:avLst>
-          </a:prstGeom>
-          <a:solidFill>
-            <a:srgbClr val="FFFFFF"/>
-          </a:solidFill>
-          <a:ln w="12700">
-            <a:solidFill>
-              <a:srgbClr val="DB2777"/>
-            </a:solidFill>
-            <a:prstDash val="solid"/>
-          </a:ln>
-        </p:spPr>
-      </p:sp>
-      <p:sp>
-        <p:nvSpPr>
-          <p:cNvPr id="47" name="Text 45"/>
-          <p:cNvSpPr/>
-          <p:nvPr/>
-        </p:nvSpPr>
-        <p:spPr>
-          <a:xfrm>
-            <a:off x="6668262" y="4169664"/>
-            <a:ext cx="685800" cy="384048"/>
-          </a:xfrm>
-          <a:prstGeom prst="rect">
-            <a:avLst/>
-          </a:prstGeom>
-          <a:noFill/>
-          <a:ln/>
-        </p:spPr>
-        <p:txBody>
-          <a:bodyPr wrap="square" lIns="0" tIns="0" rIns="0" bIns="0" rtlCol="0" anchor="ctr"/>
-          <a:lstStyle/>
-          <a:p>
-            <a:pPr algn="ctr" indent="0" marL="0">
-              <a:buNone/>
-            </a:pPr>
-            <a:r>
-              <a:rPr lang="en-US" sz="900" b="1" dirty="0">
-                <a:solidFill>
-                  <a:srgbClr val="9D174D"/>
-                </a:solidFill>
-                <a:latin typeface="Trebuchet MS" pitchFamily="34" charset="0"/>
-                <a:ea typeface="Trebuchet MS" pitchFamily="34" charset="-122"/>
-                <a:cs typeface="Trebuchet MS" pitchFamily="34" charset="-120"/>
-              </a:rPr>
-              <a:t>n</a:t>
-            </a:r>
-            <a:endParaRPr lang="en-US" sz="900" dirty="0"/>
-          </a:p>
-        </p:txBody>
-      </p:sp>
-      <p:sp>
-        <p:nvSpPr>
-          <p:cNvPr id="48" name="Shape 46"/>
-          <p:cNvSpPr/>
-          <p:nvPr/>
-        </p:nvSpPr>
-        <p:spPr>
-          <a:xfrm>
-            <a:off x="7576947" y="4169664"/>
-            <a:ext cx="685800" cy="384048"/>
-          </a:xfrm>
-          <a:prstGeom prst="rect">
-            <a:avLst>
-              <a:gd name="adj" fmla="val 9524"/>
-            </a:avLst>
-          </a:prstGeom>
-          <a:solidFill>
-            <a:srgbClr val="FFFFFF"/>
-          </a:solidFill>
-          <a:ln w="12700">
-            <a:solidFill>
-              <a:srgbClr val="DB2777"/>
-            </a:solidFill>
-            <a:prstDash val="solid"/>
-          </a:ln>
-        </p:spPr>
-      </p:sp>
-      <p:sp>
-        <p:nvSpPr>
-          <p:cNvPr id="49" name="Text 47"/>
-          <p:cNvSpPr/>
-          <p:nvPr/>
-        </p:nvSpPr>
-        <p:spPr>
-          <a:xfrm>
-            <a:off x="7576947" y="4169664"/>
-            <a:ext cx="685800" cy="384048"/>
-          </a:xfrm>
-          <a:prstGeom prst="rect">
-            <a:avLst/>
-          </a:prstGeom>
-          <a:noFill/>
-          <a:ln/>
-        </p:spPr>
-        <p:txBody>
-          <a:bodyPr wrap="square" lIns="0" tIns="0" rIns="0" bIns="0" rtlCol="0" anchor="ctr"/>
-          <a:lstStyle/>
-          <a:p>
-            <a:pPr algn="ctr" indent="0" marL="0">
-              <a:buNone/>
-            </a:pPr>
-            <a:r>
-              <a:rPr lang="en-US" sz="900" b="1" dirty="0">
-                <a:solidFill>
-                  <a:srgbClr val="9D174D"/>
-                </a:solidFill>
-                <a:latin typeface="Trebuchet MS" pitchFamily="34" charset="0"/>
-                <a:ea typeface="Trebuchet MS" pitchFamily="34" charset="-122"/>
-                <a:cs typeface="Trebuchet MS" pitchFamily="34" charset="-120"/>
-              </a:rPr>
-              <a:t>ed</a:t>
-            </a:r>
-            <a:endParaRPr lang="en-US" sz="900" dirty="0"/>
-          </a:p>
-        </p:txBody>
-      </p:sp>
-      <p:sp>
-        <p:nvSpPr>
-          <p:cNvPr id="50" name="Text 48"/>
-          <p:cNvSpPr/>
-          <p:nvPr/>
-        </p:nvSpPr>
-        <p:spPr>
-          <a:xfrm>
-            <a:off x="7576947" y="4572000"/>
-            <a:ext cx="685800" cy="219456"/>
-          </a:xfrm>
-          <a:prstGeom prst="rect">
-            <a:avLst/>
-          </a:prstGeom>
-          <a:noFill/>
-          <a:ln/>
-        </p:spPr>
-        <p:txBody>
-          <a:bodyPr wrap="square" lIns="0" tIns="0" rIns="0" bIns="0" rtlCol="0" anchor="t"/>
-          <a:lstStyle/>
-          <a:p>
-            <a:pPr algn="ctr" indent="0" marL="0">
-              <a:buNone/>
-            </a:pPr>
-            <a:r>
-              <a:rPr lang="en-US" sz="750" i="1" dirty="0">
-                <a:solidFill>
-                  <a:srgbClr val="94A3B8"/>
-                </a:solidFill>
-                <a:latin typeface="Calibri" pitchFamily="34" charset="0"/>
-                <a:ea typeface="Calibri" pitchFamily="34" charset="-122"/>
-                <a:cs typeface="Calibri" pitchFamily="34" charset="-120"/>
-              </a:rPr>
-              <a:t>/d/</a:t>
-            </a:r>
-            <a:endParaRPr lang="en-US" sz="750" dirty="0"/>
           </a:p>
         </p:txBody>
       </p:sp>
@@ -11699,7 +11324,7 @@
                 <a:ea typeface="Trebuchet MS" pitchFamily="34" charset="-122"/>
                 <a:cs typeface="Trebuchet MS" pitchFamily="34" charset="-120"/>
               </a:rPr>
-              <a:t>breakfast</a:t>
+              <a:t>fasten</a:t>
             </a:r>
             <a:endParaRPr lang="en-US" sz="2800" dirty="0"/>
           </a:p>
@@ -12526,7 +12151,7 @@
                 <a:ea typeface="Trebuchet MS" pitchFamily="34" charset="-122"/>
                 <a:cs typeface="Trebuchet MS" pitchFamily="34" charset="-120"/>
               </a:rPr>
-              <a:t>breakfast</a:t>
+              <a:t>fasten</a:t>
             </a:r>
             <a:endParaRPr lang="en-US" sz="2800" dirty="0"/>
           </a:p>
@@ -12615,11 +12240,11 @@
             </a:avLst>
           </a:prstGeom>
           <a:solidFill>
-            <a:srgbClr val="DDD6FE"/>
+            <a:srgbClr val="CCFBF1"/>
           </a:solidFill>
           <a:ln w="19050">
             <a:solidFill>
-              <a:srgbClr val="7C3AED"/>
+              <a:srgbClr val="0D9488"/>
             </a:solidFill>
             <a:prstDash val="solid"/>
           </a:ln>
@@ -12659,13 +12284,13 @@
             <a:r>
               <a:rPr lang="en-US" sz="1300" b="1" dirty="0">
                 <a:solidFill>
-                  <a:srgbClr val="4C1D95"/>
+                  <a:srgbClr val="0F766E"/>
                 </a:solidFill>
                 <a:latin typeface="Trebuchet MS" pitchFamily="34" charset="0"/>
                 <a:ea typeface="Trebuchet MS" pitchFamily="34" charset="-122"/>
                 <a:cs typeface="Trebuchet MS" pitchFamily="34" charset="-120"/>
               </a:rPr>
-              <a:t>break</a:t>
+              <a:t>fast</a:t>
             </a:r>
             <a:endParaRPr lang="en-US" sz="1300" dirty="0"/>
           </a:p>
@@ -12704,7 +12329,7 @@
                 <a:ea typeface="Calibri" pitchFamily="34" charset="-122"/>
                 <a:cs typeface="Calibri" pitchFamily="34" charset="-120"/>
               </a:rPr>
-              <a:t>to end or stop</a:t>
+              <a:t>firm, fixed in place</a:t>
             </a:r>
             <a:endParaRPr lang="en-US" sz="850" dirty="0"/>
           </a:p>
@@ -12727,11 +12352,11 @@
             </a:avLst>
           </a:prstGeom>
           <a:solidFill>
-            <a:srgbClr val="CCFBF1"/>
+            <a:srgbClr val="FCE7F3"/>
           </a:solidFill>
           <a:ln w="19050">
             <a:solidFill>
-              <a:srgbClr val="0D9488"/>
+              <a:srgbClr val="DB2777"/>
             </a:solidFill>
             <a:prstDash val="solid"/>
           </a:ln>
@@ -12771,13 +12396,13 @@
             <a:r>
               <a:rPr lang="en-US" sz="1300" b="1" dirty="0">
                 <a:solidFill>
-                  <a:srgbClr val="0F766E"/>
+                  <a:srgbClr val="9D174D"/>
                 </a:solidFill>
                 <a:latin typeface="Trebuchet MS" pitchFamily="34" charset="0"/>
                 <a:ea typeface="Trebuchet MS" pitchFamily="34" charset="-122"/>
                 <a:cs typeface="Trebuchet MS" pitchFamily="34" charset="-120"/>
               </a:rPr>
-              <a:t>fast</a:t>
+              <a:t>-en</a:t>
             </a:r>
             <a:endParaRPr lang="en-US" sz="1300" dirty="0"/>
           </a:p>
@@ -12816,7 +12441,7 @@
                 <a:ea typeface="Calibri" pitchFamily="34" charset="-122"/>
                 <a:cs typeface="Calibri" pitchFamily="34" charset="-120"/>
               </a:rPr>
-              <a:t>going without food</a:t>
+              <a:t>to make or become</a:t>
             </a:r>
             <a:endParaRPr lang="en-US" sz="850" dirty="0"/>
           </a:p>
@@ -13511,7 +13136,7 @@
                 <a:ea typeface="Trebuchet MS" pitchFamily="34" charset="-122"/>
                 <a:cs typeface="Trebuchet MS" pitchFamily="34" charset="-120"/>
               </a:rPr>
-              <a:t>breakfast</a:t>
+              <a:t>fasten</a:t>
             </a:r>
             <a:endParaRPr lang="en-US" sz="2800" dirty="0"/>
           </a:p>
@@ -13600,11 +13225,11 @@
             </a:avLst>
           </a:prstGeom>
           <a:solidFill>
-            <a:srgbClr val="DDD6FE"/>
+            <a:srgbClr val="CCFBF1"/>
           </a:solidFill>
           <a:ln w="19050">
             <a:solidFill>
-              <a:srgbClr val="7C3AED"/>
+              <a:srgbClr val="0D9488"/>
             </a:solidFill>
             <a:prstDash val="solid"/>
           </a:ln>
@@ -13644,13 +13269,13 @@
             <a:r>
               <a:rPr lang="en-US" sz="1300" b="1" dirty="0">
                 <a:solidFill>
-                  <a:srgbClr val="4C1D95"/>
+                  <a:srgbClr val="0F766E"/>
                 </a:solidFill>
                 <a:latin typeface="Trebuchet MS" pitchFamily="34" charset="0"/>
                 <a:ea typeface="Trebuchet MS" pitchFamily="34" charset="-122"/>
                 <a:cs typeface="Trebuchet MS" pitchFamily="34" charset="-120"/>
               </a:rPr>
-              <a:t>break</a:t>
+              <a:t>fast</a:t>
             </a:r>
             <a:endParaRPr lang="en-US" sz="1300" dirty="0"/>
           </a:p>
@@ -13689,7 +13314,7 @@
                 <a:ea typeface="Calibri" pitchFamily="34" charset="-122"/>
                 <a:cs typeface="Calibri" pitchFamily="34" charset="-120"/>
               </a:rPr>
-              <a:t>to end or stop</a:t>
+              <a:t>firm, fixed in place</a:t>
             </a:r>
             <a:endParaRPr lang="en-US" sz="850" dirty="0"/>
           </a:p>
@@ -13712,11 +13337,11 @@
             </a:avLst>
           </a:prstGeom>
           <a:solidFill>
-            <a:srgbClr val="CCFBF1"/>
+            <a:srgbClr val="FCE7F3"/>
           </a:solidFill>
           <a:ln w="19050">
             <a:solidFill>
-              <a:srgbClr val="0D9488"/>
+              <a:srgbClr val="DB2777"/>
             </a:solidFill>
             <a:prstDash val="solid"/>
           </a:ln>
@@ -13756,13 +13381,13 @@
             <a:r>
               <a:rPr lang="en-US" sz="1300" b="1" dirty="0">
                 <a:solidFill>
-                  <a:srgbClr val="0F766E"/>
+                  <a:srgbClr val="9D174D"/>
                 </a:solidFill>
                 <a:latin typeface="Trebuchet MS" pitchFamily="34" charset="0"/>
                 <a:ea typeface="Trebuchet MS" pitchFamily="34" charset="-122"/>
                 <a:cs typeface="Trebuchet MS" pitchFamily="34" charset="-120"/>
               </a:rPr>
-              <a:t>fast</a:t>
+              <a:t>-en</a:t>
             </a:r>
             <a:endParaRPr lang="en-US" sz="1300" dirty="0"/>
           </a:p>
@@ -13801,7 +13426,7 @@
                 <a:ea typeface="Calibri" pitchFamily="34" charset="-122"/>
                 <a:cs typeface="Calibri" pitchFamily="34" charset="-120"/>
               </a:rPr>
-              <a:t>going without food</a:t>
+              <a:t>to make or become</a:t>
             </a:r>
             <a:endParaRPr lang="en-US" sz="850" dirty="0"/>
           </a:p>
@@ -13960,7 +13585,7 @@
                 <a:ea typeface="Trebuchet MS" pitchFamily="34" charset="-122"/>
                 <a:cs typeface="Trebuchet MS" pitchFamily="34" charset="-120"/>
               </a:rPr>
-              <a:t>break</a:t>
+              <a:t>fas</a:t>
             </a:r>
             <a:endParaRPr lang="en-US" sz="1400" dirty="0"/>
           </a:p>
@@ -14065,7 +13690,7 @@
                 <a:ea typeface="Trebuchet MS" pitchFamily="34" charset="-122"/>
                 <a:cs typeface="Trebuchet MS" pitchFamily="34" charset="-120"/>
               </a:rPr>
-              <a:t>fast</a:t>
+              <a:t>ten</a:t>
             </a:r>
             <a:endParaRPr lang="en-US" sz="1400" dirty="0"/>
           </a:p>
@@ -14893,7 +14518,7 @@
                 <a:ea typeface="Trebuchet MS" pitchFamily="34" charset="-122"/>
                 <a:cs typeface="Trebuchet MS" pitchFamily="34" charset="-120"/>
               </a:rPr>
-              <a:t>breakfast</a:t>
+              <a:t>fasten</a:t>
             </a:r>
             <a:endParaRPr lang="en-US" sz="2800" dirty="0"/>
           </a:p>
@@ -14982,11 +14607,11 @@
             </a:avLst>
           </a:prstGeom>
           <a:solidFill>
-            <a:srgbClr val="DDD6FE"/>
+            <a:srgbClr val="CCFBF1"/>
           </a:solidFill>
           <a:ln w="19050">
             <a:solidFill>
-              <a:srgbClr val="7C3AED"/>
+              <a:srgbClr val="0D9488"/>
             </a:solidFill>
             <a:prstDash val="solid"/>
           </a:ln>
@@ -15026,13 +14651,13 @@
             <a:r>
               <a:rPr lang="en-US" sz="1300" b="1" dirty="0">
                 <a:solidFill>
-                  <a:srgbClr val="4C1D95"/>
+                  <a:srgbClr val="0F766E"/>
                 </a:solidFill>
                 <a:latin typeface="Trebuchet MS" pitchFamily="34" charset="0"/>
                 <a:ea typeface="Trebuchet MS" pitchFamily="34" charset="-122"/>
                 <a:cs typeface="Trebuchet MS" pitchFamily="34" charset="-120"/>
               </a:rPr>
-              <a:t>break</a:t>
+              <a:t>fast</a:t>
             </a:r>
             <a:endParaRPr lang="en-US" sz="1300" dirty="0"/>
           </a:p>
@@ -15071,7 +14696,7 @@
                 <a:ea typeface="Calibri" pitchFamily="34" charset="-122"/>
                 <a:cs typeface="Calibri" pitchFamily="34" charset="-120"/>
               </a:rPr>
-              <a:t>to end or stop</a:t>
+              <a:t>firm, fixed in place</a:t>
             </a:r>
             <a:endParaRPr lang="en-US" sz="850" dirty="0"/>
           </a:p>
@@ -15094,11 +14719,11 @@
             </a:avLst>
           </a:prstGeom>
           <a:solidFill>
-            <a:srgbClr val="CCFBF1"/>
+            <a:srgbClr val="FCE7F3"/>
           </a:solidFill>
           <a:ln w="19050">
             <a:solidFill>
-              <a:srgbClr val="0D9488"/>
+              <a:srgbClr val="DB2777"/>
             </a:solidFill>
             <a:prstDash val="solid"/>
           </a:ln>
@@ -15138,13 +14763,13 @@
             <a:r>
               <a:rPr lang="en-US" sz="1300" b="1" dirty="0">
                 <a:solidFill>
-                  <a:srgbClr val="0F766E"/>
+                  <a:srgbClr val="9D174D"/>
                 </a:solidFill>
                 <a:latin typeface="Trebuchet MS" pitchFamily="34" charset="0"/>
                 <a:ea typeface="Trebuchet MS" pitchFamily="34" charset="-122"/>
                 <a:cs typeface="Trebuchet MS" pitchFamily="34" charset="-120"/>
               </a:rPr>
-              <a:t>fast</a:t>
+              <a:t>-en</a:t>
             </a:r>
             <a:endParaRPr lang="en-US" sz="1300" dirty="0"/>
           </a:p>
@@ -15183,7 +14808,7 @@
                 <a:ea typeface="Calibri" pitchFamily="34" charset="-122"/>
                 <a:cs typeface="Calibri" pitchFamily="34" charset="-120"/>
               </a:rPr>
-              <a:t>going without food</a:t>
+              <a:t>to make or become</a:t>
             </a:r>
             <a:endParaRPr lang="en-US" sz="850" dirty="0"/>
           </a:p>
@@ -15342,7 +14967,7 @@
                 <a:ea typeface="Trebuchet MS" pitchFamily="34" charset="-122"/>
                 <a:cs typeface="Trebuchet MS" pitchFamily="34" charset="-120"/>
               </a:rPr>
-              <a:t>break</a:t>
+              <a:t>fas</a:t>
             </a:r>
             <a:endParaRPr lang="en-US" sz="1400" dirty="0"/>
           </a:p>
@@ -15447,7 +15072,7 @@
                 <a:ea typeface="Trebuchet MS" pitchFamily="34" charset="-122"/>
                 <a:cs typeface="Trebuchet MS" pitchFamily="34" charset="-120"/>
               </a:rPr>
-              <a:t>fast</a:t>
+              <a:t>ten</a:t>
             </a:r>
             <a:endParaRPr lang="en-US" sz="1400" dirty="0"/>
           </a:p>
@@ -15554,7 +15179,7 @@
         </p:nvSpPr>
         <p:spPr>
           <a:xfrm>
-            <a:off x="2023872" y="4169664"/>
+            <a:off x="2254649" y="4169664"/>
             <a:ext cx="685800" cy="384048"/>
           </a:xfrm>
           <a:prstGeom prst="rect">
@@ -15581,7 +15206,7 @@
         </p:nvSpPr>
         <p:spPr>
           <a:xfrm>
-            <a:off x="2023872" y="4169664"/>
+            <a:off x="2254649" y="4169664"/>
             <a:ext cx="685800" cy="384048"/>
           </a:xfrm>
           <a:prstGeom prst="rect">
@@ -15606,7 +15231,7 @@
                 <a:ea typeface="Trebuchet MS" pitchFamily="34" charset="-122"/>
                 <a:cs typeface="Trebuchet MS" pitchFamily="34" charset="-120"/>
               </a:rPr>
-              <a:t>b</a:t>
+              <a:t>f</a:t>
             </a:r>
             <a:endParaRPr lang="en-US" sz="900" dirty="0"/>
           </a:p>
@@ -15620,7 +15245,7 @@
         </p:nvSpPr>
         <p:spPr>
           <a:xfrm>
-            <a:off x="2831592" y="4169664"/>
+            <a:off x="3293146" y="4169664"/>
             <a:ext cx="685800" cy="384048"/>
           </a:xfrm>
           <a:prstGeom prst="rect">
@@ -15647,7 +15272,7 @@
         </p:nvSpPr>
         <p:spPr>
           <a:xfrm>
-            <a:off x="2831592" y="4169664"/>
+            <a:off x="3293146" y="4169664"/>
             <a:ext cx="685800" cy="384048"/>
           </a:xfrm>
           <a:prstGeom prst="rect">
@@ -15672,7 +15297,7 @@
                 <a:ea typeface="Trebuchet MS" pitchFamily="34" charset="-122"/>
                 <a:cs typeface="Trebuchet MS" pitchFamily="34" charset="-120"/>
               </a:rPr>
-              <a:t>r</a:t>
+              <a:t>a</a:t>
             </a:r>
             <a:endParaRPr lang="en-US" sz="900" dirty="0"/>
           </a:p>
@@ -15686,7 +15311,7 @@
         </p:nvSpPr>
         <p:spPr>
           <a:xfrm>
-            <a:off x="3639312" y="4169664"/>
+            <a:off x="4331643" y="4169664"/>
             <a:ext cx="685800" cy="384048"/>
           </a:xfrm>
           <a:prstGeom prst="rect">
@@ -15713,7 +15338,7 @@
         </p:nvSpPr>
         <p:spPr>
           <a:xfrm>
-            <a:off x="3639312" y="4169664"/>
+            <a:off x="4331643" y="4169664"/>
             <a:ext cx="685800" cy="384048"/>
           </a:xfrm>
           <a:prstGeom prst="rect">
@@ -15738,7 +15363,7 @@
                 <a:ea typeface="Trebuchet MS" pitchFamily="34" charset="-122"/>
                 <a:cs typeface="Trebuchet MS" pitchFamily="34" charset="-120"/>
               </a:rPr>
-              <a:t>ea</a:t>
+              <a:t>s</a:t>
             </a:r>
             <a:endParaRPr lang="en-US" sz="900" dirty="0"/>
           </a:p>
@@ -15746,13 +15371,211 @@
       </p:sp>
       <p:sp>
         <p:nvSpPr>
-          <p:cNvPr id="39" name="Text 37"/>
-          <p:cNvSpPr/>
-          <p:nvPr/>
-        </p:nvSpPr>
-        <p:spPr>
-          <a:xfrm>
-            <a:off x="3639312" y="4572000"/>
+          <p:cNvPr id="39" name="Shape 37"/>
+          <p:cNvSpPr/>
+          <p:nvPr/>
+        </p:nvSpPr>
+        <p:spPr>
+          <a:xfrm>
+            <a:off x="5370141" y="4169664"/>
+            <a:ext cx="685800" cy="384048"/>
+          </a:xfrm>
+          <a:prstGeom prst="rect">
+            <a:avLst>
+              <a:gd name="adj" fmla="val 9524"/>
+            </a:avLst>
+          </a:prstGeom>
+          <a:solidFill>
+            <a:srgbClr val="FFFFFF"/>
+          </a:solidFill>
+          <a:ln w="12700">
+            <a:solidFill>
+              <a:srgbClr val="DB2777"/>
+            </a:solidFill>
+            <a:prstDash val="solid"/>
+          </a:ln>
+        </p:spPr>
+      </p:sp>
+      <p:sp>
+        <p:nvSpPr>
+          <p:cNvPr id="40" name="Text 38"/>
+          <p:cNvSpPr/>
+          <p:nvPr/>
+        </p:nvSpPr>
+        <p:spPr>
+          <a:xfrm>
+            <a:off x="5370141" y="4169664"/>
+            <a:ext cx="685800" cy="384048"/>
+          </a:xfrm>
+          <a:prstGeom prst="rect">
+            <a:avLst/>
+          </a:prstGeom>
+          <a:noFill/>
+          <a:ln/>
+        </p:spPr>
+        <p:txBody>
+          <a:bodyPr wrap="square" lIns="0" tIns="0" rIns="0" bIns="0" rtlCol="0" anchor="ctr"/>
+          <a:lstStyle/>
+          <a:p>
+            <a:pPr algn="ctr" indent="0" marL="0">
+              <a:buNone/>
+            </a:pPr>
+            <a:r>
+              <a:rPr lang="en-US" sz="900" b="1" dirty="0">
+                <a:solidFill>
+                  <a:srgbClr val="9D174D"/>
+                </a:solidFill>
+                <a:latin typeface="Trebuchet MS" pitchFamily="34" charset="0"/>
+                <a:ea typeface="Trebuchet MS" pitchFamily="34" charset="-122"/>
+                <a:cs typeface="Trebuchet MS" pitchFamily="34" charset="-120"/>
+              </a:rPr>
+              <a:t>t</a:t>
+            </a:r>
+            <a:endParaRPr lang="en-US" sz="900" dirty="0"/>
+          </a:p>
+        </p:txBody>
+      </p:sp>
+      <p:sp>
+        <p:nvSpPr>
+          <p:cNvPr id="41" name="Shape 39"/>
+          <p:cNvSpPr/>
+          <p:nvPr/>
+        </p:nvSpPr>
+        <p:spPr>
+          <a:xfrm>
+            <a:off x="6408638" y="4169664"/>
+            <a:ext cx="685800" cy="384048"/>
+          </a:xfrm>
+          <a:prstGeom prst="rect">
+            <a:avLst>
+              <a:gd name="adj" fmla="val 9524"/>
+            </a:avLst>
+          </a:prstGeom>
+          <a:solidFill>
+            <a:srgbClr val="FFFFFF"/>
+          </a:solidFill>
+          <a:ln w="12700">
+            <a:solidFill>
+              <a:srgbClr val="DB2777"/>
+            </a:solidFill>
+            <a:prstDash val="solid"/>
+          </a:ln>
+        </p:spPr>
+      </p:sp>
+      <p:sp>
+        <p:nvSpPr>
+          <p:cNvPr id="42" name="Text 40"/>
+          <p:cNvSpPr/>
+          <p:nvPr/>
+        </p:nvSpPr>
+        <p:spPr>
+          <a:xfrm>
+            <a:off x="6408638" y="4169664"/>
+            <a:ext cx="685800" cy="384048"/>
+          </a:xfrm>
+          <a:prstGeom prst="rect">
+            <a:avLst/>
+          </a:prstGeom>
+          <a:noFill/>
+          <a:ln/>
+        </p:spPr>
+        <p:txBody>
+          <a:bodyPr wrap="square" lIns="0" tIns="0" rIns="0" bIns="0" rtlCol="0" anchor="ctr"/>
+          <a:lstStyle/>
+          <a:p>
+            <a:pPr algn="ctr" indent="0" marL="0">
+              <a:buNone/>
+            </a:pPr>
+            <a:r>
+              <a:rPr lang="en-US" sz="900" b="1" dirty="0">
+                <a:solidFill>
+                  <a:srgbClr val="9D174D"/>
+                </a:solidFill>
+                <a:latin typeface="Trebuchet MS" pitchFamily="34" charset="0"/>
+                <a:ea typeface="Trebuchet MS" pitchFamily="34" charset="-122"/>
+                <a:cs typeface="Trebuchet MS" pitchFamily="34" charset="-120"/>
+              </a:rPr>
+              <a:t>e</a:t>
+            </a:r>
+            <a:endParaRPr lang="en-US" sz="900" dirty="0"/>
+          </a:p>
+        </p:txBody>
+      </p:sp>
+      <p:sp>
+        <p:nvSpPr>
+          <p:cNvPr id="43" name="Shape 41"/>
+          <p:cNvSpPr/>
+          <p:nvPr/>
+        </p:nvSpPr>
+        <p:spPr>
+          <a:xfrm>
+            <a:off x="7447135" y="4169664"/>
+            <a:ext cx="685800" cy="384048"/>
+          </a:xfrm>
+          <a:prstGeom prst="rect">
+            <a:avLst>
+              <a:gd name="adj" fmla="val 9524"/>
+            </a:avLst>
+          </a:prstGeom>
+          <a:solidFill>
+            <a:srgbClr val="FFFFFF"/>
+          </a:solidFill>
+          <a:ln w="12700">
+            <a:solidFill>
+              <a:srgbClr val="DB2777"/>
+            </a:solidFill>
+            <a:prstDash val="solid"/>
+          </a:ln>
+        </p:spPr>
+      </p:sp>
+      <p:sp>
+        <p:nvSpPr>
+          <p:cNvPr id="44" name="Text 42"/>
+          <p:cNvSpPr/>
+          <p:nvPr/>
+        </p:nvSpPr>
+        <p:spPr>
+          <a:xfrm>
+            <a:off x="7447135" y="4169664"/>
+            <a:ext cx="685800" cy="384048"/>
+          </a:xfrm>
+          <a:prstGeom prst="rect">
+            <a:avLst/>
+          </a:prstGeom>
+          <a:noFill/>
+          <a:ln/>
+        </p:spPr>
+        <p:txBody>
+          <a:bodyPr wrap="square" lIns="0" tIns="0" rIns="0" bIns="0" rtlCol="0" anchor="ctr"/>
+          <a:lstStyle/>
+          <a:p>
+            <a:pPr algn="ctr" indent="0" marL="0">
+              <a:buNone/>
+            </a:pPr>
+            <a:r>
+              <a:rPr lang="en-US" sz="900" b="1" dirty="0">
+                <a:solidFill>
+                  <a:srgbClr val="9D174D"/>
+                </a:solidFill>
+                <a:latin typeface="Trebuchet MS" pitchFamily="34" charset="0"/>
+                <a:ea typeface="Trebuchet MS" pitchFamily="34" charset="-122"/>
+                <a:cs typeface="Trebuchet MS" pitchFamily="34" charset="-120"/>
+              </a:rPr>
+              <a:t>n</a:t>
+            </a:r>
+            <a:endParaRPr lang="en-US" sz="900" dirty="0"/>
+          </a:p>
+        </p:txBody>
+      </p:sp>
+      <p:sp>
+        <p:nvSpPr>
+          <p:cNvPr id="45" name="Text 43"/>
+          <p:cNvSpPr/>
+          <p:nvPr/>
+        </p:nvSpPr>
+        <p:spPr>
+          <a:xfrm>
+            <a:off x="7447135" y="4572000"/>
             <a:ext cx="685800" cy="219456"/>
           </a:xfrm>
           <a:prstGeom prst="rect">
@@ -15777,339 +15600,9 @@
                 <a:ea typeface="Calibri" pitchFamily="34" charset="-122"/>
                 <a:cs typeface="Calibri" pitchFamily="34" charset="-120"/>
               </a:rPr>
-              <a:t>/e/</a:t>
+              <a:t>silent</a:t>
             </a:r>
             <a:endParaRPr lang="en-US" sz="750" dirty="0"/>
-          </a:p>
-        </p:txBody>
-      </p:sp>
-      <p:sp>
-        <p:nvSpPr>
-          <p:cNvPr id="40" name="Shape 38"/>
-          <p:cNvSpPr/>
-          <p:nvPr/>
-        </p:nvSpPr>
-        <p:spPr>
-          <a:xfrm>
-            <a:off x="4447032" y="4169664"/>
-            <a:ext cx="685800" cy="384048"/>
-          </a:xfrm>
-          <a:prstGeom prst="rect">
-            <a:avLst>
-              <a:gd name="adj" fmla="val 9524"/>
-            </a:avLst>
-          </a:prstGeom>
-          <a:solidFill>
-            <a:srgbClr val="FFFFFF"/>
-          </a:solidFill>
-          <a:ln w="12700">
-            <a:solidFill>
-              <a:srgbClr val="DB2777"/>
-            </a:solidFill>
-            <a:prstDash val="solid"/>
-          </a:ln>
-        </p:spPr>
-      </p:sp>
-      <p:sp>
-        <p:nvSpPr>
-          <p:cNvPr id="41" name="Text 39"/>
-          <p:cNvSpPr/>
-          <p:nvPr/>
-        </p:nvSpPr>
-        <p:spPr>
-          <a:xfrm>
-            <a:off x="4447032" y="4169664"/>
-            <a:ext cx="685800" cy="384048"/>
-          </a:xfrm>
-          <a:prstGeom prst="rect">
-            <a:avLst/>
-          </a:prstGeom>
-          <a:noFill/>
-          <a:ln/>
-        </p:spPr>
-        <p:txBody>
-          <a:bodyPr wrap="square" lIns="0" tIns="0" rIns="0" bIns="0" rtlCol="0" anchor="ctr"/>
-          <a:lstStyle/>
-          <a:p>
-            <a:pPr algn="ctr" indent="0" marL="0">
-              <a:buNone/>
-            </a:pPr>
-            <a:r>
-              <a:rPr lang="en-US" sz="900" b="1" dirty="0">
-                <a:solidFill>
-                  <a:srgbClr val="9D174D"/>
-                </a:solidFill>
-                <a:latin typeface="Trebuchet MS" pitchFamily="34" charset="0"/>
-                <a:ea typeface="Trebuchet MS" pitchFamily="34" charset="-122"/>
-                <a:cs typeface="Trebuchet MS" pitchFamily="34" charset="-120"/>
-              </a:rPr>
-              <a:t>k</a:t>
-            </a:r>
-            <a:endParaRPr lang="en-US" sz="900" dirty="0"/>
-          </a:p>
-        </p:txBody>
-      </p:sp>
-      <p:sp>
-        <p:nvSpPr>
-          <p:cNvPr id="42" name="Shape 40"/>
-          <p:cNvSpPr/>
-          <p:nvPr/>
-        </p:nvSpPr>
-        <p:spPr>
-          <a:xfrm>
-            <a:off x="5254752" y="4169664"/>
-            <a:ext cx="685800" cy="384048"/>
-          </a:xfrm>
-          <a:prstGeom prst="rect">
-            <a:avLst>
-              <a:gd name="adj" fmla="val 9524"/>
-            </a:avLst>
-          </a:prstGeom>
-          <a:solidFill>
-            <a:srgbClr val="FFFFFF"/>
-          </a:solidFill>
-          <a:ln w="12700">
-            <a:solidFill>
-              <a:srgbClr val="DB2777"/>
-            </a:solidFill>
-            <a:prstDash val="solid"/>
-          </a:ln>
-        </p:spPr>
-      </p:sp>
-      <p:sp>
-        <p:nvSpPr>
-          <p:cNvPr id="43" name="Text 41"/>
-          <p:cNvSpPr/>
-          <p:nvPr/>
-        </p:nvSpPr>
-        <p:spPr>
-          <a:xfrm>
-            <a:off x="5254752" y="4169664"/>
-            <a:ext cx="685800" cy="384048"/>
-          </a:xfrm>
-          <a:prstGeom prst="rect">
-            <a:avLst/>
-          </a:prstGeom>
-          <a:noFill/>
-          <a:ln/>
-        </p:spPr>
-        <p:txBody>
-          <a:bodyPr wrap="square" lIns="0" tIns="0" rIns="0" bIns="0" rtlCol="0" anchor="ctr"/>
-          <a:lstStyle/>
-          <a:p>
-            <a:pPr algn="ctr" indent="0" marL="0">
-              <a:buNone/>
-            </a:pPr>
-            <a:r>
-              <a:rPr lang="en-US" sz="900" b="1" dirty="0">
-                <a:solidFill>
-                  <a:srgbClr val="9D174D"/>
-                </a:solidFill>
-                <a:latin typeface="Trebuchet MS" pitchFamily="34" charset="0"/>
-                <a:ea typeface="Trebuchet MS" pitchFamily="34" charset="-122"/>
-                <a:cs typeface="Trebuchet MS" pitchFamily="34" charset="-120"/>
-              </a:rPr>
-              <a:t>f</a:t>
-            </a:r>
-            <a:endParaRPr lang="en-US" sz="900" dirty="0"/>
-          </a:p>
-        </p:txBody>
-      </p:sp>
-      <p:sp>
-        <p:nvSpPr>
-          <p:cNvPr id="44" name="Shape 42"/>
-          <p:cNvSpPr/>
-          <p:nvPr/>
-        </p:nvSpPr>
-        <p:spPr>
-          <a:xfrm>
-            <a:off x="6062472" y="4169664"/>
-            <a:ext cx="685800" cy="384048"/>
-          </a:xfrm>
-          <a:prstGeom prst="rect">
-            <a:avLst>
-              <a:gd name="adj" fmla="val 9524"/>
-            </a:avLst>
-          </a:prstGeom>
-          <a:solidFill>
-            <a:srgbClr val="FFFFFF"/>
-          </a:solidFill>
-          <a:ln w="12700">
-            <a:solidFill>
-              <a:srgbClr val="DB2777"/>
-            </a:solidFill>
-            <a:prstDash val="solid"/>
-          </a:ln>
-        </p:spPr>
-      </p:sp>
-      <p:sp>
-        <p:nvSpPr>
-          <p:cNvPr id="45" name="Text 43"/>
-          <p:cNvSpPr/>
-          <p:nvPr/>
-        </p:nvSpPr>
-        <p:spPr>
-          <a:xfrm>
-            <a:off x="6062472" y="4169664"/>
-            <a:ext cx="685800" cy="384048"/>
-          </a:xfrm>
-          <a:prstGeom prst="rect">
-            <a:avLst/>
-          </a:prstGeom>
-          <a:noFill/>
-          <a:ln/>
-        </p:spPr>
-        <p:txBody>
-          <a:bodyPr wrap="square" lIns="0" tIns="0" rIns="0" bIns="0" rtlCol="0" anchor="ctr"/>
-          <a:lstStyle/>
-          <a:p>
-            <a:pPr algn="ctr" indent="0" marL="0">
-              <a:buNone/>
-            </a:pPr>
-            <a:r>
-              <a:rPr lang="en-US" sz="900" b="1" dirty="0">
-                <a:solidFill>
-                  <a:srgbClr val="9D174D"/>
-                </a:solidFill>
-                <a:latin typeface="Trebuchet MS" pitchFamily="34" charset="0"/>
-                <a:ea typeface="Trebuchet MS" pitchFamily="34" charset="-122"/>
-                <a:cs typeface="Trebuchet MS" pitchFamily="34" charset="-120"/>
-              </a:rPr>
-              <a:t>a</a:t>
-            </a:r>
-            <a:endParaRPr lang="en-US" sz="900" dirty="0"/>
-          </a:p>
-        </p:txBody>
-      </p:sp>
-      <p:sp>
-        <p:nvSpPr>
-          <p:cNvPr id="46" name="Shape 44"/>
-          <p:cNvSpPr/>
-          <p:nvPr/>
-        </p:nvSpPr>
-        <p:spPr>
-          <a:xfrm>
-            <a:off x="6870192" y="4169664"/>
-            <a:ext cx="685800" cy="384048"/>
-          </a:xfrm>
-          <a:prstGeom prst="rect">
-            <a:avLst>
-              <a:gd name="adj" fmla="val 9524"/>
-            </a:avLst>
-          </a:prstGeom>
-          <a:solidFill>
-            <a:srgbClr val="FFFFFF"/>
-          </a:solidFill>
-          <a:ln w="12700">
-            <a:solidFill>
-              <a:srgbClr val="DB2777"/>
-            </a:solidFill>
-            <a:prstDash val="solid"/>
-          </a:ln>
-        </p:spPr>
-      </p:sp>
-      <p:sp>
-        <p:nvSpPr>
-          <p:cNvPr id="47" name="Text 45"/>
-          <p:cNvSpPr/>
-          <p:nvPr/>
-        </p:nvSpPr>
-        <p:spPr>
-          <a:xfrm>
-            <a:off x="6870192" y="4169664"/>
-            <a:ext cx="685800" cy="384048"/>
-          </a:xfrm>
-          <a:prstGeom prst="rect">
-            <a:avLst/>
-          </a:prstGeom>
-          <a:noFill/>
-          <a:ln/>
-        </p:spPr>
-        <p:txBody>
-          <a:bodyPr wrap="square" lIns="0" tIns="0" rIns="0" bIns="0" rtlCol="0" anchor="ctr"/>
-          <a:lstStyle/>
-          <a:p>
-            <a:pPr algn="ctr" indent="0" marL="0">
-              <a:buNone/>
-            </a:pPr>
-            <a:r>
-              <a:rPr lang="en-US" sz="900" b="1" dirty="0">
-                <a:solidFill>
-                  <a:srgbClr val="9D174D"/>
-                </a:solidFill>
-                <a:latin typeface="Trebuchet MS" pitchFamily="34" charset="0"/>
-                <a:ea typeface="Trebuchet MS" pitchFamily="34" charset="-122"/>
-                <a:cs typeface="Trebuchet MS" pitchFamily="34" charset="-120"/>
-              </a:rPr>
-              <a:t>s</a:t>
-            </a:r>
-            <a:endParaRPr lang="en-US" sz="900" dirty="0"/>
-          </a:p>
-        </p:txBody>
-      </p:sp>
-      <p:sp>
-        <p:nvSpPr>
-          <p:cNvPr id="48" name="Shape 46"/>
-          <p:cNvSpPr/>
-          <p:nvPr/>
-        </p:nvSpPr>
-        <p:spPr>
-          <a:xfrm>
-            <a:off x="7677912" y="4169664"/>
-            <a:ext cx="685800" cy="384048"/>
-          </a:xfrm>
-          <a:prstGeom prst="rect">
-            <a:avLst>
-              <a:gd name="adj" fmla="val 9524"/>
-            </a:avLst>
-          </a:prstGeom>
-          <a:solidFill>
-            <a:srgbClr val="FFFFFF"/>
-          </a:solidFill>
-          <a:ln w="12700">
-            <a:solidFill>
-              <a:srgbClr val="DB2777"/>
-            </a:solidFill>
-            <a:prstDash val="solid"/>
-          </a:ln>
-        </p:spPr>
-      </p:sp>
-      <p:sp>
-        <p:nvSpPr>
-          <p:cNvPr id="49" name="Text 47"/>
-          <p:cNvSpPr/>
-          <p:nvPr/>
-        </p:nvSpPr>
-        <p:spPr>
-          <a:xfrm>
-            <a:off x="7677912" y="4169664"/>
-            <a:ext cx="685800" cy="384048"/>
-          </a:xfrm>
-          <a:prstGeom prst="rect">
-            <a:avLst/>
-          </a:prstGeom>
-          <a:noFill/>
-          <a:ln/>
-        </p:spPr>
-        <p:txBody>
-          <a:bodyPr wrap="square" lIns="0" tIns="0" rIns="0" bIns="0" rtlCol="0" anchor="ctr"/>
-          <a:lstStyle/>
-          <a:p>
-            <a:pPr algn="ctr" indent="0" marL="0">
-              <a:buNone/>
-            </a:pPr>
-            <a:r>
-              <a:rPr lang="en-US" sz="900" b="1" dirty="0">
-                <a:solidFill>
-                  <a:srgbClr val="9D174D"/>
-                </a:solidFill>
-                <a:latin typeface="Trebuchet MS" pitchFamily="34" charset="0"/>
-                <a:ea typeface="Trebuchet MS" pitchFamily="34" charset="-122"/>
-                <a:cs typeface="Trebuchet MS" pitchFamily="34" charset="-120"/>
-              </a:rPr>
-              <a:t>t</a:t>
-            </a:r>
-            <a:endParaRPr lang="en-US" sz="900" dirty="0"/>
           </a:p>
         </p:txBody>
       </p:sp>
@@ -17433,7 +16926,7 @@
                 <a:ea typeface="Calibri" pitchFamily="34" charset="-122"/>
                 <a:cs typeface="Calibri" pitchFamily="34" charset="-120"/>
               </a:rPr>
-              <a:t>The </a:t>
+              <a:t>During the </a:t>
             </a:r>
             <a:pPr algn="l" indent="0" marL="0">
               <a:buNone/>
@@ -17450,7 +16943,7 @@
                 <a:ea typeface="Calibri" pitchFamily="34" charset="-122"/>
                 <a:cs typeface="Calibri" pitchFamily="34" charset="-120"/>
               </a:rPr>
-              <a:t>steadfast</a:t>
+              <a:t>fasting</a:t>
             </a:r>
             <a:pPr algn="l" indent="0" marL="0">
               <a:buNone/>
@@ -17464,7 +16957,7 @@
                 <a:ea typeface="Calibri" pitchFamily="34" charset="-122"/>
                 <a:cs typeface="Calibri" pitchFamily="34" charset="-120"/>
               </a:rPr>
-              <a:t> runner, who was also the </a:t>
+              <a:t> period, the </a:t>
             </a:r>
             <a:pPr algn="l" indent="0" marL="0">
               <a:buNone/>
@@ -17481,7 +16974,7 @@
                 <a:ea typeface="Calibri" pitchFamily="34" charset="-122"/>
                 <a:cs typeface="Calibri" pitchFamily="34" charset="-120"/>
               </a:rPr>
-              <a:t>fastest</a:t>
+              <a:t>steadfast</a:t>
             </a:r>
             <a:pPr algn="l" indent="0" marL="0">
               <a:buNone/>
@@ -17495,7 +16988,7 @@
                 <a:ea typeface="Calibri" pitchFamily="34" charset="-122"/>
                 <a:cs typeface="Calibri" pitchFamily="34" charset="-120"/>
               </a:rPr>
-              <a:t> in the school, never stopped </a:t>
+              <a:t> monk ate only </a:t>
             </a:r>
             <a:pPr algn="l" indent="0" marL="0">
               <a:buNone/>
@@ -17512,7 +17005,7 @@
                 <a:ea typeface="Calibri" pitchFamily="34" charset="-122"/>
                 <a:cs typeface="Calibri" pitchFamily="34" charset="-120"/>
               </a:rPr>
-              <a:t>fasting</a:t>
+              <a:t>breakfast</a:t>
             </a:r>
             <a:pPr algn="l" indent="0" marL="0">
               <a:buNone/>
@@ -17526,7 +17019,7 @@
                 <a:ea typeface="Calibri" pitchFamily="34" charset="-122"/>
                 <a:cs typeface="Calibri" pitchFamily="34" charset="-120"/>
               </a:rPr>
-              <a:t> before a big race.</a:t>
+              <a:t> each morning, breaking his overnight fast with gratitude.</a:t>
             </a:r>
             <a:endParaRPr lang="en-US" sz="1800" dirty="0"/>
           </a:p>
@@ -17681,7 +17174,7 @@
                 <a:ea typeface="Trebuchet MS" pitchFamily="34" charset="-122"/>
                 <a:cs typeface="Trebuchet MS" pitchFamily="34" charset="-120"/>
               </a:rPr>
-              <a:t>steadfast</a:t>
+              <a:t>fasting</a:t>
             </a:r>
             <a:endParaRPr lang="en-US" sz="1400" dirty="0"/>
           </a:p>
@@ -17809,7 +17302,7 @@
                 <a:ea typeface="Trebuchet MS" pitchFamily="34" charset="-122"/>
                 <a:cs typeface="Trebuchet MS" pitchFamily="34" charset="-120"/>
               </a:rPr>
-              <a:t>fastest</a:t>
+              <a:t>steadfast</a:t>
             </a:r>
             <a:endParaRPr lang="en-US" sz="1400" dirty="0"/>
           </a:p>
@@ -17937,7 +17430,7 @@
                 <a:ea typeface="Trebuchet MS" pitchFamily="34" charset="-122"/>
                 <a:cs typeface="Trebuchet MS" pitchFamily="34" charset="-120"/>
               </a:rPr>
-              <a:t>fasting</a:t>
+              <a:t>breakfast</a:t>
             </a:r>
             <a:endParaRPr lang="en-US" sz="1400" dirty="0"/>
           </a:p>
@@ -18407,7 +17900,7 @@
                 <a:ea typeface="Trebuchet MS" pitchFamily="34" charset="-122"/>
                 <a:cs typeface="Trebuchet MS" pitchFamily="34" charset="-120"/>
               </a:rPr>
-              <a:t>steadfast</a:t>
+              <a:t>fasting</a:t>
             </a:r>
             <a:endParaRPr lang="en-US" sz="2800" dirty="0"/>
           </a:p>
@@ -19234,7 +18727,7 @@
                 <a:ea typeface="Trebuchet MS" pitchFamily="34" charset="-122"/>
                 <a:cs typeface="Trebuchet MS" pitchFamily="34" charset="-120"/>
               </a:rPr>
-              <a:t>steadfast</a:t>
+              <a:t>fasting</a:t>
             </a:r>
             <a:endParaRPr lang="en-US" sz="2800" dirty="0"/>
           </a:p>
@@ -19323,11 +18816,11 @@
             </a:avLst>
           </a:prstGeom>
           <a:solidFill>
-            <a:srgbClr val="DDD6FE"/>
+            <a:srgbClr val="CCFBF1"/>
           </a:solidFill>
           <a:ln w="19050">
             <a:solidFill>
-              <a:srgbClr val="7C3AED"/>
+              <a:srgbClr val="0D9488"/>
             </a:solidFill>
             <a:prstDash val="solid"/>
           </a:ln>
@@ -19367,13 +18860,13 @@
             <a:r>
               <a:rPr lang="en-US" sz="1300" b="1" dirty="0">
                 <a:solidFill>
-                  <a:srgbClr val="4C1D95"/>
+                  <a:srgbClr val="0F766E"/>
                 </a:solidFill>
                 <a:latin typeface="Trebuchet MS" pitchFamily="34" charset="0"/>
                 <a:ea typeface="Trebuchet MS" pitchFamily="34" charset="-122"/>
                 <a:cs typeface="Trebuchet MS" pitchFamily="34" charset="-120"/>
               </a:rPr>
-              <a:t>stead</a:t>
+              <a:t>fast</a:t>
             </a:r>
             <a:endParaRPr lang="en-US" sz="1300" dirty="0"/>
           </a:p>
@@ -19412,7 +18905,7 @@
                 <a:ea typeface="Calibri" pitchFamily="34" charset="-122"/>
                 <a:cs typeface="Calibri" pitchFamily="34" charset="-120"/>
               </a:rPr>
-              <a:t>firmly in place</a:t>
+              <a:t>going without food</a:t>
             </a:r>
             <a:endParaRPr lang="en-US" sz="850" dirty="0"/>
           </a:p>
@@ -19435,11 +18928,11 @@
             </a:avLst>
           </a:prstGeom>
           <a:solidFill>
-            <a:srgbClr val="CCFBF1"/>
+            <a:srgbClr val="FCE7F3"/>
           </a:solidFill>
           <a:ln w="19050">
             <a:solidFill>
-              <a:srgbClr val="0D9488"/>
+              <a:srgbClr val="DB2777"/>
             </a:solidFill>
             <a:prstDash val="solid"/>
           </a:ln>
@@ -19479,13 +18972,13 @@
             <a:r>
               <a:rPr lang="en-US" sz="1300" b="1" dirty="0">
                 <a:solidFill>
-                  <a:srgbClr val="0F766E"/>
+                  <a:srgbClr val="9D174D"/>
                 </a:solidFill>
                 <a:latin typeface="Trebuchet MS" pitchFamily="34" charset="0"/>
                 <a:ea typeface="Trebuchet MS" pitchFamily="34" charset="-122"/>
                 <a:cs typeface="Trebuchet MS" pitchFamily="34" charset="-120"/>
               </a:rPr>
-              <a:t>fast</a:t>
+              <a:t>-ing</a:t>
             </a:r>
             <a:endParaRPr lang="en-US" sz="1300" dirty="0"/>
           </a:p>
@@ -19524,7 +19017,7 @@
                 <a:ea typeface="Calibri" pitchFamily="34" charset="-122"/>
                 <a:cs typeface="Calibri" pitchFamily="34" charset="-120"/>
               </a:rPr>
-              <a:t>firm, fixed</a:t>
+              <a:t>in the process of (continuous action)</a:t>
             </a:r>
             <a:endParaRPr lang="en-US" sz="850" dirty="0"/>
           </a:p>
@@ -20219,7 +19712,7 @@
                 <a:ea typeface="Trebuchet MS" pitchFamily="34" charset="-122"/>
                 <a:cs typeface="Trebuchet MS" pitchFamily="34" charset="-120"/>
               </a:rPr>
-              <a:t>steadfast</a:t>
+              <a:t>fasting</a:t>
             </a:r>
             <a:endParaRPr lang="en-US" sz="2800" dirty="0"/>
           </a:p>
@@ -20308,11 +19801,11 @@
             </a:avLst>
           </a:prstGeom>
           <a:solidFill>
-            <a:srgbClr val="DDD6FE"/>
+            <a:srgbClr val="CCFBF1"/>
           </a:solidFill>
           <a:ln w="19050">
             <a:solidFill>
-              <a:srgbClr val="7C3AED"/>
+              <a:srgbClr val="0D9488"/>
             </a:solidFill>
             <a:prstDash val="solid"/>
           </a:ln>
@@ -20352,13 +19845,13 @@
             <a:r>
               <a:rPr lang="en-US" sz="1300" b="1" dirty="0">
                 <a:solidFill>
-                  <a:srgbClr val="4C1D95"/>
+                  <a:srgbClr val="0F766E"/>
                 </a:solidFill>
                 <a:latin typeface="Trebuchet MS" pitchFamily="34" charset="0"/>
                 <a:ea typeface="Trebuchet MS" pitchFamily="34" charset="-122"/>
                 <a:cs typeface="Trebuchet MS" pitchFamily="34" charset="-120"/>
               </a:rPr>
-              <a:t>stead</a:t>
+              <a:t>fast</a:t>
             </a:r>
             <a:endParaRPr lang="en-US" sz="1300" dirty="0"/>
           </a:p>
@@ -20397,7 +19890,7 @@
                 <a:ea typeface="Calibri" pitchFamily="34" charset="-122"/>
                 <a:cs typeface="Calibri" pitchFamily="34" charset="-120"/>
               </a:rPr>
-              <a:t>firmly in place</a:t>
+              <a:t>going without food</a:t>
             </a:r>
             <a:endParaRPr lang="en-US" sz="850" dirty="0"/>
           </a:p>
@@ -20420,11 +19913,11 @@
             </a:avLst>
           </a:prstGeom>
           <a:solidFill>
-            <a:srgbClr val="CCFBF1"/>
+            <a:srgbClr val="FCE7F3"/>
           </a:solidFill>
           <a:ln w="19050">
             <a:solidFill>
-              <a:srgbClr val="0D9488"/>
+              <a:srgbClr val="DB2777"/>
             </a:solidFill>
             <a:prstDash val="solid"/>
           </a:ln>
@@ -20464,13 +19957,13 @@
             <a:r>
               <a:rPr lang="en-US" sz="1300" b="1" dirty="0">
                 <a:solidFill>
-                  <a:srgbClr val="0F766E"/>
+                  <a:srgbClr val="9D174D"/>
                 </a:solidFill>
                 <a:latin typeface="Trebuchet MS" pitchFamily="34" charset="0"/>
                 <a:ea typeface="Trebuchet MS" pitchFamily="34" charset="-122"/>
                 <a:cs typeface="Trebuchet MS" pitchFamily="34" charset="-120"/>
               </a:rPr>
-              <a:t>fast</a:t>
+              <a:t>-ing</a:t>
             </a:r>
             <a:endParaRPr lang="en-US" sz="1300" dirty="0"/>
           </a:p>
@@ -20509,7 +20002,7 @@
                 <a:ea typeface="Calibri" pitchFamily="34" charset="-122"/>
                 <a:cs typeface="Calibri" pitchFamily="34" charset="-120"/>
               </a:rPr>
-              <a:t>firm, fixed</a:t>
+              <a:t>in the process of (continuous action)</a:t>
             </a:r>
             <a:endParaRPr lang="en-US" sz="850" dirty="0"/>
           </a:p>
@@ -20668,7 +20161,7 @@
                 <a:ea typeface="Trebuchet MS" pitchFamily="34" charset="-122"/>
                 <a:cs typeface="Trebuchet MS" pitchFamily="34" charset="-120"/>
               </a:rPr>
-              <a:t>stead</a:t>
+              <a:t>fast</a:t>
             </a:r>
             <a:endParaRPr lang="en-US" sz="1400" dirty="0"/>
           </a:p>
@@ -20773,7 +20266,7 @@
                 <a:ea typeface="Trebuchet MS" pitchFamily="34" charset="-122"/>
                 <a:cs typeface="Trebuchet MS" pitchFamily="34" charset="-120"/>
               </a:rPr>
-              <a:t>fast</a:t>
+              <a:t>ing</a:t>
             </a:r>
             <a:endParaRPr lang="en-US" sz="1400" dirty="0"/>
           </a:p>
@@ -21336,7 +20829,7 @@
                 <a:ea typeface="Trebuchet MS" pitchFamily="34" charset="-122"/>
                 <a:cs typeface="Trebuchet MS" pitchFamily="34" charset="-120"/>
               </a:rPr>
-              <a:t>steadfast</a:t>
+              <a:t>fasting</a:t>
             </a:r>
             <a:endParaRPr lang="en-US" sz="2800" dirty="0"/>
           </a:p>
@@ -21425,11 +20918,11 @@
             </a:avLst>
           </a:prstGeom>
           <a:solidFill>
-            <a:srgbClr val="DDD6FE"/>
+            <a:srgbClr val="CCFBF1"/>
           </a:solidFill>
           <a:ln w="19050">
             <a:solidFill>
-              <a:srgbClr val="7C3AED"/>
+              <a:srgbClr val="0D9488"/>
             </a:solidFill>
             <a:prstDash val="solid"/>
           </a:ln>
@@ -21469,13 +20962,13 @@
             <a:r>
               <a:rPr lang="en-US" sz="1300" b="1" dirty="0">
                 <a:solidFill>
-                  <a:srgbClr val="4C1D95"/>
+                  <a:srgbClr val="0F766E"/>
                 </a:solidFill>
                 <a:latin typeface="Trebuchet MS" pitchFamily="34" charset="0"/>
                 <a:ea typeface="Trebuchet MS" pitchFamily="34" charset="-122"/>
                 <a:cs typeface="Trebuchet MS" pitchFamily="34" charset="-120"/>
               </a:rPr>
-              <a:t>stead</a:t>
+              <a:t>fast</a:t>
             </a:r>
             <a:endParaRPr lang="en-US" sz="1300" dirty="0"/>
           </a:p>
@@ -21514,7 +21007,7 @@
                 <a:ea typeface="Calibri" pitchFamily="34" charset="-122"/>
                 <a:cs typeface="Calibri" pitchFamily="34" charset="-120"/>
               </a:rPr>
-              <a:t>firmly in place</a:t>
+              <a:t>going without food</a:t>
             </a:r>
             <a:endParaRPr lang="en-US" sz="850" dirty="0"/>
           </a:p>
@@ -21537,11 +21030,11 @@
             </a:avLst>
           </a:prstGeom>
           <a:solidFill>
-            <a:srgbClr val="CCFBF1"/>
+            <a:srgbClr val="FCE7F3"/>
           </a:solidFill>
           <a:ln w="19050">
             <a:solidFill>
-              <a:srgbClr val="0D9488"/>
+              <a:srgbClr val="DB2777"/>
             </a:solidFill>
             <a:prstDash val="solid"/>
           </a:ln>
@@ -21581,13 +21074,13 @@
             <a:r>
               <a:rPr lang="en-US" sz="1300" b="1" dirty="0">
                 <a:solidFill>
-                  <a:srgbClr val="0F766E"/>
+                  <a:srgbClr val="9D174D"/>
                 </a:solidFill>
                 <a:latin typeface="Trebuchet MS" pitchFamily="34" charset="0"/>
                 <a:ea typeface="Trebuchet MS" pitchFamily="34" charset="-122"/>
                 <a:cs typeface="Trebuchet MS" pitchFamily="34" charset="-120"/>
               </a:rPr>
-              <a:t>fast</a:t>
+              <a:t>-ing</a:t>
             </a:r>
             <a:endParaRPr lang="en-US" sz="1300" dirty="0"/>
           </a:p>
@@ -21626,7 +21119,7 @@
                 <a:ea typeface="Calibri" pitchFamily="34" charset="-122"/>
                 <a:cs typeface="Calibri" pitchFamily="34" charset="-120"/>
               </a:rPr>
-              <a:t>firm, fixed</a:t>
+              <a:t>in the process of (continuous action)</a:t>
             </a:r>
             <a:endParaRPr lang="en-US" sz="850" dirty="0"/>
           </a:p>
@@ -21785,7 +21278,7 @@
                 <a:ea typeface="Trebuchet MS" pitchFamily="34" charset="-122"/>
                 <a:cs typeface="Trebuchet MS" pitchFamily="34" charset="-120"/>
               </a:rPr>
-              <a:t>stead</a:t>
+              <a:t>fast</a:t>
             </a:r>
             <a:endParaRPr lang="en-US" sz="1400" dirty="0"/>
           </a:p>
@@ -21890,7 +21383,7 @@
                 <a:ea typeface="Trebuchet MS" pitchFamily="34" charset="-122"/>
                 <a:cs typeface="Trebuchet MS" pitchFamily="34" charset="-120"/>
               </a:rPr>
-              <a:t>fast</a:t>
+              <a:t>ing</a:t>
             </a:r>
             <a:endParaRPr lang="en-US" sz="1400" dirty="0"/>
           </a:p>
@@ -21997,7 +21490,7 @@
         </p:nvSpPr>
         <p:spPr>
           <a:xfrm>
-            <a:off x="2023872" y="4169664"/>
+            <a:off x="2254649" y="4169664"/>
             <a:ext cx="685800" cy="475488"/>
           </a:xfrm>
           <a:prstGeom prst="rect">
@@ -22024,7 +21517,7 @@
         </p:nvSpPr>
         <p:spPr>
           <a:xfrm>
-            <a:off x="2023872" y="4169664"/>
+            <a:off x="2254649" y="4169664"/>
             <a:ext cx="685800" cy="475488"/>
           </a:xfrm>
           <a:prstGeom prst="rect">
@@ -22049,7 +21542,7 @@
                 <a:ea typeface="Trebuchet MS" pitchFamily="34" charset="-122"/>
                 <a:cs typeface="Trebuchet MS" pitchFamily="34" charset="-120"/>
               </a:rPr>
-              <a:t>s</a:t>
+              <a:t>f</a:t>
             </a:r>
             <a:endParaRPr lang="en-US" sz="900" dirty="0"/>
           </a:p>
@@ -22063,7 +21556,7 @@
         </p:nvSpPr>
         <p:spPr>
           <a:xfrm>
-            <a:off x="2831592" y="4169664"/>
+            <a:off x="3293146" y="4169664"/>
             <a:ext cx="685800" cy="475488"/>
           </a:xfrm>
           <a:prstGeom prst="rect">
@@ -22090,7 +21583,7 @@
         </p:nvSpPr>
         <p:spPr>
           <a:xfrm>
-            <a:off x="2831592" y="4169664"/>
+            <a:off x="3293146" y="4169664"/>
             <a:ext cx="685800" cy="475488"/>
           </a:xfrm>
           <a:prstGeom prst="rect">
@@ -22115,7 +21608,7 @@
                 <a:ea typeface="Trebuchet MS" pitchFamily="34" charset="-122"/>
                 <a:cs typeface="Trebuchet MS" pitchFamily="34" charset="-120"/>
               </a:rPr>
-              <a:t>t</a:t>
+              <a:t>a</a:t>
             </a:r>
             <a:endParaRPr lang="en-US" sz="900" dirty="0"/>
           </a:p>
@@ -22129,7 +21622,7 @@
         </p:nvSpPr>
         <p:spPr>
           <a:xfrm>
-            <a:off x="3639312" y="4169664"/>
+            <a:off x="4331643" y="4169664"/>
             <a:ext cx="685800" cy="475488"/>
           </a:xfrm>
           <a:prstGeom prst="rect">
@@ -22156,7 +21649,7 @@
         </p:nvSpPr>
         <p:spPr>
           <a:xfrm>
-            <a:off x="3639312" y="4169664"/>
+            <a:off x="4331643" y="4169664"/>
             <a:ext cx="685800" cy="475488"/>
           </a:xfrm>
           <a:prstGeom prst="rect">
@@ -22181,7 +21674,7 @@
                 <a:ea typeface="Trebuchet MS" pitchFamily="34" charset="-122"/>
                 <a:cs typeface="Trebuchet MS" pitchFamily="34" charset="-120"/>
               </a:rPr>
-              <a:t>ea</a:t>
+              <a:t>s</a:t>
             </a:r>
             <a:endParaRPr lang="en-US" sz="900" dirty="0"/>
           </a:p>
@@ -22195,7 +21688,7 @@
         </p:nvSpPr>
         <p:spPr>
           <a:xfrm>
-            <a:off x="4447032" y="4169664"/>
+            <a:off x="5370141" y="4169664"/>
             <a:ext cx="685800" cy="475488"/>
           </a:xfrm>
           <a:prstGeom prst="rect">
@@ -22222,7 +21715,7 @@
         </p:nvSpPr>
         <p:spPr>
           <a:xfrm>
-            <a:off x="4447032" y="4169664"/>
+            <a:off x="5370141" y="4169664"/>
             <a:ext cx="685800" cy="475488"/>
           </a:xfrm>
           <a:prstGeom prst="rect">
@@ -22247,7 +21740,7 @@
                 <a:ea typeface="Trebuchet MS" pitchFamily="34" charset="-122"/>
                 <a:cs typeface="Trebuchet MS" pitchFamily="34" charset="-120"/>
               </a:rPr>
-              <a:t>d</a:t>
+              <a:t>t</a:t>
             </a:r>
             <a:endParaRPr lang="en-US" sz="900" dirty="0"/>
           </a:p>
@@ -22261,7 +21754,7 @@
         </p:nvSpPr>
         <p:spPr>
           <a:xfrm>
-            <a:off x="5254752" y="4169664"/>
+            <a:off x="6408638" y="4169664"/>
             <a:ext cx="685800" cy="475488"/>
           </a:xfrm>
           <a:prstGeom prst="rect">
@@ -22288,7 +21781,7 @@
         </p:nvSpPr>
         <p:spPr>
           <a:xfrm>
-            <a:off x="5254752" y="4169664"/>
+            <a:off x="6408638" y="4169664"/>
             <a:ext cx="685800" cy="475488"/>
           </a:xfrm>
           <a:prstGeom prst="rect">
@@ -22313,7 +21806,7 @@
                 <a:ea typeface="Trebuchet MS" pitchFamily="34" charset="-122"/>
                 <a:cs typeface="Trebuchet MS" pitchFamily="34" charset="-120"/>
               </a:rPr>
-              <a:t>f</a:t>
+              <a:t>i</a:t>
             </a:r>
             <a:endParaRPr lang="en-US" sz="900" dirty="0"/>
           </a:p>
@@ -22327,7 +21820,7 @@
         </p:nvSpPr>
         <p:spPr>
           <a:xfrm>
-            <a:off x="6062472" y="4169664"/>
+            <a:off x="7447135" y="4169664"/>
             <a:ext cx="685800" cy="475488"/>
           </a:xfrm>
           <a:prstGeom prst="rect">
@@ -22354,7 +21847,7 @@
         </p:nvSpPr>
         <p:spPr>
           <a:xfrm>
-            <a:off x="6062472" y="4169664"/>
+            <a:off x="7447135" y="4169664"/>
             <a:ext cx="685800" cy="475488"/>
           </a:xfrm>
           <a:prstGeom prst="rect">
@@ -22379,139 +21872,7 @@
                 <a:ea typeface="Trebuchet MS" pitchFamily="34" charset="-122"/>
                 <a:cs typeface="Trebuchet MS" pitchFamily="34" charset="-120"/>
               </a:rPr>
-              <a:t>a</a:t>
-            </a:r>
-            <a:endParaRPr lang="en-US" sz="900" dirty="0"/>
-          </a:p>
-        </p:txBody>
-      </p:sp>
-      <p:sp>
-        <p:nvSpPr>
-          <p:cNvPr id="45" name="Shape 43"/>
-          <p:cNvSpPr/>
-          <p:nvPr/>
-        </p:nvSpPr>
-        <p:spPr>
-          <a:xfrm>
-            <a:off x="6870192" y="4169664"/>
-            <a:ext cx="685800" cy="475488"/>
-          </a:xfrm>
-          <a:prstGeom prst="rect">
-            <a:avLst>
-              <a:gd name="adj" fmla="val 7692"/>
-            </a:avLst>
-          </a:prstGeom>
-          <a:solidFill>
-            <a:srgbClr val="FFFFFF"/>
-          </a:solidFill>
-          <a:ln w="12700">
-            <a:solidFill>
-              <a:srgbClr val="DB2777"/>
-            </a:solidFill>
-            <a:prstDash val="solid"/>
-          </a:ln>
-        </p:spPr>
-      </p:sp>
-      <p:sp>
-        <p:nvSpPr>
-          <p:cNvPr id="46" name="Text 44"/>
-          <p:cNvSpPr/>
-          <p:nvPr/>
-        </p:nvSpPr>
-        <p:spPr>
-          <a:xfrm>
-            <a:off x="6870192" y="4169664"/>
-            <a:ext cx="685800" cy="475488"/>
-          </a:xfrm>
-          <a:prstGeom prst="rect">
-            <a:avLst/>
-          </a:prstGeom>
-          <a:noFill/>
-          <a:ln/>
-        </p:spPr>
-        <p:txBody>
-          <a:bodyPr wrap="square" lIns="0" tIns="0" rIns="0" bIns="0" rtlCol="0" anchor="ctr"/>
-          <a:lstStyle/>
-          <a:p>
-            <a:pPr algn="ctr" indent="0" marL="0">
-              <a:buNone/>
-            </a:pPr>
-            <a:r>
-              <a:rPr lang="en-US" sz="900" b="1" dirty="0">
-                <a:solidFill>
-                  <a:srgbClr val="9D174D"/>
-                </a:solidFill>
-                <a:latin typeface="Trebuchet MS" pitchFamily="34" charset="0"/>
-                <a:ea typeface="Trebuchet MS" pitchFamily="34" charset="-122"/>
-                <a:cs typeface="Trebuchet MS" pitchFamily="34" charset="-120"/>
-              </a:rPr>
-              <a:t>s</a:t>
-            </a:r>
-            <a:endParaRPr lang="en-US" sz="900" dirty="0"/>
-          </a:p>
-        </p:txBody>
-      </p:sp>
-      <p:sp>
-        <p:nvSpPr>
-          <p:cNvPr id="47" name="Shape 45"/>
-          <p:cNvSpPr/>
-          <p:nvPr/>
-        </p:nvSpPr>
-        <p:spPr>
-          <a:xfrm>
-            <a:off x="7677912" y="4169664"/>
-            <a:ext cx="685800" cy="475488"/>
-          </a:xfrm>
-          <a:prstGeom prst="rect">
-            <a:avLst>
-              <a:gd name="adj" fmla="val 7692"/>
-            </a:avLst>
-          </a:prstGeom>
-          <a:solidFill>
-            <a:srgbClr val="FFFFFF"/>
-          </a:solidFill>
-          <a:ln w="12700">
-            <a:solidFill>
-              <a:srgbClr val="DB2777"/>
-            </a:solidFill>
-            <a:prstDash val="solid"/>
-          </a:ln>
-        </p:spPr>
-      </p:sp>
-      <p:sp>
-        <p:nvSpPr>
-          <p:cNvPr id="48" name="Text 46"/>
-          <p:cNvSpPr/>
-          <p:nvPr/>
-        </p:nvSpPr>
-        <p:spPr>
-          <a:xfrm>
-            <a:off x="7677912" y="4169664"/>
-            <a:ext cx="685800" cy="475488"/>
-          </a:xfrm>
-          <a:prstGeom prst="rect">
-            <a:avLst/>
-          </a:prstGeom>
-          <a:noFill/>
-          <a:ln/>
-        </p:spPr>
-        <p:txBody>
-          <a:bodyPr wrap="square" lIns="0" tIns="0" rIns="0" bIns="0" rtlCol="0" anchor="ctr"/>
-          <a:lstStyle/>
-          <a:p>
-            <a:pPr algn="ctr" indent="0" marL="0">
-              <a:buNone/>
-            </a:pPr>
-            <a:r>
-              <a:rPr lang="en-US" sz="900" b="1" dirty="0">
-                <a:solidFill>
-                  <a:srgbClr val="9D174D"/>
-                </a:solidFill>
-                <a:latin typeface="Trebuchet MS" pitchFamily="34" charset="0"/>
-                <a:ea typeface="Trebuchet MS" pitchFamily="34" charset="-122"/>
-                <a:cs typeface="Trebuchet MS" pitchFamily="34" charset="-120"/>
-              </a:rPr>
-              <a:t>t</a:t>
+              <a:t>ng</a:t>
             </a:r>
             <a:endParaRPr lang="en-US" sz="900" dirty="0"/>
           </a:p>
@@ -22942,7 +22303,7 @@
                 <a:ea typeface="Trebuchet MS" pitchFamily="34" charset="-122"/>
                 <a:cs typeface="Trebuchet MS" pitchFamily="34" charset="-120"/>
               </a:rPr>
-              <a:t>fastest</a:t>
+              <a:t>steadfast</a:t>
             </a:r>
             <a:endParaRPr lang="en-US" sz="2800" dirty="0"/>
           </a:p>
@@ -23769,7 +23130,7 @@
                 <a:ea typeface="Trebuchet MS" pitchFamily="34" charset="-122"/>
                 <a:cs typeface="Trebuchet MS" pitchFamily="34" charset="-120"/>
               </a:rPr>
-              <a:t>fastest</a:t>
+              <a:t>steadfast</a:t>
             </a:r>
             <a:endParaRPr lang="en-US" sz="2800" dirty="0"/>
           </a:p>
@@ -23858,11 +23219,11 @@
             </a:avLst>
           </a:prstGeom>
           <a:solidFill>
-            <a:srgbClr val="CCFBF1"/>
+            <a:srgbClr val="DDD6FE"/>
           </a:solidFill>
           <a:ln w="19050">
             <a:solidFill>
-              <a:srgbClr val="0D9488"/>
+              <a:srgbClr val="7C3AED"/>
             </a:solidFill>
             <a:prstDash val="solid"/>
           </a:ln>
@@ -23902,13 +23263,13 @@
             <a:r>
               <a:rPr lang="en-US" sz="1300" b="1" dirty="0">
                 <a:solidFill>
-                  <a:srgbClr val="0F766E"/>
+                  <a:srgbClr val="4C1D95"/>
                 </a:solidFill>
                 <a:latin typeface="Trebuchet MS" pitchFamily="34" charset="0"/>
                 <a:ea typeface="Trebuchet MS" pitchFamily="34" charset="-122"/>
                 <a:cs typeface="Trebuchet MS" pitchFamily="34" charset="-120"/>
               </a:rPr>
-              <a:t>fast</a:t>
+              <a:t>stead</a:t>
             </a:r>
             <a:endParaRPr lang="en-US" sz="1300" dirty="0"/>
           </a:p>
@@ -23947,7 +23308,7 @@
                 <a:ea typeface="Calibri" pitchFamily="34" charset="-122"/>
                 <a:cs typeface="Calibri" pitchFamily="34" charset="-120"/>
               </a:rPr>
-              <a:t>quick, swift</a:t>
+              <a:t>place or position</a:t>
             </a:r>
             <a:endParaRPr lang="en-US" sz="850" dirty="0"/>
           </a:p>
@@ -23970,11 +23331,11 @@
             </a:avLst>
           </a:prstGeom>
           <a:solidFill>
-            <a:srgbClr val="FCE7F3"/>
+            <a:srgbClr val="CCFBF1"/>
           </a:solidFill>
           <a:ln w="19050">
             <a:solidFill>
-              <a:srgbClr val="DB2777"/>
+              <a:srgbClr val="0D9488"/>
             </a:solidFill>
             <a:prstDash val="solid"/>
           </a:ln>
@@ -24014,13 +23375,13 @@
             <a:r>
               <a:rPr lang="en-US" sz="1300" b="1" dirty="0">
                 <a:solidFill>
-                  <a:srgbClr val="9D174D"/>
+                  <a:srgbClr val="0F766E"/>
                 </a:solidFill>
                 <a:latin typeface="Trebuchet MS" pitchFamily="34" charset="0"/>
                 <a:ea typeface="Trebuchet MS" pitchFamily="34" charset="-122"/>
                 <a:cs typeface="Trebuchet MS" pitchFamily="34" charset="-120"/>
               </a:rPr>
-              <a:t>est</a:t>
+              <a:t>fast</a:t>
             </a:r>
             <a:endParaRPr lang="en-US" sz="1300" dirty="0"/>
           </a:p>
@@ -24059,7 +23420,7 @@
                 <a:ea typeface="Calibri" pitchFamily="34" charset="-122"/>
                 <a:cs typeface="Calibri" pitchFamily="34" charset="-120"/>
               </a:rPr>
-              <a:t>most (superlative)</a:t>
+              <a:t>firm, fixed in place</a:t>
             </a:r>
             <a:endParaRPr lang="en-US" sz="850" dirty="0"/>
           </a:p>
@@ -25473,7 +24834,7 @@
                 <a:ea typeface="Trebuchet MS" pitchFamily="34" charset="-122"/>
                 <a:cs typeface="Trebuchet MS" pitchFamily="34" charset="-120"/>
               </a:rPr>
-              <a:t>fastest</a:t>
+              <a:t>steadfast</a:t>
             </a:r>
             <a:endParaRPr lang="en-US" sz="2800" dirty="0"/>
           </a:p>
@@ -25562,11 +24923,11 @@
             </a:avLst>
           </a:prstGeom>
           <a:solidFill>
-            <a:srgbClr val="CCFBF1"/>
+            <a:srgbClr val="DDD6FE"/>
           </a:solidFill>
           <a:ln w="19050">
             <a:solidFill>
-              <a:srgbClr val="0D9488"/>
+              <a:srgbClr val="7C3AED"/>
             </a:solidFill>
             <a:prstDash val="solid"/>
           </a:ln>
@@ -25606,13 +24967,13 @@
             <a:r>
               <a:rPr lang="en-US" sz="1300" b="1" dirty="0">
                 <a:solidFill>
-                  <a:srgbClr val="0F766E"/>
+                  <a:srgbClr val="4C1D95"/>
                 </a:solidFill>
                 <a:latin typeface="Trebuchet MS" pitchFamily="34" charset="0"/>
                 <a:ea typeface="Trebuchet MS" pitchFamily="34" charset="-122"/>
                 <a:cs typeface="Trebuchet MS" pitchFamily="34" charset="-120"/>
               </a:rPr>
-              <a:t>fast</a:t>
+              <a:t>stead</a:t>
             </a:r>
             <a:endParaRPr lang="en-US" sz="1300" dirty="0"/>
           </a:p>
@@ -25651,7 +25012,7 @@
                 <a:ea typeface="Calibri" pitchFamily="34" charset="-122"/>
                 <a:cs typeface="Calibri" pitchFamily="34" charset="-120"/>
               </a:rPr>
-              <a:t>quick, swift</a:t>
+              <a:t>place or position</a:t>
             </a:r>
             <a:endParaRPr lang="en-US" sz="850" dirty="0"/>
           </a:p>
@@ -25674,11 +25035,11 @@
             </a:avLst>
           </a:prstGeom>
           <a:solidFill>
-            <a:srgbClr val="FCE7F3"/>
+            <a:srgbClr val="CCFBF1"/>
           </a:solidFill>
           <a:ln w="19050">
             <a:solidFill>
-              <a:srgbClr val="DB2777"/>
+              <a:srgbClr val="0D9488"/>
             </a:solidFill>
             <a:prstDash val="solid"/>
           </a:ln>
@@ -25718,13 +25079,13 @@
             <a:r>
               <a:rPr lang="en-US" sz="1300" b="1" dirty="0">
                 <a:solidFill>
-                  <a:srgbClr val="9D174D"/>
+                  <a:srgbClr val="0F766E"/>
                 </a:solidFill>
                 <a:latin typeface="Trebuchet MS" pitchFamily="34" charset="0"/>
                 <a:ea typeface="Trebuchet MS" pitchFamily="34" charset="-122"/>
                 <a:cs typeface="Trebuchet MS" pitchFamily="34" charset="-120"/>
               </a:rPr>
-              <a:t>est</a:t>
+              <a:t>fast</a:t>
             </a:r>
             <a:endParaRPr lang="en-US" sz="1300" dirty="0"/>
           </a:p>
@@ -25763,7 +25124,7 @@
                 <a:ea typeface="Calibri" pitchFamily="34" charset="-122"/>
                 <a:cs typeface="Calibri" pitchFamily="34" charset="-120"/>
               </a:rPr>
-              <a:t>most (superlative)</a:t>
+              <a:t>firm, fixed in place</a:t>
             </a:r>
             <a:endParaRPr lang="en-US" sz="850" dirty="0"/>
           </a:p>
@@ -25922,7 +25283,7 @@
                 <a:ea typeface="Trebuchet MS" pitchFamily="34" charset="-122"/>
                 <a:cs typeface="Trebuchet MS" pitchFamily="34" charset="-120"/>
               </a:rPr>
-              <a:t>fast</a:t>
+              <a:t>stead</a:t>
             </a:r>
             <a:endParaRPr lang="en-US" sz="1400" dirty="0"/>
           </a:p>
@@ -26027,7 +25388,7 @@
                 <a:ea typeface="Trebuchet MS" pitchFamily="34" charset="-122"/>
                 <a:cs typeface="Trebuchet MS" pitchFamily="34" charset="-120"/>
               </a:rPr>
-              <a:t>est</a:t>
+              <a:t>fast</a:t>
             </a:r>
             <a:endParaRPr lang="en-US" sz="1400" dirty="0"/>
           </a:p>
@@ -26590,7 +25951,7 @@
                 <a:ea typeface="Trebuchet MS" pitchFamily="34" charset="-122"/>
                 <a:cs typeface="Trebuchet MS" pitchFamily="34" charset="-120"/>
               </a:rPr>
-              <a:t>fastest</a:t>
+              <a:t>steadfast</a:t>
             </a:r>
             <a:endParaRPr lang="en-US" sz="2800" dirty="0"/>
           </a:p>
@@ -26679,11 +26040,11 @@
             </a:avLst>
           </a:prstGeom>
           <a:solidFill>
-            <a:srgbClr val="CCFBF1"/>
+            <a:srgbClr val="DDD6FE"/>
           </a:solidFill>
           <a:ln w="19050">
             <a:solidFill>
-              <a:srgbClr val="0D9488"/>
+              <a:srgbClr val="7C3AED"/>
             </a:solidFill>
             <a:prstDash val="solid"/>
           </a:ln>
@@ -26723,13 +26084,13 @@
             <a:r>
               <a:rPr lang="en-US" sz="1300" b="1" dirty="0">
                 <a:solidFill>
-                  <a:srgbClr val="0F766E"/>
+                  <a:srgbClr val="4C1D95"/>
                 </a:solidFill>
                 <a:latin typeface="Trebuchet MS" pitchFamily="34" charset="0"/>
                 <a:ea typeface="Trebuchet MS" pitchFamily="34" charset="-122"/>
                 <a:cs typeface="Trebuchet MS" pitchFamily="34" charset="-120"/>
               </a:rPr>
-              <a:t>fast</a:t>
+              <a:t>stead</a:t>
             </a:r>
             <a:endParaRPr lang="en-US" sz="1300" dirty="0"/>
           </a:p>
@@ -26768,7 +26129,7 @@
                 <a:ea typeface="Calibri" pitchFamily="34" charset="-122"/>
                 <a:cs typeface="Calibri" pitchFamily="34" charset="-120"/>
               </a:rPr>
-              <a:t>quick, swift</a:t>
+              <a:t>place or position</a:t>
             </a:r>
             <a:endParaRPr lang="en-US" sz="850" dirty="0"/>
           </a:p>
@@ -26791,11 +26152,11 @@
             </a:avLst>
           </a:prstGeom>
           <a:solidFill>
-            <a:srgbClr val="FCE7F3"/>
+            <a:srgbClr val="CCFBF1"/>
           </a:solidFill>
           <a:ln w="19050">
             <a:solidFill>
-              <a:srgbClr val="DB2777"/>
+              <a:srgbClr val="0D9488"/>
             </a:solidFill>
             <a:prstDash val="solid"/>
           </a:ln>
@@ -26835,13 +26196,13 @@
             <a:r>
               <a:rPr lang="en-US" sz="1300" b="1" dirty="0">
                 <a:solidFill>
-                  <a:srgbClr val="9D174D"/>
+                  <a:srgbClr val="0F766E"/>
                 </a:solidFill>
                 <a:latin typeface="Trebuchet MS" pitchFamily="34" charset="0"/>
                 <a:ea typeface="Trebuchet MS" pitchFamily="34" charset="-122"/>
                 <a:cs typeface="Trebuchet MS" pitchFamily="34" charset="-120"/>
               </a:rPr>
-              <a:t>est</a:t>
+              <a:t>fast</a:t>
             </a:r>
             <a:endParaRPr lang="en-US" sz="1300" dirty="0"/>
           </a:p>
@@ -26880,7 +26241,7 @@
                 <a:ea typeface="Calibri" pitchFamily="34" charset="-122"/>
                 <a:cs typeface="Calibri" pitchFamily="34" charset="-120"/>
               </a:rPr>
-              <a:t>most (superlative)</a:t>
+              <a:t>firm, fixed in place</a:t>
             </a:r>
             <a:endParaRPr lang="en-US" sz="850" dirty="0"/>
           </a:p>
@@ -27039,7 +26400,7 @@
                 <a:ea typeface="Trebuchet MS" pitchFamily="34" charset="-122"/>
                 <a:cs typeface="Trebuchet MS" pitchFamily="34" charset="-120"/>
               </a:rPr>
-              <a:t>fast</a:t>
+              <a:t>stead</a:t>
             </a:r>
             <a:endParaRPr lang="en-US" sz="1400" dirty="0"/>
           </a:p>
@@ -27144,7 +26505,7 @@
                 <a:ea typeface="Trebuchet MS" pitchFamily="34" charset="-122"/>
                 <a:cs typeface="Trebuchet MS" pitchFamily="34" charset="-120"/>
               </a:rPr>
-              <a:t>est</a:t>
+              <a:t>fast</a:t>
             </a:r>
             <a:endParaRPr lang="en-US" sz="1400" dirty="0"/>
           </a:p>
@@ -27251,7 +26612,7 @@
         </p:nvSpPr>
         <p:spPr>
           <a:xfrm>
-            <a:off x="2124837" y="4169664"/>
+            <a:off x="2023872" y="4169664"/>
             <a:ext cx="685800" cy="475488"/>
           </a:xfrm>
           <a:prstGeom prst="rect">
@@ -27278,7 +26639,7 @@
         </p:nvSpPr>
         <p:spPr>
           <a:xfrm>
-            <a:off x="2124837" y="4169664"/>
+            <a:off x="2023872" y="4169664"/>
             <a:ext cx="685800" cy="475488"/>
           </a:xfrm>
           <a:prstGeom prst="rect">
@@ -27303,7 +26664,7 @@
                 <a:ea typeface="Trebuchet MS" pitchFamily="34" charset="-122"/>
                 <a:cs typeface="Trebuchet MS" pitchFamily="34" charset="-120"/>
               </a:rPr>
-              <a:t>f</a:t>
+              <a:t>s</a:t>
             </a:r>
             <a:endParaRPr lang="en-US" sz="900" dirty="0"/>
           </a:p>
@@ -27317,7 +26678,7 @@
         </p:nvSpPr>
         <p:spPr>
           <a:xfrm>
-            <a:off x="3033522" y="4169664"/>
+            <a:off x="2831592" y="4169664"/>
             <a:ext cx="685800" cy="475488"/>
           </a:xfrm>
           <a:prstGeom prst="rect">
@@ -27344,7 +26705,7 @@
         </p:nvSpPr>
         <p:spPr>
           <a:xfrm>
-            <a:off x="3033522" y="4169664"/>
+            <a:off x="2831592" y="4169664"/>
             <a:ext cx="685800" cy="475488"/>
           </a:xfrm>
           <a:prstGeom prst="rect">
@@ -27369,7 +26730,7 @@
                 <a:ea typeface="Trebuchet MS" pitchFamily="34" charset="-122"/>
                 <a:cs typeface="Trebuchet MS" pitchFamily="34" charset="-120"/>
               </a:rPr>
-              <a:t>a</a:t>
+              <a:t>t</a:t>
             </a:r>
             <a:endParaRPr lang="en-US" sz="900" dirty="0"/>
           </a:p>
@@ -27383,7 +26744,7 @@
         </p:nvSpPr>
         <p:spPr>
           <a:xfrm>
-            <a:off x="3942207" y="4169664"/>
+            <a:off x="3639312" y="4169664"/>
             <a:ext cx="685800" cy="475488"/>
           </a:xfrm>
           <a:prstGeom prst="rect">
@@ -27410,7 +26771,7 @@
         </p:nvSpPr>
         <p:spPr>
           <a:xfrm>
-            <a:off x="3942207" y="4169664"/>
+            <a:off x="3639312" y="4169664"/>
             <a:ext cx="685800" cy="475488"/>
           </a:xfrm>
           <a:prstGeom prst="rect">
@@ -27435,7 +26796,7 @@
                 <a:ea typeface="Trebuchet MS" pitchFamily="34" charset="-122"/>
                 <a:cs typeface="Trebuchet MS" pitchFamily="34" charset="-120"/>
               </a:rPr>
-              <a:t>s</a:t>
+              <a:t>ea</a:t>
             </a:r>
             <a:endParaRPr lang="en-US" sz="900" dirty="0"/>
           </a:p>
@@ -27449,7 +26810,7 @@
         </p:nvSpPr>
         <p:spPr>
           <a:xfrm>
-            <a:off x="4850892" y="4169664"/>
+            <a:off x="4447032" y="4169664"/>
             <a:ext cx="685800" cy="475488"/>
           </a:xfrm>
           <a:prstGeom prst="rect">
@@ -27476,7 +26837,7 @@
         </p:nvSpPr>
         <p:spPr>
           <a:xfrm>
-            <a:off x="4850892" y="4169664"/>
+            <a:off x="4447032" y="4169664"/>
             <a:ext cx="685800" cy="475488"/>
           </a:xfrm>
           <a:prstGeom prst="rect">
@@ -27501,7 +26862,7 @@
                 <a:ea typeface="Trebuchet MS" pitchFamily="34" charset="-122"/>
                 <a:cs typeface="Trebuchet MS" pitchFamily="34" charset="-120"/>
               </a:rPr>
-              <a:t>t</a:t>
+              <a:t>d</a:t>
             </a:r>
             <a:endParaRPr lang="en-US" sz="900" dirty="0"/>
           </a:p>
@@ -27515,7 +26876,7 @@
         </p:nvSpPr>
         <p:spPr>
           <a:xfrm>
-            <a:off x="5759577" y="4169664"/>
+            <a:off x="5254752" y="4169664"/>
             <a:ext cx="685800" cy="475488"/>
           </a:xfrm>
           <a:prstGeom prst="rect">
@@ -27542,7 +26903,7 @@
         </p:nvSpPr>
         <p:spPr>
           <a:xfrm>
-            <a:off x="5759577" y="4169664"/>
+            <a:off x="5254752" y="4169664"/>
             <a:ext cx="685800" cy="475488"/>
           </a:xfrm>
           <a:prstGeom prst="rect">
@@ -27567,7 +26928,7 @@
                 <a:ea typeface="Trebuchet MS" pitchFamily="34" charset="-122"/>
                 <a:cs typeface="Trebuchet MS" pitchFamily="34" charset="-120"/>
               </a:rPr>
-              <a:t>e</a:t>
+              <a:t>f</a:t>
             </a:r>
             <a:endParaRPr lang="en-US" sz="900" dirty="0"/>
           </a:p>
@@ -27581,7 +26942,7 @@
         </p:nvSpPr>
         <p:spPr>
           <a:xfrm>
-            <a:off x="6668262" y="4169664"/>
+            <a:off x="6062472" y="4169664"/>
             <a:ext cx="685800" cy="475488"/>
           </a:xfrm>
           <a:prstGeom prst="rect">
@@ -27608,7 +26969,7 @@
         </p:nvSpPr>
         <p:spPr>
           <a:xfrm>
-            <a:off x="6668262" y="4169664"/>
+            <a:off x="6062472" y="4169664"/>
             <a:ext cx="685800" cy="475488"/>
           </a:xfrm>
           <a:prstGeom prst="rect">
@@ -27633,7 +26994,7 @@
                 <a:ea typeface="Trebuchet MS" pitchFamily="34" charset="-122"/>
                 <a:cs typeface="Trebuchet MS" pitchFamily="34" charset="-120"/>
               </a:rPr>
-              <a:t>s</a:t>
+              <a:t>a</a:t>
             </a:r>
             <a:endParaRPr lang="en-US" sz="900" dirty="0"/>
           </a:p>
@@ -27647,7 +27008,7 @@
         </p:nvSpPr>
         <p:spPr>
           <a:xfrm>
-            <a:off x="7576947" y="4169664"/>
+            <a:off x="6870192" y="4169664"/>
             <a:ext cx="685800" cy="475488"/>
           </a:xfrm>
           <a:prstGeom prst="rect">
@@ -27674,7 +27035,73 @@
         </p:nvSpPr>
         <p:spPr>
           <a:xfrm>
-            <a:off x="7576947" y="4169664"/>
+            <a:off x="6870192" y="4169664"/>
+            <a:ext cx="685800" cy="475488"/>
+          </a:xfrm>
+          <a:prstGeom prst="rect">
+            <a:avLst/>
+          </a:prstGeom>
+          <a:noFill/>
+          <a:ln/>
+        </p:spPr>
+        <p:txBody>
+          <a:bodyPr wrap="square" lIns="0" tIns="0" rIns="0" bIns="0" rtlCol="0" anchor="ctr"/>
+          <a:lstStyle/>
+          <a:p>
+            <a:pPr algn="ctr" indent="0" marL="0">
+              <a:buNone/>
+            </a:pPr>
+            <a:r>
+              <a:rPr lang="en-US" sz="900" b="1" dirty="0">
+                <a:solidFill>
+                  <a:srgbClr val="9D174D"/>
+                </a:solidFill>
+                <a:latin typeface="Trebuchet MS" pitchFamily="34" charset="0"/>
+                <a:ea typeface="Trebuchet MS" pitchFamily="34" charset="-122"/>
+                <a:cs typeface="Trebuchet MS" pitchFamily="34" charset="-120"/>
+              </a:rPr>
+              <a:t>s</a:t>
+            </a:r>
+            <a:endParaRPr lang="en-US" sz="900" dirty="0"/>
+          </a:p>
+        </p:txBody>
+      </p:sp>
+      <p:sp>
+        <p:nvSpPr>
+          <p:cNvPr id="47" name="Shape 45"/>
+          <p:cNvSpPr/>
+          <p:nvPr/>
+        </p:nvSpPr>
+        <p:spPr>
+          <a:xfrm>
+            <a:off x="7677912" y="4169664"/>
+            <a:ext cx="685800" cy="475488"/>
+          </a:xfrm>
+          <a:prstGeom prst="rect">
+            <a:avLst>
+              <a:gd name="adj" fmla="val 7692"/>
+            </a:avLst>
+          </a:prstGeom>
+          <a:solidFill>
+            <a:srgbClr val="FFFFFF"/>
+          </a:solidFill>
+          <a:ln w="12700">
+            <a:solidFill>
+              <a:srgbClr val="DB2777"/>
+            </a:solidFill>
+            <a:prstDash val="solid"/>
+          </a:ln>
+        </p:spPr>
+      </p:sp>
+      <p:sp>
+        <p:nvSpPr>
+          <p:cNvPr id="48" name="Text 46"/>
+          <p:cNvSpPr/>
+          <p:nvPr/>
+        </p:nvSpPr>
+        <p:spPr>
+          <a:xfrm>
+            <a:off x="7677912" y="4169664"/>
             <a:ext cx="685800" cy="475488"/>
           </a:xfrm>
           <a:prstGeom prst="rect">
@@ -28130,7 +27557,7 @@
                 <a:ea typeface="Trebuchet MS" pitchFamily="34" charset="-122"/>
                 <a:cs typeface="Trebuchet MS" pitchFamily="34" charset="-120"/>
               </a:rPr>
-              <a:t>fasting</a:t>
+              <a:t>breakfast</a:t>
             </a:r>
             <a:endParaRPr lang="en-US" sz="2800" dirty="0"/>
           </a:p>
@@ -28957,7 +28384,7 @@
                 <a:ea typeface="Trebuchet MS" pitchFamily="34" charset="-122"/>
                 <a:cs typeface="Trebuchet MS" pitchFamily="34" charset="-120"/>
               </a:rPr>
-              <a:t>fasting</a:t>
+              <a:t>breakfast</a:t>
             </a:r>
             <a:endParaRPr lang="en-US" sz="2800" dirty="0"/>
           </a:p>
@@ -29046,11 +28473,11 @@
             </a:avLst>
           </a:prstGeom>
           <a:solidFill>
-            <a:srgbClr val="CCFBF1"/>
+            <a:srgbClr val="DDD6FE"/>
           </a:solidFill>
           <a:ln w="19050">
             <a:solidFill>
-              <a:srgbClr val="0D9488"/>
+              <a:srgbClr val="7C3AED"/>
             </a:solidFill>
             <a:prstDash val="solid"/>
           </a:ln>
@@ -29090,13 +28517,13 @@
             <a:r>
               <a:rPr lang="en-US" sz="1300" b="1" dirty="0">
                 <a:solidFill>
-                  <a:srgbClr val="0F766E"/>
+                  <a:srgbClr val="4C1D95"/>
                 </a:solidFill>
                 <a:latin typeface="Trebuchet MS" pitchFamily="34" charset="0"/>
                 <a:ea typeface="Trebuchet MS" pitchFamily="34" charset="-122"/>
                 <a:cs typeface="Trebuchet MS" pitchFamily="34" charset="-120"/>
               </a:rPr>
-              <a:t>fast</a:t>
+              <a:t>break</a:t>
             </a:r>
             <a:endParaRPr lang="en-US" sz="1300" dirty="0"/>
           </a:p>
@@ -29135,7 +28562,7 @@
                 <a:ea typeface="Calibri" pitchFamily="34" charset="-122"/>
                 <a:cs typeface="Calibri" pitchFamily="34" charset="-120"/>
               </a:rPr>
-              <a:t>going without food</a:t>
+              <a:t>to end or stop</a:t>
             </a:r>
             <a:endParaRPr lang="en-US" sz="850" dirty="0"/>
           </a:p>
@@ -29158,11 +28585,11 @@
             </a:avLst>
           </a:prstGeom>
           <a:solidFill>
-            <a:srgbClr val="FCE7F3"/>
+            <a:srgbClr val="CCFBF1"/>
           </a:solidFill>
           <a:ln w="19050">
             <a:solidFill>
-              <a:srgbClr val="DB2777"/>
+              <a:srgbClr val="0D9488"/>
             </a:solidFill>
             <a:prstDash val="solid"/>
           </a:ln>
@@ -29202,13 +28629,13 @@
             <a:r>
               <a:rPr lang="en-US" sz="1300" b="1" dirty="0">
                 <a:solidFill>
-                  <a:srgbClr val="9D174D"/>
+                  <a:srgbClr val="0F766E"/>
                 </a:solidFill>
                 <a:latin typeface="Trebuchet MS" pitchFamily="34" charset="0"/>
                 <a:ea typeface="Trebuchet MS" pitchFamily="34" charset="-122"/>
                 <a:cs typeface="Trebuchet MS" pitchFamily="34" charset="-120"/>
               </a:rPr>
-              <a:t>ing</a:t>
+              <a:t>fast</a:t>
             </a:r>
             <a:endParaRPr lang="en-US" sz="1300" dirty="0"/>
           </a:p>
@@ -29247,7 +28674,7 @@
                 <a:ea typeface="Calibri" pitchFamily="34" charset="-122"/>
                 <a:cs typeface="Calibri" pitchFamily="34" charset="-120"/>
               </a:rPr>
-              <a:t>ongoing action</a:t>
+              <a:t>going without food</a:t>
             </a:r>
             <a:endParaRPr lang="en-US" sz="850" dirty="0"/>
           </a:p>
@@ -29942,7 +29369,7 @@
                 <a:ea typeface="Trebuchet MS" pitchFamily="34" charset="-122"/>
                 <a:cs typeface="Trebuchet MS" pitchFamily="34" charset="-120"/>
               </a:rPr>
-              <a:t>fasting</a:t>
+              <a:t>breakfast</a:t>
             </a:r>
             <a:endParaRPr lang="en-US" sz="2800" dirty="0"/>
           </a:p>
@@ -30031,11 +29458,11 @@
             </a:avLst>
           </a:prstGeom>
           <a:solidFill>
-            <a:srgbClr val="CCFBF1"/>
+            <a:srgbClr val="DDD6FE"/>
           </a:solidFill>
           <a:ln w="19050">
             <a:solidFill>
-              <a:srgbClr val="0D9488"/>
+              <a:srgbClr val="7C3AED"/>
             </a:solidFill>
             <a:prstDash val="solid"/>
           </a:ln>
@@ -30075,13 +29502,13 @@
             <a:r>
               <a:rPr lang="en-US" sz="1300" b="1" dirty="0">
                 <a:solidFill>
-                  <a:srgbClr val="0F766E"/>
+                  <a:srgbClr val="4C1D95"/>
                 </a:solidFill>
                 <a:latin typeface="Trebuchet MS" pitchFamily="34" charset="0"/>
                 <a:ea typeface="Trebuchet MS" pitchFamily="34" charset="-122"/>
                 <a:cs typeface="Trebuchet MS" pitchFamily="34" charset="-120"/>
               </a:rPr>
-              <a:t>fast</a:t>
+              <a:t>break</a:t>
             </a:r>
             <a:endParaRPr lang="en-US" sz="1300" dirty="0"/>
           </a:p>
@@ -30120,7 +29547,7 @@
                 <a:ea typeface="Calibri" pitchFamily="34" charset="-122"/>
                 <a:cs typeface="Calibri" pitchFamily="34" charset="-120"/>
               </a:rPr>
-              <a:t>going without food</a:t>
+              <a:t>to end or stop</a:t>
             </a:r>
             <a:endParaRPr lang="en-US" sz="850" dirty="0"/>
           </a:p>
@@ -30143,11 +29570,11 @@
             </a:avLst>
           </a:prstGeom>
           <a:solidFill>
-            <a:srgbClr val="FCE7F3"/>
+            <a:srgbClr val="CCFBF1"/>
           </a:solidFill>
           <a:ln w="19050">
             <a:solidFill>
-              <a:srgbClr val="DB2777"/>
+              <a:srgbClr val="0D9488"/>
             </a:solidFill>
             <a:prstDash val="solid"/>
           </a:ln>
@@ -30187,13 +29614,13 @@
             <a:r>
               <a:rPr lang="en-US" sz="1300" b="1" dirty="0">
                 <a:solidFill>
-                  <a:srgbClr val="9D174D"/>
+                  <a:srgbClr val="0F766E"/>
                 </a:solidFill>
                 <a:latin typeface="Trebuchet MS" pitchFamily="34" charset="0"/>
                 <a:ea typeface="Trebuchet MS" pitchFamily="34" charset="-122"/>
                 <a:cs typeface="Trebuchet MS" pitchFamily="34" charset="-120"/>
               </a:rPr>
-              <a:t>ing</a:t>
+              <a:t>fast</a:t>
             </a:r>
             <a:endParaRPr lang="en-US" sz="1300" dirty="0"/>
           </a:p>
@@ -30232,7 +29659,7 @@
                 <a:ea typeface="Calibri" pitchFamily="34" charset="-122"/>
                 <a:cs typeface="Calibri" pitchFamily="34" charset="-120"/>
               </a:rPr>
-              <a:t>ongoing action</a:t>
+              <a:t>going without food</a:t>
             </a:r>
             <a:endParaRPr lang="en-US" sz="850" dirty="0"/>
           </a:p>
@@ -30391,7 +29818,7 @@
                 <a:ea typeface="Trebuchet MS" pitchFamily="34" charset="-122"/>
                 <a:cs typeface="Trebuchet MS" pitchFamily="34" charset="-120"/>
               </a:rPr>
-              <a:t>fast</a:t>
+              <a:t>break</a:t>
             </a:r>
             <a:endParaRPr lang="en-US" sz="1400" dirty="0"/>
           </a:p>
@@ -30496,7 +29923,7 @@
                 <a:ea typeface="Trebuchet MS" pitchFamily="34" charset="-122"/>
                 <a:cs typeface="Trebuchet MS" pitchFamily="34" charset="-120"/>
               </a:rPr>
-              <a:t>ing</a:t>
+              <a:t>fast</a:t>
             </a:r>
             <a:endParaRPr lang="en-US" sz="1400" dirty="0"/>
           </a:p>
@@ -31059,7 +30486,7 @@
                 <a:ea typeface="Trebuchet MS" pitchFamily="34" charset="-122"/>
                 <a:cs typeface="Trebuchet MS" pitchFamily="34" charset="-120"/>
               </a:rPr>
-              <a:t>fasting</a:t>
+              <a:t>breakfast</a:t>
             </a:r>
             <a:endParaRPr lang="en-US" sz="2800" dirty="0"/>
           </a:p>
@@ -31148,11 +30575,11 @@
             </a:avLst>
           </a:prstGeom>
           <a:solidFill>
-            <a:srgbClr val="CCFBF1"/>
+            <a:srgbClr val="DDD6FE"/>
           </a:solidFill>
           <a:ln w="19050">
             <a:solidFill>
-              <a:srgbClr val="0D9488"/>
+              <a:srgbClr val="7C3AED"/>
             </a:solidFill>
             <a:prstDash val="solid"/>
           </a:ln>
@@ -31192,13 +30619,13 @@
             <a:r>
               <a:rPr lang="en-US" sz="1300" b="1" dirty="0">
                 <a:solidFill>
-                  <a:srgbClr val="0F766E"/>
+                  <a:srgbClr val="4C1D95"/>
                 </a:solidFill>
                 <a:latin typeface="Trebuchet MS" pitchFamily="34" charset="0"/>
                 <a:ea typeface="Trebuchet MS" pitchFamily="34" charset="-122"/>
                 <a:cs typeface="Trebuchet MS" pitchFamily="34" charset="-120"/>
               </a:rPr>
-              <a:t>fast</a:t>
+              <a:t>break</a:t>
             </a:r>
             <a:endParaRPr lang="en-US" sz="1300" dirty="0"/>
           </a:p>
@@ -31237,7 +30664,7 @@
                 <a:ea typeface="Calibri" pitchFamily="34" charset="-122"/>
                 <a:cs typeface="Calibri" pitchFamily="34" charset="-120"/>
               </a:rPr>
-              <a:t>going without food</a:t>
+              <a:t>to end or stop</a:t>
             </a:r>
             <a:endParaRPr lang="en-US" sz="850" dirty="0"/>
           </a:p>
@@ -31260,11 +30687,11 @@
             </a:avLst>
           </a:prstGeom>
           <a:solidFill>
-            <a:srgbClr val="FCE7F3"/>
+            <a:srgbClr val="CCFBF1"/>
           </a:solidFill>
           <a:ln w="19050">
             <a:solidFill>
-              <a:srgbClr val="DB2777"/>
+              <a:srgbClr val="0D9488"/>
             </a:solidFill>
             <a:prstDash val="solid"/>
           </a:ln>
@@ -31304,13 +30731,13 @@
             <a:r>
               <a:rPr lang="en-US" sz="1300" b="1" dirty="0">
                 <a:solidFill>
-                  <a:srgbClr val="9D174D"/>
+                  <a:srgbClr val="0F766E"/>
                 </a:solidFill>
                 <a:latin typeface="Trebuchet MS" pitchFamily="34" charset="0"/>
                 <a:ea typeface="Trebuchet MS" pitchFamily="34" charset="-122"/>
                 <a:cs typeface="Trebuchet MS" pitchFamily="34" charset="-120"/>
               </a:rPr>
-              <a:t>ing</a:t>
+              <a:t>fast</a:t>
             </a:r>
             <a:endParaRPr lang="en-US" sz="1300" dirty="0"/>
           </a:p>
@@ -31349,7 +30776,7 @@
                 <a:ea typeface="Calibri" pitchFamily="34" charset="-122"/>
                 <a:cs typeface="Calibri" pitchFamily="34" charset="-120"/>
               </a:rPr>
-              <a:t>ongoing action</a:t>
+              <a:t>going without food</a:t>
             </a:r>
             <a:endParaRPr lang="en-US" sz="850" dirty="0"/>
           </a:p>
@@ -31508,7 +30935,7 @@
                 <a:ea typeface="Trebuchet MS" pitchFamily="34" charset="-122"/>
                 <a:cs typeface="Trebuchet MS" pitchFamily="34" charset="-120"/>
               </a:rPr>
-              <a:t>fast</a:t>
+              <a:t>break</a:t>
             </a:r>
             <a:endParaRPr lang="en-US" sz="1400" dirty="0"/>
           </a:p>
@@ -31613,7 +31040,7 @@
                 <a:ea typeface="Trebuchet MS" pitchFamily="34" charset="-122"/>
                 <a:cs typeface="Trebuchet MS" pitchFamily="34" charset="-120"/>
               </a:rPr>
-              <a:t>ing</a:t>
+              <a:t>fast</a:t>
             </a:r>
             <a:endParaRPr lang="en-US" sz="1400" dirty="0"/>
           </a:p>
@@ -31694,11 +31121,11 @@
         <p:spPr>
           <a:xfrm>
             <a:off x="1874520" y="4096512"/>
-            <a:ext cx="6903720" cy="658368"/>
+            <a:ext cx="6903720" cy="804672"/>
           </a:xfrm>
           <a:prstGeom prst="rect">
             <a:avLst>
-              <a:gd name="adj" fmla="val 8333"/>
+              <a:gd name="adj" fmla="val 6818"/>
             </a:avLst>
           </a:prstGeom>
           <a:solidFill>
@@ -31720,12 +31147,12 @@
         </p:nvSpPr>
         <p:spPr>
           <a:xfrm>
-            <a:off x="2254649" y="4169664"/>
-            <a:ext cx="685800" cy="475488"/>
+            <a:off x="2023872" y="4169664"/>
+            <a:ext cx="685800" cy="384048"/>
           </a:xfrm>
           <a:prstGeom prst="rect">
             <a:avLst>
-              <a:gd name="adj" fmla="val 7692"/>
+              <a:gd name="adj" fmla="val 9524"/>
             </a:avLst>
           </a:prstGeom>
           <a:solidFill>
@@ -31747,8 +31174,8 @@
         </p:nvSpPr>
         <p:spPr>
           <a:xfrm>
-            <a:off x="2254649" y="4169664"/>
-            <a:ext cx="685800" cy="475488"/>
+            <a:off x="2023872" y="4169664"/>
+            <a:ext cx="685800" cy="384048"/>
           </a:xfrm>
           <a:prstGeom prst="rect">
             <a:avLst/>
@@ -31772,7 +31199,7 @@
                 <a:ea typeface="Trebuchet MS" pitchFamily="34" charset="-122"/>
                 <a:cs typeface="Trebuchet MS" pitchFamily="34" charset="-120"/>
               </a:rPr>
-              <a:t>f</a:t>
+              <a:t>b</a:t>
             </a:r>
             <a:endParaRPr lang="en-US" sz="900" dirty="0"/>
           </a:p>
@@ -31786,12 +31213,12 @@
         </p:nvSpPr>
         <p:spPr>
           <a:xfrm>
-            <a:off x="3293146" y="4169664"/>
-            <a:ext cx="685800" cy="475488"/>
+            <a:off x="2831592" y="4169664"/>
+            <a:ext cx="685800" cy="384048"/>
           </a:xfrm>
           <a:prstGeom prst="rect">
             <a:avLst>
-              <a:gd name="adj" fmla="val 7692"/>
+              <a:gd name="adj" fmla="val 9524"/>
             </a:avLst>
           </a:prstGeom>
           <a:solidFill>
@@ -31813,8 +31240,8 @@
         </p:nvSpPr>
         <p:spPr>
           <a:xfrm>
-            <a:off x="3293146" y="4169664"/>
-            <a:ext cx="685800" cy="475488"/>
+            <a:off x="2831592" y="4169664"/>
+            <a:ext cx="685800" cy="384048"/>
           </a:xfrm>
           <a:prstGeom prst="rect">
             <a:avLst/>
@@ -31838,7 +31265,7 @@
                 <a:ea typeface="Trebuchet MS" pitchFamily="34" charset="-122"/>
                 <a:cs typeface="Trebuchet MS" pitchFamily="34" charset="-120"/>
               </a:rPr>
-              <a:t>a</a:t>
+              <a:t>r</a:t>
             </a:r>
             <a:endParaRPr lang="en-US" sz="900" dirty="0"/>
           </a:p>
@@ -31852,12 +31279,12 @@
         </p:nvSpPr>
         <p:spPr>
           <a:xfrm>
-            <a:off x="4331643" y="4169664"/>
-            <a:ext cx="685800" cy="475488"/>
+            <a:off x="3639312" y="4169664"/>
+            <a:ext cx="685800" cy="384048"/>
           </a:xfrm>
           <a:prstGeom prst="rect">
             <a:avLst>
-              <a:gd name="adj" fmla="val 7692"/>
+              <a:gd name="adj" fmla="val 9524"/>
             </a:avLst>
           </a:prstGeom>
           <a:solidFill>
@@ -31879,8 +31306,8 @@
         </p:nvSpPr>
         <p:spPr>
           <a:xfrm>
-            <a:off x="4331643" y="4169664"/>
-            <a:ext cx="685800" cy="475488"/>
+            <a:off x="3639312" y="4169664"/>
+            <a:ext cx="685800" cy="384048"/>
           </a:xfrm>
           <a:prstGeom prst="rect">
             <a:avLst/>
@@ -31904,7 +31331,7 @@
                 <a:ea typeface="Trebuchet MS" pitchFamily="34" charset="-122"/>
                 <a:cs typeface="Trebuchet MS" pitchFamily="34" charset="-120"/>
               </a:rPr>
-              <a:t>s</a:t>
+              <a:t>ea</a:t>
             </a:r>
             <a:endParaRPr lang="en-US" sz="900" dirty="0"/>
           </a:p>
@@ -31912,18 +31339,57 @@
       </p:sp>
       <p:sp>
         <p:nvSpPr>
-          <p:cNvPr id="39" name="Shape 37"/>
-          <p:cNvSpPr/>
-          <p:nvPr/>
-        </p:nvSpPr>
-        <p:spPr>
-          <a:xfrm>
-            <a:off x="5370141" y="4169664"/>
-            <a:ext cx="685800" cy="475488"/>
+          <p:cNvPr id="39" name="Text 37"/>
+          <p:cNvSpPr/>
+          <p:nvPr/>
+        </p:nvSpPr>
+        <p:spPr>
+          <a:xfrm>
+            <a:off x="3639312" y="4572000"/>
+            <a:ext cx="685800" cy="219456"/>
+          </a:xfrm>
+          <a:prstGeom prst="rect">
+            <a:avLst/>
+          </a:prstGeom>
+          <a:noFill/>
+          <a:ln/>
+        </p:spPr>
+        <p:txBody>
+          <a:bodyPr wrap="square" lIns="0" tIns="0" rIns="0" bIns="0" rtlCol="0" anchor="t"/>
+          <a:lstStyle/>
+          <a:p>
+            <a:pPr algn="ctr" indent="0" marL="0">
+              <a:buNone/>
+            </a:pPr>
+            <a:r>
+              <a:rPr lang="en-US" sz="750" i="1" dirty="0">
+                <a:solidFill>
+                  <a:srgbClr val="94A3B8"/>
+                </a:solidFill>
+                <a:latin typeface="Calibri" pitchFamily="34" charset="0"/>
+                <a:ea typeface="Calibri" pitchFamily="34" charset="-122"/>
+                <a:cs typeface="Calibri" pitchFamily="34" charset="-120"/>
+              </a:rPr>
+              <a:t>/e/</a:t>
+            </a:r>
+            <a:endParaRPr lang="en-US" sz="750" dirty="0"/>
+          </a:p>
+        </p:txBody>
+      </p:sp>
+      <p:sp>
+        <p:nvSpPr>
+          <p:cNvPr id="40" name="Shape 38"/>
+          <p:cNvSpPr/>
+          <p:nvPr/>
+        </p:nvSpPr>
+        <p:spPr>
+          <a:xfrm>
+            <a:off x="4447032" y="4169664"/>
+            <a:ext cx="685800" cy="384048"/>
           </a:xfrm>
           <a:prstGeom prst="rect">
             <a:avLst>
-              <a:gd name="adj" fmla="val 7692"/>
+              <a:gd name="adj" fmla="val 9524"/>
             </a:avLst>
           </a:prstGeom>
           <a:solidFill>
@@ -31939,14 +31405,14 @@
       </p:sp>
       <p:sp>
         <p:nvSpPr>
-          <p:cNvPr id="40" name="Text 38"/>
-          <p:cNvSpPr/>
-          <p:nvPr/>
-        </p:nvSpPr>
-        <p:spPr>
-          <a:xfrm>
-            <a:off x="5370141" y="4169664"/>
-            <a:ext cx="685800" cy="475488"/>
+          <p:cNvPr id="41" name="Text 39"/>
+          <p:cNvSpPr/>
+          <p:nvPr/>
+        </p:nvSpPr>
+        <p:spPr>
+          <a:xfrm>
+            <a:off x="4447032" y="4169664"/>
+            <a:ext cx="685800" cy="384048"/>
           </a:xfrm>
           <a:prstGeom prst="rect">
             <a:avLst/>
@@ -31970,7 +31436,7 @@
                 <a:ea typeface="Trebuchet MS" pitchFamily="34" charset="-122"/>
                 <a:cs typeface="Trebuchet MS" pitchFamily="34" charset="-120"/>
               </a:rPr>
-              <a:t>t</a:t>
+              <a:t>k</a:t>
             </a:r>
             <a:endParaRPr lang="en-US" sz="900" dirty="0"/>
           </a:p>
@@ -31978,18 +31444,18 @@
       </p:sp>
       <p:sp>
         <p:nvSpPr>
-          <p:cNvPr id="41" name="Shape 39"/>
-          <p:cNvSpPr/>
-          <p:nvPr/>
-        </p:nvSpPr>
-        <p:spPr>
-          <a:xfrm>
-            <a:off x="6408638" y="4169664"/>
-            <a:ext cx="685800" cy="475488"/>
+          <p:cNvPr id="42" name="Shape 40"/>
+          <p:cNvSpPr/>
+          <p:nvPr/>
+        </p:nvSpPr>
+        <p:spPr>
+          <a:xfrm>
+            <a:off x="5254752" y="4169664"/>
+            <a:ext cx="685800" cy="384048"/>
           </a:xfrm>
           <a:prstGeom prst="rect">
             <a:avLst>
-              <a:gd name="adj" fmla="val 7692"/>
+              <a:gd name="adj" fmla="val 9524"/>
             </a:avLst>
           </a:prstGeom>
           <a:solidFill>
@@ -32005,14 +31471,14 @@
       </p:sp>
       <p:sp>
         <p:nvSpPr>
-          <p:cNvPr id="42" name="Text 40"/>
-          <p:cNvSpPr/>
-          <p:nvPr/>
-        </p:nvSpPr>
-        <p:spPr>
-          <a:xfrm>
-            <a:off x="6408638" y="4169664"/>
-            <a:ext cx="685800" cy="475488"/>
+          <p:cNvPr id="43" name="Text 41"/>
+          <p:cNvSpPr/>
+          <p:nvPr/>
+        </p:nvSpPr>
+        <p:spPr>
+          <a:xfrm>
+            <a:off x="5254752" y="4169664"/>
+            <a:ext cx="685800" cy="384048"/>
           </a:xfrm>
           <a:prstGeom prst="rect">
             <a:avLst/>
@@ -32036,7 +31502,7 @@
                 <a:ea typeface="Trebuchet MS" pitchFamily="34" charset="-122"/>
                 <a:cs typeface="Trebuchet MS" pitchFamily="34" charset="-120"/>
               </a:rPr>
-              <a:t>i</a:t>
+              <a:t>f</a:t>
             </a:r>
             <a:endParaRPr lang="en-US" sz="900" dirty="0"/>
           </a:p>
@@ -32044,18 +31510,18 @@
       </p:sp>
       <p:sp>
         <p:nvSpPr>
-          <p:cNvPr id="43" name="Shape 41"/>
-          <p:cNvSpPr/>
-          <p:nvPr/>
-        </p:nvSpPr>
-        <p:spPr>
-          <a:xfrm>
-            <a:off x="7447135" y="4169664"/>
-            <a:ext cx="685800" cy="475488"/>
+          <p:cNvPr id="44" name="Shape 42"/>
+          <p:cNvSpPr/>
+          <p:nvPr/>
+        </p:nvSpPr>
+        <p:spPr>
+          <a:xfrm>
+            <a:off x="6062472" y="4169664"/>
+            <a:ext cx="685800" cy="384048"/>
           </a:xfrm>
           <a:prstGeom prst="rect">
             <a:avLst>
-              <a:gd name="adj" fmla="val 7692"/>
+              <a:gd name="adj" fmla="val 9524"/>
             </a:avLst>
           </a:prstGeom>
           <a:solidFill>
@@ -32071,14 +31537,14 @@
       </p:sp>
       <p:sp>
         <p:nvSpPr>
-          <p:cNvPr id="44" name="Text 42"/>
-          <p:cNvSpPr/>
-          <p:nvPr/>
-        </p:nvSpPr>
-        <p:spPr>
-          <a:xfrm>
-            <a:off x="7447135" y="4169664"/>
-            <a:ext cx="685800" cy="475488"/>
+          <p:cNvPr id="45" name="Text 43"/>
+          <p:cNvSpPr/>
+          <p:nvPr/>
+        </p:nvSpPr>
+        <p:spPr>
+          <a:xfrm>
+            <a:off x="6062472" y="4169664"/>
+            <a:ext cx="685800" cy="384048"/>
           </a:xfrm>
           <a:prstGeom prst="rect">
             <a:avLst/>
@@ -32102,7 +31568,139 @@
                 <a:ea typeface="Trebuchet MS" pitchFamily="34" charset="-122"/>
                 <a:cs typeface="Trebuchet MS" pitchFamily="34" charset="-120"/>
               </a:rPr>
-              <a:t>ng</a:t>
+              <a:t>a</a:t>
+            </a:r>
+            <a:endParaRPr lang="en-US" sz="900" dirty="0"/>
+          </a:p>
+        </p:txBody>
+      </p:sp>
+      <p:sp>
+        <p:nvSpPr>
+          <p:cNvPr id="46" name="Shape 44"/>
+          <p:cNvSpPr/>
+          <p:nvPr/>
+        </p:nvSpPr>
+        <p:spPr>
+          <a:xfrm>
+            <a:off x="6870192" y="4169664"/>
+            <a:ext cx="685800" cy="384048"/>
+          </a:xfrm>
+          <a:prstGeom prst="rect">
+            <a:avLst>
+              <a:gd name="adj" fmla="val 9524"/>
+            </a:avLst>
+          </a:prstGeom>
+          <a:solidFill>
+            <a:srgbClr val="FFFFFF"/>
+          </a:solidFill>
+          <a:ln w="12700">
+            <a:solidFill>
+              <a:srgbClr val="DB2777"/>
+            </a:solidFill>
+            <a:prstDash val="solid"/>
+          </a:ln>
+        </p:spPr>
+      </p:sp>
+      <p:sp>
+        <p:nvSpPr>
+          <p:cNvPr id="47" name="Text 45"/>
+          <p:cNvSpPr/>
+          <p:nvPr/>
+        </p:nvSpPr>
+        <p:spPr>
+          <a:xfrm>
+            <a:off x="6870192" y="4169664"/>
+            <a:ext cx="685800" cy="384048"/>
+          </a:xfrm>
+          <a:prstGeom prst="rect">
+            <a:avLst/>
+          </a:prstGeom>
+          <a:noFill/>
+          <a:ln/>
+        </p:spPr>
+        <p:txBody>
+          <a:bodyPr wrap="square" lIns="0" tIns="0" rIns="0" bIns="0" rtlCol="0" anchor="ctr"/>
+          <a:lstStyle/>
+          <a:p>
+            <a:pPr algn="ctr" indent="0" marL="0">
+              <a:buNone/>
+            </a:pPr>
+            <a:r>
+              <a:rPr lang="en-US" sz="900" b="1" dirty="0">
+                <a:solidFill>
+                  <a:srgbClr val="9D174D"/>
+                </a:solidFill>
+                <a:latin typeface="Trebuchet MS" pitchFamily="34" charset="0"/>
+                <a:ea typeface="Trebuchet MS" pitchFamily="34" charset="-122"/>
+                <a:cs typeface="Trebuchet MS" pitchFamily="34" charset="-120"/>
+              </a:rPr>
+              <a:t>s</a:t>
+            </a:r>
+            <a:endParaRPr lang="en-US" sz="900" dirty="0"/>
+          </a:p>
+        </p:txBody>
+      </p:sp>
+      <p:sp>
+        <p:nvSpPr>
+          <p:cNvPr id="48" name="Shape 46"/>
+          <p:cNvSpPr/>
+          <p:nvPr/>
+        </p:nvSpPr>
+        <p:spPr>
+          <a:xfrm>
+            <a:off x="7677912" y="4169664"/>
+            <a:ext cx="685800" cy="384048"/>
+          </a:xfrm>
+          <a:prstGeom prst="rect">
+            <a:avLst>
+              <a:gd name="adj" fmla="val 9524"/>
+            </a:avLst>
+          </a:prstGeom>
+          <a:solidFill>
+            <a:srgbClr val="FFFFFF"/>
+          </a:solidFill>
+          <a:ln w="12700">
+            <a:solidFill>
+              <a:srgbClr val="DB2777"/>
+            </a:solidFill>
+            <a:prstDash val="solid"/>
+          </a:ln>
+        </p:spPr>
+      </p:sp>
+      <p:sp>
+        <p:nvSpPr>
+          <p:cNvPr id="49" name="Text 47"/>
+          <p:cNvSpPr/>
+          <p:nvPr/>
+        </p:nvSpPr>
+        <p:spPr>
+          <a:xfrm>
+            <a:off x="7677912" y="4169664"/>
+            <a:ext cx="685800" cy="384048"/>
+          </a:xfrm>
+          <a:prstGeom prst="rect">
+            <a:avLst/>
+          </a:prstGeom>
+          <a:noFill/>
+          <a:ln/>
+        </p:spPr>
+        <p:txBody>
+          <a:bodyPr wrap="square" lIns="0" tIns="0" rIns="0" bIns="0" rtlCol="0" anchor="ctr"/>
+          <a:lstStyle/>
+          <a:p>
+            <a:pPr algn="ctr" indent="0" marL="0">
+              <a:buNone/>
+            </a:pPr>
+            <a:r>
+              <a:rPr lang="en-US" sz="900" b="1" dirty="0">
+                <a:solidFill>
+                  <a:srgbClr val="9D174D"/>
+                </a:solidFill>
+                <a:latin typeface="Trebuchet MS" pitchFamily="34" charset="0"/>
+                <a:ea typeface="Trebuchet MS" pitchFamily="34" charset="-122"/>
+                <a:cs typeface="Trebuchet MS" pitchFamily="34" charset="-120"/>
+              </a:rPr>
+              <a:t>t</a:t>
             </a:r>
             <a:endParaRPr lang="en-US" sz="900" dirty="0"/>
           </a:p>
@@ -34056,7 +33654,7 @@
                 <a:ea typeface="Trebuchet MS" pitchFamily="34" charset="-122"/>
                 <a:cs typeface="Trebuchet MS" pitchFamily="34" charset="-120"/>
               </a:rPr>
-              <a:t>un-</a:t>
+              <a:t>steam-</a:t>
             </a:r>
             <a:endParaRPr lang="en-US" sz="1300" dirty="0"/>
           </a:p>
@@ -34209,7 +33807,7 @@
                 <a:ea typeface="Trebuchet MS" pitchFamily="34" charset="-122"/>
                 <a:cs typeface="Trebuchet MS" pitchFamily="34" charset="-120"/>
               </a:rPr>
-              <a:t>out-</a:t>
+              <a:t>hard-</a:t>
             </a:r>
             <a:endParaRPr lang="en-US" sz="1300" dirty="0"/>
           </a:p>
@@ -34362,7 +33960,7 @@
                 <a:ea typeface="Trebuchet MS" pitchFamily="34" charset="-122"/>
                 <a:cs typeface="Trebuchet MS" pitchFamily="34" charset="-120"/>
               </a:rPr>
-              <a:t>over-</a:t>
+              <a:t>sure-</a:t>
             </a:r>
             <a:endParaRPr lang="en-US" sz="1300" dirty="0"/>
           </a:p>
@@ -34515,7 +34113,7 @@
                 <a:ea typeface="Trebuchet MS" pitchFamily="34" charset="-122"/>
                 <a:cs typeface="Trebuchet MS" pitchFamily="34" charset="-120"/>
               </a:rPr>
-              <a:t>re-</a:t>
+              <a:t>color-</a:t>
             </a:r>
             <a:endParaRPr lang="en-US" sz="1300" dirty="0"/>
           </a:p>
@@ -34709,7 +34307,7 @@
                 <a:ea typeface="Trebuchet MS" pitchFamily="34" charset="-122"/>
                 <a:cs typeface="Trebuchet MS" pitchFamily="34" charset="-120"/>
               </a:rPr>
-              <a:t>breakfast</a:t>
+              <a:t>fast</a:t>
             </a:r>
             <a:endParaRPr lang="en-US" sz="1200" dirty="0"/>
           </a:p>
@@ -35105,7 +34703,7 @@
                 <a:ea typeface="Trebuchet MS" pitchFamily="34" charset="-122"/>
                 <a:cs typeface="Trebuchet MS" pitchFamily="34" charset="-120"/>
               </a:rPr>
-              <a:t>steadfast</a:t>
+              <a:t>breakfast</a:t>
             </a:r>
             <a:endParaRPr lang="en-US" sz="1200" dirty="0"/>
           </a:p>
@@ -35171,7 +34769,7 @@
                 <a:ea typeface="Trebuchet MS" pitchFamily="34" charset="-122"/>
                 <a:cs typeface="Trebuchet MS" pitchFamily="34" charset="-120"/>
               </a:rPr>
-              <a:t>outfast</a:t>
+              <a:t>steadfast</a:t>
             </a:r>
             <a:endParaRPr lang="en-US" sz="1200" dirty="0"/>
           </a:p>
@@ -36359,7 +35957,7 @@
                 <a:ea typeface="Calibri" pitchFamily="34" charset="-122"/>
                 <a:cs typeface="Calibri" pitchFamily="34" charset="-120"/>
               </a:rPr>
-              <a:t>1.  The word 'breakfast' contains the root 'fast', meaning to go without food.</a:t>
+              <a:t>1.  Adding '-en' to 'fast' makes the word 'fasten', meaning to fix something firmly.</a:t>
             </a:r>
             <a:endParaRPr lang="en-US" sz="1300" dirty="0"/>
           </a:p>
@@ -36498,7 +36096,7 @@
                 <a:ea typeface="Calibri" pitchFamily="34" charset="-122"/>
                 <a:cs typeface="Calibri" pitchFamily="34" charset="-120"/>
               </a:rPr>
-              <a:t>2.  The root 'fast' can only mean moving quickly and never relates to food.</a:t>
+              <a:t>2.  The root 'fast' comes from ancient Greek and means 'to run'.</a:t>
             </a:r>
             <a:endParaRPr lang="en-US" sz="1300" dirty="0"/>
           </a:p>
@@ -36637,7 +36235,7 @@
                 <a:ea typeface="Calibri" pitchFamily="34" charset="-122"/>
                 <a:cs typeface="Calibri" pitchFamily="34" charset="-120"/>
               </a:rPr>
-              <a:t>3.  'Steadfast' means staying firm and committed, and contains the root 'fast'.</a:t>
+              <a:t>3.  'Steadfast' means staying firm and loyal, using the root 'fast' meaning firm.</a:t>
             </a:r>
             <a:endParaRPr lang="en-US" sz="1300" dirty="0"/>
           </a:p>
@@ -36776,7 +36374,7 @@
                 <a:ea typeface="Calibri" pitchFamily="34" charset="-122"/>
                 <a:cs typeface="Calibri" pitchFamily="34" charset="-120"/>
               </a:rPr>
-              <a:t>4.  Adding '-en' to 'fast' gives us 'fasten', meaning to fix or attach something firmly.</a:t>
+              <a:t>4.  The root 'fast' only ever means moving quickly and never relates to food.</a:t>
             </a:r>
             <a:endParaRPr lang="en-US" sz="1300" dirty="0"/>
           </a:p>
@@ -36799,11 +36397,11 @@
             </a:avLst>
           </a:prstGeom>
           <a:solidFill>
-            <a:srgbClr val="DCFCE7"/>
-          </a:solidFill>
-          <a:ln w="12700">
-            <a:solidFill>
-              <a:srgbClr val="16A34A"/>
+            <a:srgbClr val="FEE2E2"/>
+          </a:solidFill>
+          <a:ln w="12700">
+            <a:solidFill>
+              <a:srgbClr val="DC2626"/>
             </a:solidFill>
             <a:prstDash val="solid"/>
           </a:ln>
@@ -36836,13 +36434,13 @@
             <a:r>
               <a:rPr lang="en-US" sz="1100" b="1" dirty="0">
                 <a:solidFill>
-                  <a:srgbClr val="16A34A"/>
+                  <a:srgbClr val="DC2626"/>
                 </a:solidFill>
                 <a:latin typeface="Trebuchet MS" pitchFamily="34" charset="0"/>
                 <a:ea typeface="Trebuchet MS" pitchFamily="34" charset="-122"/>
                 <a:cs typeface="Trebuchet MS" pitchFamily="34" charset="-120"/>
               </a:rPr>
-              <a:t>TRUE</a:t>
+              <a:t>FALSE</a:t>
             </a:r>
             <a:endParaRPr lang="en-US" sz="1100" dirty="0"/>
           </a:p>
@@ -36915,7 +36513,7 @@
                 <a:ea typeface="Calibri" pitchFamily="34" charset="-122"/>
                 <a:cs typeface="Calibri" pitchFamily="34" charset="-120"/>
               </a:rPr>
-              <a:t>5.  The word 'fastest' contains a prefix that means 'most'.</a:t>
+              <a:t>5.  The word 'breakfast' contains the root 'fast', meaning to go without food.</a:t>
             </a:r>
             <a:endParaRPr lang="en-US" sz="1300" dirty="0"/>
           </a:p>
@@ -36938,11 +36536,11 @@
             </a:avLst>
           </a:prstGeom>
           <a:solidFill>
-            <a:srgbClr val="FEE2E2"/>
-          </a:solidFill>
-          <a:ln w="12700">
-            <a:solidFill>
-              <a:srgbClr val="DC2626"/>
+            <a:srgbClr val="DCFCE7"/>
+          </a:solidFill>
+          <a:ln w="12700">
+            <a:solidFill>
+              <a:srgbClr val="16A34A"/>
             </a:solidFill>
             <a:prstDash val="solid"/>
           </a:ln>
@@ -36975,13 +36573,13 @@
             <a:r>
               <a:rPr lang="en-US" sz="1100" b="1" dirty="0">
                 <a:solidFill>
-                  <a:srgbClr val="DC2626"/>
+                  <a:srgbClr val="16A34A"/>
                 </a:solidFill>
                 <a:latin typeface="Trebuchet MS" pitchFamily="34" charset="0"/>
                 <a:ea typeface="Trebuchet MS" pitchFamily="34" charset="-122"/>
                 <a:cs typeface="Trebuchet MS" pitchFamily="34" charset="-120"/>
               </a:rPr>
-              <a:t>FALSE</a:t>
+              <a:t>TRUE</a:t>
             </a:r>
             <a:endParaRPr lang="en-US" sz="1100" dirty="0"/>
           </a:p>
@@ -37449,7 +37047,7 @@
                 <a:ea typeface="Calibri" pitchFamily="34" charset="-122"/>
                 <a:cs typeface="Calibri" pitchFamily="34" charset="-120"/>
               </a:rPr>
-              <a:t>Origin: Latin: fastus</a:t>
+              <a:t>Origin: Old English: fæst</a:t>
             </a:r>
             <a:endParaRPr lang="en-US" sz="1100" dirty="0"/>
           </a:p>
@@ -37554,7 +37152,7 @@
                 <a:ea typeface="Trebuchet MS" pitchFamily="34" charset="-122"/>
                 <a:cs typeface="Trebuchet MS" pitchFamily="34" charset="-120"/>
               </a:rPr>
-              <a:t>breakfast</a:t>
+              <a:t>fast</a:t>
             </a:r>
             <a:endParaRPr lang="en-US" sz="1300" dirty="0"/>
           </a:p>
@@ -37950,7 +37548,7 @@
                 <a:ea typeface="Trebuchet MS" pitchFamily="34" charset="-122"/>
                 <a:cs typeface="Trebuchet MS" pitchFamily="34" charset="-120"/>
               </a:rPr>
-              <a:t>steadfast</a:t>
+              <a:t>breakfast</a:t>
             </a:r>
             <a:endParaRPr lang="en-US" sz="1300" dirty="0"/>
           </a:p>
@@ -38735,7 +38333,7 @@
                 <a:ea typeface="Trebuchet MS" pitchFamily="34" charset="-122"/>
                 <a:cs typeface="Trebuchet MS" pitchFamily="34" charset="-120"/>
               </a:rPr>
-              <a:t>un-</a:t>
+              <a:t>steam-</a:t>
             </a:r>
             <a:endParaRPr lang="en-US" sz="1300" dirty="0"/>
           </a:p>
@@ -38888,7 +38486,7 @@
                 <a:ea typeface="Trebuchet MS" pitchFamily="34" charset="-122"/>
                 <a:cs typeface="Trebuchet MS" pitchFamily="34" charset="-120"/>
               </a:rPr>
-              <a:t>out-</a:t>
+              <a:t>hard-</a:t>
             </a:r>
             <a:endParaRPr lang="en-US" sz="1300" dirty="0"/>
           </a:p>
@@ -39041,7 +38639,7 @@
                 <a:ea typeface="Trebuchet MS" pitchFamily="34" charset="-122"/>
                 <a:cs typeface="Trebuchet MS" pitchFamily="34" charset="-120"/>
               </a:rPr>
-              <a:t>over-</a:t>
+              <a:t>sure-</a:t>
             </a:r>
             <a:endParaRPr lang="en-US" sz="1300" dirty="0"/>
           </a:p>
@@ -39194,7 +38792,7 @@
                 <a:ea typeface="Trebuchet MS" pitchFamily="34" charset="-122"/>
                 <a:cs typeface="Trebuchet MS" pitchFamily="34" charset="-120"/>
               </a:rPr>
-              <a:t>re-</a:t>
+              <a:t>color-</a:t>
             </a:r>
             <a:endParaRPr lang="en-US" sz="1300" dirty="0"/>
           </a:p>
@@ -39724,7 +39322,7 @@
                 <a:ea typeface="Trebuchet MS" pitchFamily="34" charset="-122"/>
                 <a:cs typeface="Trebuchet MS" pitchFamily="34" charset="-120"/>
               </a:rPr>
-              <a:t>breakfast</a:t>
+              <a:t>fast</a:t>
             </a:r>
             <a:endParaRPr lang="en-US" sz="1400" dirty="0"/>
           </a:p>
@@ -40128,7 +39726,7 @@
                 <a:ea typeface="Trebuchet MS" pitchFamily="34" charset="-122"/>
                 <a:cs typeface="Trebuchet MS" pitchFamily="34" charset="-120"/>
               </a:rPr>
-              <a:t>breakfast</a:t>
+              <a:t>fast</a:t>
             </a:r>
             <a:endParaRPr lang="en-US" sz="1200" dirty="0"/>
           </a:p>
@@ -40194,7 +39792,7 @@
                 <a:ea typeface="Calibri" pitchFamily="34" charset="-122"/>
                 <a:cs typeface="Calibri" pitchFamily="34" charset="-120"/>
               </a:rPr>
-              <a:t>The first meal of the day, eaten after your overnight fast (time without eating).</a:t>
+              <a:t>Moving quickly, or choosing not to eat for a period of time.</a:t>
             </a:r>
             <a:endParaRPr lang="en-US" sz="1200" dirty="0"/>
           </a:p>
@@ -40333,7 +39931,7 @@
                 <a:ea typeface="Calibri" pitchFamily="34" charset="-122"/>
                 <a:cs typeface="Calibri" pitchFamily="34" charset="-120"/>
               </a:rPr>
-              <a:t>Going without food for a period of time, often for health or religious reasons.</a:t>
+              <a:t>Going without food for a set period of time, often for health or religious reasons.</a:t>
             </a:r>
             <a:endParaRPr lang="en-US" sz="1200" dirty="0"/>
           </a:p>
@@ -40472,7 +40070,7 @@
                 <a:ea typeface="Calibri" pitchFamily="34" charset="-122"/>
                 <a:cs typeface="Calibri" pitchFamily="34" charset="-120"/>
               </a:rPr>
-              <a:t>Moving more quickly than everyone or everything else.</a:t>
+              <a:t>Moving more quickly than anyone or anything else.</a:t>
             </a:r>
             <a:endParaRPr lang="en-US" sz="1200" dirty="0"/>
           </a:p>
@@ -40611,7 +40209,7 @@
                 <a:ea typeface="Calibri" pitchFamily="34" charset="-122"/>
                 <a:cs typeface="Calibri" pitchFamily="34" charset="-120"/>
               </a:rPr>
-              <a:t>To do up or attach something firmly, like a seatbelt or button.</a:t>
+              <a:t>To fix or attach something firmly so it does not come loose.</a:t>
             </a:r>
             <a:endParaRPr lang="en-US" sz="1200" dirty="0"/>
           </a:p>
@@ -40750,7 +40348,7 @@
                 <a:ea typeface="Calibri" pitchFamily="34" charset="-122"/>
                 <a:cs typeface="Calibri" pitchFamily="34" charset="-120"/>
               </a:rPr>
-              <a:t>Staying firmly committed and not giving up, no matter what.</a:t>
+              <a:t>The first meal of the day that 'breaks' the overnight fast.</a:t>
             </a:r>
             <a:endParaRPr lang="en-US" sz="1200" dirty="0"/>
           </a:p>
@@ -40889,7 +40487,7 @@
                 <a:ea typeface="Calibri" pitchFamily="34" charset="-122"/>
                 <a:cs typeface="Calibri" pitchFamily="34" charset="-120"/>
               </a:rPr>
-              <a:t>In a quick or rapid manner (used informally for emphasis).</a:t>
+              <a:t>In a quick or speedy manner (an older, less common form of 'fast').</a:t>
             </a:r>
             <a:endParaRPr lang="en-US" sz="1200" dirty="0"/>
           </a:p>
@@ -40962,7 +40560,7 @@
                 <a:ea typeface="Trebuchet MS" pitchFamily="34" charset="-122"/>
                 <a:cs typeface="Trebuchet MS" pitchFamily="34" charset="-120"/>
               </a:rPr>
-              <a:t>steadfast</a:t>
+              <a:t>breakfast</a:t>
             </a:r>
             <a:endParaRPr lang="en-US" sz="1200" dirty="0"/>
           </a:p>
@@ -41523,7 +41121,7 @@
                 <a:ea typeface="Calibri" pitchFamily="34" charset="-122"/>
                 <a:cs typeface="Calibri" pitchFamily="34" charset="-120"/>
               </a:rPr>
-              <a:t>The cheetah is the fastest land animal on Earth, reaching incredible speeds in just a few seconds.</a:t>
+              <a:t>The athlete was the fastest runner in the whole school carnival.</a:t>
             </a:r>
             <a:endParaRPr lang="en-US" sz="1500" dirty="0"/>
           </a:p>
@@ -41687,7 +41285,7 @@
                 <a:ea typeface="Calibri" pitchFamily="34" charset="-122"/>
                 <a:cs typeface="Calibri" pitchFamily="34" charset="-120"/>
               </a:rPr>
-              <a:t>Every morning, we break our overnight fast by eating breakfast to give our bodies energy for the day.</a:t>
+              <a:t>Before the big race, she made sure to fasten her shoelaces tightly.</a:t>
             </a:r>
             <a:endParaRPr lang="en-US" sz="1500" dirty="0"/>
           </a:p>
@@ -41851,7 +41449,7 @@
                 <a:ea typeface="Calibri" pitchFamily="34" charset="-122"/>
                 <a:cs typeface="Calibri" pitchFamily="34" charset="-120"/>
               </a:rPr>
-              <a:t>She fastened her helmet tightly before riding her bike down the steep hill.</a:t>
+              <a:t>Many cultures around the world practise fasting for religious or health reasons.</a:t>
             </a:r>
             <a:endParaRPr lang="en-US" sz="1500" dirty="0"/>
           </a:p>

--- a/output/wordlabs-fast-3day.pptx
+++ b/output/wordlabs-fast-3day.pptx
@@ -4240,7 +4240,7 @@
                 <a:ea typeface="Calibri" pitchFamily="34" charset="-122"/>
                 <a:cs typeface="Calibri" pitchFamily="34" charset="-120"/>
               </a:rPr>
-              <a:t>"quick, firm, or not eating"</a:t>
+              <a:t>"quick"</a:t>
             </a:r>
             <a:endParaRPr lang="en-US" sz="2200" dirty="0"/>
           </a:p>
@@ -4279,7 +4279,7 @@
                 <a:ea typeface="Calibri" pitchFamily="34" charset="-122"/>
                 <a:cs typeface="Calibri" pitchFamily="34" charset="-120"/>
               </a:rPr>
-              <a:t>Origin: Old English: fæst</a:t>
+              <a:t>Origin: Core English root</a:t>
             </a:r>
             <a:endParaRPr lang="en-US" sz="1300" dirty="0"/>
           </a:p>
@@ -5288,7 +5288,7 @@
                 <a:ea typeface="Calibri" pitchFamily="34" charset="-122"/>
                 <a:cs typeface="Calibri" pitchFamily="34" charset="-120"/>
               </a:rPr>
-              <a:t>Word Labs  •  wordlabs.app  •  Root: 'fast' = quick, firm, or not eating</a:t>
+              <a:t>Word Labs  •  wordlabs.app  •  Root: 'fast' = quick</a:t>
             </a:r>
             <a:endParaRPr lang="en-US" sz="800" dirty="0"/>
           </a:p>
@@ -5928,7 +5928,7 @@
                 <a:ea typeface="Calibri" pitchFamily="34" charset="-122"/>
                 <a:cs typeface="Calibri" pitchFamily="34" charset="-120"/>
               </a:rPr>
-              <a:t>Word Labs  •  wordlabs.app  •  Root: 'fast' = quick, firm, or not eating</a:t>
+              <a:t>Word Labs  •  wordlabs.app  •  Root: 'fast' = quick</a:t>
             </a:r>
             <a:endParaRPr lang="en-US" sz="800" dirty="0"/>
           </a:p>
@@ -6040,7 +6040,7 @@
                 <a:ea typeface="Calibri" pitchFamily="34" charset="-122"/>
                 <a:cs typeface="Calibri" pitchFamily="34" charset="-120"/>
               </a:rPr>
-              <a:t>She was the </a:t>
+              <a:t>The cheetah is the </a:t>
             </a:r>
             <a:pPr algn="l" indent="0" marL="0">
               <a:buNone/>
@@ -6057,7 +6057,7 @@
                 <a:ea typeface="Calibri" pitchFamily="34" charset="-122"/>
                 <a:cs typeface="Calibri" pitchFamily="34" charset="-120"/>
               </a:rPr>
-              <a:t>fastest</a:t>
+              <a:t>fast</a:t>
             </a:r>
             <a:pPr algn="l" indent="0" marL="0">
               <a:buNone/>
@@ -6071,7 +6071,7 @@
                 <a:ea typeface="Calibri" pitchFamily="34" charset="-122"/>
                 <a:cs typeface="Calibri" pitchFamily="34" charset="-120"/>
               </a:rPr>
-              <a:t> sprinter on the team, so the coach asked her to </a:t>
+              <a:t>est land animal, so it can run very </a:t>
             </a:r>
             <a:pPr algn="l" indent="0" marL="0">
               <a:buNone/>
@@ -6088,7 +6088,7 @@
                 <a:ea typeface="Calibri" pitchFamily="34" charset="-122"/>
                 <a:cs typeface="Calibri" pitchFamily="34" charset="-120"/>
               </a:rPr>
-              <a:t>fasten</a:t>
+              <a:t>fast</a:t>
             </a:r>
             <a:pPr algn="l" indent="0" marL="0">
               <a:buNone/>
@@ -6102,7 +6102,38 @@
                 <a:ea typeface="Calibri" pitchFamily="34" charset="-122"/>
                 <a:cs typeface="Calibri" pitchFamily="34" charset="-120"/>
               </a:rPr>
-              <a:t> her race bib before the event.</a:t>
+              <a:t>. She </a:t>
+            </a:r>
+            <a:pPr algn="l" indent="0" marL="0">
+              <a:buNone/>
+            </a:pPr>
+            <a:r>
+              <a:rPr lang="en-US" sz="1800" b="1" dirty="0">
+                <a:solidFill>
+                  <a:srgbClr val="0D9488"/>
+                </a:solidFill>
+                <a:highlight>
+                  <a:srgbClr val="CCFBF1"/>
+                </a:highlight>
+                <a:latin typeface="Calibri" pitchFamily="34" charset="0"/>
+                <a:ea typeface="Calibri" pitchFamily="34" charset="-122"/>
+                <a:cs typeface="Calibri" pitchFamily="34" charset="-120"/>
+              </a:rPr>
+              <a:t>fasted</a:t>
+            </a:r>
+            <a:pPr algn="l" indent="0" marL="0">
+              <a:buNone/>
+            </a:pPr>
+            <a:r>
+              <a:rPr lang="en-US" sz="1800" dirty="0">
+                <a:solidFill>
+                  <a:srgbClr val="0F172A"/>
+                </a:solidFill>
+                <a:latin typeface="Calibri" pitchFamily="34" charset="0"/>
+                <a:ea typeface="Calibri" pitchFamily="34" charset="-122"/>
+                <a:cs typeface="Calibri" pitchFamily="34" charset="-120"/>
+              </a:rPr>
+              <a:t> for the whole day before the medical test.</a:t>
             </a:r>
             <a:endParaRPr lang="en-US" sz="1800" dirty="0"/>
           </a:p>
@@ -6257,7 +6288,7 @@
                 <a:ea typeface="Trebuchet MS" pitchFamily="34" charset="-122"/>
                 <a:cs typeface="Trebuchet MS" pitchFamily="34" charset="-120"/>
               </a:rPr>
-              <a:t>fastest</a:t>
+              <a:t>fast</a:t>
             </a:r>
             <a:endParaRPr lang="en-US" sz="1400" dirty="0"/>
           </a:p>
@@ -6385,7 +6416,7 @@
                 <a:ea typeface="Trebuchet MS" pitchFamily="34" charset="-122"/>
                 <a:cs typeface="Trebuchet MS" pitchFamily="34" charset="-120"/>
               </a:rPr>
-              <a:t>fasten</a:t>
+              <a:t>fasted</a:t>
             </a:r>
             <a:endParaRPr lang="en-US" sz="1400" dirty="0"/>
           </a:p>
@@ -6716,7 +6747,7 @@
                 <a:ea typeface="Calibri" pitchFamily="34" charset="-122"/>
                 <a:cs typeface="Calibri" pitchFamily="34" charset="-120"/>
               </a:rPr>
-              <a:t>Word Labs  •  wordlabs.app  •  Root: 'fast' = quick, firm, or not eating</a:t>
+              <a:t>Word Labs  •  wordlabs.app  •  Root: 'fast' = quick</a:t>
             </a:r>
             <a:endParaRPr lang="en-US" sz="800" dirty="0"/>
           </a:p>
@@ -6855,7 +6886,7 @@
                 <a:ea typeface="Trebuchet MS" pitchFamily="34" charset="-122"/>
                 <a:cs typeface="Trebuchet MS" pitchFamily="34" charset="-120"/>
               </a:rPr>
-              <a:t>fastest</a:t>
+              <a:t>fast</a:t>
             </a:r>
             <a:endParaRPr lang="en-US" sz="2800" dirty="0"/>
           </a:p>
@@ -7543,7 +7574,7 @@
                 <a:ea typeface="Calibri" pitchFamily="34" charset="-122"/>
                 <a:cs typeface="Calibri" pitchFamily="34" charset="-120"/>
               </a:rPr>
-              <a:t>Word Labs  •  wordlabs.app  •  Root: 'fast' = quick, firm, or not eating</a:t>
+              <a:t>Word Labs  •  wordlabs.app  •  Root: 'fast' = quick</a:t>
             </a:r>
             <a:endParaRPr lang="en-US" sz="800" dirty="0"/>
           </a:p>
@@ -7682,7 +7713,7 @@
                 <a:ea typeface="Trebuchet MS" pitchFamily="34" charset="-122"/>
                 <a:cs typeface="Trebuchet MS" pitchFamily="34" charset="-120"/>
               </a:rPr>
-              <a:t>fastest</a:t>
+              <a:t>fast</a:t>
             </a:r>
             <a:endParaRPr lang="en-US" sz="2800" dirty="0"/>
           </a:p>
@@ -7762,7 +7793,7 @@
         </p:nvSpPr>
         <p:spPr>
           <a:xfrm>
-            <a:off x="2938272" y="2258568"/>
+            <a:off x="4370832" y="2258568"/>
             <a:ext cx="1828800" cy="292608"/>
           </a:xfrm>
           <a:prstGeom prst="rect">
@@ -7796,7 +7827,7 @@
         </p:nvSpPr>
         <p:spPr>
           <a:xfrm>
-            <a:off x="2938272" y="2258568"/>
+            <a:off x="4370832" y="2258568"/>
             <a:ext cx="1828800" cy="292608"/>
           </a:xfrm>
           <a:prstGeom prst="rect">
@@ -7835,7 +7866,7 @@
         </p:nvSpPr>
         <p:spPr>
           <a:xfrm>
-            <a:off x="2938272" y="2569464"/>
+            <a:off x="4370832" y="2569464"/>
             <a:ext cx="1828800" cy="201168"/>
           </a:xfrm>
           <a:prstGeom prst="rect">
@@ -7860,7 +7891,7 @@
                 <a:ea typeface="Calibri" pitchFamily="34" charset="-122"/>
                 <a:cs typeface="Calibri" pitchFamily="34" charset="-120"/>
               </a:rPr>
-              <a:t>quick or moving with speed</a:t>
+              <a:t>quick</a:t>
             </a:r>
             <a:endParaRPr lang="en-US" sz="850" dirty="0"/>
           </a:p>
@@ -7874,30 +7905,23 @@
         </p:nvSpPr>
         <p:spPr>
           <a:xfrm>
-            <a:off x="5803392" y="2258568"/>
-            <a:ext cx="1828800" cy="292608"/>
+            <a:off x="365760" y="3273552"/>
+            <a:ext cx="1371600" cy="658368"/>
           </a:xfrm>
           <a:prstGeom prst="rect">
             <a:avLst>
-              <a:gd name="adj" fmla="val 25000"/>
+              <a:gd name="adj" fmla="val 8333"/>
             </a:avLst>
           </a:prstGeom>
           <a:solidFill>
-            <a:srgbClr val="FCE7F3"/>
-          </a:solidFill>
-          <a:ln w="19050">
-            <a:solidFill>
-              <a:srgbClr val="DB2777"/>
-            </a:solidFill>
-            <a:prstDash val="solid"/>
-          </a:ln>
-          <a:effectLst>
-            <a:outerShdw sx="100000" sy="100000" kx="0" ky="0" algn="bl" rotWithShape="0" blurRad="101600" dist="38100" dir="8100000">
-              <a:srgbClr val="000000">
-                <a:alpha val="12000"/>
-              </a:srgbClr>
-            </a:outerShdw>
-          </a:effectLst>
+            <a:srgbClr val="E2E8F0"/>
+          </a:solidFill>
+          <a:ln w="12700">
+            <a:solidFill>
+              <a:srgbClr val="E2E8F0"/>
+            </a:solidFill>
+            <a:prstDash val="solid"/>
+          </a:ln>
         </p:spPr>
       </p:sp>
       <p:sp>
@@ -7908,8 +7932,8 @@
         </p:nvSpPr>
         <p:spPr>
           <a:xfrm>
-            <a:off x="5803392" y="2258568"/>
-            <a:ext cx="1828800" cy="292608"/>
+            <a:off x="365760" y="3273552"/>
+            <a:ext cx="1371600" cy="658368"/>
           </a:xfrm>
           <a:prstGeom prst="rect">
             <a:avLst/>
@@ -7925,73 +7949,100 @@
               <a:buNone/>
             </a:pPr>
             <a:r>
-              <a:rPr lang="en-US" sz="1300" b="1" dirty="0">
-                <a:solidFill>
-                  <a:srgbClr val="9D174D"/>
+              <a:rPr lang="en-US" sz="1100" b="1" dirty="0">
+                <a:solidFill>
+                  <a:srgbClr val="475569"/>
                 </a:solidFill>
                 <a:latin typeface="Trebuchet MS" pitchFamily="34" charset="0"/>
                 <a:ea typeface="Trebuchet MS" pitchFamily="34" charset="-122"/>
                 <a:cs typeface="Trebuchet MS" pitchFamily="34" charset="-120"/>
               </a:rPr>
-              <a:t>-est</a:t>
-            </a:r>
-            <a:endParaRPr lang="en-US" sz="1300" dirty="0"/>
-          </a:p>
-        </p:txBody>
-      </p:sp>
-      <p:sp>
-        <p:nvSpPr>
-          <p:cNvPr id="21" name="Text 19"/>
-          <p:cNvSpPr/>
-          <p:nvPr/>
-        </p:nvSpPr>
-        <p:spPr>
-          <a:xfrm>
-            <a:off x="5803392" y="2569464"/>
-            <a:ext cx="1828800" cy="201168"/>
-          </a:xfrm>
-          <a:prstGeom prst="rect">
-            <a:avLst/>
-          </a:prstGeom>
-          <a:noFill/>
-          <a:ln/>
-        </p:spPr>
-        <p:txBody>
-          <a:bodyPr wrap="square" lIns="0" tIns="0" rIns="0" bIns="0" rtlCol="0" anchor="t"/>
-          <a:lstStyle/>
-          <a:p>
-            <a:pPr algn="ctr" indent="0" marL="0">
-              <a:buNone/>
-            </a:pPr>
-            <a:r>
-              <a:rPr lang="en-US" sz="850" dirty="0">
-                <a:solidFill>
-                  <a:srgbClr val="475569"/>
+              <a:t>Syllables</a:t>
+            </a:r>
+            <a:endParaRPr lang="en-US" sz="1100" dirty="0"/>
+          </a:p>
+        </p:txBody>
+      </p:sp>
+      <p:sp>
+        <p:nvSpPr>
+          <p:cNvPr id="21" name="Shape 19"/>
+          <p:cNvSpPr/>
+          <p:nvPr/>
+        </p:nvSpPr>
+        <p:spPr>
+          <a:xfrm>
+            <a:off x="1874520" y="3273552"/>
+            <a:ext cx="6903720" cy="658368"/>
+          </a:xfrm>
+          <a:prstGeom prst="rect">
+            <a:avLst>
+              <a:gd name="adj" fmla="val 8333"/>
+            </a:avLst>
+          </a:prstGeom>
+          <a:solidFill>
+            <a:srgbClr val="F8FAFC"/>
+          </a:solidFill>
+          <a:ln w="12700">
+            <a:solidFill>
+              <a:srgbClr val="E2E8F0"/>
+            </a:solidFill>
+            <a:prstDash val="dash"/>
+          </a:ln>
+        </p:spPr>
+      </p:sp>
+      <p:sp>
+        <p:nvSpPr>
+          <p:cNvPr id="22" name="Text 20"/>
+          <p:cNvSpPr/>
+          <p:nvPr/>
+        </p:nvSpPr>
+        <p:spPr>
+          <a:xfrm>
+            <a:off x="1874520" y="3273552"/>
+            <a:ext cx="6903720" cy="658368"/>
+          </a:xfrm>
+          <a:prstGeom prst="rect">
+            <a:avLst/>
+          </a:prstGeom>
+          <a:noFill/>
+          <a:ln/>
+        </p:spPr>
+        <p:txBody>
+          <a:bodyPr wrap="square" rtlCol="0" anchor="ctr"/>
+          <a:lstStyle/>
+          <a:p>
+            <a:pPr algn="ctr" indent="0" marL="0">
+              <a:buNone/>
+            </a:pPr>
+            <a:r>
+              <a:rPr lang="en-US" sz="1100" i="1" dirty="0">
+                <a:solidFill>
+                  <a:srgbClr val="CBD5E1"/>
                 </a:solidFill>
                 <a:latin typeface="Calibri" pitchFamily="34" charset="0"/>
                 <a:ea typeface="Calibri" pitchFamily="34" charset="-122"/>
                 <a:cs typeface="Calibri" pitchFamily="34" charset="-120"/>
               </a:rPr>
-              <a:t>most (superlative)</a:t>
-            </a:r>
-            <a:endParaRPr lang="en-US" sz="850" dirty="0"/>
-          </a:p>
-        </p:txBody>
-      </p:sp>
-      <p:sp>
-        <p:nvSpPr>
-          <p:cNvPr id="22" name="Shape 20"/>
-          <p:cNvSpPr/>
-          <p:nvPr/>
-        </p:nvSpPr>
-        <p:spPr>
-          <a:xfrm>
-            <a:off x="365760" y="3273552"/>
-            <a:ext cx="1371600" cy="658368"/>
+              <a:t>Write here...</a:t>
+            </a:r>
+            <a:endParaRPr lang="en-US" sz="1100" dirty="0"/>
+          </a:p>
+        </p:txBody>
+      </p:sp>
+      <p:sp>
+        <p:nvSpPr>
+          <p:cNvPr id="23" name="Shape 21"/>
+          <p:cNvSpPr/>
+          <p:nvPr/>
+        </p:nvSpPr>
+        <p:spPr>
+          <a:xfrm>
+            <a:off x="365760" y="4096512"/>
+            <a:ext cx="1371600" cy="804672"/>
           </a:xfrm>
           <a:prstGeom prst="rect">
             <a:avLst>
-              <a:gd name="adj" fmla="val 8333"/>
+              <a:gd name="adj" fmla="val 6818"/>
             </a:avLst>
           </a:prstGeom>
           <a:solidFill>
@@ -8007,14 +8058,14 @@
       </p:sp>
       <p:sp>
         <p:nvSpPr>
-          <p:cNvPr id="23" name="Text 21"/>
-          <p:cNvSpPr/>
-          <p:nvPr/>
-        </p:nvSpPr>
-        <p:spPr>
-          <a:xfrm>
-            <a:off x="365760" y="3273552"/>
-            <a:ext cx="1371600" cy="658368"/>
+          <p:cNvPr id="24" name="Text 22"/>
+          <p:cNvSpPr/>
+          <p:nvPr/>
+        </p:nvSpPr>
+        <p:spPr>
+          <a:xfrm>
+            <a:off x="365760" y="4096512"/>
+            <a:ext cx="1371600" cy="804672"/>
           </a:xfrm>
           <a:prstGeom prst="rect">
             <a:avLst/>
@@ -8038,7 +8089,7 @@
                 <a:ea typeface="Trebuchet MS" pitchFamily="34" charset="-122"/>
                 <a:cs typeface="Trebuchet MS" pitchFamily="34" charset="-120"/>
               </a:rPr>
-              <a:t>Syllables</a:t>
+              <a:t>Phonemes</a:t>
             </a:r>
             <a:endParaRPr lang="en-US" sz="1100" dirty="0"/>
           </a:p>
@@ -8046,80 +8097,14 @@
       </p:sp>
       <p:sp>
         <p:nvSpPr>
-          <p:cNvPr id="24" name="Shape 22"/>
-          <p:cNvSpPr/>
-          <p:nvPr/>
-        </p:nvSpPr>
-        <p:spPr>
-          <a:xfrm>
-            <a:off x="1874520" y="3273552"/>
-            <a:ext cx="6903720" cy="658368"/>
-          </a:xfrm>
-          <a:prstGeom prst="rect">
-            <a:avLst>
-              <a:gd name="adj" fmla="val 8333"/>
-            </a:avLst>
-          </a:prstGeom>
-          <a:solidFill>
-            <a:srgbClr val="F8FAFC"/>
-          </a:solidFill>
-          <a:ln w="12700">
-            <a:solidFill>
-              <a:srgbClr val="E2E8F0"/>
-            </a:solidFill>
-            <a:prstDash val="dash"/>
-          </a:ln>
-        </p:spPr>
-      </p:sp>
-      <p:sp>
-        <p:nvSpPr>
-          <p:cNvPr id="25" name="Text 23"/>
-          <p:cNvSpPr/>
-          <p:nvPr/>
-        </p:nvSpPr>
-        <p:spPr>
-          <a:xfrm>
-            <a:off x="1874520" y="3273552"/>
-            <a:ext cx="6903720" cy="658368"/>
-          </a:xfrm>
-          <a:prstGeom prst="rect">
-            <a:avLst/>
-          </a:prstGeom>
-          <a:noFill/>
-          <a:ln/>
-        </p:spPr>
-        <p:txBody>
-          <a:bodyPr wrap="square" rtlCol="0" anchor="ctr"/>
-          <a:lstStyle/>
-          <a:p>
-            <a:pPr algn="ctr" indent="0" marL="0">
-              <a:buNone/>
-            </a:pPr>
-            <a:r>
-              <a:rPr lang="en-US" sz="1100" i="1" dirty="0">
-                <a:solidFill>
-                  <a:srgbClr val="CBD5E1"/>
-                </a:solidFill>
-                <a:latin typeface="Calibri" pitchFamily="34" charset="0"/>
-                <a:ea typeface="Calibri" pitchFamily="34" charset="-122"/>
-                <a:cs typeface="Calibri" pitchFamily="34" charset="-120"/>
-              </a:rPr>
-              <a:t>Write here...</a:t>
-            </a:r>
-            <a:endParaRPr lang="en-US" sz="1100" dirty="0"/>
-          </a:p>
-        </p:txBody>
-      </p:sp>
-      <p:sp>
-        <p:nvSpPr>
-          <p:cNvPr id="26" name="Shape 24"/>
-          <p:cNvSpPr/>
-          <p:nvPr/>
-        </p:nvSpPr>
-        <p:spPr>
-          <a:xfrm>
-            <a:off x="365760" y="4096512"/>
-            <a:ext cx="1371600" cy="804672"/>
+          <p:cNvPr id="25" name="Shape 23"/>
+          <p:cNvSpPr/>
+          <p:nvPr/>
+        </p:nvSpPr>
+        <p:spPr>
+          <a:xfrm>
+            <a:off x="1874520" y="4096512"/>
+            <a:ext cx="6903720" cy="804672"/>
           </a:xfrm>
           <a:prstGeom prst="rect">
             <a:avLst>
@@ -8127,85 +8112,19 @@
             </a:avLst>
           </a:prstGeom>
           <a:solidFill>
-            <a:srgbClr val="E2E8F0"/>
+            <a:srgbClr val="F8FAFC"/>
           </a:solidFill>
           <a:ln w="12700">
             <a:solidFill>
               <a:srgbClr val="E2E8F0"/>
             </a:solidFill>
-            <a:prstDash val="solid"/>
-          </a:ln>
-        </p:spPr>
-      </p:sp>
-      <p:sp>
-        <p:nvSpPr>
-          <p:cNvPr id="27" name="Text 25"/>
-          <p:cNvSpPr/>
-          <p:nvPr/>
-        </p:nvSpPr>
-        <p:spPr>
-          <a:xfrm>
-            <a:off x="365760" y="4096512"/>
-            <a:ext cx="1371600" cy="804672"/>
-          </a:xfrm>
-          <a:prstGeom prst="rect">
-            <a:avLst/>
-          </a:prstGeom>
-          <a:noFill/>
-          <a:ln/>
-        </p:spPr>
-        <p:txBody>
-          <a:bodyPr wrap="square" lIns="0" tIns="0" rIns="0" bIns="0" rtlCol="0" anchor="ctr"/>
-          <a:lstStyle/>
-          <a:p>
-            <a:pPr algn="ctr" indent="0" marL="0">
-              <a:buNone/>
-            </a:pPr>
-            <a:r>
-              <a:rPr lang="en-US" sz="1100" b="1" dirty="0">
-                <a:solidFill>
-                  <a:srgbClr val="475569"/>
-                </a:solidFill>
-                <a:latin typeface="Trebuchet MS" pitchFamily="34" charset="0"/>
-                <a:ea typeface="Trebuchet MS" pitchFamily="34" charset="-122"/>
-                <a:cs typeface="Trebuchet MS" pitchFamily="34" charset="-120"/>
-              </a:rPr>
-              <a:t>Phonemes</a:t>
-            </a:r>
-            <a:endParaRPr lang="en-US" sz="1100" dirty="0"/>
-          </a:p>
-        </p:txBody>
-      </p:sp>
-      <p:sp>
-        <p:nvSpPr>
-          <p:cNvPr id="28" name="Shape 26"/>
-          <p:cNvSpPr/>
-          <p:nvPr/>
-        </p:nvSpPr>
-        <p:spPr>
-          <a:xfrm>
-            <a:off x="1874520" y="4096512"/>
-            <a:ext cx="6903720" cy="804672"/>
-          </a:xfrm>
-          <a:prstGeom prst="rect">
-            <a:avLst>
-              <a:gd name="adj" fmla="val 6818"/>
-            </a:avLst>
-          </a:prstGeom>
-          <a:solidFill>
-            <a:srgbClr val="F8FAFC"/>
-          </a:solidFill>
-          <a:ln w="12700">
-            <a:solidFill>
-              <a:srgbClr val="E2E8F0"/>
-            </a:solidFill>
             <a:prstDash val="dash"/>
           </a:ln>
         </p:spPr>
       </p:sp>
       <p:sp>
         <p:nvSpPr>
-          <p:cNvPr id="29" name="Text 27"/>
+          <p:cNvPr id="26" name="Text 24"/>
           <p:cNvSpPr/>
           <p:nvPr/>
         </p:nvSpPr>
@@ -8528,7 +8447,7 @@
                 <a:ea typeface="Calibri" pitchFamily="34" charset="-122"/>
                 <a:cs typeface="Calibri" pitchFamily="34" charset="-120"/>
               </a:rPr>
-              <a:t>Word Labs  •  wordlabs.app  •  Root: 'fast' = quick, firm, or not eating</a:t>
+              <a:t>Word Labs  •  wordlabs.app  •  Root: 'fast' = quick</a:t>
             </a:r>
             <a:endParaRPr lang="en-US" sz="800" dirty="0"/>
           </a:p>
@@ -8667,7 +8586,7 @@
                 <a:ea typeface="Trebuchet MS" pitchFamily="34" charset="-122"/>
                 <a:cs typeface="Trebuchet MS" pitchFamily="34" charset="-120"/>
               </a:rPr>
-              <a:t>fastest</a:t>
+              <a:t>fast</a:t>
             </a:r>
             <a:endParaRPr lang="en-US" sz="2800" dirty="0"/>
           </a:p>
@@ -8747,7 +8666,7 @@
         </p:nvSpPr>
         <p:spPr>
           <a:xfrm>
-            <a:off x="2938272" y="2258568"/>
+            <a:off x="4370832" y="2258568"/>
             <a:ext cx="1828800" cy="292608"/>
           </a:xfrm>
           <a:prstGeom prst="rect">
@@ -8781,7 +8700,7 @@
         </p:nvSpPr>
         <p:spPr>
           <a:xfrm>
-            <a:off x="2938272" y="2258568"/>
+            <a:off x="4370832" y="2258568"/>
             <a:ext cx="1828800" cy="292608"/>
           </a:xfrm>
           <a:prstGeom prst="rect">
@@ -8820,7 +8739,7 @@
         </p:nvSpPr>
         <p:spPr>
           <a:xfrm>
-            <a:off x="2938272" y="2569464"/>
+            <a:off x="4370832" y="2569464"/>
             <a:ext cx="1828800" cy="201168"/>
           </a:xfrm>
           <a:prstGeom prst="rect">
@@ -8845,7 +8764,7 @@
                 <a:ea typeface="Calibri" pitchFamily="34" charset="-122"/>
                 <a:cs typeface="Calibri" pitchFamily="34" charset="-120"/>
               </a:rPr>
-              <a:t>quick or moving with speed</a:t>
+              <a:t>quick</a:t>
             </a:r>
             <a:endParaRPr lang="en-US" sz="850" dirty="0"/>
           </a:p>
@@ -8859,30 +8778,23 @@
         </p:nvSpPr>
         <p:spPr>
           <a:xfrm>
-            <a:off x="5803392" y="2258568"/>
-            <a:ext cx="1828800" cy="292608"/>
+            <a:off x="365760" y="3273552"/>
+            <a:ext cx="1371600" cy="658368"/>
           </a:xfrm>
           <a:prstGeom prst="rect">
             <a:avLst>
-              <a:gd name="adj" fmla="val 25000"/>
+              <a:gd name="adj" fmla="val 8333"/>
             </a:avLst>
           </a:prstGeom>
           <a:solidFill>
-            <a:srgbClr val="FCE7F3"/>
-          </a:solidFill>
-          <a:ln w="19050">
-            <a:solidFill>
-              <a:srgbClr val="DB2777"/>
-            </a:solidFill>
-            <a:prstDash val="solid"/>
-          </a:ln>
-          <a:effectLst>
-            <a:outerShdw sx="100000" sy="100000" kx="0" ky="0" algn="bl" rotWithShape="0" blurRad="101600" dist="38100" dir="8100000">
-              <a:srgbClr val="000000">
-                <a:alpha val="12000"/>
-              </a:srgbClr>
-            </a:outerShdw>
-          </a:effectLst>
+            <a:srgbClr val="E2E8F0"/>
+          </a:solidFill>
+          <a:ln w="12700">
+            <a:solidFill>
+              <a:srgbClr val="E2E8F0"/>
+            </a:solidFill>
+            <a:prstDash val="solid"/>
+          </a:ln>
         </p:spPr>
       </p:sp>
       <p:sp>
@@ -8893,8 +8805,8 @@
         </p:nvSpPr>
         <p:spPr>
           <a:xfrm>
-            <a:off x="5803392" y="2258568"/>
-            <a:ext cx="1828800" cy="292608"/>
+            <a:off x="365760" y="3273552"/>
+            <a:ext cx="1371600" cy="658368"/>
           </a:xfrm>
           <a:prstGeom prst="rect">
             <a:avLst/>
@@ -8910,69 +8822,30 @@
               <a:buNone/>
             </a:pPr>
             <a:r>
-              <a:rPr lang="en-US" sz="1300" b="1" dirty="0">
-                <a:solidFill>
-                  <a:srgbClr val="9D174D"/>
+              <a:rPr lang="en-US" sz="1100" b="1" dirty="0">
+                <a:solidFill>
+                  <a:srgbClr val="475569"/>
                 </a:solidFill>
                 <a:latin typeface="Trebuchet MS" pitchFamily="34" charset="0"/>
                 <a:ea typeface="Trebuchet MS" pitchFamily="34" charset="-122"/>
                 <a:cs typeface="Trebuchet MS" pitchFamily="34" charset="-120"/>
               </a:rPr>
-              <a:t>-est</a:t>
-            </a:r>
-            <a:endParaRPr lang="en-US" sz="1300" dirty="0"/>
-          </a:p>
-        </p:txBody>
-      </p:sp>
-      <p:sp>
-        <p:nvSpPr>
-          <p:cNvPr id="21" name="Text 19"/>
-          <p:cNvSpPr/>
-          <p:nvPr/>
-        </p:nvSpPr>
-        <p:spPr>
-          <a:xfrm>
-            <a:off x="5803392" y="2569464"/>
-            <a:ext cx="1828800" cy="201168"/>
-          </a:xfrm>
-          <a:prstGeom prst="rect">
-            <a:avLst/>
-          </a:prstGeom>
-          <a:noFill/>
-          <a:ln/>
-        </p:spPr>
-        <p:txBody>
-          <a:bodyPr wrap="square" lIns="0" tIns="0" rIns="0" bIns="0" rtlCol="0" anchor="t"/>
-          <a:lstStyle/>
-          <a:p>
-            <a:pPr algn="ctr" indent="0" marL="0">
-              <a:buNone/>
-            </a:pPr>
-            <a:r>
-              <a:rPr lang="en-US" sz="850" dirty="0">
-                <a:solidFill>
-                  <a:srgbClr val="475569"/>
-                </a:solidFill>
-                <a:latin typeface="Calibri" pitchFamily="34" charset="0"/>
-                <a:ea typeface="Calibri" pitchFamily="34" charset="-122"/>
-                <a:cs typeface="Calibri" pitchFamily="34" charset="-120"/>
-              </a:rPr>
-              <a:t>most (superlative)</a:t>
-            </a:r>
-            <a:endParaRPr lang="en-US" sz="850" dirty="0"/>
-          </a:p>
-        </p:txBody>
-      </p:sp>
-      <p:sp>
-        <p:nvSpPr>
-          <p:cNvPr id="22" name="Shape 20"/>
-          <p:cNvSpPr/>
-          <p:nvPr/>
-        </p:nvSpPr>
-        <p:spPr>
-          <a:xfrm>
-            <a:off x="365760" y="3273552"/>
-            <a:ext cx="1371600" cy="658368"/>
+              <a:t>Syllables</a:t>
+            </a:r>
+            <a:endParaRPr lang="en-US" sz="1100" dirty="0"/>
+          </a:p>
+        </p:txBody>
+      </p:sp>
+      <p:sp>
+        <p:nvSpPr>
+          <p:cNvPr id="21" name="Shape 19"/>
+          <p:cNvSpPr/>
+          <p:nvPr/>
+        </p:nvSpPr>
+        <p:spPr>
+          <a:xfrm>
+            <a:off x="1874520" y="3273552"/>
+            <a:ext cx="6903720" cy="658368"/>
           </a:xfrm>
           <a:prstGeom prst="rect">
             <a:avLst>
@@ -8980,11 +8853,38 @@
             </a:avLst>
           </a:prstGeom>
           <a:solidFill>
-            <a:srgbClr val="E2E8F0"/>
-          </a:solidFill>
-          <a:ln w="12700">
-            <a:solidFill>
-              <a:srgbClr val="E2E8F0"/>
+            <a:srgbClr val="CCFBF1"/>
+          </a:solidFill>
+          <a:ln w="12700">
+            <a:solidFill>
+              <a:srgbClr val="0D9488"/>
+            </a:solidFill>
+            <a:prstDash val="solid"/>
+          </a:ln>
+        </p:spPr>
+      </p:sp>
+      <p:sp>
+        <p:nvSpPr>
+          <p:cNvPr id="22" name="Shape 20"/>
+          <p:cNvSpPr/>
+          <p:nvPr/>
+        </p:nvSpPr>
+        <p:spPr>
+          <a:xfrm>
+            <a:off x="4370832" y="3364992"/>
+            <a:ext cx="1645920" cy="475488"/>
+          </a:xfrm>
+          <a:prstGeom prst="rect">
+            <a:avLst>
+              <a:gd name="adj" fmla="val 9615"/>
+            </a:avLst>
+          </a:prstGeom>
+          <a:solidFill>
+            <a:srgbClr val="FFFFFF"/>
+          </a:solidFill>
+          <a:ln w="12700">
+            <a:solidFill>
+              <a:srgbClr val="0D9488"/>
             </a:solidFill>
             <a:prstDash val="solid"/>
           </a:ln>
@@ -8998,8 +8898,8 @@
         </p:nvSpPr>
         <p:spPr>
           <a:xfrm>
-            <a:off x="365760" y="3273552"/>
-            <a:ext cx="1371600" cy="658368"/>
+            <a:off x="4370832" y="3364992"/>
+            <a:ext cx="1645920" cy="475488"/>
           </a:xfrm>
           <a:prstGeom prst="rect">
             <a:avLst/>
@@ -9015,17 +8915,17 @@
               <a:buNone/>
             </a:pPr>
             <a:r>
-              <a:rPr lang="en-US" sz="1100" b="1" dirty="0">
-                <a:solidFill>
-                  <a:srgbClr val="475569"/>
+              <a:rPr lang="en-US" sz="1400" b="1" dirty="0">
+                <a:solidFill>
+                  <a:srgbClr val="0D9488"/>
                 </a:solidFill>
                 <a:latin typeface="Trebuchet MS" pitchFamily="34" charset="0"/>
                 <a:ea typeface="Trebuchet MS" pitchFamily="34" charset="-122"/>
                 <a:cs typeface="Trebuchet MS" pitchFamily="34" charset="-120"/>
               </a:rPr>
-              <a:t>Syllables</a:t>
-            </a:r>
-            <a:endParaRPr lang="en-US" sz="1100" dirty="0"/>
+              <a:t>fast</a:t>
+            </a:r>
+            <a:endParaRPr lang="en-US" sz="1400" dirty="0"/>
           </a:p>
         </p:txBody>
       </p:sp>
@@ -9037,62 +8937,35 @@
         </p:nvSpPr>
         <p:spPr>
           <a:xfrm>
-            <a:off x="1874520" y="3273552"/>
-            <a:ext cx="6903720" cy="658368"/>
+            <a:off x="365760" y="4096512"/>
+            <a:ext cx="1371600" cy="804672"/>
           </a:xfrm>
           <a:prstGeom prst="rect">
             <a:avLst>
-              <a:gd name="adj" fmla="val 8333"/>
+              <a:gd name="adj" fmla="val 6818"/>
             </a:avLst>
           </a:prstGeom>
           <a:solidFill>
-            <a:srgbClr val="CCFBF1"/>
-          </a:solidFill>
-          <a:ln w="12700">
-            <a:solidFill>
-              <a:srgbClr val="0D9488"/>
-            </a:solidFill>
-            <a:prstDash val="solid"/>
-          </a:ln>
-        </p:spPr>
-      </p:sp>
-      <p:sp>
-        <p:nvSpPr>
-          <p:cNvPr id="25" name="Shape 23"/>
-          <p:cNvSpPr/>
-          <p:nvPr/>
-        </p:nvSpPr>
-        <p:spPr>
-          <a:xfrm>
-            <a:off x="2999232" y="3364992"/>
-            <a:ext cx="1645920" cy="475488"/>
-          </a:xfrm>
-          <a:prstGeom prst="rect">
-            <a:avLst>
-              <a:gd name="adj" fmla="val 9615"/>
-            </a:avLst>
-          </a:prstGeom>
-          <a:solidFill>
-            <a:srgbClr val="FFFFFF"/>
-          </a:solidFill>
-          <a:ln w="12700">
-            <a:solidFill>
-              <a:srgbClr val="0D9488"/>
-            </a:solidFill>
-            <a:prstDash val="solid"/>
-          </a:ln>
-        </p:spPr>
-      </p:sp>
-      <p:sp>
-        <p:nvSpPr>
-          <p:cNvPr id="26" name="Text 24"/>
-          <p:cNvSpPr/>
-          <p:nvPr/>
-        </p:nvSpPr>
-        <p:spPr>
-          <a:xfrm>
-            <a:off x="2999232" y="3364992"/>
-            <a:ext cx="1645920" cy="475488"/>
+            <a:srgbClr val="E2E8F0"/>
+          </a:solidFill>
+          <a:ln w="12700">
+            <a:solidFill>
+              <a:srgbClr val="E2E8F0"/>
+            </a:solidFill>
+            <a:prstDash val="solid"/>
+          </a:ln>
+        </p:spPr>
+      </p:sp>
+      <p:sp>
+        <p:nvSpPr>
+          <p:cNvPr id="25" name="Text 23"/>
+          <p:cNvSpPr/>
+          <p:nvPr/>
+        </p:nvSpPr>
+        <p:spPr>
+          <a:xfrm>
+            <a:off x="365760" y="4096512"/>
+            <a:ext cx="1371600" cy="804672"/>
           </a:xfrm>
           <a:prstGeom prst="rect">
             <a:avLst/>
@@ -9108,135 +8981,30 @@
               <a:buNone/>
             </a:pPr>
             <a:r>
-              <a:rPr lang="en-US" sz="1400" b="1" dirty="0">
-                <a:solidFill>
-                  <a:srgbClr val="0D9488"/>
+              <a:rPr lang="en-US" sz="1100" b="1" dirty="0">
+                <a:solidFill>
+                  <a:srgbClr val="475569"/>
                 </a:solidFill>
                 <a:latin typeface="Trebuchet MS" pitchFamily="34" charset="0"/>
                 <a:ea typeface="Trebuchet MS" pitchFamily="34" charset="-122"/>
                 <a:cs typeface="Trebuchet MS" pitchFamily="34" charset="-120"/>
               </a:rPr>
-              <a:t>fast</a:t>
-            </a:r>
-            <a:endParaRPr lang="en-US" sz="1400" dirty="0"/>
-          </a:p>
-        </p:txBody>
-      </p:sp>
-      <p:sp>
-        <p:nvSpPr>
-          <p:cNvPr id="27" name="Text 25"/>
-          <p:cNvSpPr/>
-          <p:nvPr/>
-        </p:nvSpPr>
-        <p:spPr>
-          <a:xfrm>
-            <a:off x="4645152" y="3364992"/>
-            <a:ext cx="1097280" cy="475488"/>
-          </a:xfrm>
-          <a:prstGeom prst="rect">
-            <a:avLst/>
-          </a:prstGeom>
-          <a:noFill/>
-          <a:ln/>
-        </p:spPr>
-        <p:txBody>
-          <a:bodyPr wrap="square" lIns="0" tIns="0" rIns="0" bIns="0" rtlCol="0" anchor="ctr"/>
-          <a:lstStyle/>
-          <a:p>
-            <a:pPr algn="ctr" indent="0" marL="0">
-              <a:buNone/>
-            </a:pPr>
-            <a:r>
-              <a:rPr lang="en-US" sz="1600" b="1" dirty="0">
-                <a:solidFill>
-                  <a:srgbClr val="0D9488"/>
-                </a:solidFill>
-                <a:latin typeface="Trebuchet MS" pitchFamily="34" charset="0"/>
-                <a:ea typeface="Trebuchet MS" pitchFamily="34" charset="-122"/>
-                <a:cs typeface="Trebuchet MS" pitchFamily="34" charset="-120"/>
-              </a:rPr>
-              <a:t>·</a:t>
-            </a:r>
-            <a:endParaRPr lang="en-US" sz="1600" dirty="0"/>
-          </a:p>
-        </p:txBody>
-      </p:sp>
-      <p:sp>
-        <p:nvSpPr>
-          <p:cNvPr id="28" name="Shape 26"/>
-          <p:cNvSpPr/>
-          <p:nvPr/>
-        </p:nvSpPr>
-        <p:spPr>
-          <a:xfrm>
-            <a:off x="5742432" y="3364992"/>
-            <a:ext cx="1645920" cy="475488"/>
-          </a:xfrm>
-          <a:prstGeom prst="rect">
-            <a:avLst>
-              <a:gd name="adj" fmla="val 9615"/>
-            </a:avLst>
-          </a:prstGeom>
-          <a:solidFill>
-            <a:srgbClr val="FFFFFF"/>
-          </a:solidFill>
-          <a:ln w="12700">
-            <a:solidFill>
-              <a:srgbClr val="0D9488"/>
-            </a:solidFill>
-            <a:prstDash val="solid"/>
-          </a:ln>
-        </p:spPr>
-      </p:sp>
-      <p:sp>
-        <p:nvSpPr>
-          <p:cNvPr id="29" name="Text 27"/>
-          <p:cNvSpPr/>
-          <p:nvPr/>
-        </p:nvSpPr>
-        <p:spPr>
-          <a:xfrm>
-            <a:off x="5742432" y="3364992"/>
-            <a:ext cx="1645920" cy="475488"/>
-          </a:xfrm>
-          <a:prstGeom prst="rect">
-            <a:avLst/>
-          </a:prstGeom>
-          <a:noFill/>
-          <a:ln/>
-        </p:spPr>
-        <p:txBody>
-          <a:bodyPr wrap="square" lIns="0" tIns="0" rIns="0" bIns="0" rtlCol="0" anchor="ctr"/>
-          <a:lstStyle/>
-          <a:p>
-            <a:pPr algn="ctr" indent="0" marL="0">
-              <a:buNone/>
-            </a:pPr>
-            <a:r>
-              <a:rPr lang="en-US" sz="1400" b="1" dirty="0">
-                <a:solidFill>
-                  <a:srgbClr val="0D9488"/>
-                </a:solidFill>
-                <a:latin typeface="Trebuchet MS" pitchFamily="34" charset="0"/>
-                <a:ea typeface="Trebuchet MS" pitchFamily="34" charset="-122"/>
-                <a:cs typeface="Trebuchet MS" pitchFamily="34" charset="-120"/>
-              </a:rPr>
-              <a:t>est</a:t>
-            </a:r>
-            <a:endParaRPr lang="en-US" sz="1400" dirty="0"/>
-          </a:p>
-        </p:txBody>
-      </p:sp>
-      <p:sp>
-        <p:nvSpPr>
-          <p:cNvPr id="30" name="Shape 28"/>
-          <p:cNvSpPr/>
-          <p:nvPr/>
-        </p:nvSpPr>
-        <p:spPr>
-          <a:xfrm>
-            <a:off x="365760" y="4096512"/>
-            <a:ext cx="1371600" cy="804672"/>
+              <a:t>Phonemes</a:t>
+            </a:r>
+            <a:endParaRPr lang="en-US" sz="1100" dirty="0"/>
+          </a:p>
+        </p:txBody>
+      </p:sp>
+      <p:sp>
+        <p:nvSpPr>
+          <p:cNvPr id="26" name="Shape 24"/>
+          <p:cNvSpPr/>
+          <p:nvPr/>
+        </p:nvSpPr>
+        <p:spPr>
+          <a:xfrm>
+            <a:off x="1874520" y="4096512"/>
+            <a:ext cx="6903720" cy="804672"/>
           </a:xfrm>
           <a:prstGeom prst="rect">
             <a:avLst>
@@ -9244,85 +9012,19 @@
             </a:avLst>
           </a:prstGeom>
           <a:solidFill>
-            <a:srgbClr val="E2E8F0"/>
+            <a:srgbClr val="F8FAFC"/>
           </a:solidFill>
           <a:ln w="12700">
             <a:solidFill>
               <a:srgbClr val="E2E8F0"/>
             </a:solidFill>
-            <a:prstDash val="solid"/>
-          </a:ln>
-        </p:spPr>
-      </p:sp>
-      <p:sp>
-        <p:nvSpPr>
-          <p:cNvPr id="31" name="Text 29"/>
-          <p:cNvSpPr/>
-          <p:nvPr/>
-        </p:nvSpPr>
-        <p:spPr>
-          <a:xfrm>
-            <a:off x="365760" y="4096512"/>
-            <a:ext cx="1371600" cy="804672"/>
-          </a:xfrm>
-          <a:prstGeom prst="rect">
-            <a:avLst/>
-          </a:prstGeom>
-          <a:noFill/>
-          <a:ln/>
-        </p:spPr>
-        <p:txBody>
-          <a:bodyPr wrap="square" lIns="0" tIns="0" rIns="0" bIns="0" rtlCol="0" anchor="ctr"/>
-          <a:lstStyle/>
-          <a:p>
-            <a:pPr algn="ctr" indent="0" marL="0">
-              <a:buNone/>
-            </a:pPr>
-            <a:r>
-              <a:rPr lang="en-US" sz="1100" b="1" dirty="0">
-                <a:solidFill>
-                  <a:srgbClr val="475569"/>
-                </a:solidFill>
-                <a:latin typeface="Trebuchet MS" pitchFamily="34" charset="0"/>
-                <a:ea typeface="Trebuchet MS" pitchFamily="34" charset="-122"/>
-                <a:cs typeface="Trebuchet MS" pitchFamily="34" charset="-120"/>
-              </a:rPr>
-              <a:t>Phonemes</a:t>
-            </a:r>
-            <a:endParaRPr lang="en-US" sz="1100" dirty="0"/>
-          </a:p>
-        </p:txBody>
-      </p:sp>
-      <p:sp>
-        <p:nvSpPr>
-          <p:cNvPr id="32" name="Shape 30"/>
-          <p:cNvSpPr/>
-          <p:nvPr/>
-        </p:nvSpPr>
-        <p:spPr>
-          <a:xfrm>
-            <a:off x="1874520" y="4096512"/>
-            <a:ext cx="6903720" cy="804672"/>
-          </a:xfrm>
-          <a:prstGeom prst="rect">
-            <a:avLst>
-              <a:gd name="adj" fmla="val 6818"/>
-            </a:avLst>
-          </a:prstGeom>
-          <a:solidFill>
-            <a:srgbClr val="F8FAFC"/>
-          </a:solidFill>
-          <a:ln w="12700">
-            <a:solidFill>
-              <a:srgbClr val="E2E8F0"/>
-            </a:solidFill>
             <a:prstDash val="dash"/>
           </a:ln>
         </p:spPr>
       </p:sp>
       <p:sp>
         <p:nvSpPr>
-          <p:cNvPr id="33" name="Text 31"/>
+          <p:cNvPr id="27" name="Text 25"/>
           <p:cNvSpPr/>
           <p:nvPr/>
         </p:nvSpPr>
@@ -9645,7 +9347,7 @@
                 <a:ea typeface="Calibri" pitchFamily="34" charset="-122"/>
                 <a:cs typeface="Calibri" pitchFamily="34" charset="-120"/>
               </a:rPr>
-              <a:t>Word Labs  •  wordlabs.app  •  Root: 'fast' = quick, firm, or not eating</a:t>
+              <a:t>Word Labs  •  wordlabs.app  •  Root: 'fast' = quick</a:t>
             </a:r>
             <a:endParaRPr lang="en-US" sz="800" dirty="0"/>
           </a:p>
@@ -9784,7 +9486,7 @@
                 <a:ea typeface="Trebuchet MS" pitchFamily="34" charset="-122"/>
                 <a:cs typeface="Trebuchet MS" pitchFamily="34" charset="-120"/>
               </a:rPr>
-              <a:t>fastest</a:t>
+              <a:t>fast</a:t>
             </a:r>
             <a:endParaRPr lang="en-US" sz="2800" dirty="0"/>
           </a:p>
@@ -9864,7 +9566,7 @@
         </p:nvSpPr>
         <p:spPr>
           <a:xfrm>
-            <a:off x="2938272" y="2258568"/>
+            <a:off x="4370832" y="2258568"/>
             <a:ext cx="1828800" cy="292608"/>
           </a:xfrm>
           <a:prstGeom prst="rect">
@@ -9898,7 +9600,7 @@
         </p:nvSpPr>
         <p:spPr>
           <a:xfrm>
-            <a:off x="2938272" y="2258568"/>
+            <a:off x="4370832" y="2258568"/>
             <a:ext cx="1828800" cy="292608"/>
           </a:xfrm>
           <a:prstGeom prst="rect">
@@ -9937,7 +9639,7 @@
         </p:nvSpPr>
         <p:spPr>
           <a:xfrm>
-            <a:off x="2938272" y="2569464"/>
+            <a:off x="4370832" y="2569464"/>
             <a:ext cx="1828800" cy="201168"/>
           </a:xfrm>
           <a:prstGeom prst="rect">
@@ -9962,7 +9664,7 @@
                 <a:ea typeface="Calibri" pitchFamily="34" charset="-122"/>
                 <a:cs typeface="Calibri" pitchFamily="34" charset="-120"/>
               </a:rPr>
-              <a:t>quick or moving with speed</a:t>
+              <a:t>quick</a:t>
             </a:r>
             <a:endParaRPr lang="en-US" sz="850" dirty="0"/>
           </a:p>
@@ -9976,30 +9678,23 @@
         </p:nvSpPr>
         <p:spPr>
           <a:xfrm>
-            <a:off x="5803392" y="2258568"/>
-            <a:ext cx="1828800" cy="292608"/>
+            <a:off x="365760" y="3273552"/>
+            <a:ext cx="1371600" cy="658368"/>
           </a:xfrm>
           <a:prstGeom prst="rect">
             <a:avLst>
-              <a:gd name="adj" fmla="val 25000"/>
+              <a:gd name="adj" fmla="val 8333"/>
             </a:avLst>
           </a:prstGeom>
           <a:solidFill>
-            <a:srgbClr val="FCE7F3"/>
-          </a:solidFill>
-          <a:ln w="19050">
-            <a:solidFill>
-              <a:srgbClr val="DB2777"/>
-            </a:solidFill>
-            <a:prstDash val="solid"/>
-          </a:ln>
-          <a:effectLst>
-            <a:outerShdw sx="100000" sy="100000" kx="0" ky="0" algn="bl" rotWithShape="0" blurRad="101600" dist="38100" dir="8100000">
-              <a:srgbClr val="000000">
-                <a:alpha val="12000"/>
-              </a:srgbClr>
-            </a:outerShdw>
-          </a:effectLst>
+            <a:srgbClr val="E2E8F0"/>
+          </a:solidFill>
+          <a:ln w="12700">
+            <a:solidFill>
+              <a:srgbClr val="E2E8F0"/>
+            </a:solidFill>
+            <a:prstDash val="solid"/>
+          </a:ln>
         </p:spPr>
       </p:sp>
       <p:sp>
@@ -10010,8 +9705,8 @@
         </p:nvSpPr>
         <p:spPr>
           <a:xfrm>
-            <a:off x="5803392" y="2258568"/>
-            <a:ext cx="1828800" cy="292608"/>
+            <a:off x="365760" y="3273552"/>
+            <a:ext cx="1371600" cy="658368"/>
           </a:xfrm>
           <a:prstGeom prst="rect">
             <a:avLst/>
@@ -10027,69 +9722,30 @@
               <a:buNone/>
             </a:pPr>
             <a:r>
-              <a:rPr lang="en-US" sz="1300" b="1" dirty="0">
-                <a:solidFill>
-                  <a:srgbClr val="9D174D"/>
+              <a:rPr lang="en-US" sz="1100" b="1" dirty="0">
+                <a:solidFill>
+                  <a:srgbClr val="475569"/>
                 </a:solidFill>
                 <a:latin typeface="Trebuchet MS" pitchFamily="34" charset="0"/>
                 <a:ea typeface="Trebuchet MS" pitchFamily="34" charset="-122"/>
                 <a:cs typeface="Trebuchet MS" pitchFamily="34" charset="-120"/>
               </a:rPr>
-              <a:t>-est</a:t>
-            </a:r>
-            <a:endParaRPr lang="en-US" sz="1300" dirty="0"/>
-          </a:p>
-        </p:txBody>
-      </p:sp>
-      <p:sp>
-        <p:nvSpPr>
-          <p:cNvPr id="21" name="Text 19"/>
-          <p:cNvSpPr/>
-          <p:nvPr/>
-        </p:nvSpPr>
-        <p:spPr>
-          <a:xfrm>
-            <a:off x="5803392" y="2569464"/>
-            <a:ext cx="1828800" cy="201168"/>
-          </a:xfrm>
-          <a:prstGeom prst="rect">
-            <a:avLst/>
-          </a:prstGeom>
-          <a:noFill/>
-          <a:ln/>
-        </p:spPr>
-        <p:txBody>
-          <a:bodyPr wrap="square" lIns="0" tIns="0" rIns="0" bIns="0" rtlCol="0" anchor="t"/>
-          <a:lstStyle/>
-          <a:p>
-            <a:pPr algn="ctr" indent="0" marL="0">
-              <a:buNone/>
-            </a:pPr>
-            <a:r>
-              <a:rPr lang="en-US" sz="850" dirty="0">
-                <a:solidFill>
-                  <a:srgbClr val="475569"/>
-                </a:solidFill>
-                <a:latin typeface="Calibri" pitchFamily="34" charset="0"/>
-                <a:ea typeface="Calibri" pitchFamily="34" charset="-122"/>
-                <a:cs typeface="Calibri" pitchFamily="34" charset="-120"/>
-              </a:rPr>
-              <a:t>most (superlative)</a:t>
-            </a:r>
-            <a:endParaRPr lang="en-US" sz="850" dirty="0"/>
-          </a:p>
-        </p:txBody>
-      </p:sp>
-      <p:sp>
-        <p:nvSpPr>
-          <p:cNvPr id="22" name="Shape 20"/>
-          <p:cNvSpPr/>
-          <p:nvPr/>
-        </p:nvSpPr>
-        <p:spPr>
-          <a:xfrm>
-            <a:off x="365760" y="3273552"/>
-            <a:ext cx="1371600" cy="658368"/>
+              <a:t>Syllables</a:t>
+            </a:r>
+            <a:endParaRPr lang="en-US" sz="1100" dirty="0"/>
+          </a:p>
+        </p:txBody>
+      </p:sp>
+      <p:sp>
+        <p:nvSpPr>
+          <p:cNvPr id="21" name="Shape 19"/>
+          <p:cNvSpPr/>
+          <p:nvPr/>
+        </p:nvSpPr>
+        <p:spPr>
+          <a:xfrm>
+            <a:off x="1874520" y="3273552"/>
+            <a:ext cx="6903720" cy="658368"/>
           </a:xfrm>
           <a:prstGeom prst="rect">
             <a:avLst>
@@ -10097,11 +9753,38 @@
             </a:avLst>
           </a:prstGeom>
           <a:solidFill>
-            <a:srgbClr val="E2E8F0"/>
-          </a:solidFill>
-          <a:ln w="12700">
-            <a:solidFill>
-              <a:srgbClr val="E2E8F0"/>
+            <a:srgbClr val="CCFBF1"/>
+          </a:solidFill>
+          <a:ln w="12700">
+            <a:solidFill>
+              <a:srgbClr val="0D9488"/>
+            </a:solidFill>
+            <a:prstDash val="solid"/>
+          </a:ln>
+        </p:spPr>
+      </p:sp>
+      <p:sp>
+        <p:nvSpPr>
+          <p:cNvPr id="22" name="Shape 20"/>
+          <p:cNvSpPr/>
+          <p:nvPr/>
+        </p:nvSpPr>
+        <p:spPr>
+          <a:xfrm>
+            <a:off x="4370832" y="3364992"/>
+            <a:ext cx="1645920" cy="475488"/>
+          </a:xfrm>
+          <a:prstGeom prst="rect">
+            <a:avLst>
+              <a:gd name="adj" fmla="val 9615"/>
+            </a:avLst>
+          </a:prstGeom>
+          <a:solidFill>
+            <a:srgbClr val="FFFFFF"/>
+          </a:solidFill>
+          <a:ln w="12700">
+            <a:solidFill>
+              <a:srgbClr val="0D9488"/>
             </a:solidFill>
             <a:prstDash val="solid"/>
           </a:ln>
@@ -10115,8 +9798,8 @@
         </p:nvSpPr>
         <p:spPr>
           <a:xfrm>
-            <a:off x="365760" y="3273552"/>
-            <a:ext cx="1371600" cy="658368"/>
+            <a:off x="4370832" y="3364992"/>
+            <a:ext cx="1645920" cy="475488"/>
           </a:xfrm>
           <a:prstGeom prst="rect">
             <a:avLst/>
@@ -10132,15 +9815,81 @@
               <a:buNone/>
             </a:pPr>
             <a:r>
-              <a:rPr lang="en-US" sz="1100" b="1" dirty="0">
-                <a:solidFill>
-                  <a:srgbClr val="475569"/>
+              <a:rPr lang="en-US" sz="1400" b="1" dirty="0">
+                <a:solidFill>
+                  <a:srgbClr val="0D9488"/>
                 </a:solidFill>
                 <a:latin typeface="Trebuchet MS" pitchFamily="34" charset="0"/>
                 <a:ea typeface="Trebuchet MS" pitchFamily="34" charset="-122"/>
                 <a:cs typeface="Trebuchet MS" pitchFamily="34" charset="-120"/>
               </a:rPr>
-              <a:t>Syllables</a:t>
+              <a:t>fast</a:t>
+            </a:r>
+            <a:endParaRPr lang="en-US" sz="1400" dirty="0"/>
+          </a:p>
+        </p:txBody>
+      </p:sp>
+      <p:sp>
+        <p:nvSpPr>
+          <p:cNvPr id="24" name="Shape 22"/>
+          <p:cNvSpPr/>
+          <p:nvPr/>
+        </p:nvSpPr>
+        <p:spPr>
+          <a:xfrm>
+            <a:off x="365760" y="4096512"/>
+            <a:ext cx="1371600" cy="804672"/>
+          </a:xfrm>
+          <a:prstGeom prst="rect">
+            <a:avLst>
+              <a:gd name="adj" fmla="val 6818"/>
+            </a:avLst>
+          </a:prstGeom>
+          <a:solidFill>
+            <a:srgbClr val="E2E8F0"/>
+          </a:solidFill>
+          <a:ln w="12700">
+            <a:solidFill>
+              <a:srgbClr val="E2E8F0"/>
+            </a:solidFill>
+            <a:prstDash val="solid"/>
+          </a:ln>
+        </p:spPr>
+      </p:sp>
+      <p:sp>
+        <p:nvSpPr>
+          <p:cNvPr id="25" name="Text 23"/>
+          <p:cNvSpPr/>
+          <p:nvPr/>
+        </p:nvSpPr>
+        <p:spPr>
+          <a:xfrm>
+            <a:off x="365760" y="4096512"/>
+            <a:ext cx="1371600" cy="804672"/>
+          </a:xfrm>
+          <a:prstGeom prst="rect">
+            <a:avLst/>
+          </a:prstGeom>
+          <a:noFill/>
+          <a:ln/>
+        </p:spPr>
+        <p:txBody>
+          <a:bodyPr wrap="square" lIns="0" tIns="0" rIns="0" bIns="0" rtlCol="0" anchor="ctr"/>
+          <a:lstStyle/>
+          <a:p>
+            <a:pPr algn="ctr" indent="0" marL="0">
+              <a:buNone/>
+            </a:pPr>
+            <a:r>
+              <a:rPr lang="en-US" sz="1100" b="1" dirty="0">
+                <a:solidFill>
+                  <a:srgbClr val="475569"/>
+                </a:solidFill>
+                <a:latin typeface="Trebuchet MS" pitchFamily="34" charset="0"/>
+                <a:ea typeface="Trebuchet MS" pitchFamily="34" charset="-122"/>
+                <a:cs typeface="Trebuchet MS" pitchFamily="34" charset="-120"/>
+              </a:rPr>
+              <a:t>Phonemes</a:t>
             </a:r>
             <a:endParaRPr lang="en-US" sz="1100" dirty="0"/>
           </a:p>
@@ -10148,13 +9897,13 @@
       </p:sp>
       <p:sp>
         <p:nvSpPr>
-          <p:cNvPr id="24" name="Shape 22"/>
-          <p:cNvSpPr/>
-          <p:nvPr/>
-        </p:nvSpPr>
-        <p:spPr>
-          <a:xfrm>
-            <a:off x="1874520" y="3273552"/>
+          <p:cNvPr id="26" name="Shape 24"/>
+          <p:cNvSpPr/>
+          <p:nvPr/>
+        </p:nvSpPr>
+        <p:spPr>
+          <a:xfrm>
+            <a:off x="1874520" y="4096512"/>
             <a:ext cx="6903720" cy="658368"/>
           </a:xfrm>
           <a:prstGeom prst="rect">
@@ -10163,30 +9912,30 @@
             </a:avLst>
           </a:prstGeom>
           <a:solidFill>
-            <a:srgbClr val="CCFBF1"/>
-          </a:solidFill>
-          <a:ln w="12700">
-            <a:solidFill>
-              <a:srgbClr val="0D9488"/>
-            </a:solidFill>
-            <a:prstDash val="solid"/>
-          </a:ln>
-        </p:spPr>
-      </p:sp>
-      <p:sp>
-        <p:nvSpPr>
-          <p:cNvPr id="25" name="Shape 23"/>
-          <p:cNvSpPr/>
-          <p:nvPr/>
-        </p:nvSpPr>
-        <p:spPr>
-          <a:xfrm>
-            <a:off x="2999232" y="3364992"/>
-            <a:ext cx="1645920" cy="475488"/>
+            <a:srgbClr val="FCE7F3"/>
+          </a:solidFill>
+          <a:ln w="12700">
+            <a:solidFill>
+              <a:srgbClr val="DB2777"/>
+            </a:solidFill>
+            <a:prstDash val="solid"/>
+          </a:ln>
+        </p:spPr>
+      </p:sp>
+      <p:sp>
+        <p:nvSpPr>
+          <p:cNvPr id="27" name="Shape 25"/>
+          <p:cNvSpPr/>
+          <p:nvPr/>
+        </p:nvSpPr>
+        <p:spPr>
+          <a:xfrm>
+            <a:off x="2670048" y="4169664"/>
+            <a:ext cx="685800" cy="475488"/>
           </a:xfrm>
           <a:prstGeom prst="rect">
             <a:avLst>
-              <a:gd name="adj" fmla="val 9615"/>
+              <a:gd name="adj" fmla="val 7692"/>
             </a:avLst>
           </a:prstGeom>
           <a:solidFill>
@@ -10194,22 +9943,22 @@
           </a:solidFill>
           <a:ln w="12700">
             <a:solidFill>
-              <a:srgbClr val="0D9488"/>
-            </a:solidFill>
-            <a:prstDash val="solid"/>
-          </a:ln>
-        </p:spPr>
-      </p:sp>
-      <p:sp>
-        <p:nvSpPr>
-          <p:cNvPr id="26" name="Text 24"/>
-          <p:cNvSpPr/>
-          <p:nvPr/>
-        </p:nvSpPr>
-        <p:spPr>
-          <a:xfrm>
-            <a:off x="2999232" y="3364992"/>
-            <a:ext cx="1645920" cy="475488"/>
+              <a:srgbClr val="DB2777"/>
+            </a:solidFill>
+            <a:prstDash val="solid"/>
+          </a:ln>
+        </p:spPr>
+      </p:sp>
+      <p:sp>
+        <p:nvSpPr>
+          <p:cNvPr id="28" name="Text 26"/>
+          <p:cNvSpPr/>
+          <p:nvPr/>
+        </p:nvSpPr>
+        <p:spPr>
+          <a:xfrm>
+            <a:off x="2670048" y="4169664"/>
+            <a:ext cx="685800" cy="475488"/>
           </a:xfrm>
           <a:prstGeom prst="rect">
             <a:avLst/>
@@ -10225,30 +9974,57 @@
               <a:buNone/>
             </a:pPr>
             <a:r>
-              <a:rPr lang="en-US" sz="1400" b="1" dirty="0">
-                <a:solidFill>
-                  <a:srgbClr val="0D9488"/>
+              <a:rPr lang="en-US" sz="900" b="1" dirty="0">
+                <a:solidFill>
+                  <a:srgbClr val="9D174D"/>
                 </a:solidFill>
                 <a:latin typeface="Trebuchet MS" pitchFamily="34" charset="0"/>
                 <a:ea typeface="Trebuchet MS" pitchFamily="34" charset="-122"/>
                 <a:cs typeface="Trebuchet MS" pitchFamily="34" charset="-120"/>
               </a:rPr>
-              <a:t>fast</a:t>
-            </a:r>
-            <a:endParaRPr lang="en-US" sz="1400" dirty="0"/>
-          </a:p>
-        </p:txBody>
-      </p:sp>
-      <p:sp>
-        <p:nvSpPr>
-          <p:cNvPr id="27" name="Text 25"/>
-          <p:cNvSpPr/>
-          <p:nvPr/>
-        </p:nvSpPr>
-        <p:spPr>
-          <a:xfrm>
-            <a:off x="4645152" y="3364992"/>
-            <a:ext cx="1097280" cy="475488"/>
+              <a:t>f</a:t>
+            </a:r>
+            <a:endParaRPr lang="en-US" sz="900" dirty="0"/>
+          </a:p>
+        </p:txBody>
+      </p:sp>
+      <p:sp>
+        <p:nvSpPr>
+          <p:cNvPr id="29" name="Shape 27"/>
+          <p:cNvSpPr/>
+          <p:nvPr/>
+        </p:nvSpPr>
+        <p:spPr>
+          <a:xfrm>
+            <a:off x="4123944" y="4169664"/>
+            <a:ext cx="685800" cy="475488"/>
+          </a:xfrm>
+          <a:prstGeom prst="rect">
+            <a:avLst>
+              <a:gd name="adj" fmla="val 7692"/>
+            </a:avLst>
+          </a:prstGeom>
+          <a:solidFill>
+            <a:srgbClr val="FFFFFF"/>
+          </a:solidFill>
+          <a:ln w="12700">
+            <a:solidFill>
+              <a:srgbClr val="DB2777"/>
+            </a:solidFill>
+            <a:prstDash val="solid"/>
+          </a:ln>
+        </p:spPr>
+      </p:sp>
+      <p:sp>
+        <p:nvSpPr>
+          <p:cNvPr id="30" name="Text 28"/>
+          <p:cNvSpPr/>
+          <p:nvPr/>
+        </p:nvSpPr>
+        <p:spPr>
+          <a:xfrm>
+            <a:off x="4123944" y="4169664"/>
+            <a:ext cx="685800" cy="475488"/>
           </a:xfrm>
           <a:prstGeom prst="rect">
             <a:avLst/>
@@ -10264,34 +10040,34 @@
               <a:buNone/>
             </a:pPr>
             <a:r>
-              <a:rPr lang="en-US" sz="1600" b="1" dirty="0">
-                <a:solidFill>
-                  <a:srgbClr val="0D9488"/>
+              <a:rPr lang="en-US" sz="900" b="1" dirty="0">
+                <a:solidFill>
+                  <a:srgbClr val="9D174D"/>
                 </a:solidFill>
                 <a:latin typeface="Trebuchet MS" pitchFamily="34" charset="0"/>
                 <a:ea typeface="Trebuchet MS" pitchFamily="34" charset="-122"/>
                 <a:cs typeface="Trebuchet MS" pitchFamily="34" charset="-120"/>
               </a:rPr>
-              <a:t>·</a:t>
-            </a:r>
-            <a:endParaRPr lang="en-US" sz="1600" dirty="0"/>
-          </a:p>
-        </p:txBody>
-      </p:sp>
-      <p:sp>
-        <p:nvSpPr>
-          <p:cNvPr id="28" name="Shape 26"/>
-          <p:cNvSpPr/>
-          <p:nvPr/>
-        </p:nvSpPr>
-        <p:spPr>
-          <a:xfrm>
-            <a:off x="5742432" y="3364992"/>
-            <a:ext cx="1645920" cy="475488"/>
+              <a:t>a</a:t>
+            </a:r>
+            <a:endParaRPr lang="en-US" sz="900" dirty="0"/>
+          </a:p>
+        </p:txBody>
+      </p:sp>
+      <p:sp>
+        <p:nvSpPr>
+          <p:cNvPr id="31" name="Shape 29"/>
+          <p:cNvSpPr/>
+          <p:nvPr/>
+        </p:nvSpPr>
+        <p:spPr>
+          <a:xfrm>
+            <a:off x="5577840" y="4169664"/>
+            <a:ext cx="685800" cy="475488"/>
           </a:xfrm>
           <a:prstGeom prst="rect">
             <a:avLst>
-              <a:gd name="adj" fmla="val 9615"/>
+              <a:gd name="adj" fmla="val 7692"/>
             </a:avLst>
           </a:prstGeom>
           <a:solidFill>
@@ -10299,22 +10075,22 @@
           </a:solidFill>
           <a:ln w="12700">
             <a:solidFill>
-              <a:srgbClr val="0D9488"/>
-            </a:solidFill>
-            <a:prstDash val="solid"/>
-          </a:ln>
-        </p:spPr>
-      </p:sp>
-      <p:sp>
-        <p:nvSpPr>
-          <p:cNvPr id="29" name="Text 27"/>
-          <p:cNvSpPr/>
-          <p:nvPr/>
-        </p:nvSpPr>
-        <p:spPr>
-          <a:xfrm>
-            <a:off x="5742432" y="3364992"/>
-            <a:ext cx="1645920" cy="475488"/>
+              <a:srgbClr val="DB2777"/>
+            </a:solidFill>
+            <a:prstDash val="solid"/>
+          </a:ln>
+        </p:spPr>
+      </p:sp>
+      <p:sp>
+        <p:nvSpPr>
+          <p:cNvPr id="32" name="Text 30"/>
+          <p:cNvSpPr/>
+          <p:nvPr/>
+        </p:nvSpPr>
+        <p:spPr>
+          <a:xfrm>
+            <a:off x="5577840" y="4169664"/>
+            <a:ext cx="685800" cy="475488"/>
           </a:xfrm>
           <a:prstGeom prst="rect">
             <a:avLst/>
@@ -10330,112 +10106,19 @@
               <a:buNone/>
             </a:pPr>
             <a:r>
-              <a:rPr lang="en-US" sz="1400" b="1" dirty="0">
-                <a:solidFill>
-                  <a:srgbClr val="0D9488"/>
+              <a:rPr lang="en-US" sz="900" b="1" dirty="0">
+                <a:solidFill>
+                  <a:srgbClr val="9D174D"/>
                 </a:solidFill>
                 <a:latin typeface="Trebuchet MS" pitchFamily="34" charset="0"/>
                 <a:ea typeface="Trebuchet MS" pitchFamily="34" charset="-122"/>
                 <a:cs typeface="Trebuchet MS" pitchFamily="34" charset="-120"/>
               </a:rPr>
-              <a:t>est</a:t>
-            </a:r>
-            <a:endParaRPr lang="en-US" sz="1400" dirty="0"/>
-          </a:p>
-        </p:txBody>
-      </p:sp>
-      <p:sp>
-        <p:nvSpPr>
-          <p:cNvPr id="30" name="Shape 28"/>
-          <p:cNvSpPr/>
-          <p:nvPr/>
-        </p:nvSpPr>
-        <p:spPr>
-          <a:xfrm>
-            <a:off x="365760" y="4096512"/>
-            <a:ext cx="1371600" cy="804672"/>
-          </a:xfrm>
-          <a:prstGeom prst="rect">
-            <a:avLst>
-              <a:gd name="adj" fmla="val 6818"/>
-            </a:avLst>
-          </a:prstGeom>
-          <a:solidFill>
-            <a:srgbClr val="E2E8F0"/>
-          </a:solidFill>
-          <a:ln w="12700">
-            <a:solidFill>
-              <a:srgbClr val="E2E8F0"/>
-            </a:solidFill>
-            <a:prstDash val="solid"/>
-          </a:ln>
-        </p:spPr>
-      </p:sp>
-      <p:sp>
-        <p:nvSpPr>
-          <p:cNvPr id="31" name="Text 29"/>
-          <p:cNvSpPr/>
-          <p:nvPr/>
-        </p:nvSpPr>
-        <p:spPr>
-          <a:xfrm>
-            <a:off x="365760" y="4096512"/>
-            <a:ext cx="1371600" cy="804672"/>
-          </a:xfrm>
-          <a:prstGeom prst="rect">
-            <a:avLst/>
-          </a:prstGeom>
-          <a:noFill/>
-          <a:ln/>
-        </p:spPr>
-        <p:txBody>
-          <a:bodyPr wrap="square" lIns="0" tIns="0" rIns="0" bIns="0" rtlCol="0" anchor="ctr"/>
-          <a:lstStyle/>
-          <a:p>
-            <a:pPr algn="ctr" indent="0" marL="0">
-              <a:buNone/>
-            </a:pPr>
-            <a:r>
-              <a:rPr lang="en-US" sz="1100" b="1" dirty="0">
-                <a:solidFill>
-                  <a:srgbClr val="475569"/>
-                </a:solidFill>
-                <a:latin typeface="Trebuchet MS" pitchFamily="34" charset="0"/>
-                <a:ea typeface="Trebuchet MS" pitchFamily="34" charset="-122"/>
-                <a:cs typeface="Trebuchet MS" pitchFamily="34" charset="-120"/>
-              </a:rPr>
-              <a:t>Phonemes</a:t>
-            </a:r>
-            <a:endParaRPr lang="en-US" sz="1100" dirty="0"/>
-          </a:p>
-        </p:txBody>
-      </p:sp>
-      <p:sp>
-        <p:nvSpPr>
-          <p:cNvPr id="32" name="Shape 30"/>
-          <p:cNvSpPr/>
-          <p:nvPr/>
-        </p:nvSpPr>
-        <p:spPr>
-          <a:xfrm>
-            <a:off x="1874520" y="4096512"/>
-            <a:ext cx="6903720" cy="658368"/>
-          </a:xfrm>
-          <a:prstGeom prst="rect">
-            <a:avLst>
-              <a:gd name="adj" fmla="val 8333"/>
-            </a:avLst>
-          </a:prstGeom>
-          <a:solidFill>
-            <a:srgbClr val="FCE7F3"/>
-          </a:solidFill>
-          <a:ln w="12700">
-            <a:solidFill>
-              <a:srgbClr val="DB2777"/>
-            </a:solidFill>
-            <a:prstDash val="solid"/>
-          </a:ln>
-        </p:spPr>
+              <a:t>s</a:t>
+            </a:r>
+            <a:endParaRPr lang="en-US" sz="900" dirty="0"/>
+          </a:p>
+        </p:txBody>
       </p:sp>
       <p:sp>
         <p:nvSpPr>
@@ -10445,7 +10128,7 @@
         </p:nvSpPr>
         <p:spPr>
           <a:xfrm>
-            <a:off x="2124837" y="4169664"/>
+            <a:off x="7031736" y="4169664"/>
             <a:ext cx="685800" cy="475488"/>
           </a:xfrm>
           <a:prstGeom prst="rect">
@@ -10472,403 +10155,7 @@
         </p:nvSpPr>
         <p:spPr>
           <a:xfrm>
-            <a:off x="2124837" y="4169664"/>
-            <a:ext cx="685800" cy="475488"/>
-          </a:xfrm>
-          <a:prstGeom prst="rect">
-            <a:avLst/>
-          </a:prstGeom>
-          <a:noFill/>
-          <a:ln/>
-        </p:spPr>
-        <p:txBody>
-          <a:bodyPr wrap="square" lIns="0" tIns="0" rIns="0" bIns="0" rtlCol="0" anchor="ctr"/>
-          <a:lstStyle/>
-          <a:p>
-            <a:pPr algn="ctr" indent="0" marL="0">
-              <a:buNone/>
-            </a:pPr>
-            <a:r>
-              <a:rPr lang="en-US" sz="900" b="1" dirty="0">
-                <a:solidFill>
-                  <a:srgbClr val="9D174D"/>
-                </a:solidFill>
-                <a:latin typeface="Trebuchet MS" pitchFamily="34" charset="0"/>
-                <a:ea typeface="Trebuchet MS" pitchFamily="34" charset="-122"/>
-                <a:cs typeface="Trebuchet MS" pitchFamily="34" charset="-120"/>
-              </a:rPr>
-              <a:t>f</a:t>
-            </a:r>
-            <a:endParaRPr lang="en-US" sz="900" dirty="0"/>
-          </a:p>
-        </p:txBody>
-      </p:sp>
-      <p:sp>
-        <p:nvSpPr>
-          <p:cNvPr id="35" name="Shape 33"/>
-          <p:cNvSpPr/>
-          <p:nvPr/>
-        </p:nvSpPr>
-        <p:spPr>
-          <a:xfrm>
-            <a:off x="3033522" y="4169664"/>
-            <a:ext cx="685800" cy="475488"/>
-          </a:xfrm>
-          <a:prstGeom prst="rect">
-            <a:avLst>
-              <a:gd name="adj" fmla="val 7692"/>
-            </a:avLst>
-          </a:prstGeom>
-          <a:solidFill>
-            <a:srgbClr val="FFFFFF"/>
-          </a:solidFill>
-          <a:ln w="12700">
-            <a:solidFill>
-              <a:srgbClr val="DB2777"/>
-            </a:solidFill>
-            <a:prstDash val="solid"/>
-          </a:ln>
-        </p:spPr>
-      </p:sp>
-      <p:sp>
-        <p:nvSpPr>
-          <p:cNvPr id="36" name="Text 34"/>
-          <p:cNvSpPr/>
-          <p:nvPr/>
-        </p:nvSpPr>
-        <p:spPr>
-          <a:xfrm>
-            <a:off x="3033522" y="4169664"/>
-            <a:ext cx="685800" cy="475488"/>
-          </a:xfrm>
-          <a:prstGeom prst="rect">
-            <a:avLst/>
-          </a:prstGeom>
-          <a:noFill/>
-          <a:ln/>
-        </p:spPr>
-        <p:txBody>
-          <a:bodyPr wrap="square" lIns="0" tIns="0" rIns="0" bIns="0" rtlCol="0" anchor="ctr"/>
-          <a:lstStyle/>
-          <a:p>
-            <a:pPr algn="ctr" indent="0" marL="0">
-              <a:buNone/>
-            </a:pPr>
-            <a:r>
-              <a:rPr lang="en-US" sz="900" b="1" dirty="0">
-                <a:solidFill>
-                  <a:srgbClr val="9D174D"/>
-                </a:solidFill>
-                <a:latin typeface="Trebuchet MS" pitchFamily="34" charset="0"/>
-                <a:ea typeface="Trebuchet MS" pitchFamily="34" charset="-122"/>
-                <a:cs typeface="Trebuchet MS" pitchFamily="34" charset="-120"/>
-              </a:rPr>
-              <a:t>a</a:t>
-            </a:r>
-            <a:endParaRPr lang="en-US" sz="900" dirty="0"/>
-          </a:p>
-        </p:txBody>
-      </p:sp>
-      <p:sp>
-        <p:nvSpPr>
-          <p:cNvPr id="37" name="Shape 35"/>
-          <p:cNvSpPr/>
-          <p:nvPr/>
-        </p:nvSpPr>
-        <p:spPr>
-          <a:xfrm>
-            <a:off x="3942207" y="4169664"/>
-            <a:ext cx="685800" cy="475488"/>
-          </a:xfrm>
-          <a:prstGeom prst="rect">
-            <a:avLst>
-              <a:gd name="adj" fmla="val 7692"/>
-            </a:avLst>
-          </a:prstGeom>
-          <a:solidFill>
-            <a:srgbClr val="FFFFFF"/>
-          </a:solidFill>
-          <a:ln w="12700">
-            <a:solidFill>
-              <a:srgbClr val="DB2777"/>
-            </a:solidFill>
-            <a:prstDash val="solid"/>
-          </a:ln>
-        </p:spPr>
-      </p:sp>
-      <p:sp>
-        <p:nvSpPr>
-          <p:cNvPr id="38" name="Text 36"/>
-          <p:cNvSpPr/>
-          <p:nvPr/>
-        </p:nvSpPr>
-        <p:spPr>
-          <a:xfrm>
-            <a:off x="3942207" y="4169664"/>
-            <a:ext cx="685800" cy="475488"/>
-          </a:xfrm>
-          <a:prstGeom prst="rect">
-            <a:avLst/>
-          </a:prstGeom>
-          <a:noFill/>
-          <a:ln/>
-        </p:spPr>
-        <p:txBody>
-          <a:bodyPr wrap="square" lIns="0" tIns="0" rIns="0" bIns="0" rtlCol="0" anchor="ctr"/>
-          <a:lstStyle/>
-          <a:p>
-            <a:pPr algn="ctr" indent="0" marL="0">
-              <a:buNone/>
-            </a:pPr>
-            <a:r>
-              <a:rPr lang="en-US" sz="900" b="1" dirty="0">
-                <a:solidFill>
-                  <a:srgbClr val="9D174D"/>
-                </a:solidFill>
-                <a:latin typeface="Trebuchet MS" pitchFamily="34" charset="0"/>
-                <a:ea typeface="Trebuchet MS" pitchFamily="34" charset="-122"/>
-                <a:cs typeface="Trebuchet MS" pitchFamily="34" charset="-120"/>
-              </a:rPr>
-              <a:t>s</a:t>
-            </a:r>
-            <a:endParaRPr lang="en-US" sz="900" dirty="0"/>
-          </a:p>
-        </p:txBody>
-      </p:sp>
-      <p:sp>
-        <p:nvSpPr>
-          <p:cNvPr id="39" name="Shape 37"/>
-          <p:cNvSpPr/>
-          <p:nvPr/>
-        </p:nvSpPr>
-        <p:spPr>
-          <a:xfrm>
-            <a:off x="4850892" y="4169664"/>
-            <a:ext cx="685800" cy="475488"/>
-          </a:xfrm>
-          <a:prstGeom prst="rect">
-            <a:avLst>
-              <a:gd name="adj" fmla="val 7692"/>
-            </a:avLst>
-          </a:prstGeom>
-          <a:solidFill>
-            <a:srgbClr val="FFFFFF"/>
-          </a:solidFill>
-          <a:ln w="12700">
-            <a:solidFill>
-              <a:srgbClr val="DB2777"/>
-            </a:solidFill>
-            <a:prstDash val="solid"/>
-          </a:ln>
-        </p:spPr>
-      </p:sp>
-      <p:sp>
-        <p:nvSpPr>
-          <p:cNvPr id="40" name="Text 38"/>
-          <p:cNvSpPr/>
-          <p:nvPr/>
-        </p:nvSpPr>
-        <p:spPr>
-          <a:xfrm>
-            <a:off x="4850892" y="4169664"/>
-            <a:ext cx="685800" cy="475488"/>
-          </a:xfrm>
-          <a:prstGeom prst="rect">
-            <a:avLst/>
-          </a:prstGeom>
-          <a:noFill/>
-          <a:ln/>
-        </p:spPr>
-        <p:txBody>
-          <a:bodyPr wrap="square" lIns="0" tIns="0" rIns="0" bIns="0" rtlCol="0" anchor="ctr"/>
-          <a:lstStyle/>
-          <a:p>
-            <a:pPr algn="ctr" indent="0" marL="0">
-              <a:buNone/>
-            </a:pPr>
-            <a:r>
-              <a:rPr lang="en-US" sz="900" b="1" dirty="0">
-                <a:solidFill>
-                  <a:srgbClr val="9D174D"/>
-                </a:solidFill>
-                <a:latin typeface="Trebuchet MS" pitchFamily="34" charset="0"/>
-                <a:ea typeface="Trebuchet MS" pitchFamily="34" charset="-122"/>
-                <a:cs typeface="Trebuchet MS" pitchFamily="34" charset="-120"/>
-              </a:rPr>
-              <a:t>t</a:t>
-            </a:r>
-            <a:endParaRPr lang="en-US" sz="900" dirty="0"/>
-          </a:p>
-        </p:txBody>
-      </p:sp>
-      <p:sp>
-        <p:nvSpPr>
-          <p:cNvPr id="41" name="Shape 39"/>
-          <p:cNvSpPr/>
-          <p:nvPr/>
-        </p:nvSpPr>
-        <p:spPr>
-          <a:xfrm>
-            <a:off x="5759577" y="4169664"/>
-            <a:ext cx="685800" cy="475488"/>
-          </a:xfrm>
-          <a:prstGeom prst="rect">
-            <a:avLst>
-              <a:gd name="adj" fmla="val 7692"/>
-            </a:avLst>
-          </a:prstGeom>
-          <a:solidFill>
-            <a:srgbClr val="FFFFFF"/>
-          </a:solidFill>
-          <a:ln w="12700">
-            <a:solidFill>
-              <a:srgbClr val="DB2777"/>
-            </a:solidFill>
-            <a:prstDash val="solid"/>
-          </a:ln>
-        </p:spPr>
-      </p:sp>
-      <p:sp>
-        <p:nvSpPr>
-          <p:cNvPr id="42" name="Text 40"/>
-          <p:cNvSpPr/>
-          <p:nvPr/>
-        </p:nvSpPr>
-        <p:spPr>
-          <a:xfrm>
-            <a:off x="5759577" y="4169664"/>
-            <a:ext cx="685800" cy="475488"/>
-          </a:xfrm>
-          <a:prstGeom prst="rect">
-            <a:avLst/>
-          </a:prstGeom>
-          <a:noFill/>
-          <a:ln/>
-        </p:spPr>
-        <p:txBody>
-          <a:bodyPr wrap="square" lIns="0" tIns="0" rIns="0" bIns="0" rtlCol="0" anchor="ctr"/>
-          <a:lstStyle/>
-          <a:p>
-            <a:pPr algn="ctr" indent="0" marL="0">
-              <a:buNone/>
-            </a:pPr>
-            <a:r>
-              <a:rPr lang="en-US" sz="900" b="1" dirty="0">
-                <a:solidFill>
-                  <a:srgbClr val="9D174D"/>
-                </a:solidFill>
-                <a:latin typeface="Trebuchet MS" pitchFamily="34" charset="0"/>
-                <a:ea typeface="Trebuchet MS" pitchFamily="34" charset="-122"/>
-                <a:cs typeface="Trebuchet MS" pitchFamily="34" charset="-120"/>
-              </a:rPr>
-              <a:t>e</a:t>
-            </a:r>
-            <a:endParaRPr lang="en-US" sz="900" dirty="0"/>
-          </a:p>
-        </p:txBody>
-      </p:sp>
-      <p:sp>
-        <p:nvSpPr>
-          <p:cNvPr id="43" name="Shape 41"/>
-          <p:cNvSpPr/>
-          <p:nvPr/>
-        </p:nvSpPr>
-        <p:spPr>
-          <a:xfrm>
-            <a:off x="6668262" y="4169664"/>
-            <a:ext cx="685800" cy="475488"/>
-          </a:xfrm>
-          <a:prstGeom prst="rect">
-            <a:avLst>
-              <a:gd name="adj" fmla="val 7692"/>
-            </a:avLst>
-          </a:prstGeom>
-          <a:solidFill>
-            <a:srgbClr val="FFFFFF"/>
-          </a:solidFill>
-          <a:ln w="12700">
-            <a:solidFill>
-              <a:srgbClr val="DB2777"/>
-            </a:solidFill>
-            <a:prstDash val="solid"/>
-          </a:ln>
-        </p:spPr>
-      </p:sp>
-      <p:sp>
-        <p:nvSpPr>
-          <p:cNvPr id="44" name="Text 42"/>
-          <p:cNvSpPr/>
-          <p:nvPr/>
-        </p:nvSpPr>
-        <p:spPr>
-          <a:xfrm>
-            <a:off x="6668262" y="4169664"/>
-            <a:ext cx="685800" cy="475488"/>
-          </a:xfrm>
-          <a:prstGeom prst="rect">
-            <a:avLst/>
-          </a:prstGeom>
-          <a:noFill/>
-          <a:ln/>
-        </p:spPr>
-        <p:txBody>
-          <a:bodyPr wrap="square" lIns="0" tIns="0" rIns="0" bIns="0" rtlCol="0" anchor="ctr"/>
-          <a:lstStyle/>
-          <a:p>
-            <a:pPr algn="ctr" indent="0" marL="0">
-              <a:buNone/>
-            </a:pPr>
-            <a:r>
-              <a:rPr lang="en-US" sz="900" b="1" dirty="0">
-                <a:solidFill>
-                  <a:srgbClr val="9D174D"/>
-                </a:solidFill>
-                <a:latin typeface="Trebuchet MS" pitchFamily="34" charset="0"/>
-                <a:ea typeface="Trebuchet MS" pitchFamily="34" charset="-122"/>
-                <a:cs typeface="Trebuchet MS" pitchFamily="34" charset="-120"/>
-              </a:rPr>
-              <a:t>s</a:t>
-            </a:r>
-            <a:endParaRPr lang="en-US" sz="900" dirty="0"/>
-          </a:p>
-        </p:txBody>
-      </p:sp>
-      <p:sp>
-        <p:nvSpPr>
-          <p:cNvPr id="45" name="Shape 43"/>
-          <p:cNvSpPr/>
-          <p:nvPr/>
-        </p:nvSpPr>
-        <p:spPr>
-          <a:xfrm>
-            <a:off x="7576947" y="4169664"/>
-            <a:ext cx="685800" cy="475488"/>
-          </a:xfrm>
-          <a:prstGeom prst="rect">
-            <a:avLst>
-              <a:gd name="adj" fmla="val 7692"/>
-            </a:avLst>
-          </a:prstGeom>
-          <a:solidFill>
-            <a:srgbClr val="FFFFFF"/>
-          </a:solidFill>
-          <a:ln w="12700">
-            <a:solidFill>
-              <a:srgbClr val="DB2777"/>
-            </a:solidFill>
-            <a:prstDash val="solid"/>
-          </a:ln>
-        </p:spPr>
-      </p:sp>
-      <p:sp>
-        <p:nvSpPr>
-          <p:cNvPr id="46" name="Text 44"/>
-          <p:cNvSpPr/>
-          <p:nvPr/>
-        </p:nvSpPr>
-        <p:spPr>
-          <a:xfrm>
-            <a:off x="7576947" y="4169664"/>
+            <a:off x="7031736" y="4169664"/>
             <a:ext cx="685800" cy="475488"/>
           </a:xfrm>
           <a:prstGeom prst="rect">
@@ -11185,7 +10472,7 @@
                 <a:ea typeface="Calibri" pitchFamily="34" charset="-122"/>
                 <a:cs typeface="Calibri" pitchFamily="34" charset="-120"/>
               </a:rPr>
-              <a:t>Word Labs  •  wordlabs.app  •  Root: 'fast' = quick, firm, or not eating</a:t>
+              <a:t>Word Labs  •  wordlabs.app  •  Root: 'fast' = quick</a:t>
             </a:r>
             <a:endParaRPr lang="en-US" sz="800" dirty="0"/>
           </a:p>
@@ -11324,7 +10611,7 @@
                 <a:ea typeface="Trebuchet MS" pitchFamily="34" charset="-122"/>
                 <a:cs typeface="Trebuchet MS" pitchFamily="34" charset="-120"/>
               </a:rPr>
-              <a:t>fasten</a:t>
+              <a:t>fasted</a:t>
             </a:r>
             <a:endParaRPr lang="en-US" sz="2800" dirty="0"/>
           </a:p>
@@ -12012,7 +11299,7 @@
                 <a:ea typeface="Calibri" pitchFamily="34" charset="-122"/>
                 <a:cs typeface="Calibri" pitchFamily="34" charset="-120"/>
               </a:rPr>
-              <a:t>Word Labs  •  wordlabs.app  •  Root: 'fast' = quick, firm, or not eating</a:t>
+              <a:t>Word Labs  •  wordlabs.app  •  Root: 'fast' = quick</a:t>
             </a:r>
             <a:endParaRPr lang="en-US" sz="800" dirty="0"/>
           </a:p>
@@ -12151,7 +11438,7 @@
                 <a:ea typeface="Trebuchet MS" pitchFamily="34" charset="-122"/>
                 <a:cs typeface="Trebuchet MS" pitchFamily="34" charset="-120"/>
               </a:rPr>
-              <a:t>fasten</a:t>
+              <a:t>fasted</a:t>
             </a:r>
             <a:endParaRPr lang="en-US" sz="2800" dirty="0"/>
           </a:p>
@@ -12329,7 +11616,7 @@
                 <a:ea typeface="Calibri" pitchFamily="34" charset="-122"/>
                 <a:cs typeface="Calibri" pitchFamily="34" charset="-120"/>
               </a:rPr>
-              <a:t>firm, fixed in place</a:t>
+              <a:t>quick</a:t>
             </a:r>
             <a:endParaRPr lang="en-US" sz="850" dirty="0"/>
           </a:p>
@@ -12402,7 +11689,7 @@
                 <a:ea typeface="Trebuchet MS" pitchFamily="34" charset="-122"/>
                 <a:cs typeface="Trebuchet MS" pitchFamily="34" charset="-120"/>
               </a:rPr>
-              <a:t>-en</a:t>
+              <a:t>ed</a:t>
             </a:r>
             <a:endParaRPr lang="en-US" sz="1300" dirty="0"/>
           </a:p>
@@ -12441,7 +11728,7 @@
                 <a:ea typeface="Calibri" pitchFamily="34" charset="-122"/>
                 <a:cs typeface="Calibri" pitchFamily="34" charset="-120"/>
               </a:rPr>
-              <a:t>to make or become</a:t>
+              <a:t>past tense</a:t>
             </a:r>
             <a:endParaRPr lang="en-US" sz="850" dirty="0"/>
           </a:p>
@@ -12997,7 +12284,7 @@
                 <a:ea typeface="Calibri" pitchFamily="34" charset="-122"/>
                 <a:cs typeface="Calibri" pitchFamily="34" charset="-120"/>
               </a:rPr>
-              <a:t>Word Labs  •  wordlabs.app  •  Root: 'fast' = quick, firm, or not eating</a:t>
+              <a:t>Word Labs  •  wordlabs.app  •  Root: 'fast' = quick</a:t>
             </a:r>
             <a:endParaRPr lang="en-US" sz="800" dirty="0"/>
           </a:p>
@@ -13136,7 +12423,7 @@
                 <a:ea typeface="Trebuchet MS" pitchFamily="34" charset="-122"/>
                 <a:cs typeface="Trebuchet MS" pitchFamily="34" charset="-120"/>
               </a:rPr>
-              <a:t>fasten</a:t>
+              <a:t>fasted</a:t>
             </a:r>
             <a:endParaRPr lang="en-US" sz="2800" dirty="0"/>
           </a:p>
@@ -13314,7 +12601,7 @@
                 <a:ea typeface="Calibri" pitchFamily="34" charset="-122"/>
                 <a:cs typeface="Calibri" pitchFamily="34" charset="-120"/>
               </a:rPr>
-              <a:t>firm, fixed in place</a:t>
+              <a:t>quick</a:t>
             </a:r>
             <a:endParaRPr lang="en-US" sz="850" dirty="0"/>
           </a:p>
@@ -13387,7 +12674,7 @@
                 <a:ea typeface="Trebuchet MS" pitchFamily="34" charset="-122"/>
                 <a:cs typeface="Trebuchet MS" pitchFamily="34" charset="-120"/>
               </a:rPr>
-              <a:t>-en</a:t>
+              <a:t>ed</a:t>
             </a:r>
             <a:endParaRPr lang="en-US" sz="1300" dirty="0"/>
           </a:p>
@@ -13426,7 +12713,7 @@
                 <a:ea typeface="Calibri" pitchFamily="34" charset="-122"/>
                 <a:cs typeface="Calibri" pitchFamily="34" charset="-120"/>
               </a:rPr>
-              <a:t>to make or become</a:t>
+              <a:t>past tense</a:t>
             </a:r>
             <a:endParaRPr lang="en-US" sz="850" dirty="0"/>
           </a:p>
@@ -13585,7 +12872,7 @@
                 <a:ea typeface="Trebuchet MS" pitchFamily="34" charset="-122"/>
                 <a:cs typeface="Trebuchet MS" pitchFamily="34" charset="-120"/>
               </a:rPr>
-              <a:t>fas</a:t>
+              <a:t>fast</a:t>
             </a:r>
             <a:endParaRPr lang="en-US" sz="1400" dirty="0"/>
           </a:p>
@@ -13690,7 +12977,7 @@
                 <a:ea typeface="Trebuchet MS" pitchFamily="34" charset="-122"/>
                 <a:cs typeface="Trebuchet MS" pitchFamily="34" charset="-120"/>
               </a:rPr>
-              <a:t>ten</a:t>
+              <a:t>ed</a:t>
             </a:r>
             <a:endParaRPr lang="en-US" sz="1400" dirty="0"/>
           </a:p>
@@ -14023,7 +13310,7 @@
                 <a:ea typeface="Calibri" pitchFamily="34" charset="-122"/>
                 <a:cs typeface="Calibri" pitchFamily="34" charset="-120"/>
               </a:rPr>
-              <a:t>Root 'fast' — quick, firm, or not eating</a:t>
+              <a:t>Root 'fast' — quick</a:t>
             </a:r>
             <a:endParaRPr lang="en-US" sz="1600" dirty="0"/>
           </a:p>
@@ -14379,7 +13666,7 @@
                 <a:ea typeface="Calibri" pitchFamily="34" charset="-122"/>
                 <a:cs typeface="Calibri" pitchFamily="34" charset="-120"/>
               </a:rPr>
-              <a:t>Word Labs  •  wordlabs.app  •  Root: 'fast' = quick, firm, or not eating</a:t>
+              <a:t>Word Labs  •  wordlabs.app  •  Root: 'fast' = quick</a:t>
             </a:r>
             <a:endParaRPr lang="en-US" sz="800" dirty="0"/>
           </a:p>
@@ -14518,7 +13805,7 @@
                 <a:ea typeface="Trebuchet MS" pitchFamily="34" charset="-122"/>
                 <a:cs typeface="Trebuchet MS" pitchFamily="34" charset="-120"/>
               </a:rPr>
-              <a:t>fasten</a:t>
+              <a:t>fasted</a:t>
             </a:r>
             <a:endParaRPr lang="en-US" sz="2800" dirty="0"/>
           </a:p>
@@ -14696,7 +13983,7 @@
                 <a:ea typeface="Calibri" pitchFamily="34" charset="-122"/>
                 <a:cs typeface="Calibri" pitchFamily="34" charset="-120"/>
               </a:rPr>
-              <a:t>firm, fixed in place</a:t>
+              <a:t>quick</a:t>
             </a:r>
             <a:endParaRPr lang="en-US" sz="850" dirty="0"/>
           </a:p>
@@ -14769,7 +14056,7 @@
                 <a:ea typeface="Trebuchet MS" pitchFamily="34" charset="-122"/>
                 <a:cs typeface="Trebuchet MS" pitchFamily="34" charset="-120"/>
               </a:rPr>
-              <a:t>-en</a:t>
+              <a:t>ed</a:t>
             </a:r>
             <a:endParaRPr lang="en-US" sz="1300" dirty="0"/>
           </a:p>
@@ -14808,7 +14095,7 @@
                 <a:ea typeface="Calibri" pitchFamily="34" charset="-122"/>
                 <a:cs typeface="Calibri" pitchFamily="34" charset="-120"/>
               </a:rPr>
-              <a:t>to make or become</a:t>
+              <a:t>past tense</a:t>
             </a:r>
             <a:endParaRPr lang="en-US" sz="850" dirty="0"/>
           </a:p>
@@ -14967,7 +14254,7 @@
                 <a:ea typeface="Trebuchet MS" pitchFamily="34" charset="-122"/>
                 <a:cs typeface="Trebuchet MS" pitchFamily="34" charset="-120"/>
               </a:rPr>
-              <a:t>fas</a:t>
+              <a:t>fast</a:t>
             </a:r>
             <a:endParaRPr lang="en-US" sz="1400" dirty="0"/>
           </a:p>
@@ -15072,7 +14359,7 @@
                 <a:ea typeface="Trebuchet MS" pitchFamily="34" charset="-122"/>
                 <a:cs typeface="Trebuchet MS" pitchFamily="34" charset="-120"/>
               </a:rPr>
-              <a:t>ten</a:t>
+              <a:t>ed</a:t>
             </a:r>
             <a:endParaRPr lang="en-US" sz="1400" dirty="0"/>
           </a:p>
@@ -15153,11 +14440,11 @@
         <p:spPr>
           <a:xfrm>
             <a:off x="1874520" y="4096512"/>
-            <a:ext cx="6903720" cy="804672"/>
+            <a:ext cx="6903720" cy="658368"/>
           </a:xfrm>
           <a:prstGeom prst="rect">
             <a:avLst>
-              <a:gd name="adj" fmla="val 6818"/>
+              <a:gd name="adj" fmla="val 8333"/>
             </a:avLst>
           </a:prstGeom>
           <a:solidFill>
@@ -15180,11 +14467,11 @@
         <p:spPr>
           <a:xfrm>
             <a:off x="2254649" y="4169664"/>
-            <a:ext cx="685800" cy="384048"/>
+            <a:ext cx="685800" cy="475488"/>
           </a:xfrm>
           <a:prstGeom prst="rect">
             <a:avLst>
-              <a:gd name="adj" fmla="val 9524"/>
+              <a:gd name="adj" fmla="val 7692"/>
             </a:avLst>
           </a:prstGeom>
           <a:solidFill>
@@ -15207,7 +14494,7 @@
         <p:spPr>
           <a:xfrm>
             <a:off x="2254649" y="4169664"/>
-            <a:ext cx="685800" cy="384048"/>
+            <a:ext cx="685800" cy="475488"/>
           </a:xfrm>
           <a:prstGeom prst="rect">
             <a:avLst/>
@@ -15246,11 +14533,11 @@
         <p:spPr>
           <a:xfrm>
             <a:off x="3293146" y="4169664"/>
-            <a:ext cx="685800" cy="384048"/>
+            <a:ext cx="685800" cy="475488"/>
           </a:xfrm>
           <a:prstGeom prst="rect">
             <a:avLst>
-              <a:gd name="adj" fmla="val 9524"/>
+              <a:gd name="adj" fmla="val 7692"/>
             </a:avLst>
           </a:prstGeom>
           <a:solidFill>
@@ -15273,7 +14560,7 @@
         <p:spPr>
           <a:xfrm>
             <a:off x="3293146" y="4169664"/>
-            <a:ext cx="685800" cy="384048"/>
+            <a:ext cx="685800" cy="475488"/>
           </a:xfrm>
           <a:prstGeom prst="rect">
             <a:avLst/>
@@ -15312,11 +14599,11 @@
         <p:spPr>
           <a:xfrm>
             <a:off x="4331643" y="4169664"/>
-            <a:ext cx="685800" cy="384048"/>
+            <a:ext cx="685800" cy="475488"/>
           </a:xfrm>
           <a:prstGeom prst="rect">
             <a:avLst>
-              <a:gd name="adj" fmla="val 9524"/>
+              <a:gd name="adj" fmla="val 7692"/>
             </a:avLst>
           </a:prstGeom>
           <a:solidFill>
@@ -15339,7 +14626,7 @@
         <p:spPr>
           <a:xfrm>
             <a:off x="4331643" y="4169664"/>
-            <a:ext cx="685800" cy="384048"/>
+            <a:ext cx="685800" cy="475488"/>
           </a:xfrm>
           <a:prstGeom prst="rect">
             <a:avLst/>
@@ -15378,11 +14665,11 @@
         <p:spPr>
           <a:xfrm>
             <a:off x="5370141" y="4169664"/>
-            <a:ext cx="685800" cy="384048"/>
+            <a:ext cx="685800" cy="475488"/>
           </a:xfrm>
           <a:prstGeom prst="rect">
             <a:avLst>
-              <a:gd name="adj" fmla="val 9524"/>
+              <a:gd name="adj" fmla="val 7692"/>
             </a:avLst>
           </a:prstGeom>
           <a:solidFill>
@@ -15405,7 +14692,7 @@
         <p:spPr>
           <a:xfrm>
             <a:off x="5370141" y="4169664"/>
-            <a:ext cx="685800" cy="384048"/>
+            <a:ext cx="685800" cy="475488"/>
           </a:xfrm>
           <a:prstGeom prst="rect">
             <a:avLst/>
@@ -15444,11 +14731,11 @@
         <p:spPr>
           <a:xfrm>
             <a:off x="6408638" y="4169664"/>
-            <a:ext cx="685800" cy="384048"/>
+            <a:ext cx="685800" cy="475488"/>
           </a:xfrm>
           <a:prstGeom prst="rect">
             <a:avLst>
-              <a:gd name="adj" fmla="val 9524"/>
+              <a:gd name="adj" fmla="val 7692"/>
             </a:avLst>
           </a:prstGeom>
           <a:solidFill>
@@ -15471,7 +14758,7 @@
         <p:spPr>
           <a:xfrm>
             <a:off x="6408638" y="4169664"/>
-            <a:ext cx="685800" cy="384048"/>
+            <a:ext cx="685800" cy="475488"/>
           </a:xfrm>
           <a:prstGeom prst="rect">
             <a:avLst/>
@@ -15510,11 +14797,11 @@
         <p:spPr>
           <a:xfrm>
             <a:off x="7447135" y="4169664"/>
-            <a:ext cx="685800" cy="384048"/>
+            <a:ext cx="685800" cy="475488"/>
           </a:xfrm>
           <a:prstGeom prst="rect">
             <a:avLst>
-              <a:gd name="adj" fmla="val 9524"/>
+              <a:gd name="adj" fmla="val 7692"/>
             </a:avLst>
           </a:prstGeom>
           <a:solidFill>
@@ -15537,7 +14824,7 @@
         <p:spPr>
           <a:xfrm>
             <a:off x="7447135" y="4169664"/>
-            <a:ext cx="685800" cy="384048"/>
+            <a:ext cx="685800" cy="475488"/>
           </a:xfrm>
           <a:prstGeom prst="rect">
             <a:avLst/>
@@ -15561,48 +14848,9 @@
                 <a:ea typeface="Trebuchet MS" pitchFamily="34" charset="-122"/>
                 <a:cs typeface="Trebuchet MS" pitchFamily="34" charset="-120"/>
               </a:rPr>
-              <a:t>n</a:t>
+              <a:t>d</a:t>
             </a:r>
             <a:endParaRPr lang="en-US" sz="900" dirty="0"/>
-          </a:p>
-        </p:txBody>
-      </p:sp>
-      <p:sp>
-        <p:nvSpPr>
-          <p:cNvPr id="45" name="Text 43"/>
-          <p:cNvSpPr/>
-          <p:nvPr/>
-        </p:nvSpPr>
-        <p:spPr>
-          <a:xfrm>
-            <a:off x="7447135" y="4572000"/>
-            <a:ext cx="685800" cy="219456"/>
-          </a:xfrm>
-          <a:prstGeom prst="rect">
-            <a:avLst/>
-          </a:prstGeom>
-          <a:noFill/>
-          <a:ln/>
-        </p:spPr>
-        <p:txBody>
-          <a:bodyPr wrap="square" lIns="0" tIns="0" rIns="0" bIns="0" rtlCol="0" anchor="t"/>
-          <a:lstStyle/>
-          <a:p>
-            <a:pPr algn="ctr" indent="0" marL="0">
-              <a:buNone/>
-            </a:pPr>
-            <a:r>
-              <a:rPr lang="en-US" sz="750" i="1" dirty="0">
-                <a:solidFill>
-                  <a:srgbClr val="94A3B8"/>
-                </a:solidFill>
-                <a:latin typeface="Calibri" pitchFamily="34" charset="0"/>
-                <a:ea typeface="Calibri" pitchFamily="34" charset="-122"/>
-                <a:cs typeface="Calibri" pitchFamily="34" charset="-120"/>
-              </a:rPr>
-              <a:t>silent</a:t>
-            </a:r>
-            <a:endParaRPr lang="en-US" sz="750" dirty="0"/>
           </a:p>
         </p:txBody>
       </p:sp>
@@ -16174,7 +15422,7 @@
                 <a:ea typeface="Calibri" pitchFamily="34" charset="-122"/>
                 <a:cs typeface="Calibri" pitchFamily="34" charset="-120"/>
               </a:rPr>
-              <a:t>Word Labs  •  wordlabs.app  •  Root: 'fast' = quick, firm, or not eating</a:t>
+              <a:t>Word Labs  •  wordlabs.app  •  Root: 'fast' = quick</a:t>
             </a:r>
             <a:endParaRPr lang="en-US" sz="800" dirty="0"/>
           </a:p>
@@ -16508,7 +15756,7 @@
                 <a:ea typeface="Trebuchet MS" pitchFamily="34" charset="-122"/>
                 <a:cs typeface="Trebuchet MS" pitchFamily="34" charset="-120"/>
               </a:rPr>
-              <a:t>2</a:t>
+              <a:t>0</a:t>
             </a:r>
             <a:pPr algn="ctr" indent="0" marL="0">
               <a:buNone/>
@@ -16522,7 +15770,7 @@
                 <a:ea typeface="Trebuchet MS" pitchFamily="34" charset="-122"/>
                 <a:cs typeface="Trebuchet MS" pitchFamily="34" charset="-120"/>
               </a:rPr>
-              <a:t>  punctuation marks</a:t>
+              <a:t>  punctuation mark</a:t>
             </a:r>
             <a:endParaRPr lang="en-US" sz="2800" dirty="0"/>
           </a:p>
@@ -16814,7 +16062,7 @@
                 <a:ea typeface="Calibri" pitchFamily="34" charset="-122"/>
                 <a:cs typeface="Calibri" pitchFamily="34" charset="-120"/>
               </a:rPr>
-              <a:t>Word Labs  •  wordlabs.app  •  Root: 'fast' = quick, firm, or not eating</a:t>
+              <a:t>Word Labs  •  wordlabs.app  •  Root: 'fast' = quick</a:t>
             </a:r>
             <a:endParaRPr lang="en-US" sz="800" dirty="0"/>
           </a:p>
@@ -16926,7 +16174,7 @@
                 <a:ea typeface="Calibri" pitchFamily="34" charset="-122"/>
                 <a:cs typeface="Calibri" pitchFamily="34" charset="-120"/>
               </a:rPr>
-              <a:t>During the </a:t>
+              <a:t>My new bike is much </a:t>
             </a:r>
             <a:pPr algn="l" indent="0" marL="0">
               <a:buNone/>
@@ -16943,7 +16191,7 @@
                 <a:ea typeface="Calibri" pitchFamily="34" charset="-122"/>
                 <a:cs typeface="Calibri" pitchFamily="34" charset="-120"/>
               </a:rPr>
-              <a:t>fasting</a:t>
+              <a:t>faster</a:t>
             </a:r>
             <a:pPr algn="l" indent="0" marL="0">
               <a:buNone/>
@@ -16957,7 +16205,7 @@
                 <a:ea typeface="Calibri" pitchFamily="34" charset="-122"/>
                 <a:cs typeface="Calibri" pitchFamily="34" charset="-120"/>
               </a:rPr>
-              <a:t> period, the </a:t>
+              <a:t> than my old one. The cheetah is the </a:t>
             </a:r>
             <a:pPr algn="l" indent="0" marL="0">
               <a:buNone/>
@@ -16974,7 +16222,7 @@
                 <a:ea typeface="Calibri" pitchFamily="34" charset="-122"/>
                 <a:cs typeface="Calibri" pitchFamily="34" charset="-120"/>
               </a:rPr>
-              <a:t>steadfast</a:t>
+              <a:t>fastest</a:t>
             </a:r>
             <a:pPr algn="l" indent="0" marL="0">
               <a:buNone/>
@@ -16988,7 +16236,7 @@
                 <a:ea typeface="Calibri" pitchFamily="34" charset="-122"/>
                 <a:cs typeface="Calibri" pitchFamily="34" charset="-120"/>
               </a:rPr>
-              <a:t> monk ate only </a:t>
+              <a:t> animal on land. </a:t>
             </a:r>
             <a:pPr algn="l" indent="0" marL="0">
               <a:buNone/>
@@ -17005,7 +16253,7 @@
                 <a:ea typeface="Calibri" pitchFamily="34" charset="-122"/>
                 <a:cs typeface="Calibri" pitchFamily="34" charset="-120"/>
               </a:rPr>
-              <a:t>breakfast</a:t>
+              <a:t>Fasting</a:t>
             </a:r>
             <a:pPr algn="l" indent="0" marL="0">
               <a:buNone/>
@@ -17019,7 +16267,7 @@
                 <a:ea typeface="Calibri" pitchFamily="34" charset="-122"/>
                 <a:cs typeface="Calibri" pitchFamily="34" charset="-120"/>
               </a:rPr>
-              <a:t> each morning, breaking his overnight fast with gratitude.</a:t>
+              <a:t> during Ramadan means not eating between dawn and sunset.</a:t>
             </a:r>
             <a:endParaRPr lang="en-US" sz="1800" dirty="0"/>
           </a:p>
@@ -17174,7 +16422,7 @@
                 <a:ea typeface="Trebuchet MS" pitchFamily="34" charset="-122"/>
                 <a:cs typeface="Trebuchet MS" pitchFamily="34" charset="-120"/>
               </a:rPr>
-              <a:t>fasting</a:t>
+              <a:t>faster</a:t>
             </a:r>
             <a:endParaRPr lang="en-US" sz="1400" dirty="0"/>
           </a:p>
@@ -17302,7 +16550,7 @@
                 <a:ea typeface="Trebuchet MS" pitchFamily="34" charset="-122"/>
                 <a:cs typeface="Trebuchet MS" pitchFamily="34" charset="-120"/>
               </a:rPr>
-              <a:t>steadfast</a:t>
+              <a:t>fastest</a:t>
             </a:r>
             <a:endParaRPr lang="en-US" sz="1400" dirty="0"/>
           </a:p>
@@ -17430,7 +16678,7 @@
                 <a:ea typeface="Trebuchet MS" pitchFamily="34" charset="-122"/>
                 <a:cs typeface="Trebuchet MS" pitchFamily="34" charset="-120"/>
               </a:rPr>
-              <a:t>breakfast</a:t>
+              <a:t>fasting</a:t>
             </a:r>
             <a:endParaRPr lang="en-US" sz="1400" dirty="0"/>
           </a:p>
@@ -17761,7 +17009,7 @@
                 <a:ea typeface="Calibri" pitchFamily="34" charset="-122"/>
                 <a:cs typeface="Calibri" pitchFamily="34" charset="-120"/>
               </a:rPr>
-              <a:t>Word Labs  •  wordlabs.app  •  Root: 'fast' = quick, firm, or not eating</a:t>
+              <a:t>Word Labs  •  wordlabs.app  •  Root: 'fast' = quick</a:t>
             </a:r>
             <a:endParaRPr lang="en-US" sz="800" dirty="0"/>
           </a:p>
@@ -17900,7 +17148,7 @@
                 <a:ea typeface="Trebuchet MS" pitchFamily="34" charset="-122"/>
                 <a:cs typeface="Trebuchet MS" pitchFamily="34" charset="-120"/>
               </a:rPr>
-              <a:t>fasting</a:t>
+              <a:t>faster</a:t>
             </a:r>
             <a:endParaRPr lang="en-US" sz="2800" dirty="0"/>
           </a:p>
@@ -18588,7 +17836,7 @@
                 <a:ea typeface="Calibri" pitchFamily="34" charset="-122"/>
                 <a:cs typeface="Calibri" pitchFamily="34" charset="-120"/>
               </a:rPr>
-              <a:t>Word Labs  •  wordlabs.app  •  Root: 'fast' = quick, firm, or not eating</a:t>
+              <a:t>Word Labs  •  wordlabs.app  •  Root: 'fast' = quick</a:t>
             </a:r>
             <a:endParaRPr lang="en-US" sz="800" dirty="0"/>
           </a:p>
@@ -18727,7 +17975,7 @@
                 <a:ea typeface="Trebuchet MS" pitchFamily="34" charset="-122"/>
                 <a:cs typeface="Trebuchet MS" pitchFamily="34" charset="-120"/>
               </a:rPr>
-              <a:t>fasting</a:t>
+              <a:t>faster</a:t>
             </a:r>
             <a:endParaRPr lang="en-US" sz="2800" dirty="0"/>
           </a:p>
@@ -18905,7 +18153,7 @@
                 <a:ea typeface="Calibri" pitchFamily="34" charset="-122"/>
                 <a:cs typeface="Calibri" pitchFamily="34" charset="-120"/>
               </a:rPr>
-              <a:t>going without food</a:t>
+              <a:t>quick</a:t>
             </a:r>
             <a:endParaRPr lang="en-US" sz="850" dirty="0"/>
           </a:p>
@@ -18978,7 +18226,7 @@
                 <a:ea typeface="Trebuchet MS" pitchFamily="34" charset="-122"/>
                 <a:cs typeface="Trebuchet MS" pitchFamily="34" charset="-120"/>
               </a:rPr>
-              <a:t>-ing</a:t>
+              <a:t>er</a:t>
             </a:r>
             <a:endParaRPr lang="en-US" sz="1300" dirty="0"/>
           </a:p>
@@ -19017,7 +18265,7 @@
                 <a:ea typeface="Calibri" pitchFamily="34" charset="-122"/>
                 <a:cs typeface="Calibri" pitchFamily="34" charset="-120"/>
               </a:rPr>
-              <a:t>in the process of (continuous action)</a:t>
+              <a:t>person who; more</a:t>
             </a:r>
             <a:endParaRPr lang="en-US" sz="850" dirty="0"/>
           </a:p>
@@ -19573,7 +18821,7 @@
                 <a:ea typeface="Calibri" pitchFamily="34" charset="-122"/>
                 <a:cs typeface="Calibri" pitchFamily="34" charset="-120"/>
               </a:rPr>
-              <a:t>Word Labs  •  wordlabs.app  •  Root: 'fast' = quick, firm, or not eating</a:t>
+              <a:t>Word Labs  •  wordlabs.app  •  Root: 'fast' = quick</a:t>
             </a:r>
             <a:endParaRPr lang="en-US" sz="800" dirty="0"/>
           </a:p>
@@ -19712,7 +18960,7 @@
                 <a:ea typeface="Trebuchet MS" pitchFamily="34" charset="-122"/>
                 <a:cs typeface="Trebuchet MS" pitchFamily="34" charset="-120"/>
               </a:rPr>
-              <a:t>fasting</a:t>
+              <a:t>faster</a:t>
             </a:r>
             <a:endParaRPr lang="en-US" sz="2800" dirty="0"/>
           </a:p>
@@ -19890,7 +19138,7 @@
                 <a:ea typeface="Calibri" pitchFamily="34" charset="-122"/>
                 <a:cs typeface="Calibri" pitchFamily="34" charset="-120"/>
               </a:rPr>
-              <a:t>going without food</a:t>
+              <a:t>quick</a:t>
             </a:r>
             <a:endParaRPr lang="en-US" sz="850" dirty="0"/>
           </a:p>
@@ -19963,7 +19211,7 @@
                 <a:ea typeface="Trebuchet MS" pitchFamily="34" charset="-122"/>
                 <a:cs typeface="Trebuchet MS" pitchFamily="34" charset="-120"/>
               </a:rPr>
-              <a:t>-ing</a:t>
+              <a:t>er</a:t>
             </a:r>
             <a:endParaRPr lang="en-US" sz="1300" dirty="0"/>
           </a:p>
@@ -20002,7 +19250,7 @@
                 <a:ea typeface="Calibri" pitchFamily="34" charset="-122"/>
                 <a:cs typeface="Calibri" pitchFamily="34" charset="-120"/>
               </a:rPr>
-              <a:t>in the process of (continuous action)</a:t>
+              <a:t>person who; more</a:t>
             </a:r>
             <a:endParaRPr lang="en-US" sz="850" dirty="0"/>
           </a:p>
@@ -20266,7 +19514,7 @@
                 <a:ea typeface="Trebuchet MS" pitchFamily="34" charset="-122"/>
                 <a:cs typeface="Trebuchet MS" pitchFamily="34" charset="-120"/>
               </a:rPr>
-              <a:t>ing</a:t>
+              <a:t>er</a:t>
             </a:r>
             <a:endParaRPr lang="en-US" sz="1400" dirty="0"/>
           </a:p>
@@ -20690,7 +19938,7 @@
                 <a:ea typeface="Calibri" pitchFamily="34" charset="-122"/>
                 <a:cs typeface="Calibri" pitchFamily="34" charset="-120"/>
               </a:rPr>
-              <a:t>Word Labs  •  wordlabs.app  •  Root: 'fast' = quick, firm, or not eating</a:t>
+              <a:t>Word Labs  •  wordlabs.app  •  Root: 'fast' = quick</a:t>
             </a:r>
             <a:endParaRPr lang="en-US" sz="800" dirty="0"/>
           </a:p>
@@ -20829,7 +20077,7 @@
                 <a:ea typeface="Trebuchet MS" pitchFamily="34" charset="-122"/>
                 <a:cs typeface="Trebuchet MS" pitchFamily="34" charset="-120"/>
               </a:rPr>
-              <a:t>fasting</a:t>
+              <a:t>faster</a:t>
             </a:r>
             <a:endParaRPr lang="en-US" sz="2800" dirty="0"/>
           </a:p>
@@ -21007,7 +20255,7 @@
                 <a:ea typeface="Calibri" pitchFamily="34" charset="-122"/>
                 <a:cs typeface="Calibri" pitchFamily="34" charset="-120"/>
               </a:rPr>
-              <a:t>going without food</a:t>
+              <a:t>quick</a:t>
             </a:r>
             <a:endParaRPr lang="en-US" sz="850" dirty="0"/>
           </a:p>
@@ -21080,7 +20328,7 @@
                 <a:ea typeface="Trebuchet MS" pitchFamily="34" charset="-122"/>
                 <a:cs typeface="Trebuchet MS" pitchFamily="34" charset="-120"/>
               </a:rPr>
-              <a:t>-ing</a:t>
+              <a:t>er</a:t>
             </a:r>
             <a:endParaRPr lang="en-US" sz="1300" dirty="0"/>
           </a:p>
@@ -21119,7 +20367,7 @@
                 <a:ea typeface="Calibri" pitchFamily="34" charset="-122"/>
                 <a:cs typeface="Calibri" pitchFamily="34" charset="-120"/>
               </a:rPr>
-              <a:t>in the process of (continuous action)</a:t>
+              <a:t>person who; more</a:t>
             </a:r>
             <a:endParaRPr lang="en-US" sz="850" dirty="0"/>
           </a:p>
@@ -21383,7 +20631,7 @@
                 <a:ea typeface="Trebuchet MS" pitchFamily="34" charset="-122"/>
                 <a:cs typeface="Trebuchet MS" pitchFamily="34" charset="-120"/>
               </a:rPr>
-              <a:t>ing</a:t>
+              <a:t>er</a:t>
             </a:r>
             <a:endParaRPr lang="en-US" sz="1400" dirty="0"/>
           </a:p>
@@ -21490,7 +20738,7 @@
         </p:nvSpPr>
         <p:spPr>
           <a:xfrm>
-            <a:off x="2254649" y="4169664"/>
+            <a:off x="2427732" y="4169664"/>
             <a:ext cx="685800" cy="475488"/>
           </a:xfrm>
           <a:prstGeom prst="rect">
@@ -21517,7 +20765,7 @@
         </p:nvSpPr>
         <p:spPr>
           <a:xfrm>
-            <a:off x="2254649" y="4169664"/>
+            <a:off x="2427732" y="4169664"/>
             <a:ext cx="685800" cy="475488"/>
           </a:xfrm>
           <a:prstGeom prst="rect">
@@ -21556,7 +20804,7 @@
         </p:nvSpPr>
         <p:spPr>
           <a:xfrm>
-            <a:off x="3293146" y="4169664"/>
+            <a:off x="3639312" y="4169664"/>
             <a:ext cx="685800" cy="475488"/>
           </a:xfrm>
           <a:prstGeom prst="rect">
@@ -21583,7 +20831,7 @@
         </p:nvSpPr>
         <p:spPr>
           <a:xfrm>
-            <a:off x="3293146" y="4169664"/>
+            <a:off x="3639312" y="4169664"/>
             <a:ext cx="685800" cy="475488"/>
           </a:xfrm>
           <a:prstGeom prst="rect">
@@ -21622,7 +20870,7 @@
         </p:nvSpPr>
         <p:spPr>
           <a:xfrm>
-            <a:off x="4331643" y="4169664"/>
+            <a:off x="4850892" y="4169664"/>
             <a:ext cx="685800" cy="475488"/>
           </a:xfrm>
           <a:prstGeom prst="rect">
@@ -21649,7 +20897,7 @@
         </p:nvSpPr>
         <p:spPr>
           <a:xfrm>
-            <a:off x="4331643" y="4169664"/>
+            <a:off x="4850892" y="4169664"/>
             <a:ext cx="685800" cy="475488"/>
           </a:xfrm>
           <a:prstGeom prst="rect">
@@ -21688,7 +20936,7 @@
         </p:nvSpPr>
         <p:spPr>
           <a:xfrm>
-            <a:off x="5370141" y="4169664"/>
+            <a:off x="6062472" y="4169664"/>
             <a:ext cx="685800" cy="475488"/>
           </a:xfrm>
           <a:prstGeom prst="rect">
@@ -21715,7 +20963,7 @@
         </p:nvSpPr>
         <p:spPr>
           <a:xfrm>
-            <a:off x="5370141" y="4169664"/>
+            <a:off x="6062472" y="4169664"/>
             <a:ext cx="685800" cy="475488"/>
           </a:xfrm>
           <a:prstGeom prst="rect">
@@ -21754,7 +21002,7 @@
         </p:nvSpPr>
         <p:spPr>
           <a:xfrm>
-            <a:off x="6408638" y="4169664"/>
+            <a:off x="7274052" y="4169664"/>
             <a:ext cx="685800" cy="475488"/>
           </a:xfrm>
           <a:prstGeom prst="rect">
@@ -21781,7 +21029,7 @@
         </p:nvSpPr>
         <p:spPr>
           <a:xfrm>
-            <a:off x="6408638" y="4169664"/>
+            <a:off x="7274052" y="4169664"/>
             <a:ext cx="685800" cy="475488"/>
           </a:xfrm>
           <a:prstGeom prst="rect">
@@ -21806,73 +21054,7 @@
                 <a:ea typeface="Trebuchet MS" pitchFamily="34" charset="-122"/>
                 <a:cs typeface="Trebuchet MS" pitchFamily="34" charset="-120"/>
               </a:rPr>
-              <a:t>i</a:t>
-            </a:r>
-            <a:endParaRPr lang="en-US" sz="900" dirty="0"/>
-          </a:p>
-        </p:txBody>
-      </p:sp>
-      <p:sp>
-        <p:nvSpPr>
-          <p:cNvPr id="43" name="Shape 41"/>
-          <p:cNvSpPr/>
-          <p:nvPr/>
-        </p:nvSpPr>
-        <p:spPr>
-          <a:xfrm>
-            <a:off x="7447135" y="4169664"/>
-            <a:ext cx="685800" cy="475488"/>
-          </a:xfrm>
-          <a:prstGeom prst="rect">
-            <a:avLst>
-              <a:gd name="adj" fmla="val 7692"/>
-            </a:avLst>
-          </a:prstGeom>
-          <a:solidFill>
-            <a:srgbClr val="FFFFFF"/>
-          </a:solidFill>
-          <a:ln w="12700">
-            <a:solidFill>
-              <a:srgbClr val="DB2777"/>
-            </a:solidFill>
-            <a:prstDash val="solid"/>
-          </a:ln>
-        </p:spPr>
-      </p:sp>
-      <p:sp>
-        <p:nvSpPr>
-          <p:cNvPr id="44" name="Text 42"/>
-          <p:cNvSpPr/>
-          <p:nvPr/>
-        </p:nvSpPr>
-        <p:spPr>
-          <a:xfrm>
-            <a:off x="7447135" y="4169664"/>
-            <a:ext cx="685800" cy="475488"/>
-          </a:xfrm>
-          <a:prstGeom prst="rect">
-            <a:avLst/>
-          </a:prstGeom>
-          <a:noFill/>
-          <a:ln/>
-        </p:spPr>
-        <p:txBody>
-          <a:bodyPr wrap="square" lIns="0" tIns="0" rIns="0" bIns="0" rtlCol="0" anchor="ctr"/>
-          <a:lstStyle/>
-          <a:p>
-            <a:pPr algn="ctr" indent="0" marL="0">
-              <a:buNone/>
-            </a:pPr>
-            <a:r>
-              <a:rPr lang="en-US" sz="900" b="1" dirty="0">
-                <a:solidFill>
-                  <a:srgbClr val="9D174D"/>
-                </a:solidFill>
-                <a:latin typeface="Trebuchet MS" pitchFamily="34" charset="0"/>
-                <a:ea typeface="Trebuchet MS" pitchFamily="34" charset="-122"/>
-                <a:cs typeface="Trebuchet MS" pitchFamily="34" charset="-120"/>
-              </a:rPr>
-              <a:t>ng</a:t>
+              <a:t>er</a:t>
             </a:r>
             <a:endParaRPr lang="en-US" sz="900" dirty="0"/>
           </a:p>
@@ -22164,7 +21346,7 @@
                 <a:ea typeface="Calibri" pitchFamily="34" charset="-122"/>
                 <a:cs typeface="Calibri" pitchFamily="34" charset="-120"/>
               </a:rPr>
-              <a:t>Word Labs  •  wordlabs.app  •  Root: 'fast' = quick, firm, or not eating</a:t>
+              <a:t>Word Labs  •  wordlabs.app  •  Root: 'fast' = quick</a:t>
             </a:r>
             <a:endParaRPr lang="en-US" sz="800" dirty="0"/>
           </a:p>
@@ -22303,7 +21485,7 @@
                 <a:ea typeface="Trebuchet MS" pitchFamily="34" charset="-122"/>
                 <a:cs typeface="Trebuchet MS" pitchFamily="34" charset="-120"/>
               </a:rPr>
-              <a:t>steadfast</a:t>
+              <a:t>fastest</a:t>
             </a:r>
             <a:endParaRPr lang="en-US" sz="2800" dirty="0"/>
           </a:p>
@@ -22991,7 +22173,7 @@
                 <a:ea typeface="Calibri" pitchFamily="34" charset="-122"/>
                 <a:cs typeface="Calibri" pitchFamily="34" charset="-120"/>
               </a:rPr>
-              <a:t>Word Labs  •  wordlabs.app  •  Root: 'fast' = quick, firm, or not eating</a:t>
+              <a:t>Word Labs  •  wordlabs.app  •  Root: 'fast' = quick</a:t>
             </a:r>
             <a:endParaRPr lang="en-US" sz="800" dirty="0"/>
           </a:p>
@@ -23130,7 +22312,7 @@
                 <a:ea typeface="Trebuchet MS" pitchFamily="34" charset="-122"/>
                 <a:cs typeface="Trebuchet MS" pitchFamily="34" charset="-120"/>
               </a:rPr>
-              <a:t>steadfast</a:t>
+              <a:t>fastest</a:t>
             </a:r>
             <a:endParaRPr lang="en-US" sz="2800" dirty="0"/>
           </a:p>
@@ -23219,11 +22401,11 @@
             </a:avLst>
           </a:prstGeom>
           <a:solidFill>
-            <a:srgbClr val="DDD6FE"/>
+            <a:srgbClr val="CCFBF1"/>
           </a:solidFill>
           <a:ln w="19050">
             <a:solidFill>
-              <a:srgbClr val="7C3AED"/>
+              <a:srgbClr val="0D9488"/>
             </a:solidFill>
             <a:prstDash val="solid"/>
           </a:ln>
@@ -23263,13 +22445,13 @@
             <a:r>
               <a:rPr lang="en-US" sz="1300" b="1" dirty="0">
                 <a:solidFill>
-                  <a:srgbClr val="4C1D95"/>
+                  <a:srgbClr val="0F766E"/>
                 </a:solidFill>
                 <a:latin typeface="Trebuchet MS" pitchFamily="34" charset="0"/>
                 <a:ea typeface="Trebuchet MS" pitchFamily="34" charset="-122"/>
                 <a:cs typeface="Trebuchet MS" pitchFamily="34" charset="-120"/>
               </a:rPr>
-              <a:t>stead</a:t>
+              <a:t>fast</a:t>
             </a:r>
             <a:endParaRPr lang="en-US" sz="1300" dirty="0"/>
           </a:p>
@@ -23308,7 +22490,7 @@
                 <a:ea typeface="Calibri" pitchFamily="34" charset="-122"/>
                 <a:cs typeface="Calibri" pitchFamily="34" charset="-120"/>
               </a:rPr>
-              <a:t>place or position</a:t>
+              <a:t>quick</a:t>
             </a:r>
             <a:endParaRPr lang="en-US" sz="850" dirty="0"/>
           </a:p>
@@ -23331,11 +22513,11 @@
             </a:avLst>
           </a:prstGeom>
           <a:solidFill>
-            <a:srgbClr val="CCFBF1"/>
+            <a:srgbClr val="FCE7F3"/>
           </a:solidFill>
           <a:ln w="19050">
             <a:solidFill>
-              <a:srgbClr val="0D9488"/>
+              <a:srgbClr val="DB2777"/>
             </a:solidFill>
             <a:prstDash val="solid"/>
           </a:ln>
@@ -23375,13 +22557,13 @@
             <a:r>
               <a:rPr lang="en-US" sz="1300" b="1" dirty="0">
                 <a:solidFill>
-                  <a:srgbClr val="0F766E"/>
+                  <a:srgbClr val="9D174D"/>
                 </a:solidFill>
                 <a:latin typeface="Trebuchet MS" pitchFamily="34" charset="0"/>
                 <a:ea typeface="Trebuchet MS" pitchFamily="34" charset="-122"/>
                 <a:cs typeface="Trebuchet MS" pitchFamily="34" charset="-120"/>
               </a:rPr>
-              <a:t>fast</a:t>
+              <a:t>est</a:t>
             </a:r>
             <a:endParaRPr lang="en-US" sz="1300" dirty="0"/>
           </a:p>
@@ -23420,7 +22602,7 @@
                 <a:ea typeface="Calibri" pitchFamily="34" charset="-122"/>
                 <a:cs typeface="Calibri" pitchFamily="34" charset="-120"/>
               </a:rPr>
-              <a:t>firm, fixed in place</a:t>
+              <a:t>most</a:t>
             </a:r>
             <a:endParaRPr lang="en-US" sz="850" dirty="0"/>
           </a:p>
@@ -23976,7 +23158,7 @@
                 <a:ea typeface="Calibri" pitchFamily="34" charset="-122"/>
                 <a:cs typeface="Calibri" pitchFamily="34" charset="-120"/>
               </a:rPr>
-              <a:t>Word Labs  •  wordlabs.app  •  Root: 'fast' = quick, firm, or not eating</a:t>
+              <a:t>Word Labs  •  wordlabs.app  •  Root: 'fast' = quick</a:t>
             </a:r>
             <a:endParaRPr lang="en-US" sz="800" dirty="0"/>
           </a:p>
@@ -24049,7 +23231,7 @@
                 <a:ea typeface="Trebuchet MS" pitchFamily="34" charset="-122"/>
                 <a:cs typeface="Trebuchet MS" pitchFamily="34" charset="-120"/>
               </a:rPr>
-              <a:t>We are learning that the root 'fast' means 'quick, firm, or not eating'.</a:t>
+              <a:t>We are learning that the root 'fast' means 'quick'.</a:t>
             </a:r>
             <a:endParaRPr lang="en-US" sz="2000" dirty="0"/>
           </a:p>
@@ -24695,7 +23877,7 @@
                 <a:ea typeface="Calibri" pitchFamily="34" charset="-122"/>
                 <a:cs typeface="Calibri" pitchFamily="34" charset="-120"/>
               </a:rPr>
-              <a:t>Word Labs  •  wordlabs.app  •  Root: 'fast' = quick, firm, or not eating</a:t>
+              <a:t>Word Labs  •  wordlabs.app  •  Root: 'fast' = quick</a:t>
             </a:r>
             <a:endParaRPr lang="en-US" sz="800" dirty="0"/>
           </a:p>
@@ -24834,7 +24016,7 @@
                 <a:ea typeface="Trebuchet MS" pitchFamily="34" charset="-122"/>
                 <a:cs typeface="Trebuchet MS" pitchFamily="34" charset="-120"/>
               </a:rPr>
-              <a:t>steadfast</a:t>
+              <a:t>fastest</a:t>
             </a:r>
             <a:endParaRPr lang="en-US" sz="2800" dirty="0"/>
           </a:p>
@@ -24923,11 +24105,11 @@
             </a:avLst>
           </a:prstGeom>
           <a:solidFill>
-            <a:srgbClr val="DDD6FE"/>
+            <a:srgbClr val="CCFBF1"/>
           </a:solidFill>
           <a:ln w="19050">
             <a:solidFill>
-              <a:srgbClr val="7C3AED"/>
+              <a:srgbClr val="0D9488"/>
             </a:solidFill>
             <a:prstDash val="solid"/>
           </a:ln>
@@ -24967,13 +24149,13 @@
             <a:r>
               <a:rPr lang="en-US" sz="1300" b="1" dirty="0">
                 <a:solidFill>
-                  <a:srgbClr val="4C1D95"/>
+                  <a:srgbClr val="0F766E"/>
                 </a:solidFill>
                 <a:latin typeface="Trebuchet MS" pitchFamily="34" charset="0"/>
                 <a:ea typeface="Trebuchet MS" pitchFamily="34" charset="-122"/>
                 <a:cs typeface="Trebuchet MS" pitchFamily="34" charset="-120"/>
               </a:rPr>
-              <a:t>stead</a:t>
+              <a:t>fast</a:t>
             </a:r>
             <a:endParaRPr lang="en-US" sz="1300" dirty="0"/>
           </a:p>
@@ -25012,7 +24194,7 @@
                 <a:ea typeface="Calibri" pitchFamily="34" charset="-122"/>
                 <a:cs typeface="Calibri" pitchFamily="34" charset="-120"/>
               </a:rPr>
-              <a:t>place or position</a:t>
+              <a:t>quick</a:t>
             </a:r>
             <a:endParaRPr lang="en-US" sz="850" dirty="0"/>
           </a:p>
@@ -25035,11 +24217,11 @@
             </a:avLst>
           </a:prstGeom>
           <a:solidFill>
-            <a:srgbClr val="CCFBF1"/>
+            <a:srgbClr val="FCE7F3"/>
           </a:solidFill>
           <a:ln w="19050">
             <a:solidFill>
-              <a:srgbClr val="0D9488"/>
+              <a:srgbClr val="DB2777"/>
             </a:solidFill>
             <a:prstDash val="solid"/>
           </a:ln>
@@ -25079,13 +24261,13 @@
             <a:r>
               <a:rPr lang="en-US" sz="1300" b="1" dirty="0">
                 <a:solidFill>
-                  <a:srgbClr val="0F766E"/>
+                  <a:srgbClr val="9D174D"/>
                 </a:solidFill>
                 <a:latin typeface="Trebuchet MS" pitchFamily="34" charset="0"/>
                 <a:ea typeface="Trebuchet MS" pitchFamily="34" charset="-122"/>
                 <a:cs typeface="Trebuchet MS" pitchFamily="34" charset="-120"/>
               </a:rPr>
-              <a:t>fast</a:t>
+              <a:t>est</a:t>
             </a:r>
             <a:endParaRPr lang="en-US" sz="1300" dirty="0"/>
           </a:p>
@@ -25124,7 +24306,7 @@
                 <a:ea typeface="Calibri" pitchFamily="34" charset="-122"/>
                 <a:cs typeface="Calibri" pitchFamily="34" charset="-120"/>
               </a:rPr>
-              <a:t>firm, fixed in place</a:t>
+              <a:t>most</a:t>
             </a:r>
             <a:endParaRPr lang="en-US" sz="850" dirty="0"/>
           </a:p>
@@ -25283,7 +24465,7 @@
                 <a:ea typeface="Trebuchet MS" pitchFamily="34" charset="-122"/>
                 <a:cs typeface="Trebuchet MS" pitchFamily="34" charset="-120"/>
               </a:rPr>
-              <a:t>stead</a:t>
+              <a:t>fast</a:t>
             </a:r>
             <a:endParaRPr lang="en-US" sz="1400" dirty="0"/>
           </a:p>
@@ -25388,7 +24570,7 @@
                 <a:ea typeface="Trebuchet MS" pitchFamily="34" charset="-122"/>
                 <a:cs typeface="Trebuchet MS" pitchFamily="34" charset="-120"/>
               </a:rPr>
-              <a:t>fast</a:t>
+              <a:t>est</a:t>
             </a:r>
             <a:endParaRPr lang="en-US" sz="1400" dirty="0"/>
           </a:p>
@@ -25812,7 +24994,7 @@
                 <a:ea typeface="Calibri" pitchFamily="34" charset="-122"/>
                 <a:cs typeface="Calibri" pitchFamily="34" charset="-120"/>
               </a:rPr>
-              <a:t>Word Labs  •  wordlabs.app  •  Root: 'fast' = quick, firm, or not eating</a:t>
+              <a:t>Word Labs  •  wordlabs.app  •  Root: 'fast' = quick</a:t>
             </a:r>
             <a:endParaRPr lang="en-US" sz="800" dirty="0"/>
           </a:p>
@@ -25951,7 +25133,7 @@
                 <a:ea typeface="Trebuchet MS" pitchFamily="34" charset="-122"/>
                 <a:cs typeface="Trebuchet MS" pitchFamily="34" charset="-120"/>
               </a:rPr>
-              <a:t>steadfast</a:t>
+              <a:t>fastest</a:t>
             </a:r>
             <a:endParaRPr lang="en-US" sz="2800" dirty="0"/>
           </a:p>
@@ -26040,11 +25222,11 @@
             </a:avLst>
           </a:prstGeom>
           <a:solidFill>
-            <a:srgbClr val="DDD6FE"/>
+            <a:srgbClr val="CCFBF1"/>
           </a:solidFill>
           <a:ln w="19050">
             <a:solidFill>
-              <a:srgbClr val="7C3AED"/>
+              <a:srgbClr val="0D9488"/>
             </a:solidFill>
             <a:prstDash val="solid"/>
           </a:ln>
@@ -26084,13 +25266,13 @@
             <a:r>
               <a:rPr lang="en-US" sz="1300" b="1" dirty="0">
                 <a:solidFill>
-                  <a:srgbClr val="4C1D95"/>
+                  <a:srgbClr val="0F766E"/>
                 </a:solidFill>
                 <a:latin typeface="Trebuchet MS" pitchFamily="34" charset="0"/>
                 <a:ea typeface="Trebuchet MS" pitchFamily="34" charset="-122"/>
                 <a:cs typeface="Trebuchet MS" pitchFamily="34" charset="-120"/>
               </a:rPr>
-              <a:t>stead</a:t>
+              <a:t>fast</a:t>
             </a:r>
             <a:endParaRPr lang="en-US" sz="1300" dirty="0"/>
           </a:p>
@@ -26129,7 +25311,7 @@
                 <a:ea typeface="Calibri" pitchFamily="34" charset="-122"/>
                 <a:cs typeface="Calibri" pitchFamily="34" charset="-120"/>
               </a:rPr>
-              <a:t>place or position</a:t>
+              <a:t>quick</a:t>
             </a:r>
             <a:endParaRPr lang="en-US" sz="850" dirty="0"/>
           </a:p>
@@ -26152,11 +25334,11 @@
             </a:avLst>
           </a:prstGeom>
           <a:solidFill>
-            <a:srgbClr val="CCFBF1"/>
+            <a:srgbClr val="FCE7F3"/>
           </a:solidFill>
           <a:ln w="19050">
             <a:solidFill>
-              <a:srgbClr val="0D9488"/>
+              <a:srgbClr val="DB2777"/>
             </a:solidFill>
             <a:prstDash val="solid"/>
           </a:ln>
@@ -26196,13 +25378,13 @@
             <a:r>
               <a:rPr lang="en-US" sz="1300" b="1" dirty="0">
                 <a:solidFill>
-                  <a:srgbClr val="0F766E"/>
+                  <a:srgbClr val="9D174D"/>
                 </a:solidFill>
                 <a:latin typeface="Trebuchet MS" pitchFamily="34" charset="0"/>
                 <a:ea typeface="Trebuchet MS" pitchFamily="34" charset="-122"/>
                 <a:cs typeface="Trebuchet MS" pitchFamily="34" charset="-120"/>
               </a:rPr>
-              <a:t>fast</a:t>
+              <a:t>est</a:t>
             </a:r>
             <a:endParaRPr lang="en-US" sz="1300" dirty="0"/>
           </a:p>
@@ -26241,7 +25423,7 @@
                 <a:ea typeface="Calibri" pitchFamily="34" charset="-122"/>
                 <a:cs typeface="Calibri" pitchFamily="34" charset="-120"/>
               </a:rPr>
-              <a:t>firm, fixed in place</a:t>
+              <a:t>most</a:t>
             </a:r>
             <a:endParaRPr lang="en-US" sz="850" dirty="0"/>
           </a:p>
@@ -26400,7 +25582,7 @@
                 <a:ea typeface="Trebuchet MS" pitchFamily="34" charset="-122"/>
                 <a:cs typeface="Trebuchet MS" pitchFamily="34" charset="-120"/>
               </a:rPr>
-              <a:t>stead</a:t>
+              <a:t>fast</a:t>
             </a:r>
             <a:endParaRPr lang="en-US" sz="1400" dirty="0"/>
           </a:p>
@@ -26505,7 +25687,7 @@
                 <a:ea typeface="Trebuchet MS" pitchFamily="34" charset="-122"/>
                 <a:cs typeface="Trebuchet MS" pitchFamily="34" charset="-120"/>
               </a:rPr>
-              <a:t>fast</a:t>
+              <a:t>est</a:t>
             </a:r>
             <a:endParaRPr lang="en-US" sz="1400" dirty="0"/>
           </a:p>
@@ -26612,7 +25794,7 @@
         </p:nvSpPr>
         <p:spPr>
           <a:xfrm>
-            <a:off x="2023872" y="4169664"/>
+            <a:off x="2124837" y="4169664"/>
             <a:ext cx="685800" cy="475488"/>
           </a:xfrm>
           <a:prstGeom prst="rect">
@@ -26639,7 +25821,7 @@
         </p:nvSpPr>
         <p:spPr>
           <a:xfrm>
-            <a:off x="2023872" y="4169664"/>
+            <a:off x="2124837" y="4169664"/>
             <a:ext cx="685800" cy="475488"/>
           </a:xfrm>
           <a:prstGeom prst="rect">
@@ -26664,7 +25846,7 @@
                 <a:ea typeface="Trebuchet MS" pitchFamily="34" charset="-122"/>
                 <a:cs typeface="Trebuchet MS" pitchFamily="34" charset="-120"/>
               </a:rPr>
-              <a:t>s</a:t>
+              <a:t>f</a:t>
             </a:r>
             <a:endParaRPr lang="en-US" sz="900" dirty="0"/>
           </a:p>
@@ -26678,7 +25860,7 @@
         </p:nvSpPr>
         <p:spPr>
           <a:xfrm>
-            <a:off x="2831592" y="4169664"/>
+            <a:off x="3033522" y="4169664"/>
             <a:ext cx="685800" cy="475488"/>
           </a:xfrm>
           <a:prstGeom prst="rect">
@@ -26705,7 +25887,7 @@
         </p:nvSpPr>
         <p:spPr>
           <a:xfrm>
-            <a:off x="2831592" y="4169664"/>
+            <a:off x="3033522" y="4169664"/>
             <a:ext cx="685800" cy="475488"/>
           </a:xfrm>
           <a:prstGeom prst="rect">
@@ -26730,7 +25912,7 @@
                 <a:ea typeface="Trebuchet MS" pitchFamily="34" charset="-122"/>
                 <a:cs typeface="Trebuchet MS" pitchFamily="34" charset="-120"/>
               </a:rPr>
-              <a:t>t</a:t>
+              <a:t>a</a:t>
             </a:r>
             <a:endParaRPr lang="en-US" sz="900" dirty="0"/>
           </a:p>
@@ -26744,7 +25926,7 @@
         </p:nvSpPr>
         <p:spPr>
           <a:xfrm>
-            <a:off x="3639312" y="4169664"/>
+            <a:off x="3942207" y="4169664"/>
             <a:ext cx="685800" cy="475488"/>
           </a:xfrm>
           <a:prstGeom prst="rect">
@@ -26771,7 +25953,7 @@
         </p:nvSpPr>
         <p:spPr>
           <a:xfrm>
-            <a:off x="3639312" y="4169664"/>
+            <a:off x="3942207" y="4169664"/>
             <a:ext cx="685800" cy="475488"/>
           </a:xfrm>
           <a:prstGeom prst="rect">
@@ -26796,7 +25978,7 @@
                 <a:ea typeface="Trebuchet MS" pitchFamily="34" charset="-122"/>
                 <a:cs typeface="Trebuchet MS" pitchFamily="34" charset="-120"/>
               </a:rPr>
-              <a:t>ea</a:t>
+              <a:t>s</a:t>
             </a:r>
             <a:endParaRPr lang="en-US" sz="900" dirty="0"/>
           </a:p>
@@ -26810,7 +25992,7 @@
         </p:nvSpPr>
         <p:spPr>
           <a:xfrm>
-            <a:off x="4447032" y="4169664"/>
+            <a:off x="4850892" y="4169664"/>
             <a:ext cx="685800" cy="475488"/>
           </a:xfrm>
           <a:prstGeom prst="rect">
@@ -26837,7 +26019,7 @@
         </p:nvSpPr>
         <p:spPr>
           <a:xfrm>
-            <a:off x="4447032" y="4169664"/>
+            <a:off x="4850892" y="4169664"/>
             <a:ext cx="685800" cy="475488"/>
           </a:xfrm>
           <a:prstGeom prst="rect">
@@ -26862,7 +26044,7 @@
                 <a:ea typeface="Trebuchet MS" pitchFamily="34" charset="-122"/>
                 <a:cs typeface="Trebuchet MS" pitchFamily="34" charset="-120"/>
               </a:rPr>
-              <a:t>d</a:t>
+              <a:t>t</a:t>
             </a:r>
             <a:endParaRPr lang="en-US" sz="900" dirty="0"/>
           </a:p>
@@ -26876,7 +26058,7 @@
         </p:nvSpPr>
         <p:spPr>
           <a:xfrm>
-            <a:off x="5254752" y="4169664"/>
+            <a:off x="5759577" y="4169664"/>
             <a:ext cx="685800" cy="475488"/>
           </a:xfrm>
           <a:prstGeom prst="rect">
@@ -26903,7 +26085,7 @@
         </p:nvSpPr>
         <p:spPr>
           <a:xfrm>
-            <a:off x="5254752" y="4169664"/>
+            <a:off x="5759577" y="4169664"/>
             <a:ext cx="685800" cy="475488"/>
           </a:xfrm>
           <a:prstGeom prst="rect">
@@ -26928,7 +26110,7 @@
                 <a:ea typeface="Trebuchet MS" pitchFamily="34" charset="-122"/>
                 <a:cs typeface="Trebuchet MS" pitchFamily="34" charset="-120"/>
               </a:rPr>
-              <a:t>f</a:t>
+              <a:t>e</a:t>
             </a:r>
             <a:endParaRPr lang="en-US" sz="900" dirty="0"/>
           </a:p>
@@ -26942,7 +26124,7 @@
         </p:nvSpPr>
         <p:spPr>
           <a:xfrm>
-            <a:off x="6062472" y="4169664"/>
+            <a:off x="6668262" y="4169664"/>
             <a:ext cx="685800" cy="475488"/>
           </a:xfrm>
           <a:prstGeom prst="rect">
@@ -26969,7 +26151,7 @@
         </p:nvSpPr>
         <p:spPr>
           <a:xfrm>
-            <a:off x="6062472" y="4169664"/>
+            <a:off x="6668262" y="4169664"/>
             <a:ext cx="685800" cy="475488"/>
           </a:xfrm>
           <a:prstGeom prst="rect">
@@ -26994,7 +26176,7 @@
                 <a:ea typeface="Trebuchet MS" pitchFamily="34" charset="-122"/>
                 <a:cs typeface="Trebuchet MS" pitchFamily="34" charset="-120"/>
               </a:rPr>
-              <a:t>a</a:t>
+              <a:t>s</a:t>
             </a:r>
             <a:endParaRPr lang="en-US" sz="900" dirty="0"/>
           </a:p>
@@ -27008,7 +26190,7 @@
         </p:nvSpPr>
         <p:spPr>
           <a:xfrm>
-            <a:off x="6870192" y="4169664"/>
+            <a:off x="7576947" y="4169664"/>
             <a:ext cx="685800" cy="475488"/>
           </a:xfrm>
           <a:prstGeom prst="rect">
@@ -27035,73 +26217,7 @@
         </p:nvSpPr>
         <p:spPr>
           <a:xfrm>
-            <a:off x="6870192" y="4169664"/>
-            <a:ext cx="685800" cy="475488"/>
-          </a:xfrm>
-          <a:prstGeom prst="rect">
-            <a:avLst/>
-          </a:prstGeom>
-          <a:noFill/>
-          <a:ln/>
-        </p:spPr>
-        <p:txBody>
-          <a:bodyPr wrap="square" lIns="0" tIns="0" rIns="0" bIns="0" rtlCol="0" anchor="ctr"/>
-          <a:lstStyle/>
-          <a:p>
-            <a:pPr algn="ctr" indent="0" marL="0">
-              <a:buNone/>
-            </a:pPr>
-            <a:r>
-              <a:rPr lang="en-US" sz="900" b="1" dirty="0">
-                <a:solidFill>
-                  <a:srgbClr val="9D174D"/>
-                </a:solidFill>
-                <a:latin typeface="Trebuchet MS" pitchFamily="34" charset="0"/>
-                <a:ea typeface="Trebuchet MS" pitchFamily="34" charset="-122"/>
-                <a:cs typeface="Trebuchet MS" pitchFamily="34" charset="-120"/>
-              </a:rPr>
-              <a:t>s</a:t>
-            </a:r>
-            <a:endParaRPr lang="en-US" sz="900" dirty="0"/>
-          </a:p>
-        </p:txBody>
-      </p:sp>
-      <p:sp>
-        <p:nvSpPr>
-          <p:cNvPr id="47" name="Shape 45"/>
-          <p:cNvSpPr/>
-          <p:nvPr/>
-        </p:nvSpPr>
-        <p:spPr>
-          <a:xfrm>
-            <a:off x="7677912" y="4169664"/>
-            <a:ext cx="685800" cy="475488"/>
-          </a:xfrm>
-          <a:prstGeom prst="rect">
-            <a:avLst>
-              <a:gd name="adj" fmla="val 7692"/>
-            </a:avLst>
-          </a:prstGeom>
-          <a:solidFill>
-            <a:srgbClr val="FFFFFF"/>
-          </a:solidFill>
-          <a:ln w="12700">
-            <a:solidFill>
-              <a:srgbClr val="DB2777"/>
-            </a:solidFill>
-            <a:prstDash val="solid"/>
-          </a:ln>
-        </p:spPr>
-      </p:sp>
-      <p:sp>
-        <p:nvSpPr>
-          <p:cNvPr id="48" name="Text 46"/>
-          <p:cNvSpPr/>
-          <p:nvPr/>
-        </p:nvSpPr>
-        <p:spPr>
-          <a:xfrm>
-            <a:off x="7677912" y="4169664"/>
+            <a:off x="7576947" y="4169664"/>
             <a:ext cx="685800" cy="475488"/>
           </a:xfrm>
           <a:prstGeom prst="rect">
@@ -27418,7 +26534,7 @@
                 <a:ea typeface="Calibri" pitchFamily="34" charset="-122"/>
                 <a:cs typeface="Calibri" pitchFamily="34" charset="-120"/>
               </a:rPr>
-              <a:t>Word Labs  •  wordlabs.app  •  Root: 'fast' = quick, firm, or not eating</a:t>
+              <a:t>Word Labs  •  wordlabs.app  •  Root: 'fast' = quick</a:t>
             </a:r>
             <a:endParaRPr lang="en-US" sz="800" dirty="0"/>
           </a:p>
@@ -27557,7 +26673,7 @@
                 <a:ea typeface="Trebuchet MS" pitchFamily="34" charset="-122"/>
                 <a:cs typeface="Trebuchet MS" pitchFamily="34" charset="-120"/>
               </a:rPr>
-              <a:t>breakfast</a:t>
+              <a:t>fasting</a:t>
             </a:r>
             <a:endParaRPr lang="en-US" sz="2800" dirty="0"/>
           </a:p>
@@ -28245,7 +27361,7 @@
                 <a:ea typeface="Calibri" pitchFamily="34" charset="-122"/>
                 <a:cs typeface="Calibri" pitchFamily="34" charset="-120"/>
               </a:rPr>
-              <a:t>Word Labs  •  wordlabs.app  •  Root: 'fast' = quick, firm, or not eating</a:t>
+              <a:t>Word Labs  •  wordlabs.app  •  Root: 'fast' = quick</a:t>
             </a:r>
             <a:endParaRPr lang="en-US" sz="800" dirty="0"/>
           </a:p>
@@ -28384,7 +27500,7 @@
                 <a:ea typeface="Trebuchet MS" pitchFamily="34" charset="-122"/>
                 <a:cs typeface="Trebuchet MS" pitchFamily="34" charset="-120"/>
               </a:rPr>
-              <a:t>breakfast</a:t>
+              <a:t>fasting</a:t>
             </a:r>
             <a:endParaRPr lang="en-US" sz="2800" dirty="0"/>
           </a:p>
@@ -28473,11 +27589,11 @@
             </a:avLst>
           </a:prstGeom>
           <a:solidFill>
-            <a:srgbClr val="DDD6FE"/>
+            <a:srgbClr val="CCFBF1"/>
           </a:solidFill>
           <a:ln w="19050">
             <a:solidFill>
-              <a:srgbClr val="7C3AED"/>
+              <a:srgbClr val="0D9488"/>
             </a:solidFill>
             <a:prstDash val="solid"/>
           </a:ln>
@@ -28517,13 +27633,13 @@
             <a:r>
               <a:rPr lang="en-US" sz="1300" b="1" dirty="0">
                 <a:solidFill>
-                  <a:srgbClr val="4C1D95"/>
+                  <a:srgbClr val="0F766E"/>
                 </a:solidFill>
                 <a:latin typeface="Trebuchet MS" pitchFamily="34" charset="0"/>
                 <a:ea typeface="Trebuchet MS" pitchFamily="34" charset="-122"/>
                 <a:cs typeface="Trebuchet MS" pitchFamily="34" charset="-120"/>
               </a:rPr>
-              <a:t>break</a:t>
+              <a:t>fast</a:t>
             </a:r>
             <a:endParaRPr lang="en-US" sz="1300" dirty="0"/>
           </a:p>
@@ -28562,7 +27678,7 @@
                 <a:ea typeface="Calibri" pitchFamily="34" charset="-122"/>
                 <a:cs typeface="Calibri" pitchFamily="34" charset="-120"/>
               </a:rPr>
-              <a:t>to end or stop</a:t>
+              <a:t>quick</a:t>
             </a:r>
             <a:endParaRPr lang="en-US" sz="850" dirty="0"/>
           </a:p>
@@ -28585,11 +27701,11 @@
             </a:avLst>
           </a:prstGeom>
           <a:solidFill>
-            <a:srgbClr val="CCFBF1"/>
+            <a:srgbClr val="FCE7F3"/>
           </a:solidFill>
           <a:ln w="19050">
             <a:solidFill>
-              <a:srgbClr val="0D9488"/>
+              <a:srgbClr val="DB2777"/>
             </a:solidFill>
             <a:prstDash val="solid"/>
           </a:ln>
@@ -28629,13 +27745,13 @@
             <a:r>
               <a:rPr lang="en-US" sz="1300" b="1" dirty="0">
                 <a:solidFill>
-                  <a:srgbClr val="0F766E"/>
+                  <a:srgbClr val="9D174D"/>
                 </a:solidFill>
                 <a:latin typeface="Trebuchet MS" pitchFamily="34" charset="0"/>
                 <a:ea typeface="Trebuchet MS" pitchFamily="34" charset="-122"/>
                 <a:cs typeface="Trebuchet MS" pitchFamily="34" charset="-120"/>
               </a:rPr>
-              <a:t>fast</a:t>
+              <a:t>ing</a:t>
             </a:r>
             <a:endParaRPr lang="en-US" sz="1300" dirty="0"/>
           </a:p>
@@ -28674,7 +27790,7 @@
                 <a:ea typeface="Calibri" pitchFamily="34" charset="-122"/>
                 <a:cs typeface="Calibri" pitchFamily="34" charset="-120"/>
               </a:rPr>
-              <a:t>going without food</a:t>
+              <a:t>happening now</a:t>
             </a:r>
             <a:endParaRPr lang="en-US" sz="850" dirty="0"/>
           </a:p>
@@ -29230,7 +28346,7 @@
                 <a:ea typeface="Calibri" pitchFamily="34" charset="-122"/>
                 <a:cs typeface="Calibri" pitchFamily="34" charset="-120"/>
               </a:rPr>
-              <a:t>Word Labs  •  wordlabs.app  •  Root: 'fast' = quick, firm, or not eating</a:t>
+              <a:t>Word Labs  •  wordlabs.app  •  Root: 'fast' = quick</a:t>
             </a:r>
             <a:endParaRPr lang="en-US" sz="800" dirty="0"/>
           </a:p>
@@ -29369,7 +28485,7 @@
                 <a:ea typeface="Trebuchet MS" pitchFamily="34" charset="-122"/>
                 <a:cs typeface="Trebuchet MS" pitchFamily="34" charset="-120"/>
               </a:rPr>
-              <a:t>breakfast</a:t>
+              <a:t>fasting</a:t>
             </a:r>
             <a:endParaRPr lang="en-US" sz="2800" dirty="0"/>
           </a:p>
@@ -29458,11 +28574,11 @@
             </a:avLst>
           </a:prstGeom>
           <a:solidFill>
-            <a:srgbClr val="DDD6FE"/>
+            <a:srgbClr val="CCFBF1"/>
           </a:solidFill>
           <a:ln w="19050">
             <a:solidFill>
-              <a:srgbClr val="7C3AED"/>
+              <a:srgbClr val="0D9488"/>
             </a:solidFill>
             <a:prstDash val="solid"/>
           </a:ln>
@@ -29502,13 +28618,13 @@
             <a:r>
               <a:rPr lang="en-US" sz="1300" b="1" dirty="0">
                 <a:solidFill>
-                  <a:srgbClr val="4C1D95"/>
+                  <a:srgbClr val="0F766E"/>
                 </a:solidFill>
                 <a:latin typeface="Trebuchet MS" pitchFamily="34" charset="0"/>
                 <a:ea typeface="Trebuchet MS" pitchFamily="34" charset="-122"/>
                 <a:cs typeface="Trebuchet MS" pitchFamily="34" charset="-120"/>
               </a:rPr>
-              <a:t>break</a:t>
+              <a:t>fast</a:t>
             </a:r>
             <a:endParaRPr lang="en-US" sz="1300" dirty="0"/>
           </a:p>
@@ -29547,7 +28663,7 @@
                 <a:ea typeface="Calibri" pitchFamily="34" charset="-122"/>
                 <a:cs typeface="Calibri" pitchFamily="34" charset="-120"/>
               </a:rPr>
-              <a:t>to end or stop</a:t>
+              <a:t>quick</a:t>
             </a:r>
             <a:endParaRPr lang="en-US" sz="850" dirty="0"/>
           </a:p>
@@ -29570,11 +28686,11 @@
             </a:avLst>
           </a:prstGeom>
           <a:solidFill>
-            <a:srgbClr val="CCFBF1"/>
+            <a:srgbClr val="FCE7F3"/>
           </a:solidFill>
           <a:ln w="19050">
             <a:solidFill>
-              <a:srgbClr val="0D9488"/>
+              <a:srgbClr val="DB2777"/>
             </a:solidFill>
             <a:prstDash val="solid"/>
           </a:ln>
@@ -29614,13 +28730,13 @@
             <a:r>
               <a:rPr lang="en-US" sz="1300" b="1" dirty="0">
                 <a:solidFill>
-                  <a:srgbClr val="0F766E"/>
+                  <a:srgbClr val="9D174D"/>
                 </a:solidFill>
                 <a:latin typeface="Trebuchet MS" pitchFamily="34" charset="0"/>
                 <a:ea typeface="Trebuchet MS" pitchFamily="34" charset="-122"/>
                 <a:cs typeface="Trebuchet MS" pitchFamily="34" charset="-120"/>
               </a:rPr>
-              <a:t>fast</a:t>
+              <a:t>ing</a:t>
             </a:r>
             <a:endParaRPr lang="en-US" sz="1300" dirty="0"/>
           </a:p>
@@ -29659,7 +28775,7 @@
                 <a:ea typeface="Calibri" pitchFamily="34" charset="-122"/>
                 <a:cs typeface="Calibri" pitchFamily="34" charset="-120"/>
               </a:rPr>
-              <a:t>going without food</a:t>
+              <a:t>happening now</a:t>
             </a:r>
             <a:endParaRPr lang="en-US" sz="850" dirty="0"/>
           </a:p>
@@ -29818,7 +28934,7 @@
                 <a:ea typeface="Trebuchet MS" pitchFamily="34" charset="-122"/>
                 <a:cs typeface="Trebuchet MS" pitchFamily="34" charset="-120"/>
               </a:rPr>
-              <a:t>break</a:t>
+              <a:t>fast</a:t>
             </a:r>
             <a:endParaRPr lang="en-US" sz="1400" dirty="0"/>
           </a:p>
@@ -29923,7 +29039,7 @@
                 <a:ea typeface="Trebuchet MS" pitchFamily="34" charset="-122"/>
                 <a:cs typeface="Trebuchet MS" pitchFamily="34" charset="-120"/>
               </a:rPr>
-              <a:t>fast</a:t>
+              <a:t>ing</a:t>
             </a:r>
             <a:endParaRPr lang="en-US" sz="1400" dirty="0"/>
           </a:p>
@@ -30347,7 +29463,7 @@
                 <a:ea typeface="Calibri" pitchFamily="34" charset="-122"/>
                 <a:cs typeface="Calibri" pitchFamily="34" charset="-120"/>
               </a:rPr>
-              <a:t>Word Labs  •  wordlabs.app  •  Root: 'fast' = quick, firm, or not eating</a:t>
+              <a:t>Word Labs  •  wordlabs.app  •  Root: 'fast' = quick</a:t>
             </a:r>
             <a:endParaRPr lang="en-US" sz="800" dirty="0"/>
           </a:p>
@@ -30486,7 +29602,7 @@
                 <a:ea typeface="Trebuchet MS" pitchFamily="34" charset="-122"/>
                 <a:cs typeface="Trebuchet MS" pitchFamily="34" charset="-120"/>
               </a:rPr>
-              <a:t>breakfast</a:t>
+              <a:t>fasting</a:t>
             </a:r>
             <a:endParaRPr lang="en-US" sz="2800" dirty="0"/>
           </a:p>
@@ -30575,11 +29691,11 @@
             </a:avLst>
           </a:prstGeom>
           <a:solidFill>
-            <a:srgbClr val="DDD6FE"/>
+            <a:srgbClr val="CCFBF1"/>
           </a:solidFill>
           <a:ln w="19050">
             <a:solidFill>
-              <a:srgbClr val="7C3AED"/>
+              <a:srgbClr val="0D9488"/>
             </a:solidFill>
             <a:prstDash val="solid"/>
           </a:ln>
@@ -30619,13 +29735,13 @@
             <a:r>
               <a:rPr lang="en-US" sz="1300" b="1" dirty="0">
                 <a:solidFill>
-                  <a:srgbClr val="4C1D95"/>
+                  <a:srgbClr val="0F766E"/>
                 </a:solidFill>
                 <a:latin typeface="Trebuchet MS" pitchFamily="34" charset="0"/>
                 <a:ea typeface="Trebuchet MS" pitchFamily="34" charset="-122"/>
                 <a:cs typeface="Trebuchet MS" pitchFamily="34" charset="-120"/>
               </a:rPr>
-              <a:t>break</a:t>
+              <a:t>fast</a:t>
             </a:r>
             <a:endParaRPr lang="en-US" sz="1300" dirty="0"/>
           </a:p>
@@ -30664,7 +29780,7 @@
                 <a:ea typeface="Calibri" pitchFamily="34" charset="-122"/>
                 <a:cs typeface="Calibri" pitchFamily="34" charset="-120"/>
               </a:rPr>
-              <a:t>to end or stop</a:t>
+              <a:t>quick</a:t>
             </a:r>
             <a:endParaRPr lang="en-US" sz="850" dirty="0"/>
           </a:p>
@@ -30687,11 +29803,11 @@
             </a:avLst>
           </a:prstGeom>
           <a:solidFill>
-            <a:srgbClr val="CCFBF1"/>
+            <a:srgbClr val="FCE7F3"/>
           </a:solidFill>
           <a:ln w="19050">
             <a:solidFill>
-              <a:srgbClr val="0D9488"/>
+              <a:srgbClr val="DB2777"/>
             </a:solidFill>
             <a:prstDash val="solid"/>
           </a:ln>
@@ -30731,13 +29847,13 @@
             <a:r>
               <a:rPr lang="en-US" sz="1300" b="1" dirty="0">
                 <a:solidFill>
-                  <a:srgbClr val="0F766E"/>
+                  <a:srgbClr val="9D174D"/>
                 </a:solidFill>
                 <a:latin typeface="Trebuchet MS" pitchFamily="34" charset="0"/>
                 <a:ea typeface="Trebuchet MS" pitchFamily="34" charset="-122"/>
                 <a:cs typeface="Trebuchet MS" pitchFamily="34" charset="-120"/>
               </a:rPr>
-              <a:t>fast</a:t>
+              <a:t>ing</a:t>
             </a:r>
             <a:endParaRPr lang="en-US" sz="1300" dirty="0"/>
           </a:p>
@@ -30776,7 +29892,7 @@
                 <a:ea typeface="Calibri" pitchFamily="34" charset="-122"/>
                 <a:cs typeface="Calibri" pitchFamily="34" charset="-120"/>
               </a:rPr>
-              <a:t>going without food</a:t>
+              <a:t>happening now</a:t>
             </a:r>
             <a:endParaRPr lang="en-US" sz="850" dirty="0"/>
           </a:p>
@@ -30935,7 +30051,7 @@
                 <a:ea typeface="Trebuchet MS" pitchFamily="34" charset="-122"/>
                 <a:cs typeface="Trebuchet MS" pitchFamily="34" charset="-120"/>
               </a:rPr>
-              <a:t>break</a:t>
+              <a:t>fast</a:t>
             </a:r>
             <a:endParaRPr lang="en-US" sz="1400" dirty="0"/>
           </a:p>
@@ -31040,7 +30156,7 @@
                 <a:ea typeface="Trebuchet MS" pitchFamily="34" charset="-122"/>
                 <a:cs typeface="Trebuchet MS" pitchFamily="34" charset="-120"/>
               </a:rPr>
-              <a:t>fast</a:t>
+              <a:t>ing</a:t>
             </a:r>
             <a:endParaRPr lang="en-US" sz="1400" dirty="0"/>
           </a:p>
@@ -31121,11 +30237,11 @@
         <p:spPr>
           <a:xfrm>
             <a:off x="1874520" y="4096512"/>
-            <a:ext cx="6903720" cy="804672"/>
+            <a:ext cx="6903720" cy="658368"/>
           </a:xfrm>
           <a:prstGeom prst="rect">
             <a:avLst>
-              <a:gd name="adj" fmla="val 6818"/>
+              <a:gd name="adj" fmla="val 8333"/>
             </a:avLst>
           </a:prstGeom>
           <a:solidFill>
@@ -31147,12 +30263,12 @@
         </p:nvSpPr>
         <p:spPr>
           <a:xfrm>
-            <a:off x="2023872" y="4169664"/>
-            <a:ext cx="685800" cy="384048"/>
+            <a:off x="2254649" y="4169664"/>
+            <a:ext cx="685800" cy="475488"/>
           </a:xfrm>
           <a:prstGeom prst="rect">
             <a:avLst>
-              <a:gd name="adj" fmla="val 9524"/>
+              <a:gd name="adj" fmla="val 7692"/>
             </a:avLst>
           </a:prstGeom>
           <a:solidFill>
@@ -31174,8 +30290,8 @@
         </p:nvSpPr>
         <p:spPr>
           <a:xfrm>
-            <a:off x="2023872" y="4169664"/>
-            <a:ext cx="685800" cy="384048"/>
+            <a:off x="2254649" y="4169664"/>
+            <a:ext cx="685800" cy="475488"/>
           </a:xfrm>
           <a:prstGeom prst="rect">
             <a:avLst/>
@@ -31199,7 +30315,7 @@
                 <a:ea typeface="Trebuchet MS" pitchFamily="34" charset="-122"/>
                 <a:cs typeface="Trebuchet MS" pitchFamily="34" charset="-120"/>
               </a:rPr>
-              <a:t>b</a:t>
+              <a:t>f</a:t>
             </a:r>
             <a:endParaRPr lang="en-US" sz="900" dirty="0"/>
           </a:p>
@@ -31213,12 +30329,12 @@
         </p:nvSpPr>
         <p:spPr>
           <a:xfrm>
-            <a:off x="2831592" y="4169664"/>
-            <a:ext cx="685800" cy="384048"/>
+            <a:off x="3293146" y="4169664"/>
+            <a:ext cx="685800" cy="475488"/>
           </a:xfrm>
           <a:prstGeom prst="rect">
             <a:avLst>
-              <a:gd name="adj" fmla="val 9524"/>
+              <a:gd name="adj" fmla="val 7692"/>
             </a:avLst>
           </a:prstGeom>
           <a:solidFill>
@@ -31240,8 +30356,8 @@
         </p:nvSpPr>
         <p:spPr>
           <a:xfrm>
-            <a:off x="2831592" y="4169664"/>
-            <a:ext cx="685800" cy="384048"/>
+            <a:off x="3293146" y="4169664"/>
+            <a:ext cx="685800" cy="475488"/>
           </a:xfrm>
           <a:prstGeom prst="rect">
             <a:avLst/>
@@ -31265,7 +30381,7 @@
                 <a:ea typeface="Trebuchet MS" pitchFamily="34" charset="-122"/>
                 <a:cs typeface="Trebuchet MS" pitchFamily="34" charset="-120"/>
               </a:rPr>
-              <a:t>r</a:t>
+              <a:t>a</a:t>
             </a:r>
             <a:endParaRPr lang="en-US" sz="900" dirty="0"/>
           </a:p>
@@ -31279,12 +30395,12 @@
         </p:nvSpPr>
         <p:spPr>
           <a:xfrm>
-            <a:off x="3639312" y="4169664"/>
-            <a:ext cx="685800" cy="384048"/>
+            <a:off x="4331643" y="4169664"/>
+            <a:ext cx="685800" cy="475488"/>
           </a:xfrm>
           <a:prstGeom prst="rect">
             <a:avLst>
-              <a:gd name="adj" fmla="val 9524"/>
+              <a:gd name="adj" fmla="val 7692"/>
             </a:avLst>
           </a:prstGeom>
           <a:solidFill>
@@ -31306,8 +30422,8 @@
         </p:nvSpPr>
         <p:spPr>
           <a:xfrm>
-            <a:off x="3639312" y="4169664"/>
-            <a:ext cx="685800" cy="384048"/>
+            <a:off x="4331643" y="4169664"/>
+            <a:ext cx="685800" cy="475488"/>
           </a:xfrm>
           <a:prstGeom prst="rect">
             <a:avLst/>
@@ -31331,7 +30447,7 @@
                 <a:ea typeface="Trebuchet MS" pitchFamily="34" charset="-122"/>
                 <a:cs typeface="Trebuchet MS" pitchFamily="34" charset="-120"/>
               </a:rPr>
-              <a:t>ea</a:t>
+              <a:t>s</a:t>
             </a:r>
             <a:endParaRPr lang="en-US" sz="900" dirty="0"/>
           </a:p>
@@ -31339,57 +30455,18 @@
       </p:sp>
       <p:sp>
         <p:nvSpPr>
-          <p:cNvPr id="39" name="Text 37"/>
-          <p:cNvSpPr/>
-          <p:nvPr/>
-        </p:nvSpPr>
-        <p:spPr>
-          <a:xfrm>
-            <a:off x="3639312" y="4572000"/>
-            <a:ext cx="685800" cy="219456"/>
-          </a:xfrm>
-          <a:prstGeom prst="rect">
-            <a:avLst/>
-          </a:prstGeom>
-          <a:noFill/>
-          <a:ln/>
-        </p:spPr>
-        <p:txBody>
-          <a:bodyPr wrap="square" lIns="0" tIns="0" rIns="0" bIns="0" rtlCol="0" anchor="t"/>
-          <a:lstStyle/>
-          <a:p>
-            <a:pPr algn="ctr" indent="0" marL="0">
-              <a:buNone/>
-            </a:pPr>
-            <a:r>
-              <a:rPr lang="en-US" sz="750" i="1" dirty="0">
-                <a:solidFill>
-                  <a:srgbClr val="94A3B8"/>
-                </a:solidFill>
-                <a:latin typeface="Calibri" pitchFamily="34" charset="0"/>
-                <a:ea typeface="Calibri" pitchFamily="34" charset="-122"/>
-                <a:cs typeface="Calibri" pitchFamily="34" charset="-120"/>
-              </a:rPr>
-              <a:t>/e/</a:t>
-            </a:r>
-            <a:endParaRPr lang="en-US" sz="750" dirty="0"/>
-          </a:p>
-        </p:txBody>
-      </p:sp>
-      <p:sp>
-        <p:nvSpPr>
-          <p:cNvPr id="40" name="Shape 38"/>
-          <p:cNvSpPr/>
-          <p:nvPr/>
-        </p:nvSpPr>
-        <p:spPr>
-          <a:xfrm>
-            <a:off x="4447032" y="4169664"/>
-            <a:ext cx="685800" cy="384048"/>
+          <p:cNvPr id="39" name="Shape 37"/>
+          <p:cNvSpPr/>
+          <p:nvPr/>
+        </p:nvSpPr>
+        <p:spPr>
+          <a:xfrm>
+            <a:off x="5370141" y="4169664"/>
+            <a:ext cx="685800" cy="475488"/>
           </a:xfrm>
           <a:prstGeom prst="rect">
             <a:avLst>
-              <a:gd name="adj" fmla="val 9524"/>
+              <a:gd name="adj" fmla="val 7692"/>
             </a:avLst>
           </a:prstGeom>
           <a:solidFill>
@@ -31405,14 +30482,14 @@
       </p:sp>
       <p:sp>
         <p:nvSpPr>
-          <p:cNvPr id="41" name="Text 39"/>
-          <p:cNvSpPr/>
-          <p:nvPr/>
-        </p:nvSpPr>
-        <p:spPr>
-          <a:xfrm>
-            <a:off x="4447032" y="4169664"/>
-            <a:ext cx="685800" cy="384048"/>
+          <p:cNvPr id="40" name="Text 38"/>
+          <p:cNvSpPr/>
+          <p:nvPr/>
+        </p:nvSpPr>
+        <p:spPr>
+          <a:xfrm>
+            <a:off x="5370141" y="4169664"/>
+            <a:ext cx="685800" cy="475488"/>
           </a:xfrm>
           <a:prstGeom prst="rect">
             <a:avLst/>
@@ -31436,7 +30513,7 @@
                 <a:ea typeface="Trebuchet MS" pitchFamily="34" charset="-122"/>
                 <a:cs typeface="Trebuchet MS" pitchFamily="34" charset="-120"/>
               </a:rPr>
-              <a:t>k</a:t>
+              <a:t>t</a:t>
             </a:r>
             <a:endParaRPr lang="en-US" sz="900" dirty="0"/>
           </a:p>
@@ -31444,18 +30521,18 @@
       </p:sp>
       <p:sp>
         <p:nvSpPr>
-          <p:cNvPr id="42" name="Shape 40"/>
-          <p:cNvSpPr/>
-          <p:nvPr/>
-        </p:nvSpPr>
-        <p:spPr>
-          <a:xfrm>
-            <a:off x="5254752" y="4169664"/>
-            <a:ext cx="685800" cy="384048"/>
+          <p:cNvPr id="41" name="Shape 39"/>
+          <p:cNvSpPr/>
+          <p:nvPr/>
+        </p:nvSpPr>
+        <p:spPr>
+          <a:xfrm>
+            <a:off x="6408638" y="4169664"/>
+            <a:ext cx="685800" cy="475488"/>
           </a:xfrm>
           <a:prstGeom prst="rect">
             <a:avLst>
-              <a:gd name="adj" fmla="val 9524"/>
+              <a:gd name="adj" fmla="val 7692"/>
             </a:avLst>
           </a:prstGeom>
           <a:solidFill>
@@ -31471,14 +30548,14 @@
       </p:sp>
       <p:sp>
         <p:nvSpPr>
-          <p:cNvPr id="43" name="Text 41"/>
-          <p:cNvSpPr/>
-          <p:nvPr/>
-        </p:nvSpPr>
-        <p:spPr>
-          <a:xfrm>
-            <a:off x="5254752" y="4169664"/>
-            <a:ext cx="685800" cy="384048"/>
+          <p:cNvPr id="42" name="Text 40"/>
+          <p:cNvSpPr/>
+          <p:nvPr/>
+        </p:nvSpPr>
+        <p:spPr>
+          <a:xfrm>
+            <a:off x="6408638" y="4169664"/>
+            <a:ext cx="685800" cy="475488"/>
           </a:xfrm>
           <a:prstGeom prst="rect">
             <a:avLst/>
@@ -31502,7 +30579,7 @@
                 <a:ea typeface="Trebuchet MS" pitchFamily="34" charset="-122"/>
                 <a:cs typeface="Trebuchet MS" pitchFamily="34" charset="-120"/>
               </a:rPr>
-              <a:t>f</a:t>
+              <a:t>i</a:t>
             </a:r>
             <a:endParaRPr lang="en-US" sz="900" dirty="0"/>
           </a:p>
@@ -31510,18 +30587,18 @@
       </p:sp>
       <p:sp>
         <p:nvSpPr>
-          <p:cNvPr id="44" name="Shape 42"/>
-          <p:cNvSpPr/>
-          <p:nvPr/>
-        </p:nvSpPr>
-        <p:spPr>
-          <a:xfrm>
-            <a:off x="6062472" y="4169664"/>
-            <a:ext cx="685800" cy="384048"/>
+          <p:cNvPr id="43" name="Shape 41"/>
+          <p:cNvSpPr/>
+          <p:nvPr/>
+        </p:nvSpPr>
+        <p:spPr>
+          <a:xfrm>
+            <a:off x="7447135" y="4169664"/>
+            <a:ext cx="685800" cy="475488"/>
           </a:xfrm>
           <a:prstGeom prst="rect">
             <a:avLst>
-              <a:gd name="adj" fmla="val 9524"/>
+              <a:gd name="adj" fmla="val 7692"/>
             </a:avLst>
           </a:prstGeom>
           <a:solidFill>
@@ -31537,14 +30614,14 @@
       </p:sp>
       <p:sp>
         <p:nvSpPr>
-          <p:cNvPr id="45" name="Text 43"/>
-          <p:cNvSpPr/>
-          <p:nvPr/>
-        </p:nvSpPr>
-        <p:spPr>
-          <a:xfrm>
-            <a:off x="6062472" y="4169664"/>
-            <a:ext cx="685800" cy="384048"/>
+          <p:cNvPr id="44" name="Text 42"/>
+          <p:cNvSpPr/>
+          <p:nvPr/>
+        </p:nvSpPr>
+        <p:spPr>
+          <a:xfrm>
+            <a:off x="7447135" y="4169664"/>
+            <a:ext cx="685800" cy="475488"/>
           </a:xfrm>
           <a:prstGeom prst="rect">
             <a:avLst/>
@@ -31568,139 +30645,7 @@
                 <a:ea typeface="Trebuchet MS" pitchFamily="34" charset="-122"/>
                 <a:cs typeface="Trebuchet MS" pitchFamily="34" charset="-120"/>
               </a:rPr>
-              <a:t>a</a:t>
-            </a:r>
-            <a:endParaRPr lang="en-US" sz="900" dirty="0"/>
-          </a:p>
-        </p:txBody>
-      </p:sp>
-      <p:sp>
-        <p:nvSpPr>
-          <p:cNvPr id="46" name="Shape 44"/>
-          <p:cNvSpPr/>
-          <p:nvPr/>
-        </p:nvSpPr>
-        <p:spPr>
-          <a:xfrm>
-            <a:off x="6870192" y="4169664"/>
-            <a:ext cx="685800" cy="384048"/>
-          </a:xfrm>
-          <a:prstGeom prst="rect">
-            <a:avLst>
-              <a:gd name="adj" fmla="val 9524"/>
-            </a:avLst>
-          </a:prstGeom>
-          <a:solidFill>
-            <a:srgbClr val="FFFFFF"/>
-          </a:solidFill>
-          <a:ln w="12700">
-            <a:solidFill>
-              <a:srgbClr val="DB2777"/>
-            </a:solidFill>
-            <a:prstDash val="solid"/>
-          </a:ln>
-        </p:spPr>
-      </p:sp>
-      <p:sp>
-        <p:nvSpPr>
-          <p:cNvPr id="47" name="Text 45"/>
-          <p:cNvSpPr/>
-          <p:nvPr/>
-        </p:nvSpPr>
-        <p:spPr>
-          <a:xfrm>
-            <a:off x="6870192" y="4169664"/>
-            <a:ext cx="685800" cy="384048"/>
-          </a:xfrm>
-          <a:prstGeom prst="rect">
-            <a:avLst/>
-          </a:prstGeom>
-          <a:noFill/>
-          <a:ln/>
-        </p:spPr>
-        <p:txBody>
-          <a:bodyPr wrap="square" lIns="0" tIns="0" rIns="0" bIns="0" rtlCol="0" anchor="ctr"/>
-          <a:lstStyle/>
-          <a:p>
-            <a:pPr algn="ctr" indent="0" marL="0">
-              <a:buNone/>
-            </a:pPr>
-            <a:r>
-              <a:rPr lang="en-US" sz="900" b="1" dirty="0">
-                <a:solidFill>
-                  <a:srgbClr val="9D174D"/>
-                </a:solidFill>
-                <a:latin typeface="Trebuchet MS" pitchFamily="34" charset="0"/>
-                <a:ea typeface="Trebuchet MS" pitchFamily="34" charset="-122"/>
-                <a:cs typeface="Trebuchet MS" pitchFamily="34" charset="-120"/>
-              </a:rPr>
-              <a:t>s</a:t>
-            </a:r>
-            <a:endParaRPr lang="en-US" sz="900" dirty="0"/>
-          </a:p>
-        </p:txBody>
-      </p:sp>
-      <p:sp>
-        <p:nvSpPr>
-          <p:cNvPr id="48" name="Shape 46"/>
-          <p:cNvSpPr/>
-          <p:nvPr/>
-        </p:nvSpPr>
-        <p:spPr>
-          <a:xfrm>
-            <a:off x="7677912" y="4169664"/>
-            <a:ext cx="685800" cy="384048"/>
-          </a:xfrm>
-          <a:prstGeom prst="rect">
-            <a:avLst>
-              <a:gd name="adj" fmla="val 9524"/>
-            </a:avLst>
-          </a:prstGeom>
-          <a:solidFill>
-            <a:srgbClr val="FFFFFF"/>
-          </a:solidFill>
-          <a:ln w="12700">
-            <a:solidFill>
-              <a:srgbClr val="DB2777"/>
-            </a:solidFill>
-            <a:prstDash val="solid"/>
-          </a:ln>
-        </p:spPr>
-      </p:sp>
-      <p:sp>
-        <p:nvSpPr>
-          <p:cNvPr id="49" name="Text 47"/>
-          <p:cNvSpPr/>
-          <p:nvPr/>
-        </p:nvSpPr>
-        <p:spPr>
-          <a:xfrm>
-            <a:off x="7677912" y="4169664"/>
-            <a:ext cx="685800" cy="384048"/>
-          </a:xfrm>
-          <a:prstGeom prst="rect">
-            <a:avLst/>
-          </a:prstGeom>
-          <a:noFill/>
-          <a:ln/>
-        </p:spPr>
-        <p:txBody>
-          <a:bodyPr wrap="square" lIns="0" tIns="0" rIns="0" bIns="0" rtlCol="0" anchor="ctr"/>
-          <a:lstStyle/>
-          <a:p>
-            <a:pPr algn="ctr" indent="0" marL="0">
-              <a:buNone/>
-            </a:pPr>
-            <a:r>
-              <a:rPr lang="en-US" sz="900" b="1" dirty="0">
-                <a:solidFill>
-                  <a:srgbClr val="9D174D"/>
-                </a:solidFill>
-                <a:latin typeface="Trebuchet MS" pitchFamily="34" charset="0"/>
-                <a:ea typeface="Trebuchet MS" pitchFamily="34" charset="-122"/>
-                <a:cs typeface="Trebuchet MS" pitchFamily="34" charset="-120"/>
-              </a:rPr>
-              <a:t>t</a:t>
+              <a:t>ng</a:t>
             </a:r>
             <a:endParaRPr lang="en-US" sz="900" dirty="0"/>
           </a:p>
@@ -31992,7 +30937,7 @@
                 <a:ea typeface="Calibri" pitchFamily="34" charset="-122"/>
                 <a:cs typeface="Calibri" pitchFamily="34" charset="-120"/>
               </a:rPr>
-              <a:t>Word Labs  •  wordlabs.app  •  Root: 'fast' = quick, firm, or not eating</a:t>
+              <a:t>Word Labs  •  wordlabs.app  •  Root: 'fast' = quick</a:t>
             </a:r>
             <a:endParaRPr lang="en-US" sz="800" dirty="0"/>
           </a:p>
@@ -33161,7 +32106,7 @@
                 <a:ea typeface="Calibri" pitchFamily="34" charset="-122"/>
                 <a:cs typeface="Calibri" pitchFamily="34" charset="-120"/>
               </a:rPr>
-              <a:t>Word Labs  •  wordlabs.app  •  Root: 'fast' = quick, firm, or not eating</a:t>
+              <a:t>Word Labs  •  wordlabs.app  •  Root: 'fast' = quick</a:t>
             </a:r>
             <a:endParaRPr lang="en-US" sz="800" dirty="0"/>
           </a:p>
@@ -33419,7 +32364,7 @@
             <a:avLst/>
           </a:prstGeom>
           <a:solidFill>
-            <a:srgbClr val="DDD6FE"/>
+            <a:srgbClr val="F8FAFC"/>
           </a:solidFill>
           <a:ln w="12700">
             <a:solidFill>
@@ -33431,14 +32376,39 @@
       </p:sp>
       <p:sp>
         <p:nvSpPr>
-          <p:cNvPr id="18" name="Text 16"/>
-          <p:cNvSpPr/>
-          <p:nvPr/>
-        </p:nvSpPr>
-        <p:spPr>
-          <a:xfrm>
-            <a:off x="365760" y="1563624"/>
-            <a:ext cx="2468880" cy="402336"/>
+          <p:cNvPr id="18" name="Shape 16"/>
+          <p:cNvSpPr/>
+          <p:nvPr/>
+        </p:nvSpPr>
+        <p:spPr>
+          <a:xfrm>
+            <a:off x="2971800" y="1563624"/>
+            <a:ext cx="2834640" cy="402336"/>
+          </a:xfrm>
+          <a:prstGeom prst="rect">
+            <a:avLst/>
+          </a:prstGeom>
+          <a:solidFill>
+            <a:srgbClr val="CCFBF1"/>
+          </a:solidFill>
+          <a:ln w="12700">
+            <a:solidFill>
+              <a:srgbClr val="E2E8F0"/>
+            </a:solidFill>
+            <a:prstDash val="solid"/>
+          </a:ln>
+        </p:spPr>
+      </p:sp>
+      <p:sp>
+        <p:nvSpPr>
+          <p:cNvPr id="19" name="Text 17"/>
+          <p:cNvSpPr/>
+          <p:nvPr/>
+        </p:nvSpPr>
+        <p:spPr>
+          <a:xfrm>
+            <a:off x="2971800" y="1563624"/>
+            <a:ext cx="2834640" cy="402336"/>
           </a:xfrm>
           <a:prstGeom prst="rect">
             <a:avLst/>
@@ -33456,13 +32426,13 @@
             <a:r>
               <a:rPr lang="en-US" sz="1300" b="1" dirty="0">
                 <a:solidFill>
-                  <a:srgbClr val="4C1D95"/>
+                  <a:srgbClr val="0F766E"/>
                 </a:solidFill>
                 <a:latin typeface="Trebuchet MS" pitchFamily="34" charset="0"/>
                 <a:ea typeface="Trebuchet MS" pitchFamily="34" charset="-122"/>
                 <a:cs typeface="Trebuchet MS" pitchFamily="34" charset="-120"/>
               </a:rPr>
-              <a:t>break-</a:t>
+              <a:t>fast</a:t>
             </a:r>
             <a:endParaRPr lang="en-US" sz="1300" dirty="0"/>
           </a:p>
@@ -33470,20 +32440,20 @@
       </p:sp>
       <p:sp>
         <p:nvSpPr>
-          <p:cNvPr id="19" name="Shape 17"/>
-          <p:cNvSpPr/>
-          <p:nvPr/>
-        </p:nvSpPr>
-        <p:spPr>
-          <a:xfrm>
-            <a:off x="2971800" y="1563624"/>
+          <p:cNvPr id="20" name="Shape 18"/>
+          <p:cNvSpPr/>
+          <p:nvPr/>
+        </p:nvSpPr>
+        <p:spPr>
+          <a:xfrm>
+            <a:off x="5943600" y="1563624"/>
             <a:ext cx="2834640" cy="402336"/>
           </a:xfrm>
           <a:prstGeom prst="rect">
             <a:avLst/>
           </a:prstGeom>
           <a:solidFill>
-            <a:srgbClr val="CCFBF1"/>
+            <a:srgbClr val="FCE7F3"/>
           </a:solidFill>
           <a:ln w="12700">
             <a:solidFill>
@@ -33495,13 +32465,13 @@
       </p:sp>
       <p:sp>
         <p:nvSpPr>
-          <p:cNvPr id="20" name="Text 18"/>
-          <p:cNvSpPr/>
-          <p:nvPr/>
-        </p:nvSpPr>
-        <p:spPr>
-          <a:xfrm>
-            <a:off x="2971800" y="1563624"/>
+          <p:cNvPr id="21" name="Text 19"/>
+          <p:cNvSpPr/>
+          <p:nvPr/>
+        </p:nvSpPr>
+        <p:spPr>
+          <a:xfrm>
+            <a:off x="5943600" y="1563624"/>
             <a:ext cx="2834640" cy="402336"/>
           </a:xfrm>
           <a:prstGeom prst="rect">
@@ -33520,13 +32490,13 @@
             <a:r>
               <a:rPr lang="en-US" sz="1300" b="1" dirty="0">
                 <a:solidFill>
-                  <a:srgbClr val="0F766E"/>
+                  <a:srgbClr val="9D174D"/>
                 </a:solidFill>
                 <a:latin typeface="Trebuchet MS" pitchFamily="34" charset="0"/>
                 <a:ea typeface="Trebuchet MS" pitchFamily="34" charset="-122"/>
                 <a:cs typeface="Trebuchet MS" pitchFamily="34" charset="-120"/>
               </a:rPr>
-              <a:t>fast</a:t>
+              <a:t>-ed</a:t>
             </a:r>
             <a:endParaRPr lang="en-US" sz="1300" dirty="0"/>
           </a:p>
@@ -33534,19 +32504,69 @@
       </p:sp>
       <p:sp>
         <p:nvSpPr>
-          <p:cNvPr id="21" name="Shape 19"/>
-          <p:cNvSpPr/>
-          <p:nvPr/>
-        </p:nvSpPr>
-        <p:spPr>
-          <a:xfrm>
-            <a:off x="5943600" y="1563624"/>
+          <p:cNvPr id="22" name="Shape 20"/>
+          <p:cNvSpPr/>
+          <p:nvPr/>
+        </p:nvSpPr>
+        <p:spPr>
+          <a:xfrm>
+            <a:off x="365760" y="1984248"/>
+            <a:ext cx="2468880" cy="402336"/>
+          </a:xfrm>
+          <a:prstGeom prst="rect">
+            <a:avLst/>
+          </a:prstGeom>
+          <a:solidFill>
+            <a:srgbClr val="F1F5F9"/>
+          </a:solidFill>
+          <a:ln w="12700">
+            <a:solidFill>
+              <a:srgbClr val="E2E8F0"/>
+            </a:solidFill>
+            <a:prstDash val="solid"/>
+          </a:ln>
+        </p:spPr>
+      </p:sp>
+      <p:sp>
+        <p:nvSpPr>
+          <p:cNvPr id="23" name="Shape 21"/>
+          <p:cNvSpPr/>
+          <p:nvPr/>
+        </p:nvSpPr>
+        <p:spPr>
+          <a:xfrm>
+            <a:off x="2971800" y="1984248"/>
             <a:ext cx="2834640" cy="402336"/>
           </a:xfrm>
           <a:prstGeom prst="rect">
             <a:avLst/>
           </a:prstGeom>
           <a:solidFill>
+            <a:srgbClr val="F1F5F9"/>
+          </a:solidFill>
+          <a:ln w="12700">
+            <a:solidFill>
+              <a:srgbClr val="E2E8F0"/>
+            </a:solidFill>
+            <a:prstDash val="solid"/>
+          </a:ln>
+        </p:spPr>
+      </p:sp>
+      <p:sp>
+        <p:nvSpPr>
+          <p:cNvPr id="24" name="Shape 22"/>
+          <p:cNvSpPr/>
+          <p:nvPr/>
+        </p:nvSpPr>
+        <p:spPr>
+          <a:xfrm>
+            <a:off x="5943600" y="1984248"/>
+            <a:ext cx="2834640" cy="402336"/>
+          </a:xfrm>
+          <a:prstGeom prst="rect">
+            <a:avLst/>
+          </a:prstGeom>
+          <a:solidFill>
             <a:srgbClr val="FCE7F3"/>
           </a:solidFill>
           <a:ln w="12700">
@@ -33559,13 +32579,13 @@
       </p:sp>
       <p:sp>
         <p:nvSpPr>
-          <p:cNvPr id="22" name="Text 20"/>
-          <p:cNvSpPr/>
-          <p:nvPr/>
-        </p:nvSpPr>
-        <p:spPr>
-          <a:xfrm>
-            <a:off x="5943600" y="1563624"/>
+          <p:cNvPr id="25" name="Text 23"/>
+          <p:cNvSpPr/>
+          <p:nvPr/>
+        </p:nvSpPr>
+        <p:spPr>
+          <a:xfrm>
+            <a:off x="5943600" y="1984248"/>
             <a:ext cx="2834640" cy="402336"/>
           </a:xfrm>
           <a:prstGeom prst="rect">
@@ -33590,7 +32610,7 @@
                 <a:ea typeface="Trebuchet MS" pitchFamily="34" charset="-122"/>
                 <a:cs typeface="Trebuchet MS" pitchFamily="34" charset="-120"/>
               </a:rPr>
-              <a:t>--er</a:t>
+              <a:t>-er</a:t>
             </a:r>
             <a:endParaRPr lang="en-US" sz="1300" dirty="0"/>
           </a:p>
@@ -33598,20 +32618,20 @@
       </p:sp>
       <p:sp>
         <p:nvSpPr>
-          <p:cNvPr id="23" name="Shape 21"/>
-          <p:cNvSpPr/>
-          <p:nvPr/>
-        </p:nvSpPr>
-        <p:spPr>
-          <a:xfrm>
-            <a:off x="365760" y="1984248"/>
+          <p:cNvPr id="26" name="Shape 24"/>
+          <p:cNvSpPr/>
+          <p:nvPr/>
+        </p:nvSpPr>
+        <p:spPr>
+          <a:xfrm>
+            <a:off x="365760" y="2404872"/>
             <a:ext cx="2468880" cy="402336"/>
           </a:xfrm>
           <a:prstGeom prst="rect">
             <a:avLst/>
           </a:prstGeom>
           <a:solidFill>
-            <a:srgbClr val="DDD6FE"/>
+            <a:srgbClr val="F8FAFC"/>
           </a:solidFill>
           <a:ln w="12700">
             <a:solidFill>
@@ -33623,14 +32643,64 @@
       </p:sp>
       <p:sp>
         <p:nvSpPr>
-          <p:cNvPr id="24" name="Text 22"/>
-          <p:cNvSpPr/>
-          <p:nvPr/>
-        </p:nvSpPr>
-        <p:spPr>
-          <a:xfrm>
-            <a:off x="365760" y="1984248"/>
-            <a:ext cx="2468880" cy="402336"/>
+          <p:cNvPr id="27" name="Shape 25"/>
+          <p:cNvSpPr/>
+          <p:nvPr/>
+        </p:nvSpPr>
+        <p:spPr>
+          <a:xfrm>
+            <a:off x="2971800" y="2404872"/>
+            <a:ext cx="2834640" cy="402336"/>
+          </a:xfrm>
+          <a:prstGeom prst="rect">
+            <a:avLst/>
+          </a:prstGeom>
+          <a:solidFill>
+            <a:srgbClr val="F8FAFC"/>
+          </a:solidFill>
+          <a:ln w="12700">
+            <a:solidFill>
+              <a:srgbClr val="E2E8F0"/>
+            </a:solidFill>
+            <a:prstDash val="solid"/>
+          </a:ln>
+        </p:spPr>
+      </p:sp>
+      <p:sp>
+        <p:nvSpPr>
+          <p:cNvPr id="28" name="Shape 26"/>
+          <p:cNvSpPr/>
+          <p:nvPr/>
+        </p:nvSpPr>
+        <p:spPr>
+          <a:xfrm>
+            <a:off x="5943600" y="2404872"/>
+            <a:ext cx="2834640" cy="402336"/>
+          </a:xfrm>
+          <a:prstGeom prst="rect">
+            <a:avLst/>
+          </a:prstGeom>
+          <a:solidFill>
+            <a:srgbClr val="FCE7F3"/>
+          </a:solidFill>
+          <a:ln w="12700">
+            <a:solidFill>
+              <a:srgbClr val="E2E8F0"/>
+            </a:solidFill>
+            <a:prstDash val="solid"/>
+          </a:ln>
+        </p:spPr>
+      </p:sp>
+      <p:sp>
+        <p:nvSpPr>
+          <p:cNvPr id="29" name="Text 27"/>
+          <p:cNvSpPr/>
+          <p:nvPr/>
+        </p:nvSpPr>
+        <p:spPr>
+          <a:xfrm>
+            <a:off x="5943600" y="2404872"/>
+            <a:ext cx="2834640" cy="402336"/>
           </a:xfrm>
           <a:prstGeom prst="rect">
             <a:avLst/>
@@ -33648,13 +32718,13 @@
             <a:r>
               <a:rPr lang="en-US" sz="1300" b="1" dirty="0">
                 <a:solidFill>
-                  <a:srgbClr val="4C1D95"/>
+                  <a:srgbClr val="9D174D"/>
                 </a:solidFill>
                 <a:latin typeface="Trebuchet MS" pitchFamily="34" charset="0"/>
                 <a:ea typeface="Trebuchet MS" pitchFamily="34" charset="-122"/>
                 <a:cs typeface="Trebuchet MS" pitchFamily="34" charset="-120"/>
               </a:rPr>
-              <a:t>steam-</a:t>
+              <a:t>-est</a:t>
             </a:r>
             <a:endParaRPr lang="en-US" sz="1300" dirty="0"/>
           </a:p>
@@ -33662,13 +32732,38 @@
       </p:sp>
       <p:sp>
         <p:nvSpPr>
-          <p:cNvPr id="25" name="Shape 23"/>
-          <p:cNvSpPr/>
-          <p:nvPr/>
-        </p:nvSpPr>
-        <p:spPr>
-          <a:xfrm>
-            <a:off x="2971800" y="1984248"/>
+          <p:cNvPr id="30" name="Shape 28"/>
+          <p:cNvSpPr/>
+          <p:nvPr/>
+        </p:nvSpPr>
+        <p:spPr>
+          <a:xfrm>
+            <a:off x="365760" y="2825496"/>
+            <a:ext cx="2468880" cy="402336"/>
+          </a:xfrm>
+          <a:prstGeom prst="rect">
+            <a:avLst/>
+          </a:prstGeom>
+          <a:solidFill>
+            <a:srgbClr val="F1F5F9"/>
+          </a:solidFill>
+          <a:ln w="12700">
+            <a:solidFill>
+              <a:srgbClr val="E2E8F0"/>
+            </a:solidFill>
+            <a:prstDash val="solid"/>
+          </a:ln>
+        </p:spPr>
+      </p:sp>
+      <p:sp>
+        <p:nvSpPr>
+          <p:cNvPr id="31" name="Shape 29"/>
+          <p:cNvSpPr/>
+          <p:nvPr/>
+        </p:nvSpPr>
+        <p:spPr>
+          <a:xfrm>
+            <a:off x="2971800" y="2825496"/>
             <a:ext cx="2834640" cy="402336"/>
           </a:xfrm>
           <a:prstGeom prst="rect">
@@ -33687,13 +32782,13 @@
       </p:sp>
       <p:sp>
         <p:nvSpPr>
-          <p:cNvPr id="26" name="Shape 24"/>
-          <p:cNvSpPr/>
-          <p:nvPr/>
-        </p:nvSpPr>
-        <p:spPr>
-          <a:xfrm>
-            <a:off x="5943600" y="1984248"/>
+          <p:cNvPr id="32" name="Shape 30"/>
+          <p:cNvSpPr/>
+          <p:nvPr/>
+        </p:nvSpPr>
+        <p:spPr>
+          <a:xfrm>
+            <a:off x="5943600" y="2825496"/>
             <a:ext cx="2834640" cy="402336"/>
           </a:xfrm>
           <a:prstGeom prst="rect">
@@ -33712,13 +32807,13 @@
       </p:sp>
       <p:sp>
         <p:nvSpPr>
-          <p:cNvPr id="27" name="Text 25"/>
-          <p:cNvSpPr/>
-          <p:nvPr/>
-        </p:nvSpPr>
-        <p:spPr>
-          <a:xfrm>
-            <a:off x="5943600" y="1984248"/>
+          <p:cNvPr id="33" name="Text 31"/>
+          <p:cNvSpPr/>
+          <p:nvPr/>
+        </p:nvSpPr>
+        <p:spPr>
+          <a:xfrm>
+            <a:off x="5943600" y="2825496"/>
             <a:ext cx="2834640" cy="402336"/>
           </a:xfrm>
           <a:prstGeom prst="rect">
@@ -33743,7 +32838,7 @@
                 <a:ea typeface="Trebuchet MS" pitchFamily="34" charset="-122"/>
                 <a:cs typeface="Trebuchet MS" pitchFamily="34" charset="-120"/>
               </a:rPr>
-              <a:t>--est</a:t>
+              <a:t>-ing</a:t>
             </a:r>
             <a:endParaRPr lang="en-US" sz="1300" dirty="0"/>
           </a:p>
@@ -33751,39 +32846,14 @@
       </p:sp>
       <p:sp>
         <p:nvSpPr>
-          <p:cNvPr id="28" name="Shape 26"/>
-          <p:cNvSpPr/>
-          <p:nvPr/>
-        </p:nvSpPr>
-        <p:spPr>
-          <a:xfrm>
-            <a:off x="365760" y="2404872"/>
-            <a:ext cx="2468880" cy="402336"/>
-          </a:xfrm>
-          <a:prstGeom prst="rect">
-            <a:avLst/>
-          </a:prstGeom>
-          <a:solidFill>
-            <a:srgbClr val="DDD6FE"/>
-          </a:solidFill>
-          <a:ln w="12700">
-            <a:solidFill>
-              <a:srgbClr val="E2E8F0"/>
-            </a:solidFill>
-            <a:prstDash val="solid"/>
-          </a:ln>
-        </p:spPr>
-      </p:sp>
-      <p:sp>
-        <p:nvSpPr>
-          <p:cNvPr id="29" name="Text 27"/>
-          <p:cNvSpPr/>
-          <p:nvPr/>
-        </p:nvSpPr>
-        <p:spPr>
-          <a:xfrm>
-            <a:off x="365760" y="2404872"/>
-            <a:ext cx="2468880" cy="402336"/>
+          <p:cNvPr id="34" name="Text 32"/>
+          <p:cNvSpPr/>
+          <p:nvPr/>
+        </p:nvSpPr>
+        <p:spPr>
+          <a:xfrm>
+            <a:off x="365760" y="3611880"/>
+            <a:ext cx="1828800" cy="347472"/>
           </a:xfrm>
           <a:prstGeom prst="rect">
             <a:avLst/>
@@ -33795,981 +32865,19 @@
           <a:bodyPr wrap="square" lIns="0" tIns="0" rIns="0" bIns="0" rtlCol="0" anchor="ctr"/>
           <a:lstStyle/>
           <a:p>
-            <a:pPr algn="ctr" indent="0" marL="0">
-              <a:buNone/>
-            </a:pPr>
-            <a:r>
-              <a:rPr lang="en-US" sz="1300" b="1" dirty="0">
-                <a:solidFill>
-                  <a:srgbClr val="4C1D95"/>
+            <a:pPr algn="l" indent="0" marL="0">
+              <a:buNone/>
+            </a:pPr>
+            <a:r>
+              <a:rPr lang="en-US" sz="1200" b="1" dirty="0">
+                <a:solidFill>
+                  <a:srgbClr val="0F172A"/>
                 </a:solidFill>
                 <a:latin typeface="Trebuchet MS" pitchFamily="34" charset="0"/>
                 <a:ea typeface="Trebuchet MS" pitchFamily="34" charset="-122"/>
                 <a:cs typeface="Trebuchet MS" pitchFamily="34" charset="-120"/>
               </a:rPr>
-              <a:t>hard-</a:t>
-            </a:r>
-            <a:endParaRPr lang="en-US" sz="1300" dirty="0"/>
-          </a:p>
-        </p:txBody>
-      </p:sp>
-      <p:sp>
-        <p:nvSpPr>
-          <p:cNvPr id="30" name="Shape 28"/>
-          <p:cNvSpPr/>
-          <p:nvPr/>
-        </p:nvSpPr>
-        <p:spPr>
-          <a:xfrm>
-            <a:off x="2971800" y="2404872"/>
-            <a:ext cx="2834640" cy="402336"/>
-          </a:xfrm>
-          <a:prstGeom prst="rect">
-            <a:avLst/>
-          </a:prstGeom>
-          <a:solidFill>
-            <a:srgbClr val="F8FAFC"/>
-          </a:solidFill>
-          <a:ln w="12700">
-            <a:solidFill>
-              <a:srgbClr val="E2E8F0"/>
-            </a:solidFill>
-            <a:prstDash val="solid"/>
-          </a:ln>
-        </p:spPr>
-      </p:sp>
-      <p:sp>
-        <p:nvSpPr>
-          <p:cNvPr id="31" name="Shape 29"/>
-          <p:cNvSpPr/>
-          <p:nvPr/>
-        </p:nvSpPr>
-        <p:spPr>
-          <a:xfrm>
-            <a:off x="5943600" y="2404872"/>
-            <a:ext cx="2834640" cy="402336"/>
-          </a:xfrm>
-          <a:prstGeom prst="rect">
-            <a:avLst/>
-          </a:prstGeom>
-          <a:solidFill>
-            <a:srgbClr val="FCE7F3"/>
-          </a:solidFill>
-          <a:ln w="12700">
-            <a:solidFill>
-              <a:srgbClr val="E2E8F0"/>
-            </a:solidFill>
-            <a:prstDash val="solid"/>
-          </a:ln>
-        </p:spPr>
-      </p:sp>
-      <p:sp>
-        <p:nvSpPr>
-          <p:cNvPr id="32" name="Text 30"/>
-          <p:cNvSpPr/>
-          <p:nvPr/>
-        </p:nvSpPr>
-        <p:spPr>
-          <a:xfrm>
-            <a:off x="5943600" y="2404872"/>
-            <a:ext cx="2834640" cy="402336"/>
-          </a:xfrm>
-          <a:prstGeom prst="rect">
-            <a:avLst/>
-          </a:prstGeom>
-          <a:noFill/>
-          <a:ln/>
-        </p:spPr>
-        <p:txBody>
-          <a:bodyPr wrap="square" lIns="0" tIns="0" rIns="0" bIns="0" rtlCol="0" anchor="ctr"/>
-          <a:lstStyle/>
-          <a:p>
-            <a:pPr algn="ctr" indent="0" marL="0">
-              <a:buNone/>
-            </a:pPr>
-            <a:r>
-              <a:rPr lang="en-US" sz="1300" b="1" dirty="0">
-                <a:solidFill>
-                  <a:srgbClr val="9D174D"/>
-                </a:solidFill>
-                <a:latin typeface="Trebuchet MS" pitchFamily="34" charset="0"/>
-                <a:ea typeface="Trebuchet MS" pitchFamily="34" charset="-122"/>
-                <a:cs typeface="Trebuchet MS" pitchFamily="34" charset="-120"/>
-              </a:rPr>
-              <a:t>--en</a:t>
-            </a:r>
-            <a:endParaRPr lang="en-US" sz="1300" dirty="0"/>
-          </a:p>
-        </p:txBody>
-      </p:sp>
-      <p:sp>
-        <p:nvSpPr>
-          <p:cNvPr id="33" name="Shape 31"/>
-          <p:cNvSpPr/>
-          <p:nvPr/>
-        </p:nvSpPr>
-        <p:spPr>
-          <a:xfrm>
-            <a:off x="365760" y="2825496"/>
-            <a:ext cx="2468880" cy="402336"/>
-          </a:xfrm>
-          <a:prstGeom prst="rect">
-            <a:avLst/>
-          </a:prstGeom>
-          <a:solidFill>
-            <a:srgbClr val="DDD6FE"/>
-          </a:solidFill>
-          <a:ln w="12700">
-            <a:solidFill>
-              <a:srgbClr val="E2E8F0"/>
-            </a:solidFill>
-            <a:prstDash val="solid"/>
-          </a:ln>
-        </p:spPr>
-      </p:sp>
-      <p:sp>
-        <p:nvSpPr>
-          <p:cNvPr id="34" name="Text 32"/>
-          <p:cNvSpPr/>
-          <p:nvPr/>
-        </p:nvSpPr>
-        <p:spPr>
-          <a:xfrm>
-            <a:off x="365760" y="2825496"/>
-            <a:ext cx="2468880" cy="402336"/>
-          </a:xfrm>
-          <a:prstGeom prst="rect">
-            <a:avLst/>
-          </a:prstGeom>
-          <a:noFill/>
-          <a:ln/>
-        </p:spPr>
-        <p:txBody>
-          <a:bodyPr wrap="square" lIns="0" tIns="0" rIns="0" bIns="0" rtlCol="0" anchor="ctr"/>
-          <a:lstStyle/>
-          <a:p>
-            <a:pPr algn="ctr" indent="0" marL="0">
-              <a:buNone/>
-            </a:pPr>
-            <a:r>
-              <a:rPr lang="en-US" sz="1300" b="1" dirty="0">
-                <a:solidFill>
-                  <a:srgbClr val="4C1D95"/>
-                </a:solidFill>
-                <a:latin typeface="Trebuchet MS" pitchFamily="34" charset="0"/>
-                <a:ea typeface="Trebuchet MS" pitchFamily="34" charset="-122"/>
-                <a:cs typeface="Trebuchet MS" pitchFamily="34" charset="-120"/>
-              </a:rPr>
-              <a:t>sure-</a:t>
-            </a:r>
-            <a:endParaRPr lang="en-US" sz="1300" dirty="0"/>
-          </a:p>
-        </p:txBody>
-      </p:sp>
-      <p:sp>
-        <p:nvSpPr>
-          <p:cNvPr id="35" name="Shape 33"/>
-          <p:cNvSpPr/>
-          <p:nvPr/>
-        </p:nvSpPr>
-        <p:spPr>
-          <a:xfrm>
-            <a:off x="2971800" y="2825496"/>
-            <a:ext cx="2834640" cy="402336"/>
-          </a:xfrm>
-          <a:prstGeom prst="rect">
-            <a:avLst/>
-          </a:prstGeom>
-          <a:solidFill>
-            <a:srgbClr val="F1F5F9"/>
-          </a:solidFill>
-          <a:ln w="12700">
-            <a:solidFill>
-              <a:srgbClr val="E2E8F0"/>
-            </a:solidFill>
-            <a:prstDash val="solid"/>
-          </a:ln>
-        </p:spPr>
-      </p:sp>
-      <p:sp>
-        <p:nvSpPr>
-          <p:cNvPr id="36" name="Shape 34"/>
-          <p:cNvSpPr/>
-          <p:nvPr/>
-        </p:nvSpPr>
-        <p:spPr>
-          <a:xfrm>
-            <a:off x="5943600" y="2825496"/>
-            <a:ext cx="2834640" cy="402336"/>
-          </a:xfrm>
-          <a:prstGeom prst="rect">
-            <a:avLst/>
-          </a:prstGeom>
-          <a:solidFill>
-            <a:srgbClr val="FCE7F3"/>
-          </a:solidFill>
-          <a:ln w="12700">
-            <a:solidFill>
-              <a:srgbClr val="E2E8F0"/>
-            </a:solidFill>
-            <a:prstDash val="solid"/>
-          </a:ln>
-        </p:spPr>
-      </p:sp>
-      <p:sp>
-        <p:nvSpPr>
-          <p:cNvPr id="37" name="Text 35"/>
-          <p:cNvSpPr/>
-          <p:nvPr/>
-        </p:nvSpPr>
-        <p:spPr>
-          <a:xfrm>
-            <a:off x="5943600" y="2825496"/>
-            <a:ext cx="2834640" cy="402336"/>
-          </a:xfrm>
-          <a:prstGeom prst="rect">
-            <a:avLst/>
-          </a:prstGeom>
-          <a:noFill/>
-          <a:ln/>
-        </p:spPr>
-        <p:txBody>
-          <a:bodyPr wrap="square" lIns="0" tIns="0" rIns="0" bIns="0" rtlCol="0" anchor="ctr"/>
-          <a:lstStyle/>
-          <a:p>
-            <a:pPr algn="ctr" indent="0" marL="0">
-              <a:buNone/>
-            </a:pPr>
-            <a:r>
-              <a:rPr lang="en-US" sz="1300" b="1" dirty="0">
-                <a:solidFill>
-                  <a:srgbClr val="9D174D"/>
-                </a:solidFill>
-                <a:latin typeface="Trebuchet MS" pitchFamily="34" charset="0"/>
-                <a:ea typeface="Trebuchet MS" pitchFamily="34" charset="-122"/>
-                <a:cs typeface="Trebuchet MS" pitchFamily="34" charset="-120"/>
-              </a:rPr>
-              <a:t>--ing</a:t>
-            </a:r>
-            <a:endParaRPr lang="en-US" sz="1300" dirty="0"/>
-          </a:p>
-        </p:txBody>
-      </p:sp>
-      <p:sp>
-        <p:nvSpPr>
-          <p:cNvPr id="38" name="Shape 36"/>
-          <p:cNvSpPr/>
-          <p:nvPr/>
-        </p:nvSpPr>
-        <p:spPr>
-          <a:xfrm>
-            <a:off x="365760" y="3246120"/>
-            <a:ext cx="2468880" cy="402336"/>
-          </a:xfrm>
-          <a:prstGeom prst="rect">
-            <a:avLst/>
-          </a:prstGeom>
-          <a:solidFill>
-            <a:srgbClr val="DDD6FE"/>
-          </a:solidFill>
-          <a:ln w="12700">
-            <a:solidFill>
-              <a:srgbClr val="E2E8F0"/>
-            </a:solidFill>
-            <a:prstDash val="solid"/>
-          </a:ln>
-        </p:spPr>
-      </p:sp>
-      <p:sp>
-        <p:nvSpPr>
-          <p:cNvPr id="39" name="Text 37"/>
-          <p:cNvSpPr/>
-          <p:nvPr/>
-        </p:nvSpPr>
-        <p:spPr>
-          <a:xfrm>
-            <a:off x="365760" y="3246120"/>
-            <a:ext cx="2468880" cy="402336"/>
-          </a:xfrm>
-          <a:prstGeom prst="rect">
-            <a:avLst/>
-          </a:prstGeom>
-          <a:noFill/>
-          <a:ln/>
-        </p:spPr>
-        <p:txBody>
-          <a:bodyPr wrap="square" lIns="0" tIns="0" rIns="0" bIns="0" rtlCol="0" anchor="ctr"/>
-          <a:lstStyle/>
-          <a:p>
-            <a:pPr algn="ctr" indent="0" marL="0">
-              <a:buNone/>
-            </a:pPr>
-            <a:r>
-              <a:rPr lang="en-US" sz="1300" b="1" dirty="0">
-                <a:solidFill>
-                  <a:srgbClr val="4C1D95"/>
-                </a:solidFill>
-                <a:latin typeface="Trebuchet MS" pitchFamily="34" charset="0"/>
-                <a:ea typeface="Trebuchet MS" pitchFamily="34" charset="-122"/>
-                <a:cs typeface="Trebuchet MS" pitchFamily="34" charset="-120"/>
-              </a:rPr>
-              <a:t>color-</a:t>
-            </a:r>
-            <a:endParaRPr lang="en-US" sz="1300" dirty="0"/>
-          </a:p>
-        </p:txBody>
-      </p:sp>
-      <p:sp>
-        <p:nvSpPr>
-          <p:cNvPr id="40" name="Shape 38"/>
-          <p:cNvSpPr/>
-          <p:nvPr/>
-        </p:nvSpPr>
-        <p:spPr>
-          <a:xfrm>
-            <a:off x="2971800" y="3246120"/>
-            <a:ext cx="2834640" cy="402336"/>
-          </a:xfrm>
-          <a:prstGeom prst="rect">
-            <a:avLst/>
-          </a:prstGeom>
-          <a:solidFill>
-            <a:srgbClr val="F8FAFC"/>
-          </a:solidFill>
-          <a:ln w="12700">
-            <a:solidFill>
-              <a:srgbClr val="E2E8F0"/>
-            </a:solidFill>
-            <a:prstDash val="solid"/>
-          </a:ln>
-        </p:spPr>
-      </p:sp>
-      <p:sp>
-        <p:nvSpPr>
-          <p:cNvPr id="41" name="Shape 39"/>
-          <p:cNvSpPr/>
-          <p:nvPr/>
-        </p:nvSpPr>
-        <p:spPr>
-          <a:xfrm>
-            <a:off x="5943600" y="3246120"/>
-            <a:ext cx="2834640" cy="402336"/>
-          </a:xfrm>
-          <a:prstGeom prst="rect">
-            <a:avLst/>
-          </a:prstGeom>
-          <a:solidFill>
-            <a:srgbClr val="FCE7F3"/>
-          </a:solidFill>
-          <a:ln w="12700">
-            <a:solidFill>
-              <a:srgbClr val="E2E8F0"/>
-            </a:solidFill>
-            <a:prstDash val="solid"/>
-          </a:ln>
-        </p:spPr>
-      </p:sp>
-      <p:sp>
-        <p:nvSpPr>
-          <p:cNvPr id="42" name="Text 40"/>
-          <p:cNvSpPr/>
-          <p:nvPr/>
-        </p:nvSpPr>
-        <p:spPr>
-          <a:xfrm>
-            <a:off x="5943600" y="3246120"/>
-            <a:ext cx="2834640" cy="402336"/>
-          </a:xfrm>
-          <a:prstGeom prst="rect">
-            <a:avLst/>
-          </a:prstGeom>
-          <a:noFill/>
-          <a:ln/>
-        </p:spPr>
-        <p:txBody>
-          <a:bodyPr wrap="square" lIns="0" tIns="0" rIns="0" bIns="0" rtlCol="0" anchor="ctr"/>
-          <a:lstStyle/>
-          <a:p>
-            <a:pPr algn="ctr" indent="0" marL="0">
-              <a:buNone/>
-            </a:pPr>
-            <a:r>
-              <a:rPr lang="en-US" sz="1300" b="1" dirty="0">
-                <a:solidFill>
-                  <a:srgbClr val="9D174D"/>
-                </a:solidFill>
-                <a:latin typeface="Trebuchet MS" pitchFamily="34" charset="0"/>
-                <a:ea typeface="Trebuchet MS" pitchFamily="34" charset="-122"/>
-                <a:cs typeface="Trebuchet MS" pitchFamily="34" charset="-120"/>
-              </a:rPr>
-              <a:t>--ly</a:t>
-            </a:r>
-            <a:endParaRPr lang="en-US" sz="1300" dirty="0"/>
-          </a:p>
-        </p:txBody>
-      </p:sp>
-      <p:sp>
-        <p:nvSpPr>
-          <p:cNvPr id="43" name="Text 41"/>
-          <p:cNvSpPr/>
-          <p:nvPr/>
-        </p:nvSpPr>
-        <p:spPr>
-          <a:xfrm>
-            <a:off x="365760" y="3611880"/>
-            <a:ext cx="1828800" cy="347472"/>
-          </a:xfrm>
-          <a:prstGeom prst="rect">
-            <a:avLst/>
-          </a:prstGeom>
-          <a:noFill/>
-          <a:ln/>
-        </p:spPr>
-        <p:txBody>
-          <a:bodyPr wrap="square" lIns="0" tIns="0" rIns="0" bIns="0" rtlCol="0" anchor="ctr"/>
-          <a:lstStyle/>
-          <a:p>
-            <a:pPr algn="l" indent="0" marL="0">
-              <a:buNone/>
-            </a:pPr>
-            <a:r>
-              <a:rPr lang="en-US" sz="1200" b="1" dirty="0">
-                <a:solidFill>
-                  <a:srgbClr val="0F172A"/>
-                </a:solidFill>
-                <a:latin typeface="Trebuchet MS" pitchFamily="34" charset="0"/>
-                <a:ea typeface="Trebuchet MS" pitchFamily="34" charset="-122"/>
-                <a:cs typeface="Trebuchet MS" pitchFamily="34" charset="-120"/>
-              </a:rPr>
               <a:t>Sample words:</a:t>
-            </a:r>
-            <a:endParaRPr lang="en-US" sz="1200" dirty="0"/>
-          </a:p>
-        </p:txBody>
-      </p:sp>
-      <p:sp>
-        <p:nvSpPr>
-          <p:cNvPr id="44" name="Shape 42"/>
-          <p:cNvSpPr/>
-          <p:nvPr/>
-        </p:nvSpPr>
-        <p:spPr>
-          <a:xfrm>
-            <a:off x="365760" y="4023360"/>
-            <a:ext cx="2011680" cy="402336"/>
-          </a:xfrm>
-          <a:prstGeom prst="rect">
-            <a:avLst>
-              <a:gd name="adj" fmla="val 13636"/>
-            </a:avLst>
-          </a:prstGeom>
-          <a:solidFill>
-            <a:srgbClr val="EEF2FF"/>
-          </a:solidFill>
-          <a:ln w="12700">
-            <a:solidFill>
-              <a:srgbClr val="6366F1"/>
-            </a:solidFill>
-            <a:prstDash val="solid"/>
-          </a:ln>
-        </p:spPr>
-      </p:sp>
-      <p:sp>
-        <p:nvSpPr>
-          <p:cNvPr id="45" name="Text 43"/>
-          <p:cNvSpPr/>
-          <p:nvPr/>
-        </p:nvSpPr>
-        <p:spPr>
-          <a:xfrm>
-            <a:off x="365760" y="4023360"/>
-            <a:ext cx="2011680" cy="402336"/>
-          </a:xfrm>
-          <a:prstGeom prst="rect">
-            <a:avLst/>
-          </a:prstGeom>
-          <a:noFill/>
-          <a:ln/>
-        </p:spPr>
-        <p:txBody>
-          <a:bodyPr wrap="square" lIns="0" tIns="0" rIns="0" bIns="0" rtlCol="0" anchor="ctr"/>
-          <a:lstStyle/>
-          <a:p>
-            <a:pPr algn="ctr" indent="0" marL="0">
-              <a:buNone/>
-            </a:pPr>
-            <a:r>
-              <a:rPr lang="en-US" sz="1200" b="1" dirty="0">
-                <a:solidFill>
-                  <a:srgbClr val="4338CA"/>
-                </a:solidFill>
-                <a:latin typeface="Trebuchet MS" pitchFamily="34" charset="0"/>
-                <a:ea typeface="Trebuchet MS" pitchFamily="34" charset="-122"/>
-                <a:cs typeface="Trebuchet MS" pitchFamily="34" charset="-120"/>
-              </a:rPr>
-              <a:t>fast</a:t>
-            </a:r>
-            <a:endParaRPr lang="en-US" sz="1200" dirty="0"/>
-          </a:p>
-        </p:txBody>
-      </p:sp>
-      <p:sp>
-        <p:nvSpPr>
-          <p:cNvPr id="46" name="Shape 44"/>
-          <p:cNvSpPr/>
-          <p:nvPr/>
-        </p:nvSpPr>
-        <p:spPr>
-          <a:xfrm>
-            <a:off x="2542032" y="4023360"/>
-            <a:ext cx="2011680" cy="402336"/>
-          </a:xfrm>
-          <a:prstGeom prst="rect">
-            <a:avLst>
-              <a:gd name="adj" fmla="val 13636"/>
-            </a:avLst>
-          </a:prstGeom>
-          <a:solidFill>
-            <a:srgbClr val="EEF2FF"/>
-          </a:solidFill>
-          <a:ln w="12700">
-            <a:solidFill>
-              <a:srgbClr val="6366F1"/>
-            </a:solidFill>
-            <a:prstDash val="solid"/>
-          </a:ln>
-        </p:spPr>
-      </p:sp>
-      <p:sp>
-        <p:nvSpPr>
-          <p:cNvPr id="47" name="Text 45"/>
-          <p:cNvSpPr/>
-          <p:nvPr/>
-        </p:nvSpPr>
-        <p:spPr>
-          <a:xfrm>
-            <a:off x="2542032" y="4023360"/>
-            <a:ext cx="2011680" cy="402336"/>
-          </a:xfrm>
-          <a:prstGeom prst="rect">
-            <a:avLst/>
-          </a:prstGeom>
-          <a:noFill/>
-          <a:ln/>
-        </p:spPr>
-        <p:txBody>
-          <a:bodyPr wrap="square" lIns="0" tIns="0" rIns="0" bIns="0" rtlCol="0" anchor="ctr"/>
-          <a:lstStyle/>
-          <a:p>
-            <a:pPr algn="ctr" indent="0" marL="0">
-              <a:buNone/>
-            </a:pPr>
-            <a:r>
-              <a:rPr lang="en-US" sz="1200" b="1" dirty="0">
-                <a:solidFill>
-                  <a:srgbClr val="4338CA"/>
-                </a:solidFill>
-                <a:latin typeface="Trebuchet MS" pitchFamily="34" charset="0"/>
-                <a:ea typeface="Trebuchet MS" pitchFamily="34" charset="-122"/>
-                <a:cs typeface="Trebuchet MS" pitchFamily="34" charset="-120"/>
-              </a:rPr>
-              <a:t>faster</a:t>
-            </a:r>
-            <a:endParaRPr lang="en-US" sz="1200" dirty="0"/>
-          </a:p>
-        </p:txBody>
-      </p:sp>
-      <p:sp>
-        <p:nvSpPr>
-          <p:cNvPr id="48" name="Shape 46"/>
-          <p:cNvSpPr/>
-          <p:nvPr/>
-        </p:nvSpPr>
-        <p:spPr>
-          <a:xfrm>
-            <a:off x="4718304" y="4023360"/>
-            <a:ext cx="2011680" cy="402336"/>
-          </a:xfrm>
-          <a:prstGeom prst="rect">
-            <a:avLst>
-              <a:gd name="adj" fmla="val 13636"/>
-            </a:avLst>
-          </a:prstGeom>
-          <a:solidFill>
-            <a:srgbClr val="EEF2FF"/>
-          </a:solidFill>
-          <a:ln w="12700">
-            <a:solidFill>
-              <a:srgbClr val="6366F1"/>
-            </a:solidFill>
-            <a:prstDash val="solid"/>
-          </a:ln>
-        </p:spPr>
-      </p:sp>
-      <p:sp>
-        <p:nvSpPr>
-          <p:cNvPr id="49" name="Text 47"/>
-          <p:cNvSpPr/>
-          <p:nvPr/>
-        </p:nvSpPr>
-        <p:spPr>
-          <a:xfrm>
-            <a:off x="4718304" y="4023360"/>
-            <a:ext cx="2011680" cy="402336"/>
-          </a:xfrm>
-          <a:prstGeom prst="rect">
-            <a:avLst/>
-          </a:prstGeom>
-          <a:noFill/>
-          <a:ln/>
-        </p:spPr>
-        <p:txBody>
-          <a:bodyPr wrap="square" lIns="0" tIns="0" rIns="0" bIns="0" rtlCol="0" anchor="ctr"/>
-          <a:lstStyle/>
-          <a:p>
-            <a:pPr algn="ctr" indent="0" marL="0">
-              <a:buNone/>
-            </a:pPr>
-            <a:r>
-              <a:rPr lang="en-US" sz="1200" b="1" dirty="0">
-                <a:solidFill>
-                  <a:srgbClr val="4338CA"/>
-                </a:solidFill>
-                <a:latin typeface="Trebuchet MS" pitchFamily="34" charset="0"/>
-                <a:ea typeface="Trebuchet MS" pitchFamily="34" charset="-122"/>
-                <a:cs typeface="Trebuchet MS" pitchFamily="34" charset="-120"/>
-              </a:rPr>
-              <a:t>fastest</a:t>
-            </a:r>
-            <a:endParaRPr lang="en-US" sz="1200" dirty="0"/>
-          </a:p>
-        </p:txBody>
-      </p:sp>
-      <p:sp>
-        <p:nvSpPr>
-          <p:cNvPr id="50" name="Shape 48"/>
-          <p:cNvSpPr/>
-          <p:nvPr/>
-        </p:nvSpPr>
-        <p:spPr>
-          <a:xfrm>
-            <a:off x="6894576" y="4023360"/>
-            <a:ext cx="2011680" cy="402336"/>
-          </a:xfrm>
-          <a:prstGeom prst="rect">
-            <a:avLst>
-              <a:gd name="adj" fmla="val 13636"/>
-            </a:avLst>
-          </a:prstGeom>
-          <a:solidFill>
-            <a:srgbClr val="EEF2FF"/>
-          </a:solidFill>
-          <a:ln w="12700">
-            <a:solidFill>
-              <a:srgbClr val="6366F1"/>
-            </a:solidFill>
-            <a:prstDash val="solid"/>
-          </a:ln>
-        </p:spPr>
-      </p:sp>
-      <p:sp>
-        <p:nvSpPr>
-          <p:cNvPr id="51" name="Text 49"/>
-          <p:cNvSpPr/>
-          <p:nvPr/>
-        </p:nvSpPr>
-        <p:spPr>
-          <a:xfrm>
-            <a:off x="6894576" y="4023360"/>
-            <a:ext cx="2011680" cy="402336"/>
-          </a:xfrm>
-          <a:prstGeom prst="rect">
-            <a:avLst/>
-          </a:prstGeom>
-          <a:noFill/>
-          <a:ln/>
-        </p:spPr>
-        <p:txBody>
-          <a:bodyPr wrap="square" lIns="0" tIns="0" rIns="0" bIns="0" rtlCol="0" anchor="ctr"/>
-          <a:lstStyle/>
-          <a:p>
-            <a:pPr algn="ctr" indent="0" marL="0">
-              <a:buNone/>
-            </a:pPr>
-            <a:r>
-              <a:rPr lang="en-US" sz="1200" b="1" dirty="0">
-                <a:solidFill>
-                  <a:srgbClr val="4338CA"/>
-                </a:solidFill>
-                <a:latin typeface="Trebuchet MS" pitchFamily="34" charset="0"/>
-                <a:ea typeface="Trebuchet MS" pitchFamily="34" charset="-122"/>
-                <a:cs typeface="Trebuchet MS" pitchFamily="34" charset="-120"/>
-              </a:rPr>
-              <a:t>fasting</a:t>
-            </a:r>
-            <a:endParaRPr lang="en-US" sz="1200" dirty="0"/>
-          </a:p>
-        </p:txBody>
-      </p:sp>
-      <p:sp>
-        <p:nvSpPr>
-          <p:cNvPr id="52" name="Shape 50"/>
-          <p:cNvSpPr/>
-          <p:nvPr/>
-        </p:nvSpPr>
-        <p:spPr>
-          <a:xfrm>
-            <a:off x="365760" y="4498848"/>
-            <a:ext cx="2011680" cy="402336"/>
-          </a:xfrm>
-          <a:prstGeom prst="rect">
-            <a:avLst>
-              <a:gd name="adj" fmla="val 13636"/>
-            </a:avLst>
-          </a:prstGeom>
-          <a:solidFill>
-            <a:srgbClr val="EEF2FF"/>
-          </a:solidFill>
-          <a:ln w="12700">
-            <a:solidFill>
-              <a:srgbClr val="6366F1"/>
-            </a:solidFill>
-            <a:prstDash val="solid"/>
-          </a:ln>
-        </p:spPr>
-      </p:sp>
-      <p:sp>
-        <p:nvSpPr>
-          <p:cNvPr id="53" name="Text 51"/>
-          <p:cNvSpPr/>
-          <p:nvPr/>
-        </p:nvSpPr>
-        <p:spPr>
-          <a:xfrm>
-            <a:off x="365760" y="4498848"/>
-            <a:ext cx="2011680" cy="402336"/>
-          </a:xfrm>
-          <a:prstGeom prst="rect">
-            <a:avLst/>
-          </a:prstGeom>
-          <a:noFill/>
-          <a:ln/>
-        </p:spPr>
-        <p:txBody>
-          <a:bodyPr wrap="square" lIns="0" tIns="0" rIns="0" bIns="0" rtlCol="0" anchor="ctr"/>
-          <a:lstStyle/>
-          <a:p>
-            <a:pPr algn="ctr" indent="0" marL="0">
-              <a:buNone/>
-            </a:pPr>
-            <a:r>
-              <a:rPr lang="en-US" sz="1200" b="1" dirty="0">
-                <a:solidFill>
-                  <a:srgbClr val="4338CA"/>
-                </a:solidFill>
-                <a:latin typeface="Trebuchet MS" pitchFamily="34" charset="0"/>
-                <a:ea typeface="Trebuchet MS" pitchFamily="34" charset="-122"/>
-                <a:cs typeface="Trebuchet MS" pitchFamily="34" charset="-120"/>
-              </a:rPr>
-              <a:t>fasten</a:t>
-            </a:r>
-            <a:endParaRPr lang="en-US" sz="1200" dirty="0"/>
-          </a:p>
-        </p:txBody>
-      </p:sp>
-      <p:sp>
-        <p:nvSpPr>
-          <p:cNvPr id="54" name="Shape 52"/>
-          <p:cNvSpPr/>
-          <p:nvPr/>
-        </p:nvSpPr>
-        <p:spPr>
-          <a:xfrm>
-            <a:off x="2542032" y="4498848"/>
-            <a:ext cx="2011680" cy="402336"/>
-          </a:xfrm>
-          <a:prstGeom prst="rect">
-            <a:avLst>
-              <a:gd name="adj" fmla="val 13636"/>
-            </a:avLst>
-          </a:prstGeom>
-          <a:solidFill>
-            <a:srgbClr val="EEF2FF"/>
-          </a:solidFill>
-          <a:ln w="12700">
-            <a:solidFill>
-              <a:srgbClr val="6366F1"/>
-            </a:solidFill>
-            <a:prstDash val="solid"/>
-          </a:ln>
-        </p:spPr>
-      </p:sp>
-      <p:sp>
-        <p:nvSpPr>
-          <p:cNvPr id="55" name="Text 53"/>
-          <p:cNvSpPr/>
-          <p:nvPr/>
-        </p:nvSpPr>
-        <p:spPr>
-          <a:xfrm>
-            <a:off x="2542032" y="4498848"/>
-            <a:ext cx="2011680" cy="402336"/>
-          </a:xfrm>
-          <a:prstGeom prst="rect">
-            <a:avLst/>
-          </a:prstGeom>
-          <a:noFill/>
-          <a:ln/>
-        </p:spPr>
-        <p:txBody>
-          <a:bodyPr wrap="square" lIns="0" tIns="0" rIns="0" bIns="0" rtlCol="0" anchor="ctr"/>
-          <a:lstStyle/>
-          <a:p>
-            <a:pPr algn="ctr" indent="0" marL="0">
-              <a:buNone/>
-            </a:pPr>
-            <a:r>
-              <a:rPr lang="en-US" sz="1200" b="1" dirty="0">
-                <a:solidFill>
-                  <a:srgbClr val="4338CA"/>
-                </a:solidFill>
-                <a:latin typeface="Trebuchet MS" pitchFamily="34" charset="0"/>
-                <a:ea typeface="Trebuchet MS" pitchFamily="34" charset="-122"/>
-                <a:cs typeface="Trebuchet MS" pitchFamily="34" charset="-120"/>
-              </a:rPr>
-              <a:t>fastly</a:t>
-            </a:r>
-            <a:endParaRPr lang="en-US" sz="1200" dirty="0"/>
-          </a:p>
-        </p:txBody>
-      </p:sp>
-      <p:sp>
-        <p:nvSpPr>
-          <p:cNvPr id="56" name="Shape 54"/>
-          <p:cNvSpPr/>
-          <p:nvPr/>
-        </p:nvSpPr>
-        <p:spPr>
-          <a:xfrm>
-            <a:off x="4718304" y="4498848"/>
-            <a:ext cx="2011680" cy="402336"/>
-          </a:xfrm>
-          <a:prstGeom prst="rect">
-            <a:avLst>
-              <a:gd name="adj" fmla="val 13636"/>
-            </a:avLst>
-          </a:prstGeom>
-          <a:solidFill>
-            <a:srgbClr val="EEF2FF"/>
-          </a:solidFill>
-          <a:ln w="12700">
-            <a:solidFill>
-              <a:srgbClr val="6366F1"/>
-            </a:solidFill>
-            <a:prstDash val="solid"/>
-          </a:ln>
-        </p:spPr>
-      </p:sp>
-      <p:sp>
-        <p:nvSpPr>
-          <p:cNvPr id="57" name="Text 55"/>
-          <p:cNvSpPr/>
-          <p:nvPr/>
-        </p:nvSpPr>
-        <p:spPr>
-          <a:xfrm>
-            <a:off x="4718304" y="4498848"/>
-            <a:ext cx="2011680" cy="402336"/>
-          </a:xfrm>
-          <a:prstGeom prst="rect">
-            <a:avLst/>
-          </a:prstGeom>
-          <a:noFill/>
-          <a:ln/>
-        </p:spPr>
-        <p:txBody>
-          <a:bodyPr wrap="square" lIns="0" tIns="0" rIns="0" bIns="0" rtlCol="0" anchor="ctr"/>
-          <a:lstStyle/>
-          <a:p>
-            <a:pPr algn="ctr" indent="0" marL="0">
-              <a:buNone/>
-            </a:pPr>
-            <a:r>
-              <a:rPr lang="en-US" sz="1200" b="1" dirty="0">
-                <a:solidFill>
-                  <a:srgbClr val="4338CA"/>
-                </a:solidFill>
-                <a:latin typeface="Trebuchet MS" pitchFamily="34" charset="0"/>
-                <a:ea typeface="Trebuchet MS" pitchFamily="34" charset="-122"/>
-                <a:cs typeface="Trebuchet MS" pitchFamily="34" charset="-120"/>
-              </a:rPr>
-              <a:t>breakfast</a:t>
-            </a:r>
-            <a:endParaRPr lang="en-US" sz="1200" dirty="0"/>
-          </a:p>
-        </p:txBody>
-      </p:sp>
-      <p:sp>
-        <p:nvSpPr>
-          <p:cNvPr id="58" name="Shape 56"/>
-          <p:cNvSpPr/>
-          <p:nvPr/>
-        </p:nvSpPr>
-        <p:spPr>
-          <a:xfrm>
-            <a:off x="6894576" y="4498848"/>
-            <a:ext cx="2011680" cy="402336"/>
-          </a:xfrm>
-          <a:prstGeom prst="rect">
-            <a:avLst>
-              <a:gd name="adj" fmla="val 13636"/>
-            </a:avLst>
-          </a:prstGeom>
-          <a:solidFill>
-            <a:srgbClr val="EEF2FF"/>
-          </a:solidFill>
-          <a:ln w="12700">
-            <a:solidFill>
-              <a:srgbClr val="6366F1"/>
-            </a:solidFill>
-            <a:prstDash val="solid"/>
-          </a:ln>
-        </p:spPr>
-      </p:sp>
-      <p:sp>
-        <p:nvSpPr>
-          <p:cNvPr id="59" name="Text 57"/>
-          <p:cNvSpPr/>
-          <p:nvPr/>
-        </p:nvSpPr>
-        <p:spPr>
-          <a:xfrm>
-            <a:off x="6894576" y="4498848"/>
-            <a:ext cx="2011680" cy="402336"/>
-          </a:xfrm>
-          <a:prstGeom prst="rect">
-            <a:avLst/>
-          </a:prstGeom>
-          <a:noFill/>
-          <a:ln/>
-        </p:spPr>
-        <p:txBody>
-          <a:bodyPr wrap="square" lIns="0" tIns="0" rIns="0" bIns="0" rtlCol="0" anchor="ctr"/>
-          <a:lstStyle/>
-          <a:p>
-            <a:pPr algn="ctr" indent="0" marL="0">
-              <a:buNone/>
-            </a:pPr>
-            <a:r>
-              <a:rPr lang="en-US" sz="1200" b="1" dirty="0">
-                <a:solidFill>
-                  <a:srgbClr val="4338CA"/>
-                </a:solidFill>
-                <a:latin typeface="Trebuchet MS" pitchFamily="34" charset="0"/>
-                <a:ea typeface="Trebuchet MS" pitchFamily="34" charset="-122"/>
-                <a:cs typeface="Trebuchet MS" pitchFamily="34" charset="-120"/>
-              </a:rPr>
-              <a:t>steadfast</a:t>
             </a:r>
             <a:endParaRPr lang="en-US" sz="1200" dirty="0"/>
           </a:p>
@@ -35061,7 +33169,7 @@
                 <a:ea typeface="Calibri" pitchFamily="34" charset="-122"/>
                 <a:cs typeface="Calibri" pitchFamily="34" charset="-120"/>
               </a:rPr>
-              <a:t>Word Labs  •  wordlabs.app  •  Root: 'fast' = quick, firm, or not eating</a:t>
+              <a:t>Word Labs  •  wordlabs.app  •  Root: 'fast' = quick</a:t>
             </a:r>
             <a:endParaRPr lang="en-US" sz="800" dirty="0"/>
           </a:p>
@@ -35225,7 +33333,7 @@
                 <a:ea typeface="Calibri" pitchFamily="34" charset="-122"/>
                 <a:cs typeface="Calibri" pitchFamily="34" charset="-120"/>
               </a:rPr>
-              <a:t>The core part of a word carrying its basic meaning. For example, 'fast' means 'quick, firm, or not eating'.</a:t>
+              <a:t>The core part of a word carrying its basic meaning. For example, 'fast' means 'quick'.</a:t>
             </a:r>
             <a:endParaRPr lang="en-US" sz="1350" dirty="0"/>
           </a:p>
@@ -35845,7 +33953,7 @@
                 <a:ea typeface="Calibri" pitchFamily="34" charset="-122"/>
                 <a:cs typeface="Calibri" pitchFamily="34" charset="-120"/>
               </a:rPr>
-              <a:t>Word Labs  •  wordlabs.app  •  Root: 'fast' = quick, firm, or not eating</a:t>
+              <a:t>Word Labs  •  wordlabs.app  •  Root: 'fast' = quick</a:t>
             </a:r>
             <a:endParaRPr lang="en-US" sz="800" dirty="0"/>
           </a:p>
@@ -35957,7 +34065,7 @@
                 <a:ea typeface="Calibri" pitchFamily="34" charset="-122"/>
                 <a:cs typeface="Calibri" pitchFamily="34" charset="-120"/>
               </a:rPr>
-              <a:t>1.  Adding '-en' to 'fast' makes the word 'fasten', meaning to fix something firmly.</a:t>
+              <a:t>1.  'fasted' means 'went without food for a period of time'.</a:t>
             </a:r>
             <a:endParaRPr lang="en-US" sz="1300" dirty="0"/>
           </a:p>
@@ -36096,7 +34204,7 @@
                 <a:ea typeface="Calibri" pitchFamily="34" charset="-122"/>
                 <a:cs typeface="Calibri" pitchFamily="34" charset="-120"/>
               </a:rPr>
-              <a:t>2.  The root 'fast' comes from ancient Greek and means 'to run'.</a:t>
+              <a:t>2.  'fast' means 'extremely slow and gentle'.</a:t>
             </a:r>
             <a:endParaRPr lang="en-US" sz="1300" dirty="0"/>
           </a:p>
@@ -36235,7 +34343,7 @@
                 <a:ea typeface="Calibri" pitchFamily="34" charset="-122"/>
                 <a:cs typeface="Calibri" pitchFamily="34" charset="-120"/>
               </a:rPr>
-              <a:t>3.  'Steadfast' means staying firm and loyal, using the root 'fast' meaning firm.</a:t>
+              <a:t>3.  'fast' means 'moving or happening quickly'.</a:t>
             </a:r>
             <a:endParaRPr lang="en-US" sz="1300" dirty="0"/>
           </a:p>
@@ -36374,7 +34482,7 @@
                 <a:ea typeface="Calibri" pitchFamily="34" charset="-122"/>
                 <a:cs typeface="Calibri" pitchFamily="34" charset="-120"/>
               </a:rPr>
-              <a:t>4.  The root 'fast' only ever means moving quickly and never relates to food.</a:t>
+              <a:t>4.  'fasted' means 'ran extremely quickly in a race'.</a:t>
             </a:r>
             <a:endParaRPr lang="en-US" sz="1300" dirty="0"/>
           </a:p>
@@ -36513,7 +34621,7 @@
                 <a:ea typeface="Calibri" pitchFamily="34" charset="-122"/>
                 <a:cs typeface="Calibri" pitchFamily="34" charset="-120"/>
               </a:rPr>
-              <a:t>5.  The word 'breakfast' contains the root 'fast', meaning to go without food.</a:t>
+              <a:t>5.  'fast' means 'quick'.</a:t>
             </a:r>
             <a:endParaRPr lang="en-US" sz="1300" dirty="0"/>
           </a:p>
@@ -36871,7 +34979,7 @@
                 <a:ea typeface="Calibri" pitchFamily="34" charset="-122"/>
                 <a:cs typeface="Calibri" pitchFamily="34" charset="-120"/>
               </a:rPr>
-              <a:t>Word Labs  •  wordlabs.app  •  Root: 'fast' = quick, firm, or not eating</a:t>
+              <a:t>Word Labs  •  wordlabs.app  •  Root: 'fast' = quick</a:t>
             </a:r>
             <a:endParaRPr lang="en-US" sz="800" dirty="0"/>
           </a:p>
@@ -37008,7 +35116,7 @@
                 <a:ea typeface="Trebuchet MS" pitchFamily="34" charset="-122"/>
                 <a:cs typeface="Trebuchet MS" pitchFamily="34" charset="-120"/>
               </a:rPr>
-              <a:t>quick, firm, or not eating</a:t>
+              <a:t>quick</a:t>
             </a:r>
             <a:endParaRPr lang="en-US" sz="2000" dirty="0"/>
           </a:p>
@@ -37047,7 +35155,7 @@
                 <a:ea typeface="Calibri" pitchFamily="34" charset="-122"/>
                 <a:cs typeface="Calibri" pitchFamily="34" charset="-120"/>
               </a:rPr>
-              <a:t>Origin: Old English: fæst</a:t>
+              <a:t>Origin: Core English root</a:t>
             </a:r>
             <a:endParaRPr lang="en-US" sz="1100" dirty="0"/>
           </a:p>
@@ -37087,468 +35195,6 @@
                 <a:cs typeface="Trebuchet MS" pitchFamily="34" charset="-120"/>
               </a:rPr>
               <a:t>Words using this root:</a:t>
-            </a:r>
-            <a:endParaRPr lang="en-US" sz="1300" dirty="0"/>
-          </a:p>
-        </p:txBody>
-      </p:sp>
-      <p:sp>
-        <p:nvSpPr>
-          <p:cNvPr id="16" name="Shape 14"/>
-          <p:cNvSpPr/>
-          <p:nvPr/>
-        </p:nvSpPr>
-        <p:spPr>
-          <a:xfrm>
-            <a:off x="365760" y="2743200"/>
-            <a:ext cx="2011680" cy="502920"/>
-          </a:xfrm>
-          <a:prstGeom prst="rect">
-            <a:avLst>
-              <a:gd name="adj" fmla="val 14545"/>
-            </a:avLst>
-          </a:prstGeom>
-          <a:solidFill>
-            <a:srgbClr val="EEF2FF"/>
-          </a:solidFill>
-          <a:ln w="12700">
-            <a:solidFill>
-              <a:srgbClr val="6366F1"/>
-            </a:solidFill>
-            <a:prstDash val="solid"/>
-          </a:ln>
-        </p:spPr>
-      </p:sp>
-      <p:sp>
-        <p:nvSpPr>
-          <p:cNvPr id="17" name="Text 15"/>
-          <p:cNvSpPr/>
-          <p:nvPr/>
-        </p:nvSpPr>
-        <p:spPr>
-          <a:xfrm>
-            <a:off x="365760" y="2743200"/>
-            <a:ext cx="2011680" cy="502920"/>
-          </a:xfrm>
-          <a:prstGeom prst="rect">
-            <a:avLst/>
-          </a:prstGeom>
-          <a:noFill/>
-          <a:ln/>
-        </p:spPr>
-        <p:txBody>
-          <a:bodyPr wrap="square" lIns="0" tIns="0" rIns="0" bIns="0" rtlCol="0" anchor="ctr"/>
-          <a:lstStyle/>
-          <a:p>
-            <a:pPr algn="ctr" indent="0" marL="0">
-              <a:buNone/>
-            </a:pPr>
-            <a:r>
-              <a:rPr lang="en-US" sz="1300" b="1" dirty="0">
-                <a:solidFill>
-                  <a:srgbClr val="4338CA"/>
-                </a:solidFill>
-                <a:latin typeface="Trebuchet MS" pitchFamily="34" charset="0"/>
-                <a:ea typeface="Trebuchet MS" pitchFamily="34" charset="-122"/>
-                <a:cs typeface="Trebuchet MS" pitchFamily="34" charset="-120"/>
-              </a:rPr>
-              <a:t>fast</a:t>
-            </a:r>
-            <a:endParaRPr lang="en-US" sz="1300" dirty="0"/>
-          </a:p>
-        </p:txBody>
-      </p:sp>
-      <p:sp>
-        <p:nvSpPr>
-          <p:cNvPr id="18" name="Shape 16"/>
-          <p:cNvSpPr/>
-          <p:nvPr/>
-        </p:nvSpPr>
-        <p:spPr>
-          <a:xfrm>
-            <a:off x="2514600" y="2743200"/>
-            <a:ext cx="2011680" cy="502920"/>
-          </a:xfrm>
-          <a:prstGeom prst="rect">
-            <a:avLst>
-              <a:gd name="adj" fmla="val 14545"/>
-            </a:avLst>
-          </a:prstGeom>
-          <a:solidFill>
-            <a:srgbClr val="EEF2FF"/>
-          </a:solidFill>
-          <a:ln w="12700">
-            <a:solidFill>
-              <a:srgbClr val="6366F1"/>
-            </a:solidFill>
-            <a:prstDash val="solid"/>
-          </a:ln>
-        </p:spPr>
-      </p:sp>
-      <p:sp>
-        <p:nvSpPr>
-          <p:cNvPr id="19" name="Text 17"/>
-          <p:cNvSpPr/>
-          <p:nvPr/>
-        </p:nvSpPr>
-        <p:spPr>
-          <a:xfrm>
-            <a:off x="2514600" y="2743200"/>
-            <a:ext cx="2011680" cy="502920"/>
-          </a:xfrm>
-          <a:prstGeom prst="rect">
-            <a:avLst/>
-          </a:prstGeom>
-          <a:noFill/>
-          <a:ln/>
-        </p:spPr>
-        <p:txBody>
-          <a:bodyPr wrap="square" lIns="0" tIns="0" rIns="0" bIns="0" rtlCol="0" anchor="ctr"/>
-          <a:lstStyle/>
-          <a:p>
-            <a:pPr algn="ctr" indent="0" marL="0">
-              <a:buNone/>
-            </a:pPr>
-            <a:r>
-              <a:rPr lang="en-US" sz="1300" b="1" dirty="0">
-                <a:solidFill>
-                  <a:srgbClr val="4338CA"/>
-                </a:solidFill>
-                <a:latin typeface="Trebuchet MS" pitchFamily="34" charset="0"/>
-                <a:ea typeface="Trebuchet MS" pitchFamily="34" charset="-122"/>
-                <a:cs typeface="Trebuchet MS" pitchFamily="34" charset="-120"/>
-              </a:rPr>
-              <a:t>faster</a:t>
-            </a:r>
-            <a:endParaRPr lang="en-US" sz="1300" dirty="0"/>
-          </a:p>
-        </p:txBody>
-      </p:sp>
-      <p:sp>
-        <p:nvSpPr>
-          <p:cNvPr id="20" name="Shape 18"/>
-          <p:cNvSpPr/>
-          <p:nvPr/>
-        </p:nvSpPr>
-        <p:spPr>
-          <a:xfrm>
-            <a:off x="4663440" y="2743200"/>
-            <a:ext cx="2011680" cy="502920"/>
-          </a:xfrm>
-          <a:prstGeom prst="rect">
-            <a:avLst>
-              <a:gd name="adj" fmla="val 14545"/>
-            </a:avLst>
-          </a:prstGeom>
-          <a:solidFill>
-            <a:srgbClr val="EEF2FF"/>
-          </a:solidFill>
-          <a:ln w="12700">
-            <a:solidFill>
-              <a:srgbClr val="6366F1"/>
-            </a:solidFill>
-            <a:prstDash val="solid"/>
-          </a:ln>
-        </p:spPr>
-      </p:sp>
-      <p:sp>
-        <p:nvSpPr>
-          <p:cNvPr id="21" name="Text 19"/>
-          <p:cNvSpPr/>
-          <p:nvPr/>
-        </p:nvSpPr>
-        <p:spPr>
-          <a:xfrm>
-            <a:off x="4663440" y="2743200"/>
-            <a:ext cx="2011680" cy="502920"/>
-          </a:xfrm>
-          <a:prstGeom prst="rect">
-            <a:avLst/>
-          </a:prstGeom>
-          <a:noFill/>
-          <a:ln/>
-        </p:spPr>
-        <p:txBody>
-          <a:bodyPr wrap="square" lIns="0" tIns="0" rIns="0" bIns="0" rtlCol="0" anchor="ctr"/>
-          <a:lstStyle/>
-          <a:p>
-            <a:pPr algn="ctr" indent="0" marL="0">
-              <a:buNone/>
-            </a:pPr>
-            <a:r>
-              <a:rPr lang="en-US" sz="1300" b="1" dirty="0">
-                <a:solidFill>
-                  <a:srgbClr val="4338CA"/>
-                </a:solidFill>
-                <a:latin typeface="Trebuchet MS" pitchFamily="34" charset="0"/>
-                <a:ea typeface="Trebuchet MS" pitchFamily="34" charset="-122"/>
-                <a:cs typeface="Trebuchet MS" pitchFamily="34" charset="-120"/>
-              </a:rPr>
-              <a:t>fastest</a:t>
-            </a:r>
-            <a:endParaRPr lang="en-US" sz="1300" dirty="0"/>
-          </a:p>
-        </p:txBody>
-      </p:sp>
-      <p:sp>
-        <p:nvSpPr>
-          <p:cNvPr id="22" name="Shape 20"/>
-          <p:cNvSpPr/>
-          <p:nvPr/>
-        </p:nvSpPr>
-        <p:spPr>
-          <a:xfrm>
-            <a:off x="6812280" y="2743200"/>
-            <a:ext cx="2011680" cy="502920"/>
-          </a:xfrm>
-          <a:prstGeom prst="rect">
-            <a:avLst>
-              <a:gd name="adj" fmla="val 14545"/>
-            </a:avLst>
-          </a:prstGeom>
-          <a:solidFill>
-            <a:srgbClr val="EEF2FF"/>
-          </a:solidFill>
-          <a:ln w="12700">
-            <a:solidFill>
-              <a:srgbClr val="6366F1"/>
-            </a:solidFill>
-            <a:prstDash val="solid"/>
-          </a:ln>
-        </p:spPr>
-      </p:sp>
-      <p:sp>
-        <p:nvSpPr>
-          <p:cNvPr id="23" name="Text 21"/>
-          <p:cNvSpPr/>
-          <p:nvPr/>
-        </p:nvSpPr>
-        <p:spPr>
-          <a:xfrm>
-            <a:off x="6812280" y="2743200"/>
-            <a:ext cx="2011680" cy="502920"/>
-          </a:xfrm>
-          <a:prstGeom prst="rect">
-            <a:avLst/>
-          </a:prstGeom>
-          <a:noFill/>
-          <a:ln/>
-        </p:spPr>
-        <p:txBody>
-          <a:bodyPr wrap="square" lIns="0" tIns="0" rIns="0" bIns="0" rtlCol="0" anchor="ctr"/>
-          <a:lstStyle/>
-          <a:p>
-            <a:pPr algn="ctr" indent="0" marL="0">
-              <a:buNone/>
-            </a:pPr>
-            <a:r>
-              <a:rPr lang="en-US" sz="1300" b="1" dirty="0">
-                <a:solidFill>
-                  <a:srgbClr val="4338CA"/>
-                </a:solidFill>
-                <a:latin typeface="Trebuchet MS" pitchFamily="34" charset="0"/>
-                <a:ea typeface="Trebuchet MS" pitchFamily="34" charset="-122"/>
-                <a:cs typeface="Trebuchet MS" pitchFamily="34" charset="-120"/>
-              </a:rPr>
-              <a:t>fasting</a:t>
-            </a:r>
-            <a:endParaRPr lang="en-US" sz="1300" dirty="0"/>
-          </a:p>
-        </p:txBody>
-      </p:sp>
-      <p:sp>
-        <p:nvSpPr>
-          <p:cNvPr id="24" name="Shape 22"/>
-          <p:cNvSpPr/>
-          <p:nvPr/>
-        </p:nvSpPr>
-        <p:spPr>
-          <a:xfrm>
-            <a:off x="365760" y="3401568"/>
-            <a:ext cx="2011680" cy="502920"/>
-          </a:xfrm>
-          <a:prstGeom prst="rect">
-            <a:avLst>
-              <a:gd name="adj" fmla="val 14545"/>
-            </a:avLst>
-          </a:prstGeom>
-          <a:solidFill>
-            <a:srgbClr val="EEF2FF"/>
-          </a:solidFill>
-          <a:ln w="12700">
-            <a:solidFill>
-              <a:srgbClr val="6366F1"/>
-            </a:solidFill>
-            <a:prstDash val="solid"/>
-          </a:ln>
-        </p:spPr>
-      </p:sp>
-      <p:sp>
-        <p:nvSpPr>
-          <p:cNvPr id="25" name="Text 23"/>
-          <p:cNvSpPr/>
-          <p:nvPr/>
-        </p:nvSpPr>
-        <p:spPr>
-          <a:xfrm>
-            <a:off x="365760" y="3401568"/>
-            <a:ext cx="2011680" cy="502920"/>
-          </a:xfrm>
-          <a:prstGeom prst="rect">
-            <a:avLst/>
-          </a:prstGeom>
-          <a:noFill/>
-          <a:ln/>
-        </p:spPr>
-        <p:txBody>
-          <a:bodyPr wrap="square" lIns="0" tIns="0" rIns="0" bIns="0" rtlCol="0" anchor="ctr"/>
-          <a:lstStyle/>
-          <a:p>
-            <a:pPr algn="ctr" indent="0" marL="0">
-              <a:buNone/>
-            </a:pPr>
-            <a:r>
-              <a:rPr lang="en-US" sz="1300" b="1" dirty="0">
-                <a:solidFill>
-                  <a:srgbClr val="4338CA"/>
-                </a:solidFill>
-                <a:latin typeface="Trebuchet MS" pitchFamily="34" charset="0"/>
-                <a:ea typeface="Trebuchet MS" pitchFamily="34" charset="-122"/>
-                <a:cs typeface="Trebuchet MS" pitchFamily="34" charset="-120"/>
-              </a:rPr>
-              <a:t>fasten</a:t>
-            </a:r>
-            <a:endParaRPr lang="en-US" sz="1300" dirty="0"/>
-          </a:p>
-        </p:txBody>
-      </p:sp>
-      <p:sp>
-        <p:nvSpPr>
-          <p:cNvPr id="26" name="Shape 24"/>
-          <p:cNvSpPr/>
-          <p:nvPr/>
-        </p:nvSpPr>
-        <p:spPr>
-          <a:xfrm>
-            <a:off x="2514600" y="3401568"/>
-            <a:ext cx="2011680" cy="502920"/>
-          </a:xfrm>
-          <a:prstGeom prst="rect">
-            <a:avLst>
-              <a:gd name="adj" fmla="val 14545"/>
-            </a:avLst>
-          </a:prstGeom>
-          <a:solidFill>
-            <a:srgbClr val="EEF2FF"/>
-          </a:solidFill>
-          <a:ln w="12700">
-            <a:solidFill>
-              <a:srgbClr val="6366F1"/>
-            </a:solidFill>
-            <a:prstDash val="solid"/>
-          </a:ln>
-        </p:spPr>
-      </p:sp>
-      <p:sp>
-        <p:nvSpPr>
-          <p:cNvPr id="27" name="Text 25"/>
-          <p:cNvSpPr/>
-          <p:nvPr/>
-        </p:nvSpPr>
-        <p:spPr>
-          <a:xfrm>
-            <a:off x="2514600" y="3401568"/>
-            <a:ext cx="2011680" cy="502920"/>
-          </a:xfrm>
-          <a:prstGeom prst="rect">
-            <a:avLst/>
-          </a:prstGeom>
-          <a:noFill/>
-          <a:ln/>
-        </p:spPr>
-        <p:txBody>
-          <a:bodyPr wrap="square" lIns="0" tIns="0" rIns="0" bIns="0" rtlCol="0" anchor="ctr"/>
-          <a:lstStyle/>
-          <a:p>
-            <a:pPr algn="ctr" indent="0" marL="0">
-              <a:buNone/>
-            </a:pPr>
-            <a:r>
-              <a:rPr lang="en-US" sz="1300" b="1" dirty="0">
-                <a:solidFill>
-                  <a:srgbClr val="4338CA"/>
-                </a:solidFill>
-                <a:latin typeface="Trebuchet MS" pitchFamily="34" charset="0"/>
-                <a:ea typeface="Trebuchet MS" pitchFamily="34" charset="-122"/>
-                <a:cs typeface="Trebuchet MS" pitchFamily="34" charset="-120"/>
-              </a:rPr>
-              <a:t>fastly</a:t>
-            </a:r>
-            <a:endParaRPr lang="en-US" sz="1300" dirty="0"/>
-          </a:p>
-        </p:txBody>
-      </p:sp>
-      <p:sp>
-        <p:nvSpPr>
-          <p:cNvPr id="28" name="Shape 26"/>
-          <p:cNvSpPr/>
-          <p:nvPr/>
-        </p:nvSpPr>
-        <p:spPr>
-          <a:xfrm>
-            <a:off x="4663440" y="3401568"/>
-            <a:ext cx="2011680" cy="502920"/>
-          </a:xfrm>
-          <a:prstGeom prst="rect">
-            <a:avLst>
-              <a:gd name="adj" fmla="val 14545"/>
-            </a:avLst>
-          </a:prstGeom>
-          <a:solidFill>
-            <a:srgbClr val="EEF2FF"/>
-          </a:solidFill>
-          <a:ln w="12700">
-            <a:solidFill>
-              <a:srgbClr val="6366F1"/>
-            </a:solidFill>
-            <a:prstDash val="solid"/>
-          </a:ln>
-        </p:spPr>
-      </p:sp>
-      <p:sp>
-        <p:nvSpPr>
-          <p:cNvPr id="29" name="Text 27"/>
-          <p:cNvSpPr/>
-          <p:nvPr/>
-        </p:nvSpPr>
-        <p:spPr>
-          <a:xfrm>
-            <a:off x="4663440" y="3401568"/>
-            <a:ext cx="2011680" cy="502920"/>
-          </a:xfrm>
-          <a:prstGeom prst="rect">
-            <a:avLst/>
-          </a:prstGeom>
-          <a:noFill/>
-          <a:ln/>
-        </p:spPr>
-        <p:txBody>
-          <a:bodyPr wrap="square" lIns="0" tIns="0" rIns="0" bIns="0" rtlCol="0" anchor="ctr"/>
-          <a:lstStyle/>
-          <a:p>
-            <a:pPr algn="ctr" indent="0" marL="0">
-              <a:buNone/>
-            </a:pPr>
-            <a:r>
-              <a:rPr lang="en-US" sz="1300" b="1" dirty="0">
-                <a:solidFill>
-                  <a:srgbClr val="4338CA"/>
-                </a:solidFill>
-                <a:latin typeface="Trebuchet MS" pitchFamily="34" charset="0"/>
-                <a:ea typeface="Trebuchet MS" pitchFamily="34" charset="-122"/>
-                <a:cs typeface="Trebuchet MS" pitchFamily="34" charset="-120"/>
-              </a:rPr>
-              <a:t>breakfast</a:t>
             </a:r>
             <a:endParaRPr lang="en-US" sz="1300" dirty="0"/>
           </a:p>
@@ -37840,7 +35486,7 @@
                 <a:ea typeface="Calibri" pitchFamily="34" charset="-122"/>
                 <a:cs typeface="Calibri" pitchFamily="34" charset="-120"/>
               </a:rPr>
-              <a:t>Word Labs  •  wordlabs.app  •  Root: 'fast' = quick, firm, or not eating</a:t>
+              <a:t>Word Labs  •  wordlabs.app  •  Root: 'fast' = quick</a:t>
             </a:r>
             <a:endParaRPr lang="en-US" sz="800" dirty="0"/>
           </a:p>
@@ -38098,7 +35744,7 @@
             <a:avLst/>
           </a:prstGeom>
           <a:solidFill>
-            <a:srgbClr val="DDD6FE"/>
+            <a:srgbClr val="F8FAFC"/>
           </a:solidFill>
           <a:ln w="12700">
             <a:solidFill>
@@ -38110,14 +35756,39 @@
       </p:sp>
       <p:sp>
         <p:nvSpPr>
-          <p:cNvPr id="18" name="Text 16"/>
-          <p:cNvSpPr/>
-          <p:nvPr/>
-        </p:nvSpPr>
-        <p:spPr>
-          <a:xfrm>
-            <a:off x="640080" y="1755648"/>
-            <a:ext cx="1463040" cy="420624"/>
+          <p:cNvPr id="18" name="Shape 16"/>
+          <p:cNvSpPr/>
+          <p:nvPr/>
+        </p:nvSpPr>
+        <p:spPr>
+          <a:xfrm>
+            <a:off x="3291840" y="1755648"/>
+            <a:ext cx="1645920" cy="420624"/>
+          </a:xfrm>
+          <a:prstGeom prst="rect">
+            <a:avLst/>
+          </a:prstGeom>
+          <a:solidFill>
+            <a:srgbClr val="CCFBF1"/>
+          </a:solidFill>
+          <a:ln w="12700">
+            <a:solidFill>
+              <a:srgbClr val="E5E7EB"/>
+            </a:solidFill>
+            <a:prstDash val="solid"/>
+          </a:ln>
+        </p:spPr>
+      </p:sp>
+      <p:sp>
+        <p:nvSpPr>
+          <p:cNvPr id="19" name="Text 17"/>
+          <p:cNvSpPr/>
+          <p:nvPr/>
+        </p:nvSpPr>
+        <p:spPr>
+          <a:xfrm>
+            <a:off x="3291840" y="1755648"/>
+            <a:ext cx="1645920" cy="420624"/>
           </a:xfrm>
           <a:prstGeom prst="rect">
             <a:avLst/>
@@ -38135,13 +35806,13 @@
             <a:r>
               <a:rPr lang="en-US" sz="1300" b="1" dirty="0">
                 <a:solidFill>
-                  <a:srgbClr val="4C1D95"/>
+                  <a:srgbClr val="0F766E"/>
                 </a:solidFill>
                 <a:latin typeface="Trebuchet MS" pitchFamily="34" charset="0"/>
                 <a:ea typeface="Trebuchet MS" pitchFamily="34" charset="-122"/>
                 <a:cs typeface="Trebuchet MS" pitchFamily="34" charset="-120"/>
               </a:rPr>
-              <a:t>break-</a:t>
+              <a:t>fast</a:t>
             </a:r>
             <a:endParaRPr lang="en-US" sz="1300" dirty="0"/>
           </a:p>
@@ -38149,20 +35820,20 @@
       </p:sp>
       <p:sp>
         <p:nvSpPr>
-          <p:cNvPr id="19" name="Shape 17"/>
-          <p:cNvSpPr/>
-          <p:nvPr/>
-        </p:nvSpPr>
-        <p:spPr>
-          <a:xfrm>
-            <a:off x="3291840" y="1755648"/>
-            <a:ext cx="1645920" cy="420624"/>
-          </a:xfrm>
-          <a:prstGeom prst="rect">
-            <a:avLst/>
-          </a:prstGeom>
-          <a:solidFill>
-            <a:srgbClr val="CCFBF1"/>
+          <p:cNvPr id="20" name="Shape 18"/>
+          <p:cNvSpPr/>
+          <p:nvPr/>
+        </p:nvSpPr>
+        <p:spPr>
+          <a:xfrm>
+            <a:off x="5943600" y="1755648"/>
+            <a:ext cx="1463040" cy="420624"/>
+          </a:xfrm>
+          <a:prstGeom prst="rect">
+            <a:avLst/>
+          </a:prstGeom>
+          <a:solidFill>
+            <a:srgbClr val="FCE7F3"/>
           </a:solidFill>
           <a:ln w="12700">
             <a:solidFill>
@@ -38174,14 +35845,14 @@
       </p:sp>
       <p:sp>
         <p:nvSpPr>
-          <p:cNvPr id="20" name="Text 18"/>
-          <p:cNvSpPr/>
-          <p:nvPr/>
-        </p:nvSpPr>
-        <p:spPr>
-          <a:xfrm>
-            <a:off x="3291840" y="1755648"/>
-            <a:ext cx="1645920" cy="420624"/>
+          <p:cNvPr id="21" name="Text 19"/>
+          <p:cNvSpPr/>
+          <p:nvPr/>
+        </p:nvSpPr>
+        <p:spPr>
+          <a:xfrm>
+            <a:off x="5943600" y="1755648"/>
+            <a:ext cx="1463040" cy="420624"/>
           </a:xfrm>
           <a:prstGeom prst="rect">
             <a:avLst/>
@@ -38199,13 +35870,13 @@
             <a:r>
               <a:rPr lang="en-US" sz="1300" b="1" dirty="0">
                 <a:solidFill>
-                  <a:srgbClr val="0F766E"/>
+                  <a:srgbClr val="9D174D"/>
                 </a:solidFill>
                 <a:latin typeface="Trebuchet MS" pitchFamily="34" charset="0"/>
                 <a:ea typeface="Trebuchet MS" pitchFamily="34" charset="-122"/>
                 <a:cs typeface="Trebuchet MS" pitchFamily="34" charset="-120"/>
               </a:rPr>
-              <a:t>fast</a:t>
+              <a:t>-ed</a:t>
             </a:r>
             <a:endParaRPr lang="en-US" sz="1300" dirty="0"/>
           </a:p>
@@ -38213,19 +35884,69 @@
       </p:sp>
       <p:sp>
         <p:nvSpPr>
-          <p:cNvPr id="21" name="Shape 19"/>
-          <p:cNvSpPr/>
-          <p:nvPr/>
-        </p:nvSpPr>
-        <p:spPr>
-          <a:xfrm>
-            <a:off x="5943600" y="1755648"/>
+          <p:cNvPr id="22" name="Shape 20"/>
+          <p:cNvSpPr/>
+          <p:nvPr/>
+        </p:nvSpPr>
+        <p:spPr>
+          <a:xfrm>
+            <a:off x="640080" y="2212848"/>
             <a:ext cx="1463040" cy="420624"/>
           </a:xfrm>
           <a:prstGeom prst="rect">
             <a:avLst/>
           </a:prstGeom>
           <a:solidFill>
+            <a:srgbClr val="F1F5F9"/>
+          </a:solidFill>
+          <a:ln w="12700">
+            <a:solidFill>
+              <a:srgbClr val="E5E7EB"/>
+            </a:solidFill>
+            <a:prstDash val="solid"/>
+          </a:ln>
+        </p:spPr>
+      </p:sp>
+      <p:sp>
+        <p:nvSpPr>
+          <p:cNvPr id="23" name="Shape 21"/>
+          <p:cNvSpPr/>
+          <p:nvPr/>
+        </p:nvSpPr>
+        <p:spPr>
+          <a:xfrm>
+            <a:off x="3291840" y="2212848"/>
+            <a:ext cx="1645920" cy="420624"/>
+          </a:xfrm>
+          <a:prstGeom prst="rect">
+            <a:avLst/>
+          </a:prstGeom>
+          <a:solidFill>
+            <a:srgbClr val="F1F5F9"/>
+          </a:solidFill>
+          <a:ln w="12700">
+            <a:solidFill>
+              <a:srgbClr val="E5E7EB"/>
+            </a:solidFill>
+            <a:prstDash val="solid"/>
+          </a:ln>
+        </p:spPr>
+      </p:sp>
+      <p:sp>
+        <p:nvSpPr>
+          <p:cNvPr id="24" name="Shape 22"/>
+          <p:cNvSpPr/>
+          <p:nvPr/>
+        </p:nvSpPr>
+        <p:spPr>
+          <a:xfrm>
+            <a:off x="5943600" y="2212848"/>
+            <a:ext cx="1463040" cy="420624"/>
+          </a:xfrm>
+          <a:prstGeom prst="rect">
+            <a:avLst/>
+          </a:prstGeom>
+          <a:solidFill>
             <a:srgbClr val="FCE7F3"/>
           </a:solidFill>
           <a:ln w="12700">
@@ -38238,13 +35959,13 @@
       </p:sp>
       <p:sp>
         <p:nvSpPr>
-          <p:cNvPr id="22" name="Text 20"/>
-          <p:cNvSpPr/>
-          <p:nvPr/>
-        </p:nvSpPr>
-        <p:spPr>
-          <a:xfrm>
-            <a:off x="5943600" y="1755648"/>
+          <p:cNvPr id="25" name="Text 23"/>
+          <p:cNvSpPr/>
+          <p:nvPr/>
+        </p:nvSpPr>
+        <p:spPr>
+          <a:xfrm>
+            <a:off x="5943600" y="2212848"/>
             <a:ext cx="1463040" cy="420624"/>
           </a:xfrm>
           <a:prstGeom prst="rect">
@@ -38269,7 +35990,7 @@
                 <a:ea typeface="Trebuchet MS" pitchFamily="34" charset="-122"/>
                 <a:cs typeface="Trebuchet MS" pitchFamily="34" charset="-120"/>
               </a:rPr>
-              <a:t>--er</a:t>
+              <a:t>-er</a:t>
             </a:r>
             <a:endParaRPr lang="en-US" sz="1300" dirty="0"/>
           </a:p>
@@ -38277,20 +35998,20 @@
       </p:sp>
       <p:sp>
         <p:nvSpPr>
-          <p:cNvPr id="23" name="Shape 21"/>
-          <p:cNvSpPr/>
-          <p:nvPr/>
-        </p:nvSpPr>
-        <p:spPr>
-          <a:xfrm>
-            <a:off x="640080" y="2212848"/>
+          <p:cNvPr id="26" name="Shape 24"/>
+          <p:cNvSpPr/>
+          <p:nvPr/>
+        </p:nvSpPr>
+        <p:spPr>
+          <a:xfrm>
+            <a:off x="640080" y="2670048"/>
             <a:ext cx="1463040" cy="420624"/>
           </a:xfrm>
           <a:prstGeom prst="rect">
             <a:avLst/>
           </a:prstGeom>
           <a:solidFill>
-            <a:srgbClr val="DDD6FE"/>
+            <a:srgbClr val="F8FAFC"/>
           </a:solidFill>
           <a:ln w="12700">
             <a:solidFill>
@@ -38302,18 +36023,68 @@
       </p:sp>
       <p:sp>
         <p:nvSpPr>
-          <p:cNvPr id="24" name="Text 22"/>
-          <p:cNvSpPr/>
-          <p:nvPr/>
-        </p:nvSpPr>
-        <p:spPr>
-          <a:xfrm>
-            <a:off x="640080" y="2212848"/>
+          <p:cNvPr id="27" name="Shape 25"/>
+          <p:cNvSpPr/>
+          <p:nvPr/>
+        </p:nvSpPr>
+        <p:spPr>
+          <a:xfrm>
+            <a:off x="3291840" y="2670048"/>
+            <a:ext cx="1645920" cy="420624"/>
+          </a:xfrm>
+          <a:prstGeom prst="rect">
+            <a:avLst/>
+          </a:prstGeom>
+          <a:solidFill>
+            <a:srgbClr val="F8FAFC"/>
+          </a:solidFill>
+          <a:ln w="12700">
+            <a:solidFill>
+              <a:srgbClr val="E5E7EB"/>
+            </a:solidFill>
+            <a:prstDash val="solid"/>
+          </a:ln>
+        </p:spPr>
+      </p:sp>
+      <p:sp>
+        <p:nvSpPr>
+          <p:cNvPr id="28" name="Shape 26"/>
+          <p:cNvSpPr/>
+          <p:nvPr/>
+        </p:nvSpPr>
+        <p:spPr>
+          <a:xfrm>
+            <a:off x="5943600" y="2670048"/>
             <a:ext cx="1463040" cy="420624"/>
           </a:xfrm>
           <a:prstGeom prst="rect">
             <a:avLst/>
           </a:prstGeom>
+          <a:solidFill>
+            <a:srgbClr val="FCE7F3"/>
+          </a:solidFill>
+          <a:ln w="12700">
+            <a:solidFill>
+              <a:srgbClr val="E5E7EB"/>
+            </a:solidFill>
+            <a:prstDash val="solid"/>
+          </a:ln>
+        </p:spPr>
+      </p:sp>
+      <p:sp>
+        <p:nvSpPr>
+          <p:cNvPr id="29" name="Text 27"/>
+          <p:cNvSpPr/>
+          <p:nvPr/>
+        </p:nvSpPr>
+        <p:spPr>
+          <a:xfrm>
+            <a:off x="5943600" y="2670048"/>
+            <a:ext cx="1463040" cy="420624"/>
+          </a:xfrm>
+          <a:prstGeom prst="rect">
+            <a:avLst/>
+          </a:prstGeom>
           <a:noFill/>
           <a:ln/>
         </p:spPr>
@@ -38327,13 +36098,13 @@
             <a:r>
               <a:rPr lang="en-US" sz="1300" b="1" dirty="0">
                 <a:solidFill>
-                  <a:srgbClr val="4C1D95"/>
+                  <a:srgbClr val="9D174D"/>
                 </a:solidFill>
                 <a:latin typeface="Trebuchet MS" pitchFamily="34" charset="0"/>
                 <a:ea typeface="Trebuchet MS" pitchFamily="34" charset="-122"/>
                 <a:cs typeface="Trebuchet MS" pitchFamily="34" charset="-120"/>
               </a:rPr>
-              <a:t>steam-</a:t>
+              <a:t>-est</a:t>
             </a:r>
             <a:endParaRPr lang="en-US" sz="1300" dirty="0"/>
           </a:p>
@@ -38341,13 +36112,38 @@
       </p:sp>
       <p:sp>
         <p:nvSpPr>
-          <p:cNvPr id="25" name="Shape 23"/>
-          <p:cNvSpPr/>
-          <p:nvPr/>
-        </p:nvSpPr>
-        <p:spPr>
-          <a:xfrm>
-            <a:off x="3291840" y="2212848"/>
+          <p:cNvPr id="30" name="Shape 28"/>
+          <p:cNvSpPr/>
+          <p:nvPr/>
+        </p:nvSpPr>
+        <p:spPr>
+          <a:xfrm>
+            <a:off x="640080" y="3127248"/>
+            <a:ext cx="1463040" cy="420624"/>
+          </a:xfrm>
+          <a:prstGeom prst="rect">
+            <a:avLst/>
+          </a:prstGeom>
+          <a:solidFill>
+            <a:srgbClr val="F1F5F9"/>
+          </a:solidFill>
+          <a:ln w="12700">
+            <a:solidFill>
+              <a:srgbClr val="E5E7EB"/>
+            </a:solidFill>
+            <a:prstDash val="solid"/>
+          </a:ln>
+        </p:spPr>
+      </p:sp>
+      <p:sp>
+        <p:nvSpPr>
+          <p:cNvPr id="31" name="Shape 29"/>
+          <p:cNvSpPr/>
+          <p:nvPr/>
+        </p:nvSpPr>
+        <p:spPr>
+          <a:xfrm>
+            <a:off x="3291840" y="3127248"/>
             <a:ext cx="1645920" cy="420624"/>
           </a:xfrm>
           <a:prstGeom prst="rect">
@@ -38366,13 +36162,13 @@
       </p:sp>
       <p:sp>
         <p:nvSpPr>
-          <p:cNvPr id="26" name="Shape 24"/>
-          <p:cNvSpPr/>
-          <p:nvPr/>
-        </p:nvSpPr>
-        <p:spPr>
-          <a:xfrm>
-            <a:off x="5943600" y="2212848"/>
+          <p:cNvPr id="32" name="Shape 30"/>
+          <p:cNvSpPr/>
+          <p:nvPr/>
+        </p:nvSpPr>
+        <p:spPr>
+          <a:xfrm>
+            <a:off x="5943600" y="3127248"/>
             <a:ext cx="1463040" cy="420624"/>
           </a:xfrm>
           <a:prstGeom prst="rect">
@@ -38391,13 +36187,13 @@
       </p:sp>
       <p:sp>
         <p:nvSpPr>
-          <p:cNvPr id="27" name="Text 25"/>
-          <p:cNvSpPr/>
-          <p:nvPr/>
-        </p:nvSpPr>
-        <p:spPr>
-          <a:xfrm>
-            <a:off x="5943600" y="2212848"/>
+          <p:cNvPr id="33" name="Text 31"/>
+          <p:cNvSpPr/>
+          <p:nvPr/>
+        </p:nvSpPr>
+        <p:spPr>
+          <a:xfrm>
+            <a:off x="5943600" y="3127248"/>
             <a:ext cx="1463040" cy="420624"/>
           </a:xfrm>
           <a:prstGeom prst="rect">
@@ -38422,7 +36218,7 @@
                 <a:ea typeface="Trebuchet MS" pitchFamily="34" charset="-122"/>
                 <a:cs typeface="Trebuchet MS" pitchFamily="34" charset="-120"/>
               </a:rPr>
-              <a:t>--est</a:t>
+              <a:t>-ing</a:t>
             </a:r>
             <a:endParaRPr lang="en-US" sz="1300" dirty="0"/>
           </a:p>
@@ -38430,472 +36226,13 @@
       </p:sp>
       <p:sp>
         <p:nvSpPr>
-          <p:cNvPr id="28" name="Shape 26"/>
-          <p:cNvSpPr/>
-          <p:nvPr/>
-        </p:nvSpPr>
-        <p:spPr>
-          <a:xfrm>
-            <a:off x="640080" y="2670048"/>
-            <a:ext cx="1463040" cy="420624"/>
-          </a:xfrm>
-          <a:prstGeom prst="rect">
-            <a:avLst/>
-          </a:prstGeom>
-          <a:solidFill>
-            <a:srgbClr val="DDD6FE"/>
-          </a:solidFill>
-          <a:ln w="12700">
-            <a:solidFill>
-              <a:srgbClr val="E5E7EB"/>
-            </a:solidFill>
-            <a:prstDash val="solid"/>
-          </a:ln>
-        </p:spPr>
-      </p:sp>
-      <p:sp>
-        <p:nvSpPr>
-          <p:cNvPr id="29" name="Text 27"/>
-          <p:cNvSpPr/>
-          <p:nvPr/>
-        </p:nvSpPr>
-        <p:spPr>
-          <a:xfrm>
-            <a:off x="640080" y="2670048"/>
-            <a:ext cx="1463040" cy="420624"/>
-          </a:xfrm>
-          <a:prstGeom prst="rect">
-            <a:avLst/>
-          </a:prstGeom>
-          <a:noFill/>
-          <a:ln/>
-        </p:spPr>
-        <p:txBody>
-          <a:bodyPr wrap="square" lIns="0" tIns="0" rIns="0" bIns="0" rtlCol="0" anchor="ctr"/>
-          <a:lstStyle/>
-          <a:p>
-            <a:pPr algn="ctr" indent="0" marL="0">
-              <a:buNone/>
-            </a:pPr>
-            <a:r>
-              <a:rPr lang="en-US" sz="1300" b="1" dirty="0">
-                <a:solidFill>
-                  <a:srgbClr val="4C1D95"/>
-                </a:solidFill>
-                <a:latin typeface="Trebuchet MS" pitchFamily="34" charset="0"/>
-                <a:ea typeface="Trebuchet MS" pitchFamily="34" charset="-122"/>
-                <a:cs typeface="Trebuchet MS" pitchFamily="34" charset="-120"/>
-              </a:rPr>
-              <a:t>hard-</a:t>
-            </a:r>
-            <a:endParaRPr lang="en-US" sz="1300" dirty="0"/>
-          </a:p>
-        </p:txBody>
-      </p:sp>
-      <p:sp>
-        <p:nvSpPr>
-          <p:cNvPr id="30" name="Shape 28"/>
-          <p:cNvSpPr/>
-          <p:nvPr/>
-        </p:nvSpPr>
-        <p:spPr>
-          <a:xfrm>
-            <a:off x="3291840" y="2670048"/>
-            <a:ext cx="1645920" cy="420624"/>
-          </a:xfrm>
-          <a:prstGeom prst="rect">
-            <a:avLst/>
-          </a:prstGeom>
-          <a:solidFill>
-            <a:srgbClr val="F8FAFC"/>
-          </a:solidFill>
-          <a:ln w="12700">
-            <a:solidFill>
-              <a:srgbClr val="E5E7EB"/>
-            </a:solidFill>
-            <a:prstDash val="solid"/>
-          </a:ln>
-        </p:spPr>
-      </p:sp>
-      <p:sp>
-        <p:nvSpPr>
-          <p:cNvPr id="31" name="Shape 29"/>
-          <p:cNvSpPr/>
-          <p:nvPr/>
-        </p:nvSpPr>
-        <p:spPr>
-          <a:xfrm>
-            <a:off x="5943600" y="2670048"/>
-            <a:ext cx="1463040" cy="420624"/>
-          </a:xfrm>
-          <a:prstGeom prst="rect">
-            <a:avLst/>
-          </a:prstGeom>
-          <a:solidFill>
-            <a:srgbClr val="FCE7F3"/>
-          </a:solidFill>
-          <a:ln w="12700">
-            <a:solidFill>
-              <a:srgbClr val="E5E7EB"/>
-            </a:solidFill>
-            <a:prstDash val="solid"/>
-          </a:ln>
-        </p:spPr>
-      </p:sp>
-      <p:sp>
-        <p:nvSpPr>
-          <p:cNvPr id="32" name="Text 30"/>
-          <p:cNvSpPr/>
-          <p:nvPr/>
-        </p:nvSpPr>
-        <p:spPr>
-          <a:xfrm>
-            <a:off x="5943600" y="2670048"/>
-            <a:ext cx="1463040" cy="420624"/>
-          </a:xfrm>
-          <a:prstGeom prst="rect">
-            <a:avLst/>
-          </a:prstGeom>
-          <a:noFill/>
-          <a:ln/>
-        </p:spPr>
-        <p:txBody>
-          <a:bodyPr wrap="square" lIns="0" tIns="0" rIns="0" bIns="0" rtlCol="0" anchor="ctr"/>
-          <a:lstStyle/>
-          <a:p>
-            <a:pPr algn="ctr" indent="0" marL="0">
-              <a:buNone/>
-            </a:pPr>
-            <a:r>
-              <a:rPr lang="en-US" sz="1300" b="1" dirty="0">
-                <a:solidFill>
-                  <a:srgbClr val="9D174D"/>
-                </a:solidFill>
-                <a:latin typeface="Trebuchet MS" pitchFamily="34" charset="0"/>
-                <a:ea typeface="Trebuchet MS" pitchFamily="34" charset="-122"/>
-                <a:cs typeface="Trebuchet MS" pitchFamily="34" charset="-120"/>
-              </a:rPr>
-              <a:t>--en</a:t>
-            </a:r>
-            <a:endParaRPr lang="en-US" sz="1300" dirty="0"/>
-          </a:p>
-        </p:txBody>
-      </p:sp>
-      <p:sp>
-        <p:nvSpPr>
-          <p:cNvPr id="33" name="Shape 31"/>
-          <p:cNvSpPr/>
-          <p:nvPr/>
-        </p:nvSpPr>
-        <p:spPr>
-          <a:xfrm>
-            <a:off x="640080" y="3127248"/>
-            <a:ext cx="1463040" cy="420624"/>
-          </a:xfrm>
-          <a:prstGeom prst="rect">
-            <a:avLst/>
-          </a:prstGeom>
-          <a:solidFill>
-            <a:srgbClr val="DDD6FE"/>
-          </a:solidFill>
-          <a:ln w="12700">
-            <a:solidFill>
-              <a:srgbClr val="E5E7EB"/>
-            </a:solidFill>
-            <a:prstDash val="solid"/>
-          </a:ln>
-        </p:spPr>
-      </p:sp>
-      <p:sp>
-        <p:nvSpPr>
           <p:cNvPr id="34" name="Text 32"/>
           <p:cNvSpPr/>
           <p:nvPr/>
         </p:nvSpPr>
         <p:spPr>
           <a:xfrm>
-            <a:off x="640080" y="3127248"/>
-            <a:ext cx="1463040" cy="420624"/>
-          </a:xfrm>
-          <a:prstGeom prst="rect">
-            <a:avLst/>
-          </a:prstGeom>
-          <a:noFill/>
-          <a:ln/>
-        </p:spPr>
-        <p:txBody>
-          <a:bodyPr wrap="square" lIns="0" tIns="0" rIns="0" bIns="0" rtlCol="0" anchor="ctr"/>
-          <a:lstStyle/>
-          <a:p>
-            <a:pPr algn="ctr" indent="0" marL="0">
-              <a:buNone/>
-            </a:pPr>
-            <a:r>
-              <a:rPr lang="en-US" sz="1300" b="1" dirty="0">
-                <a:solidFill>
-                  <a:srgbClr val="4C1D95"/>
-                </a:solidFill>
-                <a:latin typeface="Trebuchet MS" pitchFamily="34" charset="0"/>
-                <a:ea typeface="Trebuchet MS" pitchFamily="34" charset="-122"/>
-                <a:cs typeface="Trebuchet MS" pitchFamily="34" charset="-120"/>
-              </a:rPr>
-              <a:t>sure-</a:t>
-            </a:r>
-            <a:endParaRPr lang="en-US" sz="1300" dirty="0"/>
-          </a:p>
-        </p:txBody>
-      </p:sp>
-      <p:sp>
-        <p:nvSpPr>
-          <p:cNvPr id="35" name="Shape 33"/>
-          <p:cNvSpPr/>
-          <p:nvPr/>
-        </p:nvSpPr>
-        <p:spPr>
-          <a:xfrm>
-            <a:off x="3291840" y="3127248"/>
-            <a:ext cx="1645920" cy="420624"/>
-          </a:xfrm>
-          <a:prstGeom prst="rect">
-            <a:avLst/>
-          </a:prstGeom>
-          <a:solidFill>
-            <a:srgbClr val="F1F5F9"/>
-          </a:solidFill>
-          <a:ln w="12700">
-            <a:solidFill>
-              <a:srgbClr val="E5E7EB"/>
-            </a:solidFill>
-            <a:prstDash val="solid"/>
-          </a:ln>
-        </p:spPr>
-      </p:sp>
-      <p:sp>
-        <p:nvSpPr>
-          <p:cNvPr id="36" name="Shape 34"/>
-          <p:cNvSpPr/>
-          <p:nvPr/>
-        </p:nvSpPr>
-        <p:spPr>
-          <a:xfrm>
-            <a:off x="5943600" y="3127248"/>
-            <a:ext cx="1463040" cy="420624"/>
-          </a:xfrm>
-          <a:prstGeom prst="rect">
-            <a:avLst/>
-          </a:prstGeom>
-          <a:solidFill>
-            <a:srgbClr val="FCE7F3"/>
-          </a:solidFill>
-          <a:ln w="12700">
-            <a:solidFill>
-              <a:srgbClr val="E5E7EB"/>
-            </a:solidFill>
-            <a:prstDash val="solid"/>
-          </a:ln>
-        </p:spPr>
-      </p:sp>
-      <p:sp>
-        <p:nvSpPr>
-          <p:cNvPr id="37" name="Text 35"/>
-          <p:cNvSpPr/>
-          <p:nvPr/>
-        </p:nvSpPr>
-        <p:spPr>
-          <a:xfrm>
-            <a:off x="5943600" y="3127248"/>
-            <a:ext cx="1463040" cy="420624"/>
-          </a:xfrm>
-          <a:prstGeom prst="rect">
-            <a:avLst/>
-          </a:prstGeom>
-          <a:noFill/>
-          <a:ln/>
-        </p:spPr>
-        <p:txBody>
-          <a:bodyPr wrap="square" lIns="0" tIns="0" rIns="0" bIns="0" rtlCol="0" anchor="ctr"/>
-          <a:lstStyle/>
-          <a:p>
-            <a:pPr algn="ctr" indent="0" marL="0">
-              <a:buNone/>
-            </a:pPr>
-            <a:r>
-              <a:rPr lang="en-US" sz="1300" b="1" dirty="0">
-                <a:solidFill>
-                  <a:srgbClr val="9D174D"/>
-                </a:solidFill>
-                <a:latin typeface="Trebuchet MS" pitchFamily="34" charset="0"/>
-                <a:ea typeface="Trebuchet MS" pitchFamily="34" charset="-122"/>
-                <a:cs typeface="Trebuchet MS" pitchFamily="34" charset="-120"/>
-              </a:rPr>
-              <a:t>--ing</a:t>
-            </a:r>
-            <a:endParaRPr lang="en-US" sz="1300" dirty="0"/>
-          </a:p>
-        </p:txBody>
-      </p:sp>
-      <p:sp>
-        <p:nvSpPr>
-          <p:cNvPr id="38" name="Shape 36"/>
-          <p:cNvSpPr/>
-          <p:nvPr/>
-        </p:nvSpPr>
-        <p:spPr>
-          <a:xfrm>
-            <a:off x="640080" y="3584448"/>
-            <a:ext cx="1463040" cy="420624"/>
-          </a:xfrm>
-          <a:prstGeom prst="rect">
-            <a:avLst/>
-          </a:prstGeom>
-          <a:solidFill>
-            <a:srgbClr val="DDD6FE"/>
-          </a:solidFill>
-          <a:ln w="12700">
-            <a:solidFill>
-              <a:srgbClr val="E5E7EB"/>
-            </a:solidFill>
-            <a:prstDash val="solid"/>
-          </a:ln>
-        </p:spPr>
-      </p:sp>
-      <p:sp>
-        <p:nvSpPr>
-          <p:cNvPr id="39" name="Text 37"/>
-          <p:cNvSpPr/>
-          <p:nvPr/>
-        </p:nvSpPr>
-        <p:spPr>
-          <a:xfrm>
-            <a:off x="640080" y="3584448"/>
-            <a:ext cx="1463040" cy="420624"/>
-          </a:xfrm>
-          <a:prstGeom prst="rect">
-            <a:avLst/>
-          </a:prstGeom>
-          <a:noFill/>
-          <a:ln/>
-        </p:spPr>
-        <p:txBody>
-          <a:bodyPr wrap="square" lIns="0" tIns="0" rIns="0" bIns="0" rtlCol="0" anchor="ctr"/>
-          <a:lstStyle/>
-          <a:p>
-            <a:pPr algn="ctr" indent="0" marL="0">
-              <a:buNone/>
-            </a:pPr>
-            <a:r>
-              <a:rPr lang="en-US" sz="1300" b="1" dirty="0">
-                <a:solidFill>
-                  <a:srgbClr val="4C1D95"/>
-                </a:solidFill>
-                <a:latin typeface="Trebuchet MS" pitchFamily="34" charset="0"/>
-                <a:ea typeface="Trebuchet MS" pitchFamily="34" charset="-122"/>
-                <a:cs typeface="Trebuchet MS" pitchFamily="34" charset="-120"/>
-              </a:rPr>
-              <a:t>color-</a:t>
-            </a:r>
-            <a:endParaRPr lang="en-US" sz="1300" dirty="0"/>
-          </a:p>
-        </p:txBody>
-      </p:sp>
-      <p:sp>
-        <p:nvSpPr>
-          <p:cNvPr id="40" name="Shape 38"/>
-          <p:cNvSpPr/>
-          <p:nvPr/>
-        </p:nvSpPr>
-        <p:spPr>
-          <a:xfrm>
-            <a:off x="3291840" y="3584448"/>
-            <a:ext cx="1645920" cy="420624"/>
-          </a:xfrm>
-          <a:prstGeom prst="rect">
-            <a:avLst/>
-          </a:prstGeom>
-          <a:solidFill>
-            <a:srgbClr val="F8FAFC"/>
-          </a:solidFill>
-          <a:ln w="12700">
-            <a:solidFill>
-              <a:srgbClr val="E5E7EB"/>
-            </a:solidFill>
-            <a:prstDash val="solid"/>
-          </a:ln>
-        </p:spPr>
-      </p:sp>
-      <p:sp>
-        <p:nvSpPr>
-          <p:cNvPr id="41" name="Shape 39"/>
-          <p:cNvSpPr/>
-          <p:nvPr/>
-        </p:nvSpPr>
-        <p:spPr>
-          <a:xfrm>
-            <a:off x="5943600" y="3584448"/>
-            <a:ext cx="1463040" cy="420624"/>
-          </a:xfrm>
-          <a:prstGeom prst="rect">
-            <a:avLst/>
-          </a:prstGeom>
-          <a:solidFill>
-            <a:srgbClr val="FCE7F3"/>
-          </a:solidFill>
-          <a:ln w="12700">
-            <a:solidFill>
-              <a:srgbClr val="E5E7EB"/>
-            </a:solidFill>
-            <a:prstDash val="solid"/>
-          </a:ln>
-        </p:spPr>
-      </p:sp>
-      <p:sp>
-        <p:nvSpPr>
-          <p:cNvPr id="42" name="Text 40"/>
-          <p:cNvSpPr/>
-          <p:nvPr/>
-        </p:nvSpPr>
-        <p:spPr>
-          <a:xfrm>
-            <a:off x="5943600" y="3584448"/>
-            <a:ext cx="1463040" cy="420624"/>
-          </a:xfrm>
-          <a:prstGeom prst="rect">
-            <a:avLst/>
-          </a:prstGeom>
-          <a:noFill/>
-          <a:ln/>
-        </p:spPr>
-        <p:txBody>
-          <a:bodyPr wrap="square" lIns="0" tIns="0" rIns="0" bIns="0" rtlCol="0" anchor="ctr"/>
-          <a:lstStyle/>
-          <a:p>
-            <a:pPr algn="ctr" indent="0" marL="0">
-              <a:buNone/>
-            </a:pPr>
-            <a:r>
-              <a:rPr lang="en-US" sz="1300" b="1" dirty="0">
-                <a:solidFill>
-                  <a:srgbClr val="9D174D"/>
-                </a:solidFill>
-                <a:latin typeface="Trebuchet MS" pitchFamily="34" charset="0"/>
-                <a:ea typeface="Trebuchet MS" pitchFamily="34" charset="-122"/>
-                <a:cs typeface="Trebuchet MS" pitchFamily="34" charset="-120"/>
-              </a:rPr>
-              <a:t>--ly</a:t>
-            </a:r>
-            <a:endParaRPr lang="en-US" sz="1300" dirty="0"/>
-          </a:p>
-        </p:txBody>
-      </p:sp>
-      <p:sp>
-        <p:nvSpPr>
-          <p:cNvPr id="43" name="Text 41"/>
-          <p:cNvSpPr/>
-          <p:nvPr/>
-        </p:nvSpPr>
-        <p:spPr>
-          <a:xfrm>
-            <a:off x="365760" y="4178808"/>
+            <a:off x="365760" y="3721608"/>
             <a:ext cx="1097280" cy="420624"/>
           </a:xfrm>
           <a:prstGeom prst="rect">
@@ -38928,13 +36265,13 @@
       </p:sp>
       <p:sp>
         <p:nvSpPr>
-          <p:cNvPr id="44" name="Shape 42"/>
-          <p:cNvSpPr/>
-          <p:nvPr/>
-        </p:nvSpPr>
-        <p:spPr>
-          <a:xfrm>
-            <a:off x="1508760" y="4178808"/>
+          <p:cNvPr id="35" name="Shape 33"/>
+          <p:cNvSpPr/>
+          <p:nvPr/>
+        </p:nvSpPr>
+        <p:spPr>
+          <a:xfrm>
+            <a:off x="1508760" y="3721608"/>
             <a:ext cx="1243584" cy="420624"/>
           </a:xfrm>
           <a:prstGeom prst="rect">
@@ -38943,11 +36280,11 @@
             </a:avLst>
           </a:prstGeom>
           <a:solidFill>
-            <a:srgbClr val="DDD6FE"/>
+            <a:srgbClr val="CCFBF1"/>
           </a:solidFill>
           <a:ln w="19050">
             <a:solidFill>
-              <a:srgbClr val="7C3AED"/>
+              <a:srgbClr val="0D9488"/>
             </a:solidFill>
             <a:prstDash val="solid"/>
           </a:ln>
@@ -38962,13 +36299,13 @@
       </p:sp>
       <p:sp>
         <p:nvSpPr>
-          <p:cNvPr id="45" name="Text 43"/>
-          <p:cNvSpPr/>
-          <p:nvPr/>
-        </p:nvSpPr>
-        <p:spPr>
-          <a:xfrm>
-            <a:off x="1508760" y="4178808"/>
+          <p:cNvPr id="36" name="Text 34"/>
+          <p:cNvSpPr/>
+          <p:nvPr/>
+        </p:nvSpPr>
+        <p:spPr>
+          <a:xfrm>
+            <a:off x="1508760" y="3721608"/>
             <a:ext cx="1243584" cy="420624"/>
           </a:xfrm>
           <a:prstGeom prst="rect">
@@ -38987,13 +36324,13 @@
             <a:r>
               <a:rPr lang="en-US" sz="1300" b="1" dirty="0">
                 <a:solidFill>
-                  <a:srgbClr val="4C1D95"/>
+                  <a:srgbClr val="0F766E"/>
                 </a:solidFill>
                 <a:latin typeface="Trebuchet MS" pitchFamily="34" charset="0"/>
                 <a:ea typeface="Trebuchet MS" pitchFamily="34" charset="-122"/>
                 <a:cs typeface="Trebuchet MS" pitchFamily="34" charset="-120"/>
               </a:rPr>
-              <a:t>break-</a:t>
+              <a:t>'fast'</a:t>
             </a:r>
             <a:endParaRPr lang="en-US" sz="1300" dirty="0"/>
           </a:p>
@@ -39001,13 +36338,13 @@
       </p:sp>
       <p:sp>
         <p:nvSpPr>
-          <p:cNvPr id="46" name="Text 44"/>
-          <p:cNvSpPr/>
-          <p:nvPr/>
-        </p:nvSpPr>
-        <p:spPr>
-          <a:xfrm>
-            <a:off x="2779776" y="4178808"/>
+          <p:cNvPr id="37" name="Text 35"/>
+          <p:cNvSpPr/>
+          <p:nvPr/>
+        </p:nvSpPr>
+        <p:spPr>
+          <a:xfrm>
+            <a:off x="2779776" y="3721608"/>
             <a:ext cx="320040" cy="420624"/>
           </a:xfrm>
           <a:prstGeom prst="rect">
@@ -39040,14 +36377,14 @@
       </p:sp>
       <p:sp>
         <p:nvSpPr>
-          <p:cNvPr id="47" name="Shape 45"/>
-          <p:cNvSpPr/>
-          <p:nvPr/>
-        </p:nvSpPr>
-        <p:spPr>
-          <a:xfrm>
-            <a:off x="3127248" y="4178808"/>
-            <a:ext cx="1243584" cy="420624"/>
+          <p:cNvPr id="38" name="Shape 36"/>
+          <p:cNvSpPr/>
+          <p:nvPr/>
+        </p:nvSpPr>
+        <p:spPr>
+          <a:xfrm>
+            <a:off x="3127248" y="3721608"/>
+            <a:ext cx="822960" cy="420624"/>
           </a:xfrm>
           <a:prstGeom prst="rect">
             <a:avLst>
@@ -39055,11 +36392,11 @@
             </a:avLst>
           </a:prstGeom>
           <a:solidFill>
-            <a:srgbClr val="CCFBF1"/>
+            <a:srgbClr val="FCE7F3"/>
           </a:solidFill>
           <a:ln w="19050">
             <a:solidFill>
-              <a:srgbClr val="0D9488"/>
+              <a:srgbClr val="DB2777"/>
             </a:solidFill>
             <a:prstDash val="solid"/>
           </a:ln>
@@ -39074,14 +36411,14 @@
       </p:sp>
       <p:sp>
         <p:nvSpPr>
-          <p:cNvPr id="48" name="Text 46"/>
-          <p:cNvSpPr/>
-          <p:nvPr/>
-        </p:nvSpPr>
-        <p:spPr>
-          <a:xfrm>
-            <a:off x="3127248" y="4178808"/>
-            <a:ext cx="1243584" cy="420624"/>
+          <p:cNvPr id="39" name="Text 37"/>
+          <p:cNvSpPr/>
+          <p:nvPr/>
+        </p:nvSpPr>
+        <p:spPr>
+          <a:xfrm>
+            <a:off x="3127248" y="3721608"/>
+            <a:ext cx="822960" cy="420624"/>
           </a:xfrm>
           <a:prstGeom prst="rect">
             <a:avLst/>
@@ -39099,13 +36436,13 @@
             <a:r>
               <a:rPr lang="en-US" sz="1300" b="1" dirty="0">
                 <a:solidFill>
-                  <a:srgbClr val="0F766E"/>
+                  <a:srgbClr val="9D174D"/>
                 </a:solidFill>
                 <a:latin typeface="Trebuchet MS" pitchFamily="34" charset="0"/>
                 <a:ea typeface="Trebuchet MS" pitchFamily="34" charset="-122"/>
                 <a:cs typeface="Trebuchet MS" pitchFamily="34" charset="-120"/>
               </a:rPr>
-              <a:t>'fast'</a:t>
+              <a:t>-ed</a:t>
             </a:r>
             <a:endParaRPr lang="en-US" sz="1300" dirty="0"/>
           </a:p>
@@ -39113,14 +36450,14 @@
       </p:sp>
       <p:sp>
         <p:nvSpPr>
-          <p:cNvPr id="49" name="Text 47"/>
-          <p:cNvSpPr/>
-          <p:nvPr/>
-        </p:nvSpPr>
-        <p:spPr>
-          <a:xfrm>
-            <a:off x="4398264" y="4178808"/>
-            <a:ext cx="320040" cy="420624"/>
+          <p:cNvPr id="40" name="Text 38"/>
+          <p:cNvSpPr/>
+          <p:nvPr/>
+        </p:nvSpPr>
+        <p:spPr>
+          <a:xfrm>
+            <a:off x="4023360" y="3721608"/>
+            <a:ext cx="365760" cy="420624"/>
           </a:xfrm>
           <a:prstGeom prst="rect">
             <a:avLst/>
@@ -39136,30 +36473,30 @@
               <a:buNone/>
             </a:pPr>
             <a:r>
-              <a:rPr lang="en-US" sz="1400" dirty="0">
-                <a:solidFill>
-                  <a:srgbClr val="475569"/>
+              <a:rPr lang="en-US" sz="1800" b="1" dirty="0">
+                <a:solidFill>
+                  <a:srgbClr val="0D9488"/>
                 </a:solidFill>
                 <a:latin typeface="Trebuchet MS" pitchFamily="34" charset="0"/>
                 <a:ea typeface="Trebuchet MS" pitchFamily="34" charset="-122"/>
                 <a:cs typeface="Trebuchet MS" pitchFamily="34" charset="-120"/>
               </a:rPr>
-              <a:t>+</a:t>
-            </a:r>
-            <a:endParaRPr lang="en-US" sz="1400" dirty="0"/>
-          </a:p>
-        </p:txBody>
-      </p:sp>
-      <p:sp>
-        <p:nvSpPr>
-          <p:cNvPr id="50" name="Shape 48"/>
-          <p:cNvSpPr/>
-          <p:nvPr/>
-        </p:nvSpPr>
-        <p:spPr>
-          <a:xfrm>
-            <a:off x="4745736" y="4178808"/>
-            <a:ext cx="950976" cy="420624"/>
+              <a:t>=</a:t>
+            </a:r>
+            <a:endParaRPr lang="en-US" sz="1800" dirty="0"/>
+          </a:p>
+        </p:txBody>
+      </p:sp>
+      <p:sp>
+        <p:nvSpPr>
+          <p:cNvPr id="41" name="Shape 39"/>
+          <p:cNvSpPr/>
+          <p:nvPr/>
+        </p:nvSpPr>
+        <p:spPr>
+          <a:xfrm>
+            <a:off x="4434840" y="3721608"/>
+            <a:ext cx="2194560" cy="420624"/>
           </a:xfrm>
           <a:prstGeom prst="rect">
             <a:avLst>
@@ -39167,118 +36504,6 @@
             </a:avLst>
           </a:prstGeom>
           <a:solidFill>
-            <a:srgbClr val="FCE7F3"/>
-          </a:solidFill>
-          <a:ln w="19050">
-            <a:solidFill>
-              <a:srgbClr val="DB2777"/>
-            </a:solidFill>
-            <a:prstDash val="solid"/>
-          </a:ln>
-          <a:effectLst>
-            <a:outerShdw sx="100000" sy="100000" kx="0" ky="0" algn="bl" rotWithShape="0" blurRad="101600" dist="38100" dir="8100000">
-              <a:srgbClr val="000000">
-                <a:alpha val="12000"/>
-              </a:srgbClr>
-            </a:outerShdw>
-          </a:effectLst>
-        </p:spPr>
-      </p:sp>
-      <p:sp>
-        <p:nvSpPr>
-          <p:cNvPr id="51" name="Text 49"/>
-          <p:cNvSpPr/>
-          <p:nvPr/>
-        </p:nvSpPr>
-        <p:spPr>
-          <a:xfrm>
-            <a:off x="4745736" y="4178808"/>
-            <a:ext cx="950976" cy="420624"/>
-          </a:xfrm>
-          <a:prstGeom prst="rect">
-            <a:avLst/>
-          </a:prstGeom>
-          <a:noFill/>
-          <a:ln/>
-        </p:spPr>
-        <p:txBody>
-          <a:bodyPr wrap="square" lIns="0" tIns="0" rIns="0" bIns="0" rtlCol="0" anchor="ctr"/>
-          <a:lstStyle/>
-          <a:p>
-            <a:pPr algn="ctr" indent="0" marL="0">
-              <a:buNone/>
-            </a:pPr>
-            <a:r>
-              <a:rPr lang="en-US" sz="1300" b="1" dirty="0">
-                <a:solidFill>
-                  <a:srgbClr val="9D174D"/>
-                </a:solidFill>
-                <a:latin typeface="Trebuchet MS" pitchFamily="34" charset="0"/>
-                <a:ea typeface="Trebuchet MS" pitchFamily="34" charset="-122"/>
-                <a:cs typeface="Trebuchet MS" pitchFamily="34" charset="-120"/>
-              </a:rPr>
-              <a:t>--er</a:t>
-            </a:r>
-            <a:endParaRPr lang="en-US" sz="1300" dirty="0"/>
-          </a:p>
-        </p:txBody>
-      </p:sp>
-      <p:sp>
-        <p:nvSpPr>
-          <p:cNvPr id="52" name="Text 50"/>
-          <p:cNvSpPr/>
-          <p:nvPr/>
-        </p:nvSpPr>
-        <p:spPr>
-          <a:xfrm>
-            <a:off x="5769864" y="4178808"/>
-            <a:ext cx="365760" cy="420624"/>
-          </a:xfrm>
-          <a:prstGeom prst="rect">
-            <a:avLst/>
-          </a:prstGeom>
-          <a:noFill/>
-          <a:ln/>
-        </p:spPr>
-        <p:txBody>
-          <a:bodyPr wrap="square" lIns="0" tIns="0" rIns="0" bIns="0" rtlCol="0" anchor="ctr"/>
-          <a:lstStyle/>
-          <a:p>
-            <a:pPr algn="ctr" indent="0" marL="0">
-              <a:buNone/>
-            </a:pPr>
-            <a:r>
-              <a:rPr lang="en-US" sz="1800" b="1" dirty="0">
-                <a:solidFill>
-                  <a:srgbClr val="0D9488"/>
-                </a:solidFill>
-                <a:latin typeface="Trebuchet MS" pitchFamily="34" charset="0"/>
-                <a:ea typeface="Trebuchet MS" pitchFamily="34" charset="-122"/>
-                <a:cs typeface="Trebuchet MS" pitchFamily="34" charset="-120"/>
-              </a:rPr>
-              <a:t>=</a:t>
-            </a:r>
-            <a:endParaRPr lang="en-US" sz="1800" dirty="0"/>
-          </a:p>
-        </p:txBody>
-      </p:sp>
-      <p:sp>
-        <p:nvSpPr>
-          <p:cNvPr id="53" name="Shape 51"/>
-          <p:cNvSpPr/>
-          <p:nvPr/>
-        </p:nvSpPr>
-        <p:spPr>
-          <a:xfrm>
-            <a:off x="6181344" y="4178808"/>
-            <a:ext cx="2194560" cy="420624"/>
-          </a:xfrm>
-          <a:prstGeom prst="rect">
-            <a:avLst>
-              <a:gd name="adj" fmla="val 17391"/>
-            </a:avLst>
-          </a:prstGeom>
-          <a:solidFill>
             <a:srgbClr val="0D9488"/>
           </a:solidFill>
           <a:ln w="12700">
@@ -39291,13 +36516,13 @@
       </p:sp>
       <p:sp>
         <p:nvSpPr>
-          <p:cNvPr id="54" name="Text 52"/>
-          <p:cNvSpPr/>
-          <p:nvPr/>
-        </p:nvSpPr>
-        <p:spPr>
-          <a:xfrm>
-            <a:off x="6181344" y="4178808"/>
+          <p:cNvPr id="42" name="Text 40"/>
+          <p:cNvSpPr/>
+          <p:nvPr/>
+        </p:nvSpPr>
+        <p:spPr>
+          <a:xfrm>
+            <a:off x="4434840" y="3721608"/>
             <a:ext cx="2194560" cy="420624"/>
           </a:xfrm>
           <a:prstGeom prst="rect">
@@ -39614,7 +36839,7 @@
                 <a:ea typeface="Calibri" pitchFamily="34" charset="-122"/>
                 <a:cs typeface="Calibri" pitchFamily="34" charset="-120"/>
               </a:rPr>
-              <a:t>Word Labs  •  wordlabs.app  •  Root: 'fast' = quick, firm, or not eating</a:t>
+              <a:t>Word Labs  •  wordlabs.app  •  Root: 'fast' = quick</a:t>
             </a:r>
             <a:endParaRPr lang="en-US" sz="800" dirty="0"/>
           </a:p>
@@ -39656,979 +36881,6 @@
               <a:t>Match the word to its meaning:</a:t>
             </a:r>
             <a:endParaRPr lang="en-US" sz="1300" dirty="0"/>
-          </a:p>
-        </p:txBody>
-      </p:sp>
-      <p:sp>
-        <p:nvSpPr>
-          <p:cNvPr id="11" name="Shape 9"/>
-          <p:cNvSpPr/>
-          <p:nvPr/>
-        </p:nvSpPr>
-        <p:spPr>
-          <a:xfrm>
-            <a:off x="365760" y="1188720"/>
-            <a:ext cx="2011680" cy="457200"/>
-          </a:xfrm>
-          <a:prstGeom prst="rect">
-            <a:avLst>
-              <a:gd name="adj" fmla="val 12000"/>
-            </a:avLst>
-          </a:prstGeom>
-          <a:solidFill>
-            <a:srgbClr val="EEF2FF"/>
-          </a:solidFill>
-          <a:ln w="12700">
-            <a:solidFill>
-              <a:srgbClr val="6366F1"/>
-            </a:solidFill>
-            <a:prstDash val="solid"/>
-          </a:ln>
-          <a:effectLst>
-            <a:outerShdw sx="100000" sy="100000" kx="0" ky="0" algn="bl" rotWithShape="0" blurRad="101600" dist="38100" dir="8100000">
-              <a:srgbClr val="000000">
-                <a:alpha val="12000"/>
-              </a:srgbClr>
-            </a:outerShdw>
-          </a:effectLst>
-        </p:spPr>
-      </p:sp>
-      <p:sp>
-        <p:nvSpPr>
-          <p:cNvPr id="12" name="Text 10"/>
-          <p:cNvSpPr/>
-          <p:nvPr/>
-        </p:nvSpPr>
-        <p:spPr>
-          <a:xfrm>
-            <a:off x="365760" y="1188720"/>
-            <a:ext cx="2011680" cy="457200"/>
-          </a:xfrm>
-          <a:prstGeom prst="rect">
-            <a:avLst/>
-          </a:prstGeom>
-          <a:noFill/>
-          <a:ln/>
-        </p:spPr>
-        <p:txBody>
-          <a:bodyPr wrap="square" lIns="0" tIns="0" rIns="0" bIns="0" rtlCol="0" anchor="ctr"/>
-          <a:lstStyle/>
-          <a:p>
-            <a:pPr algn="ctr" indent="0" marL="0">
-              <a:buNone/>
-            </a:pPr>
-            <a:r>
-              <a:rPr lang="en-US" sz="1200" b="1" dirty="0">
-                <a:solidFill>
-                  <a:srgbClr val="4338CA"/>
-                </a:solidFill>
-                <a:latin typeface="Trebuchet MS" pitchFamily="34" charset="0"/>
-                <a:ea typeface="Trebuchet MS" pitchFamily="34" charset="-122"/>
-                <a:cs typeface="Trebuchet MS" pitchFamily="34" charset="-120"/>
-              </a:rPr>
-              <a:t>fast</a:t>
-            </a:r>
-            <a:endParaRPr lang="en-US" sz="1200" dirty="0"/>
-          </a:p>
-        </p:txBody>
-      </p:sp>
-      <p:sp>
-        <p:nvSpPr>
-          <p:cNvPr id="13" name="Shape 11"/>
-          <p:cNvSpPr/>
-          <p:nvPr/>
-        </p:nvSpPr>
-        <p:spPr>
-          <a:xfrm>
-            <a:off x="2514600" y="1188720"/>
-            <a:ext cx="6263640" cy="457200"/>
-          </a:xfrm>
-          <a:prstGeom prst="rect">
-            <a:avLst>
-              <a:gd name="adj" fmla="val 12000"/>
-            </a:avLst>
-          </a:prstGeom>
-          <a:solidFill>
-            <a:srgbClr val="F8FAFC"/>
-          </a:solidFill>
-          <a:ln w="12700">
-            <a:solidFill>
-              <a:srgbClr val="E2E8F0"/>
-            </a:solidFill>
-            <a:prstDash val="solid"/>
-          </a:ln>
-        </p:spPr>
-      </p:sp>
-      <p:sp>
-        <p:nvSpPr>
-          <p:cNvPr id="14" name="Text 12"/>
-          <p:cNvSpPr/>
-          <p:nvPr/>
-        </p:nvSpPr>
-        <p:spPr>
-          <a:xfrm>
-            <a:off x="2651760" y="1188720"/>
-            <a:ext cx="6035040" cy="457200"/>
-          </a:xfrm>
-          <a:prstGeom prst="rect">
-            <a:avLst/>
-          </a:prstGeom>
-          <a:noFill/>
-          <a:ln/>
-        </p:spPr>
-        <p:txBody>
-          <a:bodyPr wrap="square" rtlCol="0" anchor="ctr"/>
-          <a:lstStyle/>
-          <a:p>
-            <a:pPr algn="l" indent="0" marL="0">
-              <a:buNone/>
-            </a:pPr>
-            <a:r>
-              <a:rPr lang="en-US" sz="1200" dirty="0">
-                <a:solidFill>
-                  <a:srgbClr val="0F172A"/>
-                </a:solidFill>
-                <a:latin typeface="Calibri" pitchFamily="34" charset="0"/>
-                <a:ea typeface="Calibri" pitchFamily="34" charset="-122"/>
-                <a:cs typeface="Calibri" pitchFamily="34" charset="-120"/>
-              </a:rPr>
-              <a:t>Moving quickly, or choosing not to eat for a period of time.</a:t>
-            </a:r>
-            <a:endParaRPr lang="en-US" sz="1200" dirty="0"/>
-          </a:p>
-        </p:txBody>
-      </p:sp>
-      <p:sp>
-        <p:nvSpPr>
-          <p:cNvPr id="15" name="Shape 13"/>
-          <p:cNvSpPr/>
-          <p:nvPr/>
-        </p:nvSpPr>
-        <p:spPr>
-          <a:xfrm>
-            <a:off x="365760" y="1719072"/>
-            <a:ext cx="2011680" cy="457200"/>
-          </a:xfrm>
-          <a:prstGeom prst="rect">
-            <a:avLst>
-              <a:gd name="adj" fmla="val 12000"/>
-            </a:avLst>
-          </a:prstGeom>
-          <a:solidFill>
-            <a:srgbClr val="EEF2FF"/>
-          </a:solidFill>
-          <a:ln w="12700">
-            <a:solidFill>
-              <a:srgbClr val="6366F1"/>
-            </a:solidFill>
-            <a:prstDash val="solid"/>
-          </a:ln>
-          <a:effectLst>
-            <a:outerShdw sx="100000" sy="100000" kx="0" ky="0" algn="bl" rotWithShape="0" blurRad="101600" dist="38100" dir="8100000">
-              <a:srgbClr val="000000">
-                <a:alpha val="12000"/>
-              </a:srgbClr>
-            </a:outerShdw>
-          </a:effectLst>
-        </p:spPr>
-      </p:sp>
-      <p:sp>
-        <p:nvSpPr>
-          <p:cNvPr id="16" name="Text 14"/>
-          <p:cNvSpPr/>
-          <p:nvPr/>
-        </p:nvSpPr>
-        <p:spPr>
-          <a:xfrm>
-            <a:off x="365760" y="1719072"/>
-            <a:ext cx="2011680" cy="457200"/>
-          </a:xfrm>
-          <a:prstGeom prst="rect">
-            <a:avLst/>
-          </a:prstGeom>
-          <a:noFill/>
-          <a:ln/>
-        </p:spPr>
-        <p:txBody>
-          <a:bodyPr wrap="square" lIns="0" tIns="0" rIns="0" bIns="0" rtlCol="0" anchor="ctr"/>
-          <a:lstStyle/>
-          <a:p>
-            <a:pPr algn="ctr" indent="0" marL="0">
-              <a:buNone/>
-            </a:pPr>
-            <a:r>
-              <a:rPr lang="en-US" sz="1200" b="1" dirty="0">
-                <a:solidFill>
-                  <a:srgbClr val="4338CA"/>
-                </a:solidFill>
-                <a:latin typeface="Trebuchet MS" pitchFamily="34" charset="0"/>
-                <a:ea typeface="Trebuchet MS" pitchFamily="34" charset="-122"/>
-                <a:cs typeface="Trebuchet MS" pitchFamily="34" charset="-120"/>
-              </a:rPr>
-              <a:t>faster</a:t>
-            </a:r>
-            <a:endParaRPr lang="en-US" sz="1200" dirty="0"/>
-          </a:p>
-        </p:txBody>
-      </p:sp>
-      <p:sp>
-        <p:nvSpPr>
-          <p:cNvPr id="17" name="Shape 15"/>
-          <p:cNvSpPr/>
-          <p:nvPr/>
-        </p:nvSpPr>
-        <p:spPr>
-          <a:xfrm>
-            <a:off x="2514600" y="1719072"/>
-            <a:ext cx="6263640" cy="457200"/>
-          </a:xfrm>
-          <a:prstGeom prst="rect">
-            <a:avLst>
-              <a:gd name="adj" fmla="val 12000"/>
-            </a:avLst>
-          </a:prstGeom>
-          <a:solidFill>
-            <a:srgbClr val="F8FAFC"/>
-          </a:solidFill>
-          <a:ln w="12700">
-            <a:solidFill>
-              <a:srgbClr val="E2E8F0"/>
-            </a:solidFill>
-            <a:prstDash val="solid"/>
-          </a:ln>
-        </p:spPr>
-      </p:sp>
-      <p:sp>
-        <p:nvSpPr>
-          <p:cNvPr id="18" name="Text 16"/>
-          <p:cNvSpPr/>
-          <p:nvPr/>
-        </p:nvSpPr>
-        <p:spPr>
-          <a:xfrm>
-            <a:off x="2651760" y="1719072"/>
-            <a:ext cx="6035040" cy="457200"/>
-          </a:xfrm>
-          <a:prstGeom prst="rect">
-            <a:avLst/>
-          </a:prstGeom>
-          <a:noFill/>
-          <a:ln/>
-        </p:spPr>
-        <p:txBody>
-          <a:bodyPr wrap="square" rtlCol="0" anchor="ctr"/>
-          <a:lstStyle/>
-          <a:p>
-            <a:pPr algn="l" indent="0" marL="0">
-              <a:buNone/>
-            </a:pPr>
-            <a:r>
-              <a:rPr lang="en-US" sz="1200" dirty="0">
-                <a:solidFill>
-                  <a:srgbClr val="0F172A"/>
-                </a:solidFill>
-                <a:latin typeface="Calibri" pitchFamily="34" charset="0"/>
-                <a:ea typeface="Calibri" pitchFamily="34" charset="-122"/>
-                <a:cs typeface="Calibri" pitchFamily="34" charset="-120"/>
-              </a:rPr>
-              <a:t>Going without food for a set period of time, often for health or religious reasons.</a:t>
-            </a:r>
-            <a:endParaRPr lang="en-US" sz="1200" dirty="0"/>
-          </a:p>
-        </p:txBody>
-      </p:sp>
-      <p:sp>
-        <p:nvSpPr>
-          <p:cNvPr id="19" name="Shape 17"/>
-          <p:cNvSpPr/>
-          <p:nvPr/>
-        </p:nvSpPr>
-        <p:spPr>
-          <a:xfrm>
-            <a:off x="365760" y="2249424"/>
-            <a:ext cx="2011680" cy="457200"/>
-          </a:xfrm>
-          <a:prstGeom prst="rect">
-            <a:avLst>
-              <a:gd name="adj" fmla="val 12000"/>
-            </a:avLst>
-          </a:prstGeom>
-          <a:solidFill>
-            <a:srgbClr val="EEF2FF"/>
-          </a:solidFill>
-          <a:ln w="12700">
-            <a:solidFill>
-              <a:srgbClr val="6366F1"/>
-            </a:solidFill>
-            <a:prstDash val="solid"/>
-          </a:ln>
-          <a:effectLst>
-            <a:outerShdw sx="100000" sy="100000" kx="0" ky="0" algn="bl" rotWithShape="0" blurRad="101600" dist="38100" dir="8100000">
-              <a:srgbClr val="000000">
-                <a:alpha val="12000"/>
-              </a:srgbClr>
-            </a:outerShdw>
-          </a:effectLst>
-        </p:spPr>
-      </p:sp>
-      <p:sp>
-        <p:nvSpPr>
-          <p:cNvPr id="20" name="Text 18"/>
-          <p:cNvSpPr/>
-          <p:nvPr/>
-        </p:nvSpPr>
-        <p:spPr>
-          <a:xfrm>
-            <a:off x="365760" y="2249424"/>
-            <a:ext cx="2011680" cy="457200"/>
-          </a:xfrm>
-          <a:prstGeom prst="rect">
-            <a:avLst/>
-          </a:prstGeom>
-          <a:noFill/>
-          <a:ln/>
-        </p:spPr>
-        <p:txBody>
-          <a:bodyPr wrap="square" lIns="0" tIns="0" rIns="0" bIns="0" rtlCol="0" anchor="ctr"/>
-          <a:lstStyle/>
-          <a:p>
-            <a:pPr algn="ctr" indent="0" marL="0">
-              <a:buNone/>
-            </a:pPr>
-            <a:r>
-              <a:rPr lang="en-US" sz="1200" b="1" dirty="0">
-                <a:solidFill>
-                  <a:srgbClr val="4338CA"/>
-                </a:solidFill>
-                <a:latin typeface="Trebuchet MS" pitchFamily="34" charset="0"/>
-                <a:ea typeface="Trebuchet MS" pitchFamily="34" charset="-122"/>
-                <a:cs typeface="Trebuchet MS" pitchFamily="34" charset="-120"/>
-              </a:rPr>
-              <a:t>fastest</a:t>
-            </a:r>
-            <a:endParaRPr lang="en-US" sz="1200" dirty="0"/>
-          </a:p>
-        </p:txBody>
-      </p:sp>
-      <p:sp>
-        <p:nvSpPr>
-          <p:cNvPr id="21" name="Shape 19"/>
-          <p:cNvSpPr/>
-          <p:nvPr/>
-        </p:nvSpPr>
-        <p:spPr>
-          <a:xfrm>
-            <a:off x="2514600" y="2249424"/>
-            <a:ext cx="6263640" cy="457200"/>
-          </a:xfrm>
-          <a:prstGeom prst="rect">
-            <a:avLst>
-              <a:gd name="adj" fmla="val 12000"/>
-            </a:avLst>
-          </a:prstGeom>
-          <a:solidFill>
-            <a:srgbClr val="F8FAFC"/>
-          </a:solidFill>
-          <a:ln w="12700">
-            <a:solidFill>
-              <a:srgbClr val="E2E8F0"/>
-            </a:solidFill>
-            <a:prstDash val="solid"/>
-          </a:ln>
-        </p:spPr>
-      </p:sp>
-      <p:sp>
-        <p:nvSpPr>
-          <p:cNvPr id="22" name="Text 20"/>
-          <p:cNvSpPr/>
-          <p:nvPr/>
-        </p:nvSpPr>
-        <p:spPr>
-          <a:xfrm>
-            <a:off x="2651760" y="2249424"/>
-            <a:ext cx="6035040" cy="457200"/>
-          </a:xfrm>
-          <a:prstGeom prst="rect">
-            <a:avLst/>
-          </a:prstGeom>
-          <a:noFill/>
-          <a:ln/>
-        </p:spPr>
-        <p:txBody>
-          <a:bodyPr wrap="square" rtlCol="0" anchor="ctr"/>
-          <a:lstStyle/>
-          <a:p>
-            <a:pPr algn="l" indent="0" marL="0">
-              <a:buNone/>
-            </a:pPr>
-            <a:r>
-              <a:rPr lang="en-US" sz="1200" dirty="0">
-                <a:solidFill>
-                  <a:srgbClr val="0F172A"/>
-                </a:solidFill>
-                <a:latin typeface="Calibri" pitchFamily="34" charset="0"/>
-                <a:ea typeface="Calibri" pitchFamily="34" charset="-122"/>
-                <a:cs typeface="Calibri" pitchFamily="34" charset="-120"/>
-              </a:rPr>
-              <a:t>Moving more quickly than anyone or anything else.</a:t>
-            </a:r>
-            <a:endParaRPr lang="en-US" sz="1200" dirty="0"/>
-          </a:p>
-        </p:txBody>
-      </p:sp>
-      <p:sp>
-        <p:nvSpPr>
-          <p:cNvPr id="23" name="Shape 21"/>
-          <p:cNvSpPr/>
-          <p:nvPr/>
-        </p:nvSpPr>
-        <p:spPr>
-          <a:xfrm>
-            <a:off x="365760" y="2779776"/>
-            <a:ext cx="2011680" cy="457200"/>
-          </a:xfrm>
-          <a:prstGeom prst="rect">
-            <a:avLst>
-              <a:gd name="adj" fmla="val 12000"/>
-            </a:avLst>
-          </a:prstGeom>
-          <a:solidFill>
-            <a:srgbClr val="EEF2FF"/>
-          </a:solidFill>
-          <a:ln w="12700">
-            <a:solidFill>
-              <a:srgbClr val="6366F1"/>
-            </a:solidFill>
-            <a:prstDash val="solid"/>
-          </a:ln>
-          <a:effectLst>
-            <a:outerShdw sx="100000" sy="100000" kx="0" ky="0" algn="bl" rotWithShape="0" blurRad="101600" dist="38100" dir="8100000">
-              <a:srgbClr val="000000">
-                <a:alpha val="12000"/>
-              </a:srgbClr>
-            </a:outerShdw>
-          </a:effectLst>
-        </p:spPr>
-      </p:sp>
-      <p:sp>
-        <p:nvSpPr>
-          <p:cNvPr id="24" name="Text 22"/>
-          <p:cNvSpPr/>
-          <p:nvPr/>
-        </p:nvSpPr>
-        <p:spPr>
-          <a:xfrm>
-            <a:off x="365760" y="2779776"/>
-            <a:ext cx="2011680" cy="457200"/>
-          </a:xfrm>
-          <a:prstGeom prst="rect">
-            <a:avLst/>
-          </a:prstGeom>
-          <a:noFill/>
-          <a:ln/>
-        </p:spPr>
-        <p:txBody>
-          <a:bodyPr wrap="square" lIns="0" tIns="0" rIns="0" bIns="0" rtlCol="0" anchor="ctr"/>
-          <a:lstStyle/>
-          <a:p>
-            <a:pPr algn="ctr" indent="0" marL="0">
-              <a:buNone/>
-            </a:pPr>
-            <a:r>
-              <a:rPr lang="en-US" sz="1200" b="1" dirty="0">
-                <a:solidFill>
-                  <a:srgbClr val="4338CA"/>
-                </a:solidFill>
-                <a:latin typeface="Trebuchet MS" pitchFamily="34" charset="0"/>
-                <a:ea typeface="Trebuchet MS" pitchFamily="34" charset="-122"/>
-                <a:cs typeface="Trebuchet MS" pitchFamily="34" charset="-120"/>
-              </a:rPr>
-              <a:t>fasting</a:t>
-            </a:r>
-            <a:endParaRPr lang="en-US" sz="1200" dirty="0"/>
-          </a:p>
-        </p:txBody>
-      </p:sp>
-      <p:sp>
-        <p:nvSpPr>
-          <p:cNvPr id="25" name="Shape 23"/>
-          <p:cNvSpPr/>
-          <p:nvPr/>
-        </p:nvSpPr>
-        <p:spPr>
-          <a:xfrm>
-            <a:off x="2514600" y="2779776"/>
-            <a:ext cx="6263640" cy="457200"/>
-          </a:xfrm>
-          <a:prstGeom prst="rect">
-            <a:avLst>
-              <a:gd name="adj" fmla="val 12000"/>
-            </a:avLst>
-          </a:prstGeom>
-          <a:solidFill>
-            <a:srgbClr val="F8FAFC"/>
-          </a:solidFill>
-          <a:ln w="12700">
-            <a:solidFill>
-              <a:srgbClr val="E2E8F0"/>
-            </a:solidFill>
-            <a:prstDash val="solid"/>
-          </a:ln>
-        </p:spPr>
-      </p:sp>
-      <p:sp>
-        <p:nvSpPr>
-          <p:cNvPr id="26" name="Text 24"/>
-          <p:cNvSpPr/>
-          <p:nvPr/>
-        </p:nvSpPr>
-        <p:spPr>
-          <a:xfrm>
-            <a:off x="2651760" y="2779776"/>
-            <a:ext cx="6035040" cy="457200"/>
-          </a:xfrm>
-          <a:prstGeom prst="rect">
-            <a:avLst/>
-          </a:prstGeom>
-          <a:noFill/>
-          <a:ln/>
-        </p:spPr>
-        <p:txBody>
-          <a:bodyPr wrap="square" rtlCol="0" anchor="ctr"/>
-          <a:lstStyle/>
-          <a:p>
-            <a:pPr algn="l" indent="0" marL="0">
-              <a:buNone/>
-            </a:pPr>
-            <a:r>
-              <a:rPr lang="en-US" sz="1200" dirty="0">
-                <a:solidFill>
-                  <a:srgbClr val="0F172A"/>
-                </a:solidFill>
-                <a:latin typeface="Calibri" pitchFamily="34" charset="0"/>
-                <a:ea typeface="Calibri" pitchFamily="34" charset="-122"/>
-                <a:cs typeface="Calibri" pitchFamily="34" charset="-120"/>
-              </a:rPr>
-              <a:t>To fix or attach something firmly so it does not come loose.</a:t>
-            </a:r>
-            <a:endParaRPr lang="en-US" sz="1200" dirty="0"/>
-          </a:p>
-        </p:txBody>
-      </p:sp>
-      <p:sp>
-        <p:nvSpPr>
-          <p:cNvPr id="27" name="Shape 25"/>
-          <p:cNvSpPr/>
-          <p:nvPr/>
-        </p:nvSpPr>
-        <p:spPr>
-          <a:xfrm>
-            <a:off x="365760" y="3310128"/>
-            <a:ext cx="2011680" cy="457200"/>
-          </a:xfrm>
-          <a:prstGeom prst="rect">
-            <a:avLst>
-              <a:gd name="adj" fmla="val 12000"/>
-            </a:avLst>
-          </a:prstGeom>
-          <a:solidFill>
-            <a:srgbClr val="EEF2FF"/>
-          </a:solidFill>
-          <a:ln w="12700">
-            <a:solidFill>
-              <a:srgbClr val="6366F1"/>
-            </a:solidFill>
-            <a:prstDash val="solid"/>
-          </a:ln>
-          <a:effectLst>
-            <a:outerShdw sx="100000" sy="100000" kx="0" ky="0" algn="bl" rotWithShape="0" blurRad="101600" dist="38100" dir="8100000">
-              <a:srgbClr val="000000">
-                <a:alpha val="12000"/>
-              </a:srgbClr>
-            </a:outerShdw>
-          </a:effectLst>
-        </p:spPr>
-      </p:sp>
-      <p:sp>
-        <p:nvSpPr>
-          <p:cNvPr id="28" name="Text 26"/>
-          <p:cNvSpPr/>
-          <p:nvPr/>
-        </p:nvSpPr>
-        <p:spPr>
-          <a:xfrm>
-            <a:off x="365760" y="3310128"/>
-            <a:ext cx="2011680" cy="457200"/>
-          </a:xfrm>
-          <a:prstGeom prst="rect">
-            <a:avLst/>
-          </a:prstGeom>
-          <a:noFill/>
-          <a:ln/>
-        </p:spPr>
-        <p:txBody>
-          <a:bodyPr wrap="square" lIns="0" tIns="0" rIns="0" bIns="0" rtlCol="0" anchor="ctr"/>
-          <a:lstStyle/>
-          <a:p>
-            <a:pPr algn="ctr" indent="0" marL="0">
-              <a:buNone/>
-            </a:pPr>
-            <a:r>
-              <a:rPr lang="en-US" sz="1200" b="1" dirty="0">
-                <a:solidFill>
-                  <a:srgbClr val="4338CA"/>
-                </a:solidFill>
-                <a:latin typeface="Trebuchet MS" pitchFamily="34" charset="0"/>
-                <a:ea typeface="Trebuchet MS" pitchFamily="34" charset="-122"/>
-                <a:cs typeface="Trebuchet MS" pitchFamily="34" charset="-120"/>
-              </a:rPr>
-              <a:t>fasten</a:t>
-            </a:r>
-            <a:endParaRPr lang="en-US" sz="1200" dirty="0"/>
-          </a:p>
-        </p:txBody>
-      </p:sp>
-      <p:sp>
-        <p:nvSpPr>
-          <p:cNvPr id="29" name="Shape 27"/>
-          <p:cNvSpPr/>
-          <p:nvPr/>
-        </p:nvSpPr>
-        <p:spPr>
-          <a:xfrm>
-            <a:off x="2514600" y="3310128"/>
-            <a:ext cx="6263640" cy="457200"/>
-          </a:xfrm>
-          <a:prstGeom prst="rect">
-            <a:avLst>
-              <a:gd name="adj" fmla="val 12000"/>
-            </a:avLst>
-          </a:prstGeom>
-          <a:solidFill>
-            <a:srgbClr val="F8FAFC"/>
-          </a:solidFill>
-          <a:ln w="12700">
-            <a:solidFill>
-              <a:srgbClr val="E2E8F0"/>
-            </a:solidFill>
-            <a:prstDash val="solid"/>
-          </a:ln>
-        </p:spPr>
-      </p:sp>
-      <p:sp>
-        <p:nvSpPr>
-          <p:cNvPr id="30" name="Text 28"/>
-          <p:cNvSpPr/>
-          <p:nvPr/>
-        </p:nvSpPr>
-        <p:spPr>
-          <a:xfrm>
-            <a:off x="2651760" y="3310128"/>
-            <a:ext cx="6035040" cy="457200"/>
-          </a:xfrm>
-          <a:prstGeom prst="rect">
-            <a:avLst/>
-          </a:prstGeom>
-          <a:noFill/>
-          <a:ln/>
-        </p:spPr>
-        <p:txBody>
-          <a:bodyPr wrap="square" rtlCol="0" anchor="ctr"/>
-          <a:lstStyle/>
-          <a:p>
-            <a:pPr algn="l" indent="0" marL="0">
-              <a:buNone/>
-            </a:pPr>
-            <a:r>
-              <a:rPr lang="en-US" sz="1200" dirty="0">
-                <a:solidFill>
-                  <a:srgbClr val="0F172A"/>
-                </a:solidFill>
-                <a:latin typeface="Calibri" pitchFamily="34" charset="0"/>
-                <a:ea typeface="Calibri" pitchFamily="34" charset="-122"/>
-                <a:cs typeface="Calibri" pitchFamily="34" charset="-120"/>
-              </a:rPr>
-              <a:t>The first meal of the day that 'breaks' the overnight fast.</a:t>
-            </a:r>
-            <a:endParaRPr lang="en-US" sz="1200" dirty="0"/>
-          </a:p>
-        </p:txBody>
-      </p:sp>
-      <p:sp>
-        <p:nvSpPr>
-          <p:cNvPr id="31" name="Shape 29"/>
-          <p:cNvSpPr/>
-          <p:nvPr/>
-        </p:nvSpPr>
-        <p:spPr>
-          <a:xfrm>
-            <a:off x="365760" y="3840480"/>
-            <a:ext cx="2011680" cy="457200"/>
-          </a:xfrm>
-          <a:prstGeom prst="rect">
-            <a:avLst>
-              <a:gd name="adj" fmla="val 12000"/>
-            </a:avLst>
-          </a:prstGeom>
-          <a:solidFill>
-            <a:srgbClr val="EEF2FF"/>
-          </a:solidFill>
-          <a:ln w="12700">
-            <a:solidFill>
-              <a:srgbClr val="6366F1"/>
-            </a:solidFill>
-            <a:prstDash val="solid"/>
-          </a:ln>
-          <a:effectLst>
-            <a:outerShdw sx="100000" sy="100000" kx="0" ky="0" algn="bl" rotWithShape="0" blurRad="101600" dist="38100" dir="8100000">
-              <a:srgbClr val="000000">
-                <a:alpha val="12000"/>
-              </a:srgbClr>
-            </a:outerShdw>
-          </a:effectLst>
-        </p:spPr>
-      </p:sp>
-      <p:sp>
-        <p:nvSpPr>
-          <p:cNvPr id="32" name="Text 30"/>
-          <p:cNvSpPr/>
-          <p:nvPr/>
-        </p:nvSpPr>
-        <p:spPr>
-          <a:xfrm>
-            <a:off x="365760" y="3840480"/>
-            <a:ext cx="2011680" cy="457200"/>
-          </a:xfrm>
-          <a:prstGeom prst="rect">
-            <a:avLst/>
-          </a:prstGeom>
-          <a:noFill/>
-          <a:ln/>
-        </p:spPr>
-        <p:txBody>
-          <a:bodyPr wrap="square" lIns="0" tIns="0" rIns="0" bIns="0" rtlCol="0" anchor="ctr"/>
-          <a:lstStyle/>
-          <a:p>
-            <a:pPr algn="ctr" indent="0" marL="0">
-              <a:buNone/>
-            </a:pPr>
-            <a:r>
-              <a:rPr lang="en-US" sz="1200" b="1" dirty="0">
-                <a:solidFill>
-                  <a:srgbClr val="4338CA"/>
-                </a:solidFill>
-                <a:latin typeface="Trebuchet MS" pitchFamily="34" charset="0"/>
-                <a:ea typeface="Trebuchet MS" pitchFamily="34" charset="-122"/>
-                <a:cs typeface="Trebuchet MS" pitchFamily="34" charset="-120"/>
-              </a:rPr>
-              <a:t>fastly</a:t>
-            </a:r>
-            <a:endParaRPr lang="en-US" sz="1200" dirty="0"/>
-          </a:p>
-        </p:txBody>
-      </p:sp>
-      <p:sp>
-        <p:nvSpPr>
-          <p:cNvPr id="33" name="Shape 31"/>
-          <p:cNvSpPr/>
-          <p:nvPr/>
-        </p:nvSpPr>
-        <p:spPr>
-          <a:xfrm>
-            <a:off x="2514600" y="3840480"/>
-            <a:ext cx="6263640" cy="457200"/>
-          </a:xfrm>
-          <a:prstGeom prst="rect">
-            <a:avLst>
-              <a:gd name="adj" fmla="val 12000"/>
-            </a:avLst>
-          </a:prstGeom>
-          <a:solidFill>
-            <a:srgbClr val="F8FAFC"/>
-          </a:solidFill>
-          <a:ln w="12700">
-            <a:solidFill>
-              <a:srgbClr val="E2E8F0"/>
-            </a:solidFill>
-            <a:prstDash val="solid"/>
-          </a:ln>
-        </p:spPr>
-      </p:sp>
-      <p:sp>
-        <p:nvSpPr>
-          <p:cNvPr id="34" name="Text 32"/>
-          <p:cNvSpPr/>
-          <p:nvPr/>
-        </p:nvSpPr>
-        <p:spPr>
-          <a:xfrm>
-            <a:off x="2651760" y="3840480"/>
-            <a:ext cx="6035040" cy="457200"/>
-          </a:xfrm>
-          <a:prstGeom prst="rect">
-            <a:avLst/>
-          </a:prstGeom>
-          <a:noFill/>
-          <a:ln/>
-        </p:spPr>
-        <p:txBody>
-          <a:bodyPr wrap="square" rtlCol="0" anchor="ctr"/>
-          <a:lstStyle/>
-          <a:p>
-            <a:pPr algn="l" indent="0" marL="0">
-              <a:buNone/>
-            </a:pPr>
-            <a:r>
-              <a:rPr lang="en-US" sz="1200" dirty="0">
-                <a:solidFill>
-                  <a:srgbClr val="0F172A"/>
-                </a:solidFill>
-                <a:latin typeface="Calibri" pitchFamily="34" charset="0"/>
-                <a:ea typeface="Calibri" pitchFamily="34" charset="-122"/>
-                <a:cs typeface="Calibri" pitchFamily="34" charset="-120"/>
-              </a:rPr>
-              <a:t>In a quick or speedy manner (an older, less common form of 'fast').</a:t>
-            </a:r>
-            <a:endParaRPr lang="en-US" sz="1200" dirty="0"/>
-          </a:p>
-        </p:txBody>
-      </p:sp>
-      <p:sp>
-        <p:nvSpPr>
-          <p:cNvPr id="35" name="Shape 33"/>
-          <p:cNvSpPr/>
-          <p:nvPr/>
-        </p:nvSpPr>
-        <p:spPr>
-          <a:xfrm>
-            <a:off x="365760" y="4370832"/>
-            <a:ext cx="2011680" cy="457200"/>
-          </a:xfrm>
-          <a:prstGeom prst="rect">
-            <a:avLst>
-              <a:gd name="adj" fmla="val 12000"/>
-            </a:avLst>
-          </a:prstGeom>
-          <a:solidFill>
-            <a:srgbClr val="EEF2FF"/>
-          </a:solidFill>
-          <a:ln w="12700">
-            <a:solidFill>
-              <a:srgbClr val="6366F1"/>
-            </a:solidFill>
-            <a:prstDash val="solid"/>
-          </a:ln>
-          <a:effectLst>
-            <a:outerShdw sx="100000" sy="100000" kx="0" ky="0" algn="bl" rotWithShape="0" blurRad="101600" dist="38100" dir="8100000">
-              <a:srgbClr val="000000">
-                <a:alpha val="12000"/>
-              </a:srgbClr>
-            </a:outerShdw>
-          </a:effectLst>
-        </p:spPr>
-      </p:sp>
-      <p:sp>
-        <p:nvSpPr>
-          <p:cNvPr id="36" name="Text 34"/>
-          <p:cNvSpPr/>
-          <p:nvPr/>
-        </p:nvSpPr>
-        <p:spPr>
-          <a:xfrm>
-            <a:off x="365760" y="4370832"/>
-            <a:ext cx="2011680" cy="457200"/>
-          </a:xfrm>
-          <a:prstGeom prst="rect">
-            <a:avLst/>
-          </a:prstGeom>
-          <a:noFill/>
-          <a:ln/>
-        </p:spPr>
-        <p:txBody>
-          <a:bodyPr wrap="square" lIns="0" tIns="0" rIns="0" bIns="0" rtlCol="0" anchor="ctr"/>
-          <a:lstStyle/>
-          <a:p>
-            <a:pPr algn="ctr" indent="0" marL="0">
-              <a:buNone/>
-            </a:pPr>
-            <a:r>
-              <a:rPr lang="en-US" sz="1200" b="1" dirty="0">
-                <a:solidFill>
-                  <a:srgbClr val="4338CA"/>
-                </a:solidFill>
-                <a:latin typeface="Trebuchet MS" pitchFamily="34" charset="0"/>
-                <a:ea typeface="Trebuchet MS" pitchFamily="34" charset="-122"/>
-                <a:cs typeface="Trebuchet MS" pitchFamily="34" charset="-120"/>
-              </a:rPr>
-              <a:t>breakfast</a:t>
-            </a:r>
-            <a:endParaRPr lang="en-US" sz="1200" dirty="0"/>
-          </a:p>
-        </p:txBody>
-      </p:sp>
-      <p:sp>
-        <p:nvSpPr>
-          <p:cNvPr id="37" name="Shape 35"/>
-          <p:cNvSpPr/>
-          <p:nvPr/>
-        </p:nvSpPr>
-        <p:spPr>
-          <a:xfrm>
-            <a:off x="2514600" y="4370832"/>
-            <a:ext cx="6263640" cy="457200"/>
-          </a:xfrm>
-          <a:prstGeom prst="rect">
-            <a:avLst>
-              <a:gd name="adj" fmla="val 12000"/>
-            </a:avLst>
-          </a:prstGeom>
-          <a:solidFill>
-            <a:srgbClr val="F8FAFC"/>
-          </a:solidFill>
-          <a:ln w="12700">
-            <a:solidFill>
-              <a:srgbClr val="E2E8F0"/>
-            </a:solidFill>
-            <a:prstDash val="solid"/>
-          </a:ln>
-        </p:spPr>
-      </p:sp>
-      <p:sp>
-        <p:nvSpPr>
-          <p:cNvPr id="38" name="Text 36"/>
-          <p:cNvSpPr/>
-          <p:nvPr/>
-        </p:nvSpPr>
-        <p:spPr>
-          <a:xfrm>
-            <a:off x="2651760" y="4370832"/>
-            <a:ext cx="6035040" cy="457200"/>
-          </a:xfrm>
-          <a:prstGeom prst="rect">
-            <a:avLst/>
-          </a:prstGeom>
-          <a:noFill/>
-          <a:ln/>
-        </p:spPr>
-        <p:txBody>
-          <a:bodyPr wrap="square" rtlCol="0" anchor="ctr"/>
-          <a:lstStyle/>
-          <a:p>
-            <a:pPr algn="l" indent="0" marL="0">
-              <a:buNone/>
-            </a:pPr>
-            <a:r>
-              <a:rPr lang="en-US" sz="1200" dirty="0">
-                <a:solidFill>
-                  <a:srgbClr val="0F172A"/>
-                </a:solidFill>
-                <a:latin typeface="Calibri" pitchFamily="34" charset="0"/>
-                <a:ea typeface="Calibri" pitchFamily="34" charset="-122"/>
-                <a:cs typeface="Calibri" pitchFamily="34" charset="-120"/>
-              </a:rPr>
-              <a:t>Moving more quickly than something else.</a:t>
-            </a:r>
-            <a:endParaRPr lang="en-US" sz="1200" dirty="0"/>
           </a:p>
         </p:txBody>
       </p:sp>
@@ -40918,7 +37170,7 @@
                 <a:ea typeface="Calibri" pitchFamily="34" charset="-122"/>
                 <a:cs typeface="Calibri" pitchFamily="34" charset="-120"/>
               </a:rPr>
-              <a:t>Word Labs  •  wordlabs.app  •  Root: 'fast' = quick, firm, or not eating</a:t>
+              <a:t>Word Labs  •  wordlabs.app  •  Root: 'fast' = quick</a:t>
             </a:r>
             <a:endParaRPr lang="en-US" sz="800" dirty="0"/>
           </a:p>
@@ -41121,7 +37373,7 @@
                 <a:ea typeface="Calibri" pitchFamily="34" charset="-122"/>
                 <a:cs typeface="Calibri" pitchFamily="34" charset="-120"/>
               </a:rPr>
-              <a:t>The athlete was the fastest runner in the whole school carnival.</a:t>
+              <a:t>The cheetah is the fastest land animal, so it can run very fast.</a:t>
             </a:r>
             <a:endParaRPr lang="en-US" sz="1500" dirty="0"/>
           </a:p>
@@ -41285,7 +37537,7 @@
                 <a:ea typeface="Calibri" pitchFamily="34" charset="-122"/>
                 <a:cs typeface="Calibri" pitchFamily="34" charset="-120"/>
               </a:rPr>
-              <a:t>Before the big race, she made sure to fasten her shoelaces tightly.</a:t>
+              <a:t>She fasted for the whole day before the medical test.</a:t>
             </a:r>
             <a:endParaRPr lang="en-US" sz="1500" dirty="0"/>
           </a:p>
@@ -41449,7 +37701,7 @@
                 <a:ea typeface="Calibri" pitchFamily="34" charset="-122"/>
                 <a:cs typeface="Calibri" pitchFamily="34" charset="-120"/>
               </a:rPr>
-              <a:t>Many cultures around the world practise fasting for religious or health reasons.</a:t>
+              <a:t>My new bike is much faster than my old one.</a:t>
             </a:r>
             <a:endParaRPr lang="en-US" sz="1500" dirty="0"/>
           </a:p>
